--- a/ARQUITECTURAS.pptx
+++ b/ARQUITECTURAS.pptx
@@ -199,7 +199,7 @@
           <a:p>
             <a:fld id="{648875B9-81E3-48EB-AC45-E2B16239D10D}" type="datetimeFigureOut">
               <a:rPr lang="es-ES" smtClean="0"/>
-              <a:t>05/05/2026</a:t>
+              <a:t>06/05/2026</a:t>
             </a:fld>
             <a:endParaRPr lang="es-ES"/>
           </a:p>
@@ -805,7 +805,7 @@
           <a:p>
             <a:fld id="{31F888AD-2037-4E90-B50F-EBB1A322544F}" type="datetimeFigureOut">
               <a:rPr lang="es-ES" smtClean="0"/>
-              <a:t>05/05/2026</a:t>
+              <a:t>06/05/2026</a:t>
             </a:fld>
             <a:endParaRPr lang="es-ES"/>
           </a:p>
@@ -1003,7 +1003,7 @@
           <a:p>
             <a:fld id="{31F888AD-2037-4E90-B50F-EBB1A322544F}" type="datetimeFigureOut">
               <a:rPr lang="es-ES" smtClean="0"/>
-              <a:t>05/05/2026</a:t>
+              <a:t>06/05/2026</a:t>
             </a:fld>
             <a:endParaRPr lang="es-ES"/>
           </a:p>
@@ -1211,7 +1211,7 @@
           <a:p>
             <a:fld id="{31F888AD-2037-4E90-B50F-EBB1A322544F}" type="datetimeFigureOut">
               <a:rPr lang="es-ES" smtClean="0"/>
-              <a:t>05/05/2026</a:t>
+              <a:t>06/05/2026</a:t>
             </a:fld>
             <a:endParaRPr lang="es-ES"/>
           </a:p>
@@ -1444,7 +1444,7 @@
           <a:p>
             <a:fld id="{31F888AD-2037-4E90-B50F-EBB1A322544F}" type="datetimeFigureOut">
               <a:rPr lang="es-ES" smtClean="0"/>
-              <a:t>05/05/2026</a:t>
+              <a:t>06/05/2026</a:t>
             </a:fld>
             <a:endParaRPr lang="es-ES"/>
           </a:p>
@@ -1719,7 +1719,7 @@
           <a:p>
             <a:fld id="{31F888AD-2037-4E90-B50F-EBB1A322544F}" type="datetimeFigureOut">
               <a:rPr lang="es-ES" smtClean="0"/>
-              <a:t>05/05/2026</a:t>
+              <a:t>06/05/2026</a:t>
             </a:fld>
             <a:endParaRPr lang="es-ES"/>
           </a:p>
@@ -1984,7 +1984,7 @@
           <a:p>
             <a:fld id="{31F888AD-2037-4E90-B50F-EBB1A322544F}" type="datetimeFigureOut">
               <a:rPr lang="es-ES" smtClean="0"/>
-              <a:t>05/05/2026</a:t>
+              <a:t>06/05/2026</a:t>
             </a:fld>
             <a:endParaRPr lang="es-ES"/>
           </a:p>
@@ -2396,7 +2396,7 @@
           <a:p>
             <a:fld id="{31F888AD-2037-4E90-B50F-EBB1A322544F}" type="datetimeFigureOut">
               <a:rPr lang="es-ES" smtClean="0"/>
-              <a:t>05/05/2026</a:t>
+              <a:t>06/05/2026</a:t>
             </a:fld>
             <a:endParaRPr lang="es-ES"/>
           </a:p>
@@ -2537,7 +2537,7 @@
           <a:p>
             <a:fld id="{31F888AD-2037-4E90-B50F-EBB1A322544F}" type="datetimeFigureOut">
               <a:rPr lang="es-ES" smtClean="0"/>
-              <a:t>05/05/2026</a:t>
+              <a:t>06/05/2026</a:t>
             </a:fld>
             <a:endParaRPr lang="es-ES"/>
           </a:p>
@@ -2650,7 +2650,7 @@
           <a:p>
             <a:fld id="{31F888AD-2037-4E90-B50F-EBB1A322544F}" type="datetimeFigureOut">
               <a:rPr lang="es-ES" smtClean="0"/>
-              <a:t>05/05/2026</a:t>
+              <a:t>06/05/2026</a:t>
             </a:fld>
             <a:endParaRPr lang="es-ES"/>
           </a:p>
@@ -2961,7 +2961,7 @@
           <a:p>
             <a:fld id="{31F888AD-2037-4E90-B50F-EBB1A322544F}" type="datetimeFigureOut">
               <a:rPr lang="es-ES" smtClean="0"/>
-              <a:t>05/05/2026</a:t>
+              <a:t>06/05/2026</a:t>
             </a:fld>
             <a:endParaRPr lang="es-ES"/>
           </a:p>
@@ -3249,7 +3249,7 @@
           <a:p>
             <a:fld id="{31F888AD-2037-4E90-B50F-EBB1A322544F}" type="datetimeFigureOut">
               <a:rPr lang="es-ES" smtClean="0"/>
-              <a:t>05/05/2026</a:t>
+              <a:t>06/05/2026</a:t>
             </a:fld>
             <a:endParaRPr lang="es-ES"/>
           </a:p>
@@ -3490,7 +3490,7 @@
           <a:p>
             <a:fld id="{31F888AD-2037-4E90-B50F-EBB1A322544F}" type="datetimeFigureOut">
               <a:rPr lang="es-ES" smtClean="0"/>
-              <a:t>05/05/2026</a:t>
+              <a:t>06/05/2026</a:t>
             </a:fld>
             <a:endParaRPr lang="es-ES"/>
           </a:p>
@@ -9801,8 +9801,8 @@
           </p:blipFill>
           <p:spPr>
             <a:xfrm>
-              <a:off x="6621448" y="6194520"/>
-              <a:ext cx="1461406" cy="360756"/>
+              <a:off x="7012060" y="6263770"/>
+              <a:ext cx="1135748" cy="280366"/>
             </a:xfrm>
             <a:prstGeom prst="rect">
               <a:avLst/>
@@ -9932,6 +9932,51 @@
           </a:prstGeom>
         </p:spPr>
       </p:pic>
+      <p:sp>
+        <p:nvSpPr>
+          <p:cNvPr id="8" name="Text 34">
+            <a:extLst>
+              <a:ext uri="{FF2B5EF4-FFF2-40B4-BE49-F238E27FC236}">
+                <a16:creationId xmlns:a16="http://schemas.microsoft.com/office/drawing/2014/main" id="{B15F765C-BCFE-F8CA-34E2-474EE679A89E}"/>
+              </a:ext>
+            </a:extLst>
+          </p:cNvPr>
+          <p:cNvSpPr/>
+          <p:nvPr/>
+        </p:nvSpPr>
+        <p:spPr>
+          <a:xfrm>
+            <a:off x="6361867" y="6288790"/>
+            <a:ext cx="675132" cy="169869"/>
+          </a:xfrm>
+          <a:prstGeom prst="rect">
+            <a:avLst/>
+          </a:prstGeom>
+          <a:noFill/>
+          <a:ln/>
+        </p:spPr>
+        <p:txBody>
+          <a:bodyPr wrap="square" lIns="0" tIns="0" rIns="0" bIns="0" rtlCol="0" anchor="ctr"/>
+          <a:lstStyle/>
+          <a:p>
+            <a:pPr marL="0" indent="0" algn="ctr">
+              <a:buNone/>
+            </a:pPr>
+            <a:r>
+              <a:rPr lang="en-US" sz="2000" b="1" dirty="0">
+                <a:solidFill>
+                  <a:srgbClr val="212121"/>
+                </a:solidFill>
+                <a:latin typeface="Calibri" pitchFamily="34" charset="0"/>
+                <a:ea typeface="Calibri" pitchFamily="34" charset="-122"/>
+                <a:cs typeface="Calibri" pitchFamily="34" charset="-120"/>
+              </a:rPr>
+              <a:t>DNN</a:t>
+            </a:r>
+            <a:endParaRPr lang="en-US" sz="2000" dirty="0"/>
+          </a:p>
+        </p:txBody>
+      </p:sp>
     </p:spTree>
   </p:cSld>
   <p:clrMapOvr>
@@ -18147,6 +18192,23 @@
 </file>
 
 <file path=customXml/item1.xml><?xml version="1.0" encoding="utf-8"?>
+<p:properties xmlns:p="http://schemas.microsoft.com/office/2006/metadata/properties" xmlns:xsi="http://www.w3.org/2001/XMLSchema-instance" xmlns:pc="http://schemas.microsoft.com/office/infopath/2007/PartnerControls">
+  <documentManagement>
+    <_activity xmlns="da169425-153d-4080-8705-45c92938e7f0" xsi:nil="true"/>
+  </documentManagement>
+</p:properties>
+</file>
+
+<file path=customXml/item2.xml><?xml version="1.0" encoding="utf-8"?>
+<?mso-contentType ?>
+<FormTemplates xmlns="http://schemas.microsoft.com/sharepoint/v3/contenttype/forms">
+  <Display>DocumentLibraryForm</Display>
+  <Edit>DocumentLibraryForm</Edit>
+  <New>DocumentLibraryForm</New>
+</FormTemplates>
+</file>
+
+<file path=customXml/item3.xml><?xml version="1.0" encoding="utf-8"?>
 <ct:contentTypeSchema xmlns:ct="http://schemas.microsoft.com/office/2006/metadata/contentType" xmlns:ma="http://schemas.microsoft.com/office/2006/metadata/properties/metaAttributes" ct:_="" ma:_="" ma:contentTypeName="Documento" ma:contentTypeID="0x010100DEA5B49C5DE5F44CB629258CFB70E19D" ma:contentTypeVersion="18" ma:contentTypeDescription="Crear nuevo documento." ma:contentTypeScope="" ma:versionID="74d7687ff137e87fb3b1bb4914d165da">
   <xsd:schema xmlns:xsd="http://www.w3.org/2001/XMLSchema" xmlns:xs="http://www.w3.org/2001/XMLSchema" xmlns:p="http://schemas.microsoft.com/office/2006/metadata/properties" xmlns:ns3="da169425-153d-4080-8705-45c92938e7f0" xmlns:ns4="89f1de4a-40f7-4e81-987b-401414521485" targetNamespace="http://schemas.microsoft.com/office/2006/metadata/properties" ma:root="true" ma:fieldsID="4c882593e756bab23045d9ebaf71ae2a" ns3:_="" ns4:_="">
     <xsd:import namespace="da169425-153d-4080-8705-45c92938e7f0"/>
@@ -18399,24 +18461,32 @@
 </ct:contentTypeSchema>
 </file>
 
-<file path=customXml/item2.xml><?xml version="1.0" encoding="utf-8"?>
-<?mso-contentType ?>
-<FormTemplates xmlns="http://schemas.microsoft.com/sharepoint/v3/contenttype/forms">
-  <Display>DocumentLibraryForm</Display>
-  <Edit>DocumentLibraryForm</Edit>
-  <New>DocumentLibraryForm</New>
-</FormTemplates>
+<file path=customXml/itemProps1.xml><?xml version="1.0" encoding="utf-8"?>
+<ds:datastoreItem xmlns:ds="http://schemas.openxmlformats.org/officeDocument/2006/customXml" ds:itemID="{E10D70F7-8416-46C5-896C-E4C67671FD25}">
+  <ds:schemaRefs>
+    <ds:schemaRef ds:uri="89f1de4a-40f7-4e81-987b-401414521485"/>
+    <ds:schemaRef ds:uri="http://purl.org/dc/dcmitype/"/>
+    <ds:schemaRef ds:uri="http://www.w3.org/XML/1998/namespace"/>
+    <ds:schemaRef ds:uri="http://purl.org/dc/terms/"/>
+    <ds:schemaRef ds:uri="http://schemas.microsoft.com/office/2006/metadata/properties"/>
+    <ds:schemaRef ds:uri="http://purl.org/dc/elements/1.1/"/>
+    <ds:schemaRef ds:uri="http://schemas.microsoft.com/office/2006/documentManagement/types"/>
+    <ds:schemaRef ds:uri="http://schemas.microsoft.com/office/infopath/2007/PartnerControls"/>
+    <ds:schemaRef ds:uri="http://schemas.openxmlformats.org/package/2006/metadata/core-properties"/>
+    <ds:schemaRef ds:uri="da169425-153d-4080-8705-45c92938e7f0"/>
+  </ds:schemaRefs>
+</ds:datastoreItem>
 </file>
 
-<file path=customXml/item3.xml><?xml version="1.0" encoding="utf-8"?>
-<p:properties xmlns:p="http://schemas.microsoft.com/office/2006/metadata/properties" xmlns:xsi="http://www.w3.org/2001/XMLSchema-instance" xmlns:pc="http://schemas.microsoft.com/office/infopath/2007/PartnerControls">
-  <documentManagement>
-    <_activity xmlns="da169425-153d-4080-8705-45c92938e7f0" xsi:nil="true"/>
-  </documentManagement>
-</p:properties>
+<file path=customXml/itemProps2.xml><?xml version="1.0" encoding="utf-8"?>
+<ds:datastoreItem xmlns:ds="http://schemas.openxmlformats.org/officeDocument/2006/customXml" ds:itemID="{4E1C400D-5C3C-43E3-9C88-F800C5BA2249}">
+  <ds:schemaRefs>
+    <ds:schemaRef ds:uri="http://schemas.microsoft.com/sharepoint/v3/contenttype/forms"/>
+  </ds:schemaRefs>
+</ds:datastoreItem>
 </file>
 
-<file path=customXml/itemProps1.xml><?xml version="1.0" encoding="utf-8"?>
+<file path=customXml/itemProps3.xml><?xml version="1.0" encoding="utf-8"?>
 <ds:datastoreItem xmlns:ds="http://schemas.openxmlformats.org/officeDocument/2006/customXml" ds:itemID="{F22018BE-1405-4A4B-BB67-C88962BABDE1}">
   <ds:schemaRefs>
     <ds:schemaRef ds:uri="http://schemas.microsoft.com/office/2006/metadata/contentType"/>
@@ -18433,29 +18503,4 @@
     <ds:schemaRef ds:uri="http://schemas.microsoft.com/internal/obd"/>
   </ds:schemaRefs>
 </ds:datastoreItem>
-</file>
-
-<file path=customXml/itemProps2.xml><?xml version="1.0" encoding="utf-8"?>
-<ds:datastoreItem xmlns:ds="http://schemas.openxmlformats.org/officeDocument/2006/customXml" ds:itemID="{4E1C400D-5C3C-43E3-9C88-F800C5BA2249}">
-  <ds:schemaRefs>
-    <ds:schemaRef ds:uri="http://schemas.microsoft.com/sharepoint/v3/contenttype/forms"/>
-  </ds:schemaRefs>
-</ds:datastoreItem>
-</file>
-
-<file path=customXml/itemProps3.xml><?xml version="1.0" encoding="utf-8"?>
-<ds:datastoreItem xmlns:ds="http://schemas.openxmlformats.org/officeDocument/2006/customXml" ds:itemID="{E10D70F7-8416-46C5-896C-E4C67671FD25}">
-  <ds:schemaRefs>
-    <ds:schemaRef ds:uri="http://schemas.microsoft.com/office/2006/metadata/properties"/>
-    <ds:schemaRef ds:uri="da169425-153d-4080-8705-45c92938e7f0"/>
-    <ds:schemaRef ds:uri="http://purl.org/dc/elements/1.1/"/>
-    <ds:schemaRef ds:uri="http://schemas.microsoft.com/office/2006/documentManagement/types"/>
-    <ds:schemaRef ds:uri="http://schemas.openxmlformats.org/package/2006/metadata/core-properties"/>
-    <ds:schemaRef ds:uri="http://purl.org/dc/dcmitype/"/>
-    <ds:schemaRef ds:uri="http://schemas.microsoft.com/office/infopath/2007/PartnerControls"/>
-    <ds:schemaRef ds:uri="89f1de4a-40f7-4e81-987b-401414521485"/>
-    <ds:schemaRef ds:uri="http://www.w3.org/XML/1998/namespace"/>
-    <ds:schemaRef ds:uri="http://purl.org/dc/terms/"/>
-  </ds:schemaRefs>
-</ds:datastoreItem>
 </file>
--- a/ARQUITECTURAS.pptx
+++ b/ARQUITECTURAS.pptx
@@ -10022,8 +10022,8 @@
         </p:nvSpPr>
         <p:spPr>
           <a:xfrm>
-            <a:off x="9913676" y="3740415"/>
-            <a:ext cx="2210348" cy="2970482"/>
+            <a:off x="9876493" y="4103645"/>
+            <a:ext cx="2210348" cy="2244395"/>
           </a:xfrm>
           <a:prstGeom prst="roundRect">
             <a:avLst>
@@ -10080,7 +10080,7 @@
         </p:nvSpPr>
         <p:spPr>
           <a:xfrm>
-            <a:off x="9913675" y="3740415"/>
+            <a:off x="9876492" y="4103645"/>
             <a:ext cx="2210348" cy="601033"/>
           </a:xfrm>
           <a:prstGeom prst="roundRect">
@@ -12566,7 +12566,7 @@
           <p:spPr>
             <a:xfrm>
               <a:off x="778873" y="825583"/>
-              <a:ext cx="694365" cy="263359"/>
+              <a:ext cx="592177" cy="263359"/>
             </a:xfrm>
             <a:prstGeom prst="rect">
               <a:avLst/>
@@ -12578,7 +12578,7 @@
             <a:bodyPr wrap="square" lIns="0" tIns="0" rIns="0" bIns="0" rtlCol="0" anchor="ctr"/>
             <a:lstStyle/>
             <a:p>
-              <a:pPr marL="0" indent="0">
+              <a:pPr marL="0" indent="0" algn="ctr">
                 <a:buNone/>
               </a:pPr>
               <a:r>
@@ -12646,8 +12646,8 @@
           </p:nvSpPr>
           <p:spPr>
             <a:xfrm>
-              <a:off x="778873" y="1372956"/>
-              <a:ext cx="1096165" cy="263359"/>
+              <a:off x="757440" y="1372956"/>
+              <a:ext cx="607596" cy="263359"/>
             </a:xfrm>
             <a:prstGeom prst="rect">
               <a:avLst/>
@@ -12659,7 +12659,7 @@
             <a:bodyPr wrap="square" lIns="0" tIns="0" rIns="0" bIns="0" rtlCol="0" anchor="ctr"/>
             <a:lstStyle/>
             <a:p>
-              <a:pPr marL="0" indent="0">
+              <a:pPr marL="0" indent="0" algn="ctr">
                 <a:buNone/>
               </a:pPr>
               <a:r>
@@ -12831,8 +12831,8 @@
           </p:nvSpPr>
           <p:spPr>
             <a:xfrm>
-              <a:off x="886752" y="2186232"/>
-              <a:ext cx="494541" cy="435921"/>
+              <a:off x="747787" y="2184665"/>
+              <a:ext cx="611337" cy="435921"/>
             </a:xfrm>
             <a:prstGeom prst="rect">
               <a:avLst/>
@@ -12844,7 +12844,7 @@
             <a:bodyPr wrap="square" lIns="0" tIns="0" rIns="0" bIns="0" rtlCol="0" anchor="ctr"/>
             <a:lstStyle/>
             <a:p>
-              <a:pPr marL="0" indent="0">
+              <a:pPr marL="0" indent="0" algn="ctr">
                 <a:buNone/>
               </a:pPr>
               <a:r>
@@ -12869,7 +12869,7 @@
                 </a:rPr>
               </a:br>
               <a:r>
-                <a:rPr lang="en-US" sz="1400" b="1" dirty="0">
+                <a:rPr lang="en-US" sz="1400" b="1" dirty="0" err="1">
                   <a:solidFill>
                     <a:srgbClr val="212121"/>
                   </a:solidFill>
@@ -12877,7 +12877,7 @@
                   <a:ea typeface="Calibri" pitchFamily="34" charset="-122"/>
                   <a:cs typeface="Calibri" pitchFamily="34" charset="-120"/>
                 </a:rPr>
-                <a:t>Social</a:t>
+                <a:t>Usuario</a:t>
               </a:r>
               <a:endParaRPr lang="en-US" dirty="0"/>
             </a:p>
@@ -14057,7 +14057,7 @@
                 <a:ea typeface="Calibri" panose="020F0502020204030204" pitchFamily="34" charset="0"/>
                 <a:cs typeface="Calibri" panose="020F0502020204030204" pitchFamily="34" charset="0"/>
               </a:rPr>
-              <a:t>Agrega</a:t>
+              <a:t>Agregación</a:t>
             </a:r>
             <a:r>
               <a:rPr lang="en-US" sz="1100" b="1" dirty="0">
@@ -14070,7 +14070,7 @@
                 <a:ea typeface="Calibri" panose="020F0502020204030204" pitchFamily="34" charset="0"/>
                 <a:cs typeface="Calibri" panose="020F0502020204030204" pitchFamily="34" charset="0"/>
               </a:rPr>
-              <a:t> variables </a:t>
+              <a:t> de variables </a:t>
             </a:r>
             <a:r>
               <a:rPr lang="en-US" sz="1100" b="1" dirty="0" err="1">
@@ -14157,7 +14157,7 @@
                 <a:ea typeface="Calibri" panose="020F0502020204030204" pitchFamily="34" charset="0"/>
                 <a:cs typeface="Calibri" panose="020F0502020204030204" pitchFamily="34" charset="0"/>
               </a:rPr>
-              <a:t>Convierte</a:t>
+              <a:t>Conversión</a:t>
             </a:r>
             <a:r>
               <a:rPr lang="en-US" sz="1100" b="1" dirty="0">
@@ -14170,7 +14170,7 @@
                 <a:ea typeface="Calibri" panose="020F0502020204030204" pitchFamily="34" charset="0"/>
                 <a:cs typeface="Calibri" panose="020F0502020204030204" pitchFamily="34" charset="0"/>
               </a:rPr>
-              <a:t> </a:t>
+              <a:t> de </a:t>
             </a:r>
             <a:r>
               <a:rPr lang="en-US" sz="1100" b="1" dirty="0" err="1">
@@ -14183,47 +14183,18 @@
                 <a:ea typeface="Calibri" panose="020F0502020204030204" pitchFamily="34" charset="0"/>
                 <a:cs typeface="Calibri" panose="020F0502020204030204" pitchFamily="34" charset="0"/>
               </a:rPr>
-              <a:t>duraciones</a:t>
+              <a:t>unidades</a:t>
             </a:r>
-            <a:r>
-              <a:rPr lang="en-US" sz="1100" b="1" dirty="0">
-                <a:solidFill>
-                  <a:schemeClr val="bg2">
-                    <a:lumMod val="50000"/>
-                  </a:schemeClr>
-                </a:solidFill>
-                <a:latin typeface="Calibri" panose="020F0502020204030204" pitchFamily="34" charset="0"/>
-                <a:ea typeface="Calibri" panose="020F0502020204030204" pitchFamily="34" charset="0"/>
-                <a:cs typeface="Calibri" panose="020F0502020204030204" pitchFamily="34" charset="0"/>
-              </a:rPr>
-              <a:t> (h) </a:t>
-            </a:r>
-            <a:r>
-              <a:rPr lang="en-US" sz="1100" b="1" dirty="0">
-                <a:solidFill>
-                  <a:schemeClr val="bg2">
-                    <a:lumMod val="50000"/>
-                  </a:schemeClr>
-                </a:solidFill>
-                <a:latin typeface="Times New Roman" panose="02020603050405020304" pitchFamily="18" charset="0"/>
-                <a:ea typeface="Calibri" panose="020F0502020204030204" pitchFamily="34" charset="0"/>
-                <a:cs typeface="Times New Roman" panose="02020603050405020304" pitchFamily="18" charset="0"/>
-              </a:rPr>
-              <a:t>→ </a:t>
-            </a:r>
-            <a:r>
-              <a:rPr lang="en-US" sz="1100" b="1" dirty="0">
-                <a:solidFill>
-                  <a:schemeClr val="bg2">
-                    <a:lumMod val="50000"/>
-                  </a:schemeClr>
-                </a:solidFill>
-                <a:latin typeface="Calibri" panose="020F0502020204030204" pitchFamily="34" charset="0"/>
-                <a:ea typeface="Calibri" panose="020F0502020204030204" pitchFamily="34" charset="0"/>
-                <a:cs typeface="Calibri" panose="020F0502020204030204" pitchFamily="34" charset="0"/>
-              </a:rPr>
-              <a:t>(s)</a:t>
-            </a:r>
+            <a:endParaRPr lang="en-US" sz="1100" b="1" dirty="0">
+              <a:solidFill>
+                <a:schemeClr val="bg2">
+                  <a:lumMod val="50000"/>
+                </a:schemeClr>
+              </a:solidFill>
+              <a:latin typeface="Calibri" panose="020F0502020204030204" pitchFamily="34" charset="0"/>
+              <a:ea typeface="Calibri" panose="020F0502020204030204" pitchFamily="34" charset="0"/>
+              <a:cs typeface="Calibri" panose="020F0502020204030204" pitchFamily="34" charset="0"/>
+            </a:endParaRPr>
           </a:p>
           <a:p>
             <a:pPr marL="171450" indent="-171450">
@@ -14340,10 +14311,10 @@
         </p:nvGrpSpPr>
         <p:grpSpPr>
           <a:xfrm>
-            <a:off x="5504834" y="3769014"/>
-            <a:ext cx="1677036" cy="2911674"/>
+            <a:off x="5504834" y="4587163"/>
+            <a:ext cx="1677036" cy="1279645"/>
             <a:chOff x="5472688" y="3569096"/>
-            <a:chExt cx="1677036" cy="2911674"/>
+            <a:chExt cx="1677036" cy="1279645"/>
           </a:xfrm>
         </p:grpSpPr>
         <p:grpSp>
@@ -14361,9 +14332,9 @@
           <p:grpSpPr>
             <a:xfrm>
               <a:off x="5477218" y="3569096"/>
-              <a:ext cx="1653882" cy="2911674"/>
+              <a:ext cx="1653882" cy="1279645"/>
               <a:chOff x="9066910" y="2945375"/>
-              <a:chExt cx="1653881" cy="2911674"/>
+              <a:chExt cx="1653881" cy="1279645"/>
             </a:xfrm>
           </p:grpSpPr>
           <p:sp>
@@ -14381,7 +14352,7 @@
             <p:spPr>
               <a:xfrm>
                 <a:off x="9075902" y="2945375"/>
-                <a:ext cx="1644889" cy="2911674"/>
+                <a:ext cx="1644889" cy="1279645"/>
               </a:xfrm>
               <a:prstGeom prst="roundRect">
                 <a:avLst>
@@ -14562,72 +14533,6 @@
             </a:p>
           </p:txBody>
         </p:sp>
-        <p:pic>
-          <p:nvPicPr>
-            <p:cNvPr id="1425" name="Imagen 1424">
-              <a:extLst>
-                <a:ext uri="{FF2B5EF4-FFF2-40B4-BE49-F238E27FC236}">
-                  <a16:creationId xmlns:a16="http://schemas.microsoft.com/office/drawing/2014/main" id="{876AF0EA-D9F1-0AFC-0F5A-CFCBE0E5B8CE}"/>
-                </a:ext>
-              </a:extLst>
-            </p:cNvPr>
-            <p:cNvPicPr>
-              <a:picLocks noChangeAspect="1"/>
-            </p:cNvPicPr>
-            <p:nvPr/>
-          </p:nvPicPr>
-          <p:blipFill>
-            <a:blip r:embed="rId23">
-              <a:extLst>
-                <a:ext uri="{28A0092B-C50C-407E-A947-70E740481C1C}">
-                  <a14:useLocalDpi xmlns:a14="http://schemas.microsoft.com/office/drawing/2010/main" val="0"/>
-                </a:ext>
-              </a:extLst>
-            </a:blip>
-            <a:stretch>
-              <a:fillRect/>
-            </a:stretch>
-          </p:blipFill>
-          <p:spPr>
-            <a:xfrm>
-              <a:off x="5627644" y="4801900"/>
-              <a:ext cx="1344034" cy="958987"/>
-            </a:xfrm>
-            <a:prstGeom prst="rect">
-              <a:avLst/>
-            </a:prstGeom>
-          </p:spPr>
-        </p:pic>
-        <p:pic>
-          <p:nvPicPr>
-            <p:cNvPr id="1372" name="Imagen 1371" descr="machine learning - Difference between standardscaler and Normalizer in  sklearn.preprocessing - Stack Overflow">
-              <a:extLst>
-                <a:ext uri="{FF2B5EF4-FFF2-40B4-BE49-F238E27FC236}">
-                  <a16:creationId xmlns:a16="http://schemas.microsoft.com/office/drawing/2014/main" id="{3FD92362-3D86-846B-8814-5F37FC4DC894}"/>
-                </a:ext>
-              </a:extLst>
-            </p:cNvPr>
-            <p:cNvPicPr>
-              <a:picLocks noChangeAspect="1"/>
-            </p:cNvPicPr>
-            <p:nvPr/>
-          </p:nvPicPr>
-          <p:blipFill>
-            <a:blip r:embed="rId24"/>
-            <a:stretch>
-              <a:fillRect/>
-            </a:stretch>
-          </p:blipFill>
-          <p:spPr>
-            <a:xfrm>
-              <a:off x="5627644" y="5295422"/>
-              <a:ext cx="1344035" cy="1125320"/>
-            </a:xfrm>
-            <a:prstGeom prst="rect">
-              <a:avLst/>
-            </a:prstGeom>
-          </p:spPr>
-        </p:pic>
       </p:grpSp>
       <p:cxnSp>
         <p:nvCxnSpPr>
@@ -14646,9 +14551,9 @@
           <p:nvPr/>
         </p:nvCxnSpPr>
         <p:spPr>
-          <a:xfrm flipV="1">
-            <a:off x="5105966" y="5224851"/>
-            <a:ext cx="412390" cy="992"/>
+          <a:xfrm>
+            <a:off x="5105966" y="5225843"/>
+            <a:ext cx="412390" cy="1143"/>
           </a:xfrm>
           <a:prstGeom prst="bentConnector3">
             <a:avLst/>
@@ -14690,7 +14595,7 @@
           <a:blip>
             <a:extLst>
               <a:ext uri="{96DAC541-7B7A-43D3-8B79-37D633B846F1}">
-                <asvg:svgBlip xmlns:asvg="http://schemas.microsoft.com/office/drawing/2016/SVG/main" r:embed="rId25"/>
+                <asvg:svgBlip xmlns:asvg="http://schemas.microsoft.com/office/drawing/2016/SVG/main" r:embed="rId23"/>
               </a:ext>
             </a:extLst>
           </a:blip>
@@ -14700,7 +14605,7 @@
         </p:blipFill>
         <p:spPr>
           <a:xfrm>
-            <a:off x="5625497" y="3856014"/>
+            <a:off x="5625497" y="4674163"/>
             <a:ext cx="426461" cy="357117"/>
           </a:xfrm>
           <a:prstGeom prst="rect">
@@ -14948,7 +14853,7 @@
           <p:nvPr/>
         </p:nvPicPr>
         <p:blipFill>
-          <a:blip r:embed="rId26">
+          <a:blip r:embed="rId24">
             <a:extLst>
               <a:ext uri="{28A0092B-C50C-407E-A947-70E740481C1C}">
                 <a14:useLocalDpi xmlns:a14="http://schemas.microsoft.com/office/drawing/2010/main" val="0"/>
@@ -14961,7 +14866,7 @@
         </p:blipFill>
         <p:spPr>
           <a:xfrm>
-            <a:off x="9947574" y="4521988"/>
+            <a:off x="9910391" y="4885218"/>
             <a:ext cx="492510" cy="492510"/>
           </a:xfrm>
           <a:prstGeom prst="rect">
@@ -14987,7 +14892,7 @@
           <a:blip>
             <a:extLst>
               <a:ext uri="{96DAC541-7B7A-43D3-8B79-37D633B846F1}">
-                <asvg:svgBlip xmlns:asvg="http://schemas.microsoft.com/office/drawing/2016/SVG/main" r:embed="rId27"/>
+                <asvg:svgBlip xmlns:asvg="http://schemas.microsoft.com/office/drawing/2016/SVG/main" r:embed="rId25"/>
               </a:ext>
             </a:extLst>
           </a:blip>
@@ -15023,7 +14928,7 @@
           <a:blip>
             <a:extLst>
               <a:ext uri="{96DAC541-7B7A-43D3-8B79-37D633B846F1}">
-                <asvg:svgBlip xmlns:asvg="http://schemas.microsoft.com/office/drawing/2016/SVG/main" r:embed="rId27"/>
+                <asvg:svgBlip xmlns:asvg="http://schemas.microsoft.com/office/drawing/2016/SVG/main" r:embed="rId25"/>
               </a:ext>
             </a:extLst>
           </a:blip>
@@ -15033,7 +14938,7 @@
         </p:blipFill>
         <p:spPr>
           <a:xfrm>
-            <a:off x="10001178" y="3819141"/>
+            <a:off x="9963995" y="4182371"/>
             <a:ext cx="362195" cy="399663"/>
           </a:xfrm>
           <a:prstGeom prst="rect">
@@ -15055,7 +14960,7 @@
         </p:nvSpPr>
         <p:spPr>
           <a:xfrm>
-            <a:off x="10416881" y="3889692"/>
+            <a:off x="10379698" y="4252922"/>
             <a:ext cx="1310949" cy="262118"/>
           </a:xfrm>
           <a:prstGeom prst="rect">
@@ -15113,7 +15018,7 @@
         </p:blipFill>
         <p:spPr>
           <a:xfrm>
-            <a:off x="11745835" y="4347931"/>
+            <a:off x="11708652" y="4711161"/>
             <a:ext cx="292608" cy="292608"/>
           </a:xfrm>
           <a:prstGeom prst="rect">
@@ -15148,7 +15053,7 @@
         </p:blipFill>
         <p:spPr>
           <a:xfrm>
-            <a:off x="11745835" y="4544052"/>
+            <a:off x="11708652" y="4907282"/>
             <a:ext cx="292608" cy="292608"/>
           </a:xfrm>
           <a:prstGeom prst="rect">
@@ -15183,7 +15088,7 @@
         </p:blipFill>
         <p:spPr>
           <a:xfrm>
-            <a:off x="11786067" y="4787977"/>
+            <a:off x="11748884" y="5151207"/>
             <a:ext cx="231553" cy="231553"/>
           </a:xfrm>
           <a:prstGeom prst="rect">
@@ -15218,7 +15123,7 @@
         </p:blipFill>
         <p:spPr>
           <a:xfrm>
-            <a:off x="11752413" y="4963557"/>
+            <a:off x="11715230" y="5326787"/>
             <a:ext cx="292506" cy="292608"/>
           </a:xfrm>
           <a:prstGeom prst="rect">
@@ -15240,7 +15145,7 @@
         </p:nvSpPr>
         <p:spPr>
           <a:xfrm>
-            <a:off x="10468076" y="4416033"/>
+            <a:off x="10430893" y="4779263"/>
             <a:ext cx="1267329" cy="789201"/>
           </a:xfrm>
           <a:prstGeom prst="rect">
@@ -15310,14 +15215,14 @@
           <p:nvPr/>
         </p:nvPicPr>
         <p:blipFill>
-          <a:blip r:embed="rId28"/>
+          <a:blip r:embed="rId26"/>
           <a:stretch>
             <a:fillRect/>
           </a:stretch>
         </p:blipFill>
         <p:spPr>
           <a:xfrm>
-            <a:off x="9957643" y="5420011"/>
+            <a:off x="9920460" y="5783241"/>
             <a:ext cx="492510" cy="492510"/>
           </a:xfrm>
           <a:prstGeom prst="rect">
@@ -15339,7 +15244,7 @@
         </p:nvSpPr>
         <p:spPr>
           <a:xfrm>
-            <a:off x="10460501" y="5512140"/>
+            <a:off x="10423318" y="5875370"/>
             <a:ext cx="1267329" cy="338319"/>
           </a:xfrm>
           <a:prstGeom prst="rect">
@@ -15373,84 +15278,6 @@
           </a:p>
         </p:txBody>
       </p:sp>
-      <p:pic>
-        <p:nvPicPr>
-          <p:cNvPr id="1472" name="Imagen 1471">
-            <a:extLst>
-              <a:ext uri="{FF2B5EF4-FFF2-40B4-BE49-F238E27FC236}">
-                <a16:creationId xmlns:a16="http://schemas.microsoft.com/office/drawing/2014/main" id="{48D94A0E-CCA1-EBA4-A23C-0B58F936DF74}"/>
-              </a:ext>
-            </a:extLst>
-          </p:cNvPr>
-          <p:cNvPicPr>
-            <a:picLocks noChangeAspect="1"/>
-          </p:cNvPicPr>
-          <p:nvPr/>
-        </p:nvPicPr>
-        <p:blipFill>
-          <a:blip r:embed="rId29"/>
-          <a:stretch>
-            <a:fillRect/>
-          </a:stretch>
-        </p:blipFill>
-        <p:spPr>
-          <a:xfrm>
-            <a:off x="9957643" y="6128369"/>
-            <a:ext cx="492510" cy="492510"/>
-          </a:xfrm>
-          <a:prstGeom prst="rect">
-            <a:avLst/>
-          </a:prstGeom>
-        </p:spPr>
-      </p:pic>
-      <p:sp>
-        <p:nvSpPr>
-          <p:cNvPr id="1473" name="Text 34">
-            <a:extLst>
-              <a:ext uri="{FF2B5EF4-FFF2-40B4-BE49-F238E27FC236}">
-                <a16:creationId xmlns:a16="http://schemas.microsoft.com/office/drawing/2014/main" id="{AC77135D-EB02-6A0B-9B94-0F813D14D010}"/>
-              </a:ext>
-            </a:extLst>
-          </p:cNvPr>
-          <p:cNvSpPr/>
-          <p:nvPr/>
-        </p:nvSpPr>
-        <p:spPr>
-          <a:xfrm>
-            <a:off x="10468076" y="6205464"/>
-            <a:ext cx="1638025" cy="338319"/>
-          </a:xfrm>
-          <a:prstGeom prst="rect">
-            <a:avLst/>
-          </a:prstGeom>
-          <a:noFill/>
-          <a:ln/>
-        </p:spPr>
-        <p:txBody>
-          <a:bodyPr wrap="square" lIns="0" tIns="0" rIns="0" bIns="0" rtlCol="0" anchor="ctr"/>
-          <a:lstStyle/>
-          <a:p>
-            <a:pPr marL="0" indent="0">
-              <a:buNone/>
-            </a:pPr>
-            <a:r>
-              <a:rPr lang="en-US" sz="1600" b="1" dirty="0">
-                <a:solidFill>
-                  <a:srgbClr val="212121"/>
-                </a:solidFill>
-                <a:latin typeface="Courier New" panose="02070309020205020404" pitchFamily="49" charset="0"/>
-                <a:ea typeface="Calibri" pitchFamily="34" charset="-122"/>
-                <a:cs typeface="Courier New" panose="02070309020205020404" pitchFamily="49" charset="0"/>
-              </a:rPr>
-              <a:t>Probabilities</a:t>
-            </a:r>
-            <a:endParaRPr lang="en-US" sz="1600" dirty="0">
-              <a:latin typeface="Courier New" panose="02070309020205020404" pitchFamily="49" charset="0"/>
-              <a:cs typeface="Courier New" panose="02070309020205020404" pitchFamily="49" charset="0"/>
-            </a:endParaRPr>
-          </a:p>
-        </p:txBody>
-      </p:sp>
       <p:cxnSp>
         <p:nvCxnSpPr>
           <p:cNvPr id="1489" name="Conector: angular 1488">
@@ -15461,6 +15288,7 @@
             </a:extLst>
           </p:cNvPr>
           <p:cNvCxnSpPr>
+            <a:cxnSpLocks/>
             <a:stCxn id="1356" idx="3"/>
             <a:endCxn id="1452" idx="1"/>
           </p:cNvCxnSpPr>
@@ -15468,8 +15296,8 @@
         </p:nvCxnSpPr>
         <p:spPr>
           <a:xfrm flipV="1">
-            <a:off x="9227086" y="5225656"/>
-            <a:ext cx="686590" cy="902312"/>
+            <a:off x="9227086" y="5225843"/>
+            <a:ext cx="649407" cy="902125"/>
           </a:xfrm>
           <a:prstGeom prst="bentConnector3">
             <a:avLst>
@@ -15505,6 +15333,7 @@
             </a:extLst>
           </p:cNvPr>
           <p:cNvCxnSpPr>
+            <a:cxnSpLocks/>
             <a:stCxn id="1350" idx="3"/>
             <a:endCxn id="1452" idx="1"/>
           </p:cNvCxnSpPr>
@@ -15512,8 +15341,8 @@
         </p:nvCxnSpPr>
         <p:spPr>
           <a:xfrm flipV="1">
-            <a:off x="9223753" y="5225656"/>
-            <a:ext cx="689923" cy="1151"/>
+            <a:off x="9223753" y="5225843"/>
+            <a:ext cx="652740" cy="964"/>
           </a:xfrm>
           <a:prstGeom prst="bentConnector3">
             <a:avLst/>
@@ -15547,6 +15376,7 @@
             </a:extLst>
           </p:cNvPr>
           <p:cNvCxnSpPr>
+            <a:cxnSpLocks/>
             <a:stCxn id="1347" idx="3"/>
             <a:endCxn id="1452" idx="1"/>
           </p:cNvCxnSpPr>
@@ -15555,7 +15385,7 @@
         <p:spPr>
           <a:xfrm>
             <a:off x="9223753" y="4370770"/>
-            <a:ext cx="689923" cy="854886"/>
+            <a:ext cx="652740" cy="855073"/>
           </a:xfrm>
           <a:prstGeom prst="bentConnector3">
             <a:avLst/>
@@ -15589,6 +15419,7 @@
             </a:extLst>
           </p:cNvPr>
           <p:cNvCxnSpPr>
+            <a:cxnSpLocks/>
             <a:stCxn id="1440" idx="3"/>
             <a:endCxn id="1347" idx="1"/>
           </p:cNvCxnSpPr>
@@ -15597,7 +15428,7 @@
         <p:spPr>
           <a:xfrm flipV="1">
             <a:off x="7163246" y="4370770"/>
-            <a:ext cx="477039" cy="854081"/>
+            <a:ext cx="477039" cy="856216"/>
           </a:xfrm>
           <a:prstGeom prst="bentConnector3">
             <a:avLst/>
@@ -15631,15 +15462,16 @@
             </a:extLst>
           </p:cNvPr>
           <p:cNvCxnSpPr>
+            <a:cxnSpLocks/>
             <a:stCxn id="1440" idx="3"/>
             <a:endCxn id="1350" idx="1"/>
           </p:cNvCxnSpPr>
           <p:nvPr/>
         </p:nvCxnSpPr>
         <p:spPr>
-          <a:xfrm>
-            <a:off x="7163246" y="5224851"/>
-            <a:ext cx="477039" cy="1956"/>
+          <a:xfrm flipV="1">
+            <a:off x="7163246" y="5226807"/>
+            <a:ext cx="477039" cy="179"/>
           </a:xfrm>
           <a:prstGeom prst="bentConnector3">
             <a:avLst/>
@@ -15673,6 +15505,7 @@
             </a:extLst>
           </p:cNvPr>
           <p:cNvCxnSpPr>
+            <a:cxnSpLocks/>
             <a:stCxn id="1440" idx="3"/>
             <a:endCxn id="1356" idx="1"/>
           </p:cNvCxnSpPr>
@@ -15680,8 +15513,8 @@
         </p:nvCxnSpPr>
         <p:spPr>
           <a:xfrm>
-            <a:off x="7163246" y="5224851"/>
-            <a:ext cx="480372" cy="903117"/>
+            <a:off x="7163246" y="5226986"/>
+            <a:ext cx="480372" cy="900982"/>
           </a:xfrm>
           <a:prstGeom prst="bentConnector3">
             <a:avLst/>
@@ -15815,26 +15648,122 @@
           <a:p>
             <a:pPr algn="ctr"/>
             <a:r>
-              <a:rPr sz="1323" b="1">
+              <a:rPr sz="1323" b="1" dirty="0">
                 <a:solidFill>
                   <a:srgbClr val="000000"/>
                 </a:solidFill>
                 <a:latin typeface="Calibri"/>
               </a:rPr>
-              <a:t>POST   /api/lpmc/predict   |   /compare</a:t>
+              <a:t>POST   /</a:t>
+            </a:r>
+            <a:r>
+              <a:rPr sz="1323" b="1" dirty="0" err="1">
+                <a:solidFill>
+                  <a:srgbClr val="000000"/>
+                </a:solidFill>
+                <a:latin typeface="Calibri"/>
+              </a:rPr>
+              <a:t>api</a:t>
+            </a:r>
+            <a:r>
+              <a:rPr sz="1323" b="1" dirty="0">
+                <a:solidFill>
+                  <a:srgbClr val="000000"/>
+                </a:solidFill>
+                <a:latin typeface="Calibri"/>
+              </a:rPr>
+              <a:t>/</a:t>
+            </a:r>
+            <a:r>
+              <a:rPr sz="1323" b="1" dirty="0" err="1">
+                <a:solidFill>
+                  <a:srgbClr val="000000"/>
+                </a:solidFill>
+                <a:latin typeface="Calibri"/>
+              </a:rPr>
+              <a:t>lpmc</a:t>
+            </a:r>
+            <a:r>
+              <a:rPr sz="1323" b="1" dirty="0">
+                <a:solidFill>
+                  <a:srgbClr val="000000"/>
+                </a:solidFill>
+                <a:latin typeface="Calibri"/>
+              </a:rPr>
+              <a:t>/predict   |   /compare</a:t>
             </a:r>
           </a:p>
           <a:p>
             <a:pPr algn="ctr"/>
             <a:r>
-              <a:rPr sz="1005">
+              <a:rPr sz="1005" dirty="0" err="1">
                 <a:solidFill>
                   <a:srgbClr val="444444"/>
                 </a:solidFill>
                 <a:latin typeface="Calibri"/>
               </a:rPr>
-              <a:t>origen  ·  destino  ·  perfil sociodemográfico</a:t>
+              <a:t>origen</a:t>
             </a:r>
+            <a:r>
+              <a:rPr sz="1005" dirty="0">
+                <a:solidFill>
+                  <a:srgbClr val="444444"/>
+                </a:solidFill>
+                <a:latin typeface="Calibri"/>
+              </a:rPr>
+              <a:t>  ·  </a:t>
+            </a:r>
+            <a:r>
+              <a:rPr sz="1005" dirty="0" err="1">
+                <a:solidFill>
+                  <a:srgbClr val="444444"/>
+                </a:solidFill>
+                <a:latin typeface="Calibri"/>
+              </a:rPr>
+              <a:t>destino</a:t>
+            </a:r>
+            <a:r>
+              <a:rPr sz="1005" dirty="0">
+                <a:solidFill>
+                  <a:srgbClr val="444444"/>
+                </a:solidFill>
+                <a:latin typeface="Calibri"/>
+              </a:rPr>
+              <a:t>  ·  </a:t>
+            </a:r>
+            <a:r>
+              <a:rPr sz="1005" dirty="0" err="1">
+                <a:solidFill>
+                  <a:srgbClr val="444444"/>
+                </a:solidFill>
+                <a:latin typeface="Calibri"/>
+              </a:rPr>
+              <a:t>perfil</a:t>
+            </a:r>
+            <a:r>
+              <a:rPr sz="1005" dirty="0">
+                <a:solidFill>
+                  <a:srgbClr val="444444"/>
+                </a:solidFill>
+                <a:latin typeface="Calibri"/>
+              </a:rPr>
+              <a:t> </a:t>
+            </a:r>
+            <a:r>
+              <a:rPr sz="1005" dirty="0" err="1">
+                <a:solidFill>
+                  <a:srgbClr val="444444"/>
+                </a:solidFill>
+                <a:latin typeface="Calibri"/>
+              </a:rPr>
+              <a:t>sociodemográfico</a:t>
+            </a:r>
+            <a:endParaRPr sz="1005" dirty="0">
+              <a:solidFill>
+                <a:srgbClr val="444444"/>
+              </a:solidFill>
+              <a:latin typeface="Calibri"/>
+            </a:endParaRPr>
           </a:p>
         </p:txBody>
       </p:sp>
@@ -16697,7 +16626,7 @@
           <a:p>
             <a:pPr algn="ctr"/>
             <a:r>
-              <a:rPr sz="1323" b="1">
+              <a:rPr sz="1323" b="1" dirty="0" err="1">
                 <a:solidFill>
                   <a:srgbClr val="000000"/>
                 </a:solidFill>
@@ -16705,18 +16634,66 @@
               </a:rPr>
               <a:t>build_route_features</a:t>
             </a:r>
+            <a:endParaRPr sz="1323" b="1" dirty="0">
+              <a:solidFill>
+                <a:srgbClr val="000000"/>
+              </a:solidFill>
+              <a:latin typeface="Calibri"/>
+            </a:endParaRPr>
           </a:p>
           <a:p>
             <a:pPr algn="ctr"/>
             <a:r>
-              <a:rPr sz="1005">
+              <a:rPr sz="1005" dirty="0" err="1">
                 <a:solidFill>
                   <a:srgbClr val="444444"/>
                 </a:solidFill>
                 <a:latin typeface="Calibri"/>
               </a:rPr>
-              <a:t>duración (s) → horas  ·  legs OTP → dur_pt_*  ·  transbordos</a:t>
+              <a:t>duración</a:t>
             </a:r>
+            <a:r>
+              <a:rPr sz="1005" dirty="0">
+                <a:solidFill>
+                  <a:srgbClr val="444444"/>
+                </a:solidFill>
+                <a:latin typeface="Calibri"/>
+              </a:rPr>
+              <a:t> (s) → horas  ·  legs OTP → </a:t>
+            </a:r>
+            <a:r>
+              <a:rPr sz="1005" dirty="0" err="1">
+                <a:solidFill>
+                  <a:srgbClr val="444444"/>
+                </a:solidFill>
+                <a:latin typeface="Calibri"/>
+              </a:rPr>
+              <a:t>dur_pt</a:t>
+            </a:r>
+            <a:r>
+              <a:rPr sz="1005" dirty="0">
+                <a:solidFill>
+                  <a:srgbClr val="444444"/>
+                </a:solidFill>
+                <a:latin typeface="Calibri"/>
+              </a:rPr>
+              <a:t>_*  ·  </a:t>
+            </a:r>
+            <a:r>
+              <a:rPr sz="1005" dirty="0" err="1">
+                <a:solidFill>
+                  <a:srgbClr val="444444"/>
+                </a:solidFill>
+                <a:latin typeface="Calibri"/>
+              </a:rPr>
+              <a:t>transbordos</a:t>
+            </a:r>
+            <a:endParaRPr sz="1005" dirty="0">
+              <a:solidFill>
+                <a:srgbClr val="444444"/>
+              </a:solidFill>
+              <a:latin typeface="Calibri"/>
+            </a:endParaRPr>
           </a:p>
         </p:txBody>
       </p:sp>
@@ -16801,7 +16778,7 @@
           <a:p>
             <a:pPr algn="ctr"/>
             <a:r>
-              <a:rPr sz="1323" b="1">
+              <a:rPr sz="1323" b="1" dirty="0" err="1">
                 <a:solidFill>
                   <a:srgbClr val="000000"/>
                 </a:solidFill>
@@ -16809,18 +16786,57 @@
               </a:rPr>
               <a:t>build_feature_frame</a:t>
             </a:r>
+            <a:endParaRPr sz="1323" b="1" dirty="0">
+              <a:solidFill>
+                <a:srgbClr val="000000"/>
+              </a:solidFill>
+              <a:latin typeface="Calibri"/>
+            </a:endParaRPr>
           </a:p>
           <a:p>
             <a:pPr algn="ctr"/>
             <a:r>
-              <a:rPr sz="1005">
+              <a:rPr sz="1005" dirty="0">
                 <a:solidFill>
                   <a:srgbClr val="444444"/>
                 </a:solidFill>
                 <a:latin typeface="Calibri"/>
               </a:rPr>
-              <a:t>+ variables sociodemográficas  ·  one-hot purpose / fueltype</a:t>
+              <a:t>+ variables </a:t>
             </a:r>
+            <a:r>
+              <a:rPr sz="1005" dirty="0" err="1">
+                <a:solidFill>
+                  <a:srgbClr val="444444"/>
+                </a:solidFill>
+                <a:latin typeface="Calibri"/>
+              </a:rPr>
+              <a:t>sociodemográficas</a:t>
+            </a:r>
+            <a:r>
+              <a:rPr sz="1005" dirty="0">
+                <a:solidFill>
+                  <a:srgbClr val="444444"/>
+                </a:solidFill>
+                <a:latin typeface="Calibri"/>
+              </a:rPr>
+              <a:t>  ·  one-hot purpose / </a:t>
+            </a:r>
+            <a:r>
+              <a:rPr sz="1005" dirty="0" err="1">
+                <a:solidFill>
+                  <a:srgbClr val="444444"/>
+                </a:solidFill>
+                <a:latin typeface="Calibri"/>
+              </a:rPr>
+              <a:t>fueltype</a:t>
+            </a:r>
+            <a:endParaRPr sz="1005" dirty="0">
+              <a:solidFill>
+                <a:srgbClr val="444444"/>
+              </a:solidFill>
+              <a:latin typeface="Calibri"/>
+            </a:endParaRPr>
           </a:p>
         </p:txBody>
       </p:sp>
@@ -16905,7 +16921,7 @@
           <a:p>
             <a:pPr algn="ctr"/>
             <a:r>
-              <a:rPr sz="1323" b="1">
+              <a:rPr sz="1323" b="1" dirty="0" err="1">
                 <a:solidFill>
                   <a:srgbClr val="000000"/>
                 </a:solidFill>
@@ -16913,17 +16929,95 @@
               </a:rPr>
               <a:t>StandardScaler.transform</a:t>
             </a:r>
+            <a:endParaRPr sz="1323" b="1" dirty="0">
+              <a:solidFill>
+                <a:srgbClr val="000000"/>
+              </a:solidFill>
+              <a:latin typeface="Calibri"/>
+            </a:endParaRPr>
           </a:p>
           <a:p>
             <a:pPr algn="ctr"/>
             <a:r>
-              <a:rPr sz="1005">
+              <a:rPr sz="1005" dirty="0">
                 <a:solidFill>
                   <a:srgbClr val="444444"/>
                 </a:solidFill>
                 <a:latin typeface="Calibri"/>
               </a:rPr>
-              <a:t>columnas continuas  ·  μ y σ ajustados sobre el conjunto train</a:t>
+              <a:t>columnas </a:t>
+            </a:r>
+            <a:r>
+              <a:rPr sz="1005" dirty="0" err="1">
+                <a:solidFill>
+                  <a:srgbClr val="444444"/>
+                </a:solidFill>
+                <a:latin typeface="Calibri"/>
+              </a:rPr>
+              <a:t>continuas</a:t>
+            </a:r>
+            <a:r>
+              <a:rPr sz="1005" dirty="0">
+                <a:solidFill>
+                  <a:srgbClr val="444444"/>
+                </a:solidFill>
+                <a:latin typeface="Calibri"/>
+              </a:rPr>
+              <a:t>  ·  μ y σ </a:t>
+            </a:r>
+            <a:r>
+              <a:rPr sz="1005" dirty="0" err="1">
+                <a:solidFill>
+                  <a:srgbClr val="444444"/>
+                </a:solidFill>
+                <a:latin typeface="Calibri"/>
+              </a:rPr>
+              <a:t>ajustados</a:t>
+            </a:r>
+            <a:r>
+              <a:rPr sz="1005" dirty="0">
+                <a:solidFill>
+                  <a:srgbClr val="444444"/>
+                </a:solidFill>
+                <a:latin typeface="Calibri"/>
+              </a:rPr>
+              <a:t> </a:t>
+            </a:r>
+            <a:r>
+              <a:rPr sz="1005" dirty="0" err="1">
+                <a:solidFill>
+                  <a:srgbClr val="444444"/>
+                </a:solidFill>
+                <a:latin typeface="Calibri"/>
+              </a:rPr>
+              <a:t>sobre</a:t>
+            </a:r>
+            <a:r>
+              <a:rPr sz="1005" dirty="0">
+                <a:solidFill>
+                  <a:srgbClr val="444444"/>
+                </a:solidFill>
+                <a:latin typeface="Calibri"/>
+              </a:rPr>
+              <a:t> </a:t>
+            </a:r>
+            <a:r>
+              <a:rPr sz="1005" dirty="0" err="1">
+                <a:solidFill>
+                  <a:srgbClr val="444444"/>
+                </a:solidFill>
+                <a:latin typeface="Calibri"/>
+              </a:rPr>
+              <a:t>el</a:t>
+            </a:r>
+            <a:r>
+              <a:rPr sz="1005" dirty="0">
+                <a:solidFill>
+                  <a:srgbClr val="444444"/>
+                </a:solidFill>
+                <a:latin typeface="Calibri"/>
+              </a:rPr>
+              <a:t> conjunto train</a:t>
             </a:r>
           </a:p>
         </p:txBody>
@@ -18192,23 +18286,6 @@
 </file>
 
 <file path=customXml/item1.xml><?xml version="1.0" encoding="utf-8"?>
-<p:properties xmlns:p="http://schemas.microsoft.com/office/2006/metadata/properties" xmlns:xsi="http://www.w3.org/2001/XMLSchema-instance" xmlns:pc="http://schemas.microsoft.com/office/infopath/2007/PartnerControls">
-  <documentManagement>
-    <_activity xmlns="da169425-153d-4080-8705-45c92938e7f0" xsi:nil="true"/>
-  </documentManagement>
-</p:properties>
-</file>
-
-<file path=customXml/item2.xml><?xml version="1.0" encoding="utf-8"?>
-<?mso-contentType ?>
-<FormTemplates xmlns="http://schemas.microsoft.com/sharepoint/v3/contenttype/forms">
-  <Display>DocumentLibraryForm</Display>
-  <Edit>DocumentLibraryForm</Edit>
-  <New>DocumentLibraryForm</New>
-</FormTemplates>
-</file>
-
-<file path=customXml/item3.xml><?xml version="1.0" encoding="utf-8"?>
 <ct:contentTypeSchema xmlns:ct="http://schemas.microsoft.com/office/2006/metadata/contentType" xmlns:ma="http://schemas.microsoft.com/office/2006/metadata/properties/metaAttributes" ct:_="" ma:_="" ma:contentTypeName="Documento" ma:contentTypeID="0x010100DEA5B49C5DE5F44CB629258CFB70E19D" ma:contentTypeVersion="18" ma:contentTypeDescription="Crear nuevo documento." ma:contentTypeScope="" ma:versionID="74d7687ff137e87fb3b1bb4914d165da">
   <xsd:schema xmlns:xsd="http://www.w3.org/2001/XMLSchema" xmlns:xs="http://www.w3.org/2001/XMLSchema" xmlns:p="http://schemas.microsoft.com/office/2006/metadata/properties" xmlns:ns3="da169425-153d-4080-8705-45c92938e7f0" xmlns:ns4="89f1de4a-40f7-4e81-987b-401414521485" targetNamespace="http://schemas.microsoft.com/office/2006/metadata/properties" ma:root="true" ma:fieldsID="4c882593e756bab23045d9ebaf71ae2a" ns3:_="" ns4:_="">
     <xsd:import namespace="da169425-153d-4080-8705-45c92938e7f0"/>
@@ -18461,32 +18538,24 @@
 </ct:contentTypeSchema>
 </file>
 
-<file path=customXml/itemProps1.xml><?xml version="1.0" encoding="utf-8"?>
-<ds:datastoreItem xmlns:ds="http://schemas.openxmlformats.org/officeDocument/2006/customXml" ds:itemID="{E10D70F7-8416-46C5-896C-E4C67671FD25}">
-  <ds:schemaRefs>
-    <ds:schemaRef ds:uri="89f1de4a-40f7-4e81-987b-401414521485"/>
-    <ds:schemaRef ds:uri="http://purl.org/dc/dcmitype/"/>
-    <ds:schemaRef ds:uri="http://www.w3.org/XML/1998/namespace"/>
-    <ds:schemaRef ds:uri="http://purl.org/dc/terms/"/>
-    <ds:schemaRef ds:uri="http://schemas.microsoft.com/office/2006/metadata/properties"/>
-    <ds:schemaRef ds:uri="http://purl.org/dc/elements/1.1/"/>
-    <ds:schemaRef ds:uri="http://schemas.microsoft.com/office/2006/documentManagement/types"/>
-    <ds:schemaRef ds:uri="http://schemas.microsoft.com/office/infopath/2007/PartnerControls"/>
-    <ds:schemaRef ds:uri="http://schemas.openxmlformats.org/package/2006/metadata/core-properties"/>
-    <ds:schemaRef ds:uri="da169425-153d-4080-8705-45c92938e7f0"/>
-  </ds:schemaRefs>
-</ds:datastoreItem>
+<file path=customXml/item2.xml><?xml version="1.0" encoding="utf-8"?>
+<?mso-contentType ?>
+<FormTemplates xmlns="http://schemas.microsoft.com/sharepoint/v3/contenttype/forms">
+  <Display>DocumentLibraryForm</Display>
+  <Edit>DocumentLibraryForm</Edit>
+  <New>DocumentLibraryForm</New>
+</FormTemplates>
 </file>
 
-<file path=customXml/itemProps2.xml><?xml version="1.0" encoding="utf-8"?>
-<ds:datastoreItem xmlns:ds="http://schemas.openxmlformats.org/officeDocument/2006/customXml" ds:itemID="{4E1C400D-5C3C-43E3-9C88-F800C5BA2249}">
-  <ds:schemaRefs>
-    <ds:schemaRef ds:uri="http://schemas.microsoft.com/sharepoint/v3/contenttype/forms"/>
-  </ds:schemaRefs>
-</ds:datastoreItem>
+<file path=customXml/item3.xml><?xml version="1.0" encoding="utf-8"?>
+<p:properties xmlns:p="http://schemas.microsoft.com/office/2006/metadata/properties" xmlns:xsi="http://www.w3.org/2001/XMLSchema-instance" xmlns:pc="http://schemas.microsoft.com/office/infopath/2007/PartnerControls">
+  <documentManagement>
+    <_activity xmlns="da169425-153d-4080-8705-45c92938e7f0" xsi:nil="true"/>
+  </documentManagement>
+</p:properties>
 </file>
 
-<file path=customXml/itemProps3.xml><?xml version="1.0" encoding="utf-8"?>
+<file path=customXml/itemProps1.xml><?xml version="1.0" encoding="utf-8"?>
 <ds:datastoreItem xmlns:ds="http://schemas.openxmlformats.org/officeDocument/2006/customXml" ds:itemID="{F22018BE-1405-4A4B-BB67-C88962BABDE1}">
   <ds:schemaRefs>
     <ds:schemaRef ds:uri="http://schemas.microsoft.com/office/2006/metadata/contentType"/>
@@ -18503,4 +18572,29 @@
     <ds:schemaRef ds:uri="http://schemas.microsoft.com/internal/obd"/>
   </ds:schemaRefs>
 </ds:datastoreItem>
+</file>
+
+<file path=customXml/itemProps2.xml><?xml version="1.0" encoding="utf-8"?>
+<ds:datastoreItem xmlns:ds="http://schemas.openxmlformats.org/officeDocument/2006/customXml" ds:itemID="{4E1C400D-5C3C-43E3-9C88-F800C5BA2249}">
+  <ds:schemaRefs>
+    <ds:schemaRef ds:uri="http://schemas.microsoft.com/sharepoint/v3/contenttype/forms"/>
+  </ds:schemaRefs>
+</ds:datastoreItem>
+</file>
+
+<file path=customXml/itemProps3.xml><?xml version="1.0" encoding="utf-8"?>
+<ds:datastoreItem xmlns:ds="http://schemas.openxmlformats.org/officeDocument/2006/customXml" ds:itemID="{E10D70F7-8416-46C5-896C-E4C67671FD25}">
+  <ds:schemaRefs>
+    <ds:schemaRef ds:uri="89f1de4a-40f7-4e81-987b-401414521485"/>
+    <ds:schemaRef ds:uri="http://purl.org/dc/dcmitype/"/>
+    <ds:schemaRef ds:uri="http://www.w3.org/XML/1998/namespace"/>
+    <ds:schemaRef ds:uri="http://purl.org/dc/terms/"/>
+    <ds:schemaRef ds:uri="http://schemas.microsoft.com/office/2006/metadata/properties"/>
+    <ds:schemaRef ds:uri="http://purl.org/dc/elements/1.1/"/>
+    <ds:schemaRef ds:uri="http://schemas.microsoft.com/office/2006/documentManagement/types"/>
+    <ds:schemaRef ds:uri="http://schemas.microsoft.com/office/infopath/2007/PartnerControls"/>
+    <ds:schemaRef ds:uri="http://schemas.openxmlformats.org/package/2006/metadata/core-properties"/>
+    <ds:schemaRef ds:uri="da169425-153d-4080-8705-45c92938e7f0"/>
+  </ds:schemaRefs>
+</ds:datastoreItem>
 </file>
--- a/ARQUITECTURAS.pptx
+++ b/ARQUITECTURAS.pptx
@@ -10,7 +10,7 @@
   <p:sldIdLst>
     <p:sldId id="260" r:id="rId5"/>
     <p:sldId id="261" r:id="rId6"/>
-    <p:sldId id="256" r:id="rId7"/>
+    <p:sldId id="262" r:id="rId7"/>
   </p:sldIdLst>
   <p:sldSz cx="12192000" cy="6858000"/>
   <p:notesSz cx="6858000" cy="9144000"/>
@@ -199,7 +199,7 @@
           <a:p>
             <a:fld id="{648875B9-81E3-48EB-AC45-E2B16239D10D}" type="datetimeFigureOut">
               <a:rPr lang="es-ES" smtClean="0"/>
-              <a:t>06/05/2026</a:t>
+              <a:t>28/05/2026</a:t>
             </a:fld>
             <a:endParaRPr lang="es-ES"/>
           </a:p>
@@ -658,6 +658,114 @@
 </p:notes>
 </file>
 
+<file path=ppt/notesSlides/notesSlide3.xml><?xml version="1.0" encoding="utf-8"?>
+<p:notes xmlns:a="http://schemas.openxmlformats.org/drawingml/2006/main" xmlns:r="http://schemas.openxmlformats.org/officeDocument/2006/relationships" xmlns:p="http://schemas.openxmlformats.org/presentationml/2006/main">
+  <p:cSld>
+    <p:spTree>
+      <p:nvGrpSpPr>
+        <p:cNvPr id="1" name="">
+          <a:extLst>
+            <a:ext uri="{FF2B5EF4-FFF2-40B4-BE49-F238E27FC236}">
+              <a16:creationId xmlns:a16="http://schemas.microsoft.com/office/drawing/2014/main" id="{9DE11144-03BE-FE4E-0BF1-95994BF4A2FA}"/>
+            </a:ext>
+          </a:extLst>
+        </p:cNvPr>
+        <p:cNvGrpSpPr/>
+        <p:nvPr/>
+      </p:nvGrpSpPr>
+      <p:grpSpPr>
+        <a:xfrm>
+          <a:off x="0" y="0"/>
+          <a:ext cx="0" cy="0"/>
+          <a:chOff x="0" y="0"/>
+          <a:chExt cx="0" cy="0"/>
+        </a:xfrm>
+      </p:grpSpPr>
+      <p:sp>
+        <p:nvSpPr>
+          <p:cNvPr id="2" name="Slide Image Placeholder 1">
+            <a:extLst>
+              <a:ext uri="{FF2B5EF4-FFF2-40B4-BE49-F238E27FC236}">
+                <a16:creationId xmlns:a16="http://schemas.microsoft.com/office/drawing/2014/main" id="{63D99DC6-C4A5-121C-B575-173227476E17}"/>
+              </a:ext>
+            </a:extLst>
+          </p:cNvPr>
+          <p:cNvSpPr>
+            <a:spLocks noGrp="1" noRot="1" noChangeAspect="1"/>
+          </p:cNvSpPr>
+          <p:nvPr>
+            <p:ph type="sldImg"/>
+          </p:nvPr>
+        </p:nvSpPr>
+        <p:spPr/>
+      </p:sp>
+      <p:sp>
+        <p:nvSpPr>
+          <p:cNvPr id="3" name="Notes Placeholder 2">
+            <a:extLst>
+              <a:ext uri="{FF2B5EF4-FFF2-40B4-BE49-F238E27FC236}">
+                <a16:creationId xmlns:a16="http://schemas.microsoft.com/office/drawing/2014/main" id="{3F93D1D3-B577-F574-6D5F-7A0C233CF1C8}"/>
+              </a:ext>
+            </a:extLst>
+          </p:cNvPr>
+          <p:cNvSpPr>
+            <a:spLocks noGrp="1"/>
+          </p:cNvSpPr>
+          <p:nvPr>
+            <p:ph type="body" idx="1"/>
+          </p:nvPr>
+        </p:nvSpPr>
+        <p:spPr/>
+        <p:txBody>
+          <a:bodyPr/>
+          <a:lstStyle/>
+          <a:p>
+            <a:endParaRPr lang="en-US" dirty="0"/>
+          </a:p>
+        </p:txBody>
+      </p:sp>
+      <p:sp>
+        <p:nvSpPr>
+          <p:cNvPr id="4" name="Slide Number Placeholder 3">
+            <a:extLst>
+              <a:ext uri="{FF2B5EF4-FFF2-40B4-BE49-F238E27FC236}">
+                <a16:creationId xmlns:a16="http://schemas.microsoft.com/office/drawing/2014/main" id="{9B922388-AB26-3EB7-E67E-C2F718C79ECD}"/>
+              </a:ext>
+            </a:extLst>
+          </p:cNvPr>
+          <p:cNvSpPr>
+            <a:spLocks noGrp="1"/>
+          </p:cNvSpPr>
+          <p:nvPr>
+            <p:ph type="sldNum" sz="quarter" idx="10"/>
+          </p:nvPr>
+        </p:nvSpPr>
+        <p:spPr/>
+        <p:txBody>
+          <a:bodyPr/>
+          <a:lstStyle/>
+          <a:p>
+            <a:fld id="{F7021451-1387-4CA6-816F-3879F97B5CBC}" type="slidenum">
+              <a:rPr lang="en-US"/>
+              <a:t>3</a:t>
+            </a:fld>
+            <a:endParaRPr lang="en-US"/>
+          </a:p>
+        </p:txBody>
+      </p:sp>
+    </p:spTree>
+    <p:extLst>
+      <p:ext uri="{BB962C8B-B14F-4D97-AF65-F5344CB8AC3E}">
+        <p14:creationId xmlns:p14="http://schemas.microsoft.com/office/powerpoint/2010/main" val="1851369066"/>
+      </p:ext>
+    </p:extLst>
+  </p:cSld>
+  <p:clrMapOvr>
+    <a:masterClrMapping/>
+  </p:clrMapOvr>
+</p:notes>
+</file>
+
 <file path=ppt/slideLayouts/slideLayout1.xml><?xml version="1.0" encoding="utf-8"?>
 <p:sldLayout xmlns:a="http://schemas.openxmlformats.org/drawingml/2006/main" xmlns:r="http://schemas.openxmlformats.org/officeDocument/2006/relationships" xmlns:p="http://schemas.openxmlformats.org/presentationml/2006/main" type="title" preserve="1">
   <p:cSld name="Diapositiva de título">
@@ -805,7 +913,7 @@
           <a:p>
             <a:fld id="{31F888AD-2037-4E90-B50F-EBB1A322544F}" type="datetimeFigureOut">
               <a:rPr lang="es-ES" smtClean="0"/>
-              <a:t>06/05/2026</a:t>
+              <a:t>28/05/2026</a:t>
             </a:fld>
             <a:endParaRPr lang="es-ES"/>
           </a:p>
@@ -1003,7 +1111,7 @@
           <a:p>
             <a:fld id="{31F888AD-2037-4E90-B50F-EBB1A322544F}" type="datetimeFigureOut">
               <a:rPr lang="es-ES" smtClean="0"/>
-              <a:t>06/05/2026</a:t>
+              <a:t>28/05/2026</a:t>
             </a:fld>
             <a:endParaRPr lang="es-ES"/>
           </a:p>
@@ -1211,7 +1319,7 @@
           <a:p>
             <a:fld id="{31F888AD-2037-4E90-B50F-EBB1A322544F}" type="datetimeFigureOut">
               <a:rPr lang="es-ES" smtClean="0"/>
-              <a:t>06/05/2026</a:t>
+              <a:t>28/05/2026</a:t>
             </a:fld>
             <a:endParaRPr lang="es-ES"/>
           </a:p>
@@ -1444,7 +1552,7 @@
           <a:p>
             <a:fld id="{31F888AD-2037-4E90-B50F-EBB1A322544F}" type="datetimeFigureOut">
               <a:rPr lang="es-ES" smtClean="0"/>
-              <a:t>06/05/2026</a:t>
+              <a:t>28/05/2026</a:t>
             </a:fld>
             <a:endParaRPr lang="es-ES"/>
           </a:p>
@@ -1719,7 +1827,7 @@
           <a:p>
             <a:fld id="{31F888AD-2037-4E90-B50F-EBB1A322544F}" type="datetimeFigureOut">
               <a:rPr lang="es-ES" smtClean="0"/>
-              <a:t>06/05/2026</a:t>
+              <a:t>28/05/2026</a:t>
             </a:fld>
             <a:endParaRPr lang="es-ES"/>
           </a:p>
@@ -1984,7 +2092,7 @@
           <a:p>
             <a:fld id="{31F888AD-2037-4E90-B50F-EBB1A322544F}" type="datetimeFigureOut">
               <a:rPr lang="es-ES" smtClean="0"/>
-              <a:t>06/05/2026</a:t>
+              <a:t>28/05/2026</a:t>
             </a:fld>
             <a:endParaRPr lang="es-ES"/>
           </a:p>
@@ -2396,7 +2504,7 @@
           <a:p>
             <a:fld id="{31F888AD-2037-4E90-B50F-EBB1A322544F}" type="datetimeFigureOut">
               <a:rPr lang="es-ES" smtClean="0"/>
-              <a:t>06/05/2026</a:t>
+              <a:t>28/05/2026</a:t>
             </a:fld>
             <a:endParaRPr lang="es-ES"/>
           </a:p>
@@ -2537,7 +2645,7 @@
           <a:p>
             <a:fld id="{31F888AD-2037-4E90-B50F-EBB1A322544F}" type="datetimeFigureOut">
               <a:rPr lang="es-ES" smtClean="0"/>
-              <a:t>06/05/2026</a:t>
+              <a:t>28/05/2026</a:t>
             </a:fld>
             <a:endParaRPr lang="es-ES"/>
           </a:p>
@@ -2650,7 +2758,7 @@
           <a:p>
             <a:fld id="{31F888AD-2037-4E90-B50F-EBB1A322544F}" type="datetimeFigureOut">
               <a:rPr lang="es-ES" smtClean="0"/>
-              <a:t>06/05/2026</a:t>
+              <a:t>28/05/2026</a:t>
             </a:fld>
             <a:endParaRPr lang="es-ES"/>
           </a:p>
@@ -2961,7 +3069,7 @@
           <a:p>
             <a:fld id="{31F888AD-2037-4E90-B50F-EBB1A322544F}" type="datetimeFigureOut">
               <a:rPr lang="es-ES" smtClean="0"/>
-              <a:t>06/05/2026</a:t>
+              <a:t>28/05/2026</a:t>
             </a:fld>
             <a:endParaRPr lang="es-ES"/>
           </a:p>
@@ -3249,7 +3357,7 @@
           <a:p>
             <a:fld id="{31F888AD-2037-4E90-B50F-EBB1A322544F}" type="datetimeFigureOut">
               <a:rPr lang="es-ES" smtClean="0"/>
-              <a:t>06/05/2026</a:t>
+              <a:t>28/05/2026</a:t>
             </a:fld>
             <a:endParaRPr lang="es-ES"/>
           </a:p>
@@ -3490,7 +3598,7 @@
           <a:p>
             <a:fld id="{31F888AD-2037-4E90-B50F-EBB1A322544F}" type="datetimeFigureOut">
               <a:rPr lang="es-ES" smtClean="0"/>
-              <a:t>06/05/2026</a:t>
+              <a:t>28/05/2026</a:t>
             </a:fld>
             <a:endParaRPr lang="es-ES"/>
           </a:p>
@@ -3892,7 +4000,7 @@
 </file>
 
 <file path=ppt/slides/slide1.xml><?xml version="1.0" encoding="utf-8"?>
-<p:sld xmlns:a="http://schemas.openxmlformats.org/drawingml/2006/main" xmlns:r="http://schemas.openxmlformats.org/officeDocument/2006/relationships" xmlns:p="http://schemas.openxmlformats.org/presentationml/2006/main">
+<p:sld xmlns:a="http://schemas.openxmlformats.org/drawingml/2006/main" xmlns:r="http://schemas.openxmlformats.org/officeDocument/2006/relationships" xmlns:p="http://schemas.openxmlformats.org/presentationml/2006/main" show="0">
   <p:cSld>
     <p:spTree>
       <p:nvGrpSpPr>
@@ -5129,7 +5237,7 @@
                   <a:solidFill>
                     <a:srgbClr val="004D40"/>
                   </a:solidFill>
-                  <a:latin typeface="Courier New" pitchFamily="34" charset="0"/>
+                  <a:latin typeface="Consolas" panose="020B0609020204030204" pitchFamily="49" charset="0"/>
                   <a:ea typeface="Courier New" pitchFamily="34" charset="-122"/>
                   <a:cs typeface="Courier New" pitchFamily="34" charset="-120"/>
                 </a:rPr>
@@ -5140,7 +5248,7 @@
                   <a:solidFill>
                     <a:srgbClr val="004D40"/>
                   </a:solidFill>
-                  <a:latin typeface="Courier New" pitchFamily="34" charset="0"/>
+                  <a:latin typeface="Consolas" panose="020B0609020204030204" pitchFamily="49" charset="0"/>
                   <a:ea typeface="Courier New" pitchFamily="34" charset="-122"/>
                   <a:cs typeface="Courier New" pitchFamily="34" charset="-120"/>
                 </a:rPr>
@@ -5151,7 +5259,7 @@
                   <a:solidFill>
                     <a:srgbClr val="004D40"/>
                   </a:solidFill>
-                  <a:latin typeface="Courier New" pitchFamily="34" charset="0"/>
+                  <a:latin typeface="Consolas" panose="020B0609020204030204" pitchFamily="49" charset="0"/>
                   <a:ea typeface="Courier New" pitchFamily="34" charset="-122"/>
                   <a:cs typeface="Courier New" pitchFamily="34" charset="-120"/>
                 </a:rPr>
@@ -5162,13 +5270,15 @@
                   <a:solidFill>
                     <a:srgbClr val="004D40"/>
                   </a:solidFill>
-                  <a:latin typeface="Courier New" pitchFamily="34" charset="0"/>
+                  <a:latin typeface="Consolas" panose="020B0609020204030204" pitchFamily="49" charset="0"/>
                   <a:ea typeface="Courier New" pitchFamily="34" charset="-122"/>
                   <a:cs typeface="Courier New" pitchFamily="34" charset="-120"/>
                 </a:rPr>
                 <a:t>osrm</a:t>
               </a:r>
-              <a:endParaRPr lang="en-US" sz="1600" b="1" dirty="0"/>
+              <a:endParaRPr lang="en-US" sz="1600" b="1" dirty="0">
+                <a:latin typeface="Consolas" panose="020B0609020204030204" pitchFamily="49" charset="0"/>
+              </a:endParaRPr>
             </a:p>
           </p:txBody>
         </p:sp>
@@ -5214,7 +5324,7 @@
                   <a:solidFill>
                     <a:srgbClr val="004D40"/>
                   </a:solidFill>
-                  <a:latin typeface="Courier New" pitchFamily="34" charset="0"/>
+                  <a:latin typeface="Consolas" panose="020B0609020204030204" pitchFamily="49" charset="0"/>
                   <a:ea typeface="Courier New" pitchFamily="34" charset="-122"/>
                   <a:cs typeface="Courier New" pitchFamily="34" charset="-120"/>
                 </a:rPr>
@@ -5225,7 +5335,7 @@
                   <a:solidFill>
                     <a:srgbClr val="004D40"/>
                   </a:solidFill>
-                  <a:latin typeface="Courier New" pitchFamily="34" charset="0"/>
+                  <a:latin typeface="Consolas" panose="020B0609020204030204" pitchFamily="49" charset="0"/>
                   <a:ea typeface="Courier New" pitchFamily="34" charset="-122"/>
                   <a:cs typeface="Courier New" pitchFamily="34" charset="-120"/>
                 </a:rPr>
@@ -5236,7 +5346,7 @@
                   <a:solidFill>
                     <a:srgbClr val="004D40"/>
                   </a:solidFill>
-                  <a:latin typeface="Courier New" pitchFamily="34" charset="0"/>
+                  <a:latin typeface="Consolas" panose="020B0609020204030204" pitchFamily="49" charset="0"/>
                   <a:ea typeface="Courier New" pitchFamily="34" charset="-122"/>
                   <a:cs typeface="Courier New" pitchFamily="34" charset="-120"/>
                 </a:rPr>
@@ -5247,13 +5357,15 @@
                   <a:solidFill>
                     <a:srgbClr val="004D40"/>
                   </a:solidFill>
-                  <a:latin typeface="Courier New" pitchFamily="34" charset="0"/>
+                  <a:latin typeface="Consolas" panose="020B0609020204030204" pitchFamily="49" charset="0"/>
                   <a:ea typeface="Courier New" pitchFamily="34" charset="-122"/>
                   <a:cs typeface="Courier New" pitchFamily="34" charset="-120"/>
                 </a:rPr>
                 <a:t>otp</a:t>
               </a:r>
-              <a:endParaRPr lang="en-US" sz="1600" b="1" dirty="0"/>
+              <a:endParaRPr lang="en-US" sz="1600" b="1" dirty="0">
+                <a:latin typeface="Consolas" panose="020B0609020204030204" pitchFamily="49" charset="0"/>
+              </a:endParaRPr>
             </a:p>
           </p:txBody>
         </p:sp>
@@ -5299,7 +5411,7 @@
                   <a:solidFill>
                     <a:srgbClr val="004D40"/>
                   </a:solidFill>
-                  <a:latin typeface="Courier New" pitchFamily="34" charset="0"/>
+                  <a:latin typeface="Consolas" panose="020B0609020204030204" pitchFamily="49" charset="0"/>
                   <a:ea typeface="Courier New" pitchFamily="34" charset="-122"/>
                   <a:cs typeface="Courier New" pitchFamily="34" charset="-120"/>
                 </a:rPr>
@@ -5310,7 +5422,7 @@
                   <a:solidFill>
                     <a:srgbClr val="004D40"/>
                   </a:solidFill>
-                  <a:latin typeface="Courier New" pitchFamily="34" charset="0"/>
+                  <a:latin typeface="Consolas" panose="020B0609020204030204" pitchFamily="49" charset="0"/>
                   <a:ea typeface="Courier New" pitchFamily="34" charset="-122"/>
                   <a:cs typeface="Courier New" pitchFamily="34" charset="-120"/>
                 </a:rPr>
@@ -5321,7 +5433,7 @@
                   <a:solidFill>
                     <a:srgbClr val="004D40"/>
                   </a:solidFill>
-                  <a:latin typeface="Courier New" pitchFamily="34" charset="0"/>
+                  <a:latin typeface="Consolas" panose="020B0609020204030204" pitchFamily="49" charset="0"/>
                   <a:ea typeface="Courier New" pitchFamily="34" charset="-122"/>
                   <a:cs typeface="Courier New" pitchFamily="34" charset="-120"/>
                 </a:rPr>
@@ -5332,13 +5444,15 @@
                   <a:solidFill>
                     <a:srgbClr val="004D40"/>
                   </a:solidFill>
-                  <a:latin typeface="Courier New" pitchFamily="34" charset="0"/>
+                  <a:latin typeface="Consolas" panose="020B0609020204030204" pitchFamily="49" charset="0"/>
                   <a:ea typeface="Courier New" pitchFamily="34" charset="-122"/>
                   <a:cs typeface="Courier New" pitchFamily="34" charset="-120"/>
                 </a:rPr>
                 <a:t>gtfs</a:t>
               </a:r>
-              <a:endParaRPr lang="en-US" sz="1600" b="1" dirty="0"/>
+              <a:endParaRPr lang="en-US" sz="1600" b="1" dirty="0">
+                <a:latin typeface="Consolas" panose="020B0609020204030204" pitchFamily="49" charset="0"/>
+              </a:endParaRPr>
             </a:p>
           </p:txBody>
         </p:sp>
@@ -5384,7 +5498,7 @@
                   <a:solidFill>
                     <a:srgbClr val="004D40"/>
                   </a:solidFill>
-                  <a:latin typeface="Courier New" pitchFamily="34" charset="0"/>
+                  <a:latin typeface="Consolas" panose="020B0609020204030204" pitchFamily="49" charset="0"/>
                   <a:ea typeface="Courier New" pitchFamily="34" charset="-122"/>
                   <a:cs typeface="Courier New" pitchFamily="34" charset="-120"/>
                 </a:rPr>
@@ -5395,7 +5509,7 @@
                   <a:solidFill>
                     <a:srgbClr val="004D40"/>
                   </a:solidFill>
-                  <a:latin typeface="Courier New" pitchFamily="34" charset="0"/>
+                  <a:latin typeface="Consolas" panose="020B0609020204030204" pitchFamily="49" charset="0"/>
                   <a:ea typeface="Courier New" pitchFamily="34" charset="-122"/>
                   <a:cs typeface="Courier New" pitchFamily="34" charset="-120"/>
                 </a:rPr>
@@ -5406,7 +5520,7 @@
                   <a:solidFill>
                     <a:srgbClr val="004D40"/>
                   </a:solidFill>
-                  <a:latin typeface="Courier New" pitchFamily="34" charset="0"/>
+                  <a:latin typeface="Consolas" panose="020B0609020204030204" pitchFamily="49" charset="0"/>
                   <a:ea typeface="Courier New" pitchFamily="34" charset="-122"/>
                   <a:cs typeface="Courier New" pitchFamily="34" charset="-120"/>
                 </a:rPr>
@@ -5417,13 +5531,15 @@
                   <a:solidFill>
                     <a:srgbClr val="004D40"/>
                   </a:solidFill>
-                  <a:latin typeface="Courier New" pitchFamily="34" charset="0"/>
+                  <a:latin typeface="Consolas" panose="020B0609020204030204" pitchFamily="49" charset="0"/>
                   <a:ea typeface="Courier New" pitchFamily="34" charset="-122"/>
                   <a:cs typeface="Courier New" pitchFamily="34" charset="-120"/>
                 </a:rPr>
                 <a:t>lpmc</a:t>
               </a:r>
-              <a:endParaRPr lang="en-US" sz="1600" b="1" dirty="0"/>
+              <a:endParaRPr lang="en-US" sz="1600" b="1" dirty="0">
+                <a:latin typeface="Consolas" panose="020B0609020204030204" pitchFamily="49" charset="0"/>
+              </a:endParaRPr>
             </a:p>
           </p:txBody>
         </p:sp>
@@ -6050,7 +6166,7 @@
             </p:nvSpPr>
             <p:spPr>
               <a:xfrm>
-                <a:off x="7212384" y="3324985"/>
+                <a:off x="7212384" y="3489442"/>
                 <a:ext cx="1109007" cy="240174"/>
               </a:xfrm>
               <a:prstGeom prst="rect">
@@ -6106,7 +6222,7 @@
             </p:nvSpPr>
             <p:spPr>
               <a:xfrm>
-                <a:off x="7596297" y="3492007"/>
+                <a:off x="7596297" y="3656464"/>
                 <a:ext cx="368610" cy="228600"/>
               </a:xfrm>
               <a:prstGeom prst="rect">
@@ -6131,7 +6247,18 @@
                     <a:ea typeface="Calibri" pitchFamily="34" charset="-122"/>
                     <a:cs typeface="Calibri" pitchFamily="34" charset="-120"/>
                   </a:rPr>
-                  <a:t>:latest</a:t>
+                  <a:t>:</a:t>
+                </a:r>
+                <a:r>
+                  <a:rPr lang="en-US" sz="1100" dirty="0">
+                    <a:solidFill>
+                      <a:srgbClr val="777777"/>
+                    </a:solidFill>
+                    <a:latin typeface="Calibri" pitchFamily="34" charset="0"/>
+                    <a:ea typeface="Calibri" pitchFamily="34" charset="-122"/>
+                    <a:cs typeface="Calibri" pitchFamily="34" charset="-120"/>
+                  </a:rPr>
+                  <a:t>latest</a:t>
                 </a:r>
                 <a:endParaRPr lang="en-US" sz="900" dirty="0"/>
               </a:p>
@@ -6238,8 +6365,8 @@
           </p:blipFill>
           <p:spPr>
             <a:xfrm>
-              <a:off x="8394788" y="2271570"/>
-              <a:ext cx="368300" cy="368300"/>
+              <a:off x="7929077" y="1485993"/>
+              <a:ext cx="458917" cy="458917"/>
             </a:xfrm>
             <a:prstGeom prst="rect">
               <a:avLst/>
@@ -9308,13 +9435,15 @@
                 <a:solidFill>
                   <a:srgbClr val="004D40"/>
                 </a:solidFill>
-                <a:latin typeface="Courier New" pitchFamily="34" charset="0"/>
+                <a:latin typeface="Consolas" panose="020B0609020204030204" pitchFamily="49" charset="0"/>
                 <a:ea typeface="Courier New" pitchFamily="34" charset="-122"/>
                 <a:cs typeface="Courier New" pitchFamily="34" charset="-120"/>
               </a:rPr>
               <a:t>/predict</a:t>
             </a:r>
-            <a:endParaRPr lang="en-US" sz="1200" b="1" dirty="0"/>
+            <a:endParaRPr lang="en-US" sz="1200" b="1" dirty="0">
+              <a:latin typeface="Consolas" panose="020B0609020204030204" pitchFamily="49" charset="0"/>
+            </a:endParaRPr>
           </a:p>
         </p:txBody>
       </p:sp>
@@ -9986,7 +10115,7 @@
 </file>
 
 <file path=ppt/slides/slide2.xml><?xml version="1.0" encoding="utf-8"?>
-<p:sld xmlns:a="http://schemas.openxmlformats.org/drawingml/2006/main" xmlns:r="http://schemas.openxmlformats.org/officeDocument/2006/relationships" xmlns:p="http://schemas.openxmlformats.org/presentationml/2006/main">
+<p:sld xmlns:a="http://schemas.openxmlformats.org/drawingml/2006/main" xmlns:r="http://schemas.openxmlformats.org/officeDocument/2006/relationships" xmlns:p="http://schemas.openxmlformats.org/presentationml/2006/main" show="0">
   <p:cSld>
     <p:spTree>
       <p:nvGrpSpPr>
@@ -11900,7 +12029,7 @@
                         <a:solidFill>
                           <a:srgbClr val="004D40"/>
                         </a:solidFill>
-                        <a:latin typeface="Courier New" pitchFamily="34" charset="0"/>
+                        <a:latin typeface="Consolas" panose="020B0609020204030204" pitchFamily="49" charset="0"/>
                         <a:ea typeface="Courier New" pitchFamily="34" charset="-122"/>
                         <a:cs typeface="Courier New" pitchFamily="34" charset="-120"/>
                       </a:rPr>
@@ -11911,7 +12040,7 @@
                         <a:solidFill>
                           <a:srgbClr val="004D40"/>
                         </a:solidFill>
-                        <a:latin typeface="Courier New" pitchFamily="34" charset="0"/>
+                        <a:latin typeface="Consolas" panose="020B0609020204030204" pitchFamily="49" charset="0"/>
                         <a:ea typeface="Courier New" pitchFamily="34" charset="-122"/>
                         <a:cs typeface="Courier New" pitchFamily="34" charset="-120"/>
                       </a:rPr>
@@ -11922,7 +12051,7 @@
                         <a:solidFill>
                           <a:srgbClr val="004D40"/>
                         </a:solidFill>
-                        <a:latin typeface="Courier New" pitchFamily="34" charset="0"/>
+                        <a:latin typeface="Consolas" panose="020B0609020204030204" pitchFamily="49" charset="0"/>
                         <a:ea typeface="Courier New" pitchFamily="34" charset="-122"/>
                         <a:cs typeface="Courier New" pitchFamily="34" charset="-120"/>
                       </a:rPr>
@@ -11933,7 +12062,7 @@
                         <a:solidFill>
                           <a:srgbClr val="004D40"/>
                         </a:solidFill>
-                        <a:latin typeface="Courier New" pitchFamily="34" charset="0"/>
+                        <a:latin typeface="Consolas" panose="020B0609020204030204" pitchFamily="49" charset="0"/>
                         <a:ea typeface="Courier New" pitchFamily="34" charset="-122"/>
                         <a:cs typeface="Courier New" pitchFamily="34" charset="-120"/>
                       </a:rPr>
@@ -11944,13 +12073,15 @@
                         <a:solidFill>
                           <a:srgbClr val="004D40"/>
                         </a:solidFill>
-                        <a:latin typeface="Courier New" pitchFamily="34" charset="0"/>
+                        <a:latin typeface="Consolas" panose="020B0609020204030204" pitchFamily="49" charset="0"/>
                         <a:ea typeface="Courier New" pitchFamily="34" charset="-122"/>
                         <a:cs typeface="Courier New" pitchFamily="34" charset="-120"/>
                       </a:rPr>
                       <a:t>/predict</a:t>
                     </a:r>
-                    <a:endParaRPr lang="en-US" sz="1600" b="1" dirty="0"/>
+                    <a:endParaRPr lang="en-US" sz="1600" b="1" dirty="0">
+                      <a:latin typeface="Consolas" panose="020B0609020204030204" pitchFamily="49" charset="0"/>
+                    </a:endParaRPr>
                   </a:p>
                 </p:txBody>
               </p:sp>
@@ -11997,7 +12128,7 @@
                       <a:solidFill>
                         <a:srgbClr val="004D40"/>
                       </a:solidFill>
-                      <a:latin typeface="Courier New" pitchFamily="34" charset="0"/>
+                      <a:latin typeface="Consolas" panose="020B0609020204030204" pitchFamily="49" charset="0"/>
                       <a:ea typeface="Courier New" pitchFamily="34" charset="-122"/>
                       <a:cs typeface="Courier New" pitchFamily="34" charset="-120"/>
                     </a:rPr>
@@ -12008,7 +12139,7 @@
                       <a:solidFill>
                         <a:srgbClr val="004D40"/>
                       </a:solidFill>
-                      <a:latin typeface="Courier New" pitchFamily="34" charset="0"/>
+                      <a:latin typeface="Consolas" panose="020B0609020204030204" pitchFamily="49" charset="0"/>
                       <a:ea typeface="Courier New" pitchFamily="34" charset="-122"/>
                       <a:cs typeface="Courier New" pitchFamily="34" charset="-120"/>
                     </a:rPr>
@@ -12019,7 +12150,7 @@
                       <a:solidFill>
                         <a:srgbClr val="004D40"/>
                       </a:solidFill>
-                      <a:latin typeface="Courier New" pitchFamily="34" charset="0"/>
+                      <a:latin typeface="Consolas" panose="020B0609020204030204" pitchFamily="49" charset="0"/>
                       <a:ea typeface="Courier New" pitchFamily="34" charset="-122"/>
                       <a:cs typeface="Courier New" pitchFamily="34" charset="-120"/>
                     </a:rPr>
@@ -12030,7 +12161,7 @@
                       <a:solidFill>
                         <a:srgbClr val="004D40"/>
                       </a:solidFill>
-                      <a:latin typeface="Courier New" pitchFamily="34" charset="0"/>
+                      <a:latin typeface="Consolas" panose="020B0609020204030204" pitchFamily="49" charset="0"/>
                       <a:ea typeface="Courier New" pitchFamily="34" charset="-122"/>
                       <a:cs typeface="Courier New" pitchFamily="34" charset="-120"/>
                     </a:rPr>
@@ -12041,13 +12172,15 @@
                       <a:solidFill>
                         <a:srgbClr val="004D40"/>
                       </a:solidFill>
-                      <a:latin typeface="Courier New" pitchFamily="34" charset="0"/>
+                      <a:latin typeface="Consolas" panose="020B0609020204030204" pitchFamily="49" charset="0"/>
                       <a:ea typeface="Courier New" pitchFamily="34" charset="-122"/>
                       <a:cs typeface="Courier New" pitchFamily="34" charset="-120"/>
                     </a:rPr>
                     <a:t>/compare</a:t>
                   </a:r>
-                  <a:endParaRPr lang="en-US" sz="1600" b="1" dirty="0"/>
+                  <a:endParaRPr lang="en-US" sz="1600" b="1" dirty="0">
+                    <a:latin typeface="Consolas" panose="020B0609020204030204" pitchFamily="49" charset="0"/>
+                  </a:endParaRPr>
                 </a:p>
               </p:txBody>
             </p:sp>
@@ -12329,7 +12462,7 @@
         </p:nvSpPr>
         <p:spPr>
           <a:xfrm>
-            <a:off x="4874990" y="1609324"/>
+            <a:off x="4938825" y="1601346"/>
             <a:ext cx="1730691" cy="307777"/>
           </a:xfrm>
           <a:prstGeom prst="rect">
@@ -12346,13 +12479,15 @@
             <a:pPr algn="ctr"/>
             <a:r>
               <a:rPr lang="en-US" sz="1400" b="1" dirty="0" err="1">
-                <a:latin typeface="Courier New" pitchFamily="34" charset="0"/>
+                <a:latin typeface="Consolas" panose="020B0609020204030204" pitchFamily="49" charset="0"/>
                 <a:ea typeface="Courier New" pitchFamily="34" charset="-122"/>
                 <a:cs typeface="Courier New" pitchFamily="34" charset="-120"/>
               </a:rPr>
               <a:t>asyncio.gather</a:t>
             </a:r>
-            <a:endParaRPr lang="en-US" sz="1400" b="1" dirty="0"/>
+            <a:endParaRPr lang="en-US" sz="1400" b="1" dirty="0">
+              <a:latin typeface="Consolas" panose="020B0609020204030204" pitchFamily="49" charset="0"/>
+            </a:endParaRPr>
           </a:p>
         </p:txBody>
       </p:sp>
@@ -12710,7 +12845,7 @@
                   <a:solidFill>
                     <a:srgbClr val="777777"/>
                   </a:solidFill>
-                  <a:latin typeface="Courier New" pitchFamily="34" charset="0"/>
+                  <a:latin typeface="Consolas" panose="020B0609020204030204" pitchFamily="49" charset="0"/>
                   <a:ea typeface="Courier New" pitchFamily="34" charset="-122"/>
                   <a:cs typeface="Courier New" pitchFamily="34" charset="-120"/>
                 </a:rPr>
@@ -12721,7 +12856,7 @@
                   <a:solidFill>
                     <a:srgbClr val="777777"/>
                   </a:solidFill>
-                  <a:latin typeface="Courier New" pitchFamily="34" charset="0"/>
+                  <a:latin typeface="Consolas" panose="020B0609020204030204" pitchFamily="49" charset="0"/>
                   <a:ea typeface="Courier New" pitchFamily="34" charset="-122"/>
                   <a:cs typeface="Courier New" pitchFamily="34" charset="-120"/>
                 </a:rPr>
@@ -12731,7 +12866,7 @@
                   <a:solidFill>
                     <a:srgbClr val="777777"/>
                   </a:solidFill>
-                  <a:latin typeface="Courier New" pitchFamily="34" charset="0"/>
+                  <a:latin typeface="Consolas" panose="020B0609020204030204" pitchFamily="49" charset="0"/>
                   <a:ea typeface="Courier New" pitchFamily="34" charset="-122"/>
                   <a:cs typeface="Courier New" pitchFamily="34" charset="-120"/>
                 </a:rPr>
@@ -12741,6 +12876,7 @@
                 <a:solidFill>
                   <a:srgbClr val="777777"/>
                 </a:solidFill>
+                <a:latin typeface="Consolas" panose="020B0609020204030204" pitchFamily="49" charset="0"/>
               </a:endParaRPr>
             </a:p>
           </p:txBody>
@@ -12916,7 +13052,7 @@
                   <a:solidFill>
                     <a:srgbClr val="777777"/>
                   </a:solidFill>
-                  <a:latin typeface="Courier New" pitchFamily="34" charset="0"/>
+                  <a:latin typeface="Consolas" panose="020B0609020204030204" pitchFamily="49" charset="0"/>
                   <a:ea typeface="Courier New" pitchFamily="34" charset="-122"/>
                   <a:cs typeface="Courier New" pitchFamily="34" charset="-120"/>
                 </a:rPr>
@@ -12927,7 +13063,7 @@
                   <a:solidFill>
                     <a:srgbClr val="777777"/>
                   </a:solidFill>
-                  <a:latin typeface="Courier New" pitchFamily="34" charset="0"/>
+                  <a:latin typeface="Consolas" panose="020B0609020204030204" pitchFamily="49" charset="0"/>
                   <a:ea typeface="Courier New" pitchFamily="34" charset="-122"/>
                   <a:cs typeface="Courier New" pitchFamily="34" charset="-120"/>
                 </a:rPr>
@@ -12937,7 +13073,7 @@
                   <a:solidFill>
                     <a:srgbClr val="777777"/>
                   </a:solidFill>
-                  <a:latin typeface="Courier New" pitchFamily="34" charset="0"/>
+                  <a:latin typeface="Consolas" panose="020B0609020204030204" pitchFamily="49" charset="0"/>
                   <a:ea typeface="Courier New" pitchFamily="34" charset="-122"/>
                   <a:cs typeface="Courier New" pitchFamily="34" charset="-120"/>
                 </a:rPr>
@@ -12950,7 +13086,7 @@
                   <a:solidFill>
                     <a:srgbClr val="777777"/>
                   </a:solidFill>
-                  <a:latin typeface="Courier New" pitchFamily="34" charset="0"/>
+                  <a:latin typeface="Consolas" panose="020B0609020204030204" pitchFamily="49" charset="0"/>
                   <a:cs typeface="Courier New" pitchFamily="34" charset="-120"/>
                 </a:rPr>
                 <a:t>license</a:t>
@@ -12962,7 +13098,7 @@
                   <a:solidFill>
                     <a:srgbClr val="777777"/>
                   </a:solidFill>
-                  <a:latin typeface="Courier New" pitchFamily="34" charset="0"/>
+                  <a:latin typeface="Consolas" panose="020B0609020204030204" pitchFamily="49" charset="0"/>
                   <a:cs typeface="Courier New" pitchFamily="34" charset="-120"/>
                 </a:rPr>
                 <a:t>purpose</a:t>
@@ -12974,7 +13110,7 @@
                   <a:solidFill>
                     <a:srgbClr val="777777"/>
                   </a:solidFill>
-                  <a:latin typeface="Courier New" pitchFamily="34" charset="0"/>
+                  <a:latin typeface="Consolas" panose="020B0609020204030204" pitchFamily="49" charset="0"/>
                   <a:cs typeface="Courier New" pitchFamily="34" charset="-120"/>
                 </a:rPr>
                 <a:t>…</a:t>
@@ -13121,7 +13257,7 @@
                   <a:solidFill>
                     <a:srgbClr val="777777"/>
                   </a:solidFill>
-                  <a:latin typeface="Courier New" pitchFamily="34" charset="0"/>
+                  <a:latin typeface="Consolas" panose="020B0609020204030204" pitchFamily="49" charset="0"/>
                   <a:ea typeface="Courier New" pitchFamily="34" charset="-122"/>
                   <a:cs typeface="Courier New" pitchFamily="34" charset="-120"/>
                 </a:rPr>
@@ -13132,7 +13268,7 @@
                   <a:solidFill>
                     <a:srgbClr val="777777"/>
                   </a:solidFill>
-                  <a:latin typeface="Courier New" pitchFamily="34" charset="0"/>
+                  <a:latin typeface="Consolas" panose="020B0609020204030204" pitchFamily="49" charset="0"/>
                   <a:ea typeface="Courier New" pitchFamily="34" charset="-122"/>
                   <a:cs typeface="Courier New" pitchFamily="34" charset="-120"/>
                 </a:rPr>
@@ -13142,7 +13278,7 @@
                   <a:solidFill>
                     <a:srgbClr val="777777"/>
                   </a:solidFill>
-                  <a:latin typeface="Courier New" pitchFamily="34" charset="0"/>
+                  <a:latin typeface="Consolas" panose="020B0609020204030204" pitchFamily="49" charset="0"/>
                   <a:ea typeface="Courier New" pitchFamily="34" charset="-122"/>
                   <a:cs typeface="Courier New" pitchFamily="34" charset="-120"/>
                 </a:rPr>
@@ -13152,6 +13288,7 @@
                 <a:solidFill>
                   <a:srgbClr val="777777"/>
                 </a:solidFill>
+                <a:latin typeface="Consolas" panose="020B0609020204030204" pitchFamily="49" charset="0"/>
               </a:endParaRPr>
             </a:p>
           </p:txBody>
@@ -13577,13 +13714,15 @@
             <a:pPr algn="ctr"/>
             <a:r>
               <a:rPr lang="en-US" sz="1400" b="1" dirty="0">
-                <a:latin typeface="Courier New" pitchFamily="34" charset="0"/>
+                <a:latin typeface="Consolas" panose="020B0609020204030204" pitchFamily="49" charset="0"/>
                 <a:ea typeface="Courier New" pitchFamily="34" charset="-122"/>
                 <a:cs typeface="Courier New" pitchFamily="34" charset="-120"/>
               </a:rPr>
               <a:t>lpmc_inference.py</a:t>
             </a:r>
-            <a:endParaRPr lang="en-US" sz="1400" b="1" dirty="0"/>
+            <a:endParaRPr lang="en-US" sz="1400" b="1" dirty="0">
+              <a:latin typeface="Consolas" panose="020B0609020204030204" pitchFamily="49" charset="0"/>
+            </a:endParaRPr>
           </a:p>
         </p:txBody>
       </p:sp>
@@ -13625,13 +13764,15 @@
           <a:p>
             <a:r>
               <a:rPr lang="en-US" sz="1200" b="1" dirty="0" err="1">
-                <a:latin typeface="Courier New" pitchFamily="34" charset="0"/>
+                <a:latin typeface="Consolas" panose="020B0609020204030204" pitchFamily="49" charset="0"/>
                 <a:ea typeface="Calibri" panose="020F0502020204030204" pitchFamily="34" charset="0"/>
                 <a:cs typeface="Courier New" pitchFamily="34" charset="-120"/>
               </a:rPr>
               <a:t>build_route_features</a:t>
             </a:r>
-            <a:endParaRPr lang="en-US" sz="1200" b="1" dirty="0"/>
+            <a:endParaRPr lang="en-US" sz="1200" b="1" dirty="0">
+              <a:latin typeface="Consolas" panose="020B0609020204030204" pitchFamily="49" charset="0"/>
+            </a:endParaRPr>
           </a:p>
         </p:txBody>
       </p:sp>
@@ -13669,7 +13810,7 @@
                     <a:lumMod val="50000"/>
                   </a:schemeClr>
                 </a:solidFill>
-                <a:latin typeface="Courier New" panose="02070309020205020404" pitchFamily="49" charset="0"/>
+                <a:latin typeface="Consolas" panose="020B0609020204030204" pitchFamily="49" charset="0"/>
                 <a:ea typeface="Calibri" pitchFamily="34" charset="-122"/>
                 <a:cs typeface="Courier New" panose="02070309020205020404" pitchFamily="49" charset="0"/>
               </a:rPr>
@@ -13684,7 +13825,7 @@
                     <a:lumMod val="50000"/>
                   </a:schemeClr>
                 </a:solidFill>
-                <a:latin typeface="Courier New" panose="02070309020205020404" pitchFamily="49" charset="0"/>
+                <a:latin typeface="Consolas" panose="020B0609020204030204" pitchFamily="49" charset="0"/>
                 <a:ea typeface="Calibri" pitchFamily="34" charset="-122"/>
                 <a:cs typeface="Courier New" panose="02070309020205020404" pitchFamily="49" charset="0"/>
               </a:rPr>
@@ -13696,7 +13837,7 @@
                   <a:lumMod val="50000"/>
                 </a:schemeClr>
               </a:solidFill>
-              <a:latin typeface="Courier New" panose="02070309020205020404" pitchFamily="49" charset="0"/>
+              <a:latin typeface="Consolas" panose="020B0609020204030204" pitchFamily="49" charset="0"/>
               <a:ea typeface="Calibri" pitchFamily="34" charset="-122"/>
               <a:cs typeface="Courier New" panose="02070309020205020404" pitchFamily="49" charset="0"/>
             </a:endParaRPr>
@@ -13709,7 +13850,7 @@
                     <a:lumMod val="50000"/>
                   </a:schemeClr>
                 </a:solidFill>
-                <a:latin typeface="Courier New" panose="02070309020205020404" pitchFamily="49" charset="0"/>
+                <a:latin typeface="Consolas" panose="020B0609020204030204" pitchFamily="49" charset="0"/>
                 <a:ea typeface="Calibri" pitchFamily="34" charset="-122"/>
                 <a:cs typeface="Courier New" panose="02070309020205020404" pitchFamily="49" charset="0"/>
               </a:rPr>
@@ -13721,7 +13862,7 @@
                   <a:lumMod val="50000"/>
                 </a:schemeClr>
               </a:solidFill>
-              <a:latin typeface="Courier New" panose="02070309020205020404" pitchFamily="49" charset="0"/>
+              <a:latin typeface="Consolas" panose="020B0609020204030204" pitchFamily="49" charset="0"/>
               <a:ea typeface="Calibri" pitchFamily="34" charset="-122"/>
               <a:cs typeface="Courier New" panose="02070309020205020404" pitchFamily="49" charset="0"/>
             </a:endParaRPr>
@@ -13734,7 +13875,7 @@
                     <a:lumMod val="50000"/>
                   </a:schemeClr>
                 </a:solidFill>
-                <a:latin typeface="Courier New" panose="02070309020205020404" pitchFamily="49" charset="0"/>
+                <a:latin typeface="Consolas" panose="020B0609020204030204" pitchFamily="49" charset="0"/>
                 <a:ea typeface="Calibri" pitchFamily="34" charset="-122"/>
                 <a:cs typeface="Courier New" panose="02070309020205020404" pitchFamily="49" charset="0"/>
               </a:rPr>
@@ -13746,7 +13887,7 @@
                   <a:lumMod val="50000"/>
                 </a:schemeClr>
               </a:solidFill>
-              <a:latin typeface="Courier New" panose="02070309020205020404" pitchFamily="49" charset="0"/>
+              <a:latin typeface="Consolas" panose="020B0609020204030204" pitchFamily="49" charset="0"/>
               <a:ea typeface="Calibri" pitchFamily="34" charset="-122"/>
               <a:cs typeface="Courier New" panose="02070309020205020404" pitchFamily="49" charset="0"/>
             </a:endParaRPr>
@@ -13759,7 +13900,7 @@
                     <a:lumMod val="50000"/>
                   </a:schemeClr>
                 </a:solidFill>
-                <a:latin typeface="Courier New" panose="02070309020205020404" pitchFamily="49" charset="0"/>
+                <a:latin typeface="Consolas" panose="020B0609020204030204" pitchFamily="49" charset="0"/>
                 <a:ea typeface="Calibri" pitchFamily="34" charset="-122"/>
                 <a:cs typeface="Courier New" panose="02070309020205020404" pitchFamily="49" charset="0"/>
               </a:rPr>
@@ -13807,7 +13948,7 @@
                     <a:lumMod val="50000"/>
                   </a:schemeClr>
                 </a:solidFill>
-                <a:latin typeface="Courier New" panose="02070309020205020404" pitchFamily="49" charset="0"/>
+                <a:latin typeface="Consolas" panose="020B0609020204030204" pitchFamily="49" charset="0"/>
                 <a:ea typeface="Calibri" pitchFamily="34" charset="-122"/>
                 <a:cs typeface="Courier New" panose="02070309020205020404" pitchFamily="49" charset="0"/>
               </a:rPr>
@@ -13819,7 +13960,7 @@
                   <a:lumMod val="50000"/>
                 </a:schemeClr>
               </a:solidFill>
-              <a:latin typeface="Courier New" panose="02070309020205020404" pitchFamily="49" charset="0"/>
+              <a:latin typeface="Consolas" panose="020B0609020204030204" pitchFamily="49" charset="0"/>
               <a:ea typeface="Calibri" pitchFamily="34" charset="-122"/>
               <a:cs typeface="Courier New" panose="02070309020205020404" pitchFamily="49" charset="0"/>
             </a:endParaRPr>
@@ -13836,7 +13977,7 @@
                     <a:lumMod val="50000"/>
                   </a:schemeClr>
                 </a:solidFill>
-                <a:latin typeface="Courier New" panose="02070309020205020404" pitchFamily="49" charset="0"/>
+                <a:latin typeface="Consolas" panose="020B0609020204030204" pitchFamily="49" charset="0"/>
                 <a:ea typeface="Calibri" pitchFamily="34" charset="-122"/>
                 <a:cs typeface="Courier New" panose="02070309020205020404" pitchFamily="49" charset="0"/>
               </a:rPr>
@@ -13848,7 +13989,7 @@
                   <a:lumMod val="50000"/>
                 </a:schemeClr>
               </a:solidFill>
-              <a:latin typeface="Courier New" panose="02070309020205020404" pitchFamily="49" charset="0"/>
+              <a:latin typeface="Consolas" panose="020B0609020204030204" pitchFamily="49" charset="0"/>
               <a:ea typeface="Calibri" pitchFamily="34" charset="-122"/>
               <a:cs typeface="Courier New" panose="02070309020205020404" pitchFamily="49" charset="0"/>
             </a:endParaRPr>
@@ -13865,7 +14006,7 @@
                     <a:lumMod val="50000"/>
                   </a:schemeClr>
                 </a:solidFill>
-                <a:latin typeface="Courier New" panose="02070309020205020404" pitchFamily="49" charset="0"/>
+                <a:latin typeface="Consolas" panose="020B0609020204030204" pitchFamily="49" charset="0"/>
                 <a:ea typeface="Calibri" pitchFamily="34" charset="-122"/>
                 <a:cs typeface="Courier New" panose="02070309020205020404" pitchFamily="49" charset="0"/>
               </a:rPr>
@@ -13877,7 +14018,7 @@
                   <a:lumMod val="50000"/>
                 </a:schemeClr>
               </a:solidFill>
-              <a:latin typeface="Courier New" panose="02070309020205020404" pitchFamily="49" charset="0"/>
+              <a:latin typeface="Consolas" panose="020B0609020204030204" pitchFamily="49" charset="0"/>
               <a:ea typeface="Calibri" pitchFamily="34" charset="-122"/>
               <a:cs typeface="Courier New" panose="02070309020205020404" pitchFamily="49" charset="0"/>
             </a:endParaRPr>
@@ -13894,7 +14035,7 @@
                     <a:lumMod val="50000"/>
                   </a:schemeClr>
                 </a:solidFill>
-                <a:latin typeface="Courier New" panose="02070309020205020404" pitchFamily="49" charset="0"/>
+                <a:latin typeface="Consolas" panose="020B0609020204030204" pitchFamily="49" charset="0"/>
                 <a:ea typeface="Calibri" pitchFamily="34" charset="-122"/>
                 <a:cs typeface="Courier New" panose="02070309020205020404" pitchFamily="49" charset="0"/>
               </a:rPr>
@@ -13906,7 +14047,7 @@
                   <a:lumMod val="50000"/>
                 </a:schemeClr>
               </a:solidFill>
-              <a:latin typeface="Courier New" panose="02070309020205020404" pitchFamily="49" charset="0"/>
+              <a:latin typeface="Consolas" panose="020B0609020204030204" pitchFamily="49" charset="0"/>
               <a:ea typeface="Calibri" pitchFamily="34" charset="-122"/>
               <a:cs typeface="Courier New" panose="02070309020205020404" pitchFamily="49" charset="0"/>
             </a:endParaRPr>
@@ -13923,7 +14064,7 @@
                     <a:lumMod val="50000"/>
                   </a:schemeClr>
                 </a:solidFill>
-                <a:latin typeface="Courier New" panose="02070309020205020404" pitchFamily="49" charset="0"/>
+                <a:latin typeface="Consolas" panose="020B0609020204030204" pitchFamily="49" charset="0"/>
                 <a:ea typeface="Calibri" pitchFamily="34" charset="-122"/>
                 <a:cs typeface="Courier New" panose="02070309020205020404" pitchFamily="49" charset="0"/>
               </a:rPr>
@@ -13935,7 +14076,7 @@
                   <a:lumMod val="50000"/>
                 </a:schemeClr>
               </a:solidFill>
-              <a:latin typeface="Courier New" panose="02070309020205020404" pitchFamily="49" charset="0"/>
+              <a:latin typeface="Consolas" panose="020B0609020204030204" pitchFamily="49" charset="0"/>
               <a:ea typeface="Calibri" pitchFamily="34" charset="-122"/>
               <a:cs typeface="Courier New" panose="02070309020205020404" pitchFamily="49" charset="0"/>
             </a:endParaRPr>
@@ -13952,7 +14093,7 @@
                     <a:lumMod val="50000"/>
                   </a:schemeClr>
                 </a:solidFill>
-                <a:latin typeface="Courier New" panose="02070309020205020404" pitchFamily="49" charset="0"/>
+                <a:latin typeface="Consolas" panose="020B0609020204030204" pitchFamily="49" charset="0"/>
                 <a:ea typeface="Calibri" pitchFamily="34" charset="-122"/>
                 <a:cs typeface="Courier New" panose="02070309020205020404" pitchFamily="49" charset="0"/>
               </a:rPr>
@@ -13964,7 +14105,7 @@
                   <a:lumMod val="50000"/>
                 </a:schemeClr>
               </a:solidFill>
-              <a:latin typeface="Courier New" panose="02070309020205020404" pitchFamily="49" charset="0"/>
+              <a:latin typeface="Consolas" panose="020B0609020204030204" pitchFamily="49" charset="0"/>
               <a:ea typeface="Calibri" pitchFamily="34" charset="-122"/>
               <a:cs typeface="Courier New" panose="02070309020205020404" pitchFamily="49" charset="0"/>
             </a:endParaRPr>
@@ -14009,13 +14150,15 @@
           <a:p>
             <a:r>
               <a:rPr lang="en-US" sz="1200" b="1" dirty="0" err="1">
-                <a:latin typeface="Courier New" pitchFamily="34" charset="0"/>
+                <a:latin typeface="Consolas" panose="020B0609020204030204" pitchFamily="49" charset="0"/>
                 <a:ea typeface="Calibri" panose="020F0502020204030204" pitchFamily="34" charset="0"/>
                 <a:cs typeface="Courier New" pitchFamily="34" charset="-120"/>
               </a:rPr>
               <a:t>build_feature_frame</a:t>
             </a:r>
-            <a:endParaRPr lang="en-US" sz="1200" b="1" dirty="0"/>
+            <a:endParaRPr lang="en-US" sz="1200" b="1" dirty="0">
+              <a:latin typeface="Consolas" panose="020B0609020204030204" pitchFamily="49" charset="0"/>
+            </a:endParaRPr>
           </a:p>
         </p:txBody>
       </p:sp>
@@ -14511,25 +14654,27 @@
               <a:pPr algn="ctr"/>
               <a:r>
                 <a:rPr lang="en-US" sz="1400" b="1" dirty="0" err="1">
-                  <a:latin typeface="Courier New" pitchFamily="34" charset="0"/>
+                  <a:latin typeface="Consolas" panose="020B0609020204030204" pitchFamily="49" charset="0"/>
                   <a:cs typeface="Courier New" pitchFamily="34" charset="-120"/>
                 </a:rPr>
                 <a:t>StandardScaler</a:t>
               </a:r>
               <a:br>
                 <a:rPr lang="en-US" sz="1400" b="1" dirty="0">
-                  <a:latin typeface="Courier New" pitchFamily="34" charset="0"/>
+                  <a:latin typeface="Consolas" panose="020B0609020204030204" pitchFamily="49" charset="0"/>
                   <a:cs typeface="Courier New" pitchFamily="34" charset="-120"/>
                 </a:rPr>
               </a:br>
               <a:r>
                 <a:rPr lang="en-US" sz="1400" b="1" dirty="0">
-                  <a:latin typeface="Courier New" pitchFamily="34" charset="0"/>
+                  <a:latin typeface="Consolas" panose="020B0609020204030204" pitchFamily="49" charset="0"/>
                   <a:cs typeface="Courier New" pitchFamily="34" charset="-120"/>
                 </a:rPr>
                 <a:t>.transform</a:t>
               </a:r>
-              <a:endParaRPr lang="en-US" sz="1400" b="1" dirty="0"/>
+              <a:endParaRPr lang="en-US" sz="1400" b="1" dirty="0">
+                <a:latin typeface="Consolas" panose="020B0609020204030204" pitchFamily="49" charset="0"/>
+              </a:endParaRPr>
             </a:p>
           </p:txBody>
         </p:sp>
@@ -15166,7 +15311,7 @@
                 <a:solidFill>
                   <a:srgbClr val="212121"/>
                 </a:solidFill>
-                <a:latin typeface="Courier New" panose="02070309020205020404" pitchFamily="49" charset="0"/>
+                <a:latin typeface="Consolas" panose="020B0609020204030204" pitchFamily="49" charset="0"/>
                 <a:ea typeface="Calibri" pitchFamily="34" charset="-122"/>
                 <a:cs typeface="Courier New" panose="02070309020205020404" pitchFamily="49" charset="0"/>
               </a:rPr>
@@ -15177,7 +15322,7 @@
                 <a:solidFill>
                   <a:srgbClr val="212121"/>
                 </a:solidFill>
-                <a:latin typeface="Courier New" panose="02070309020205020404" pitchFamily="49" charset="0"/>
+                <a:latin typeface="Consolas" panose="020B0609020204030204" pitchFamily="49" charset="0"/>
                 <a:ea typeface="Calibri" pitchFamily="34" charset="-122"/>
                 <a:cs typeface="Courier New" panose="02070309020205020404" pitchFamily="49" charset="0"/>
               </a:rPr>
@@ -15187,14 +15332,14 @@
                 <a:solidFill>
                   <a:srgbClr val="212121"/>
                 </a:solidFill>
-                <a:latin typeface="Courier New" panose="02070309020205020404" pitchFamily="49" charset="0"/>
+                <a:latin typeface="Consolas" panose="020B0609020204030204" pitchFamily="49" charset="0"/>
                 <a:ea typeface="Calibri" pitchFamily="34" charset="-122"/>
                 <a:cs typeface="Courier New" panose="02070309020205020404" pitchFamily="49" charset="0"/>
               </a:rPr>
               <a:t>Mode</a:t>
             </a:r>
             <a:endParaRPr lang="en-US" sz="1600" dirty="0">
-              <a:latin typeface="Courier New" panose="02070309020205020404" pitchFamily="49" charset="0"/>
+              <a:latin typeface="Consolas" panose="020B0609020204030204" pitchFamily="49" charset="0"/>
               <a:cs typeface="Courier New" panose="02070309020205020404" pitchFamily="49" charset="0"/>
             </a:endParaRPr>
           </a:p>
@@ -15265,14 +15410,14 @@
                 <a:solidFill>
                   <a:srgbClr val="212121"/>
                 </a:solidFill>
-                <a:latin typeface="Courier New" panose="02070309020205020404" pitchFamily="49" charset="0"/>
+                <a:latin typeface="Consolas" panose="020B0609020204030204" pitchFamily="49" charset="0"/>
                 <a:ea typeface="Calibri" pitchFamily="34" charset="-122"/>
                 <a:cs typeface="Courier New" panose="02070309020205020404" pitchFamily="49" charset="0"/>
               </a:rPr>
               <a:t>Confidence</a:t>
             </a:r>
             <a:endParaRPr lang="en-US" sz="1600" dirty="0">
-              <a:latin typeface="Courier New" panose="02070309020205020404" pitchFamily="49" charset="0"/>
+              <a:latin typeface="Consolas" panose="020B0609020204030204" pitchFamily="49" charset="0"/>
               <a:cs typeface="Courier New" panose="02070309020205020404" pitchFamily="49" charset="0"/>
             </a:endParaRPr>
           </a:p>
@@ -15556,7 +15701,13 @@
   <p:cSld>
     <p:spTree>
       <p:nvGrpSpPr>
-        <p:cNvPr id="1" name=""/>
+        <p:cNvPr id="1" name="">
+          <a:extLst>
+            <a:ext uri="{FF2B5EF4-FFF2-40B4-BE49-F238E27FC236}">
+              <a16:creationId xmlns:a16="http://schemas.microsoft.com/office/drawing/2014/main" id="{073DF7C0-68CC-FEA5-F8C7-F359929905B9}"/>
+            </a:ext>
+          </a:extLst>
+        </p:cNvPr>
         <p:cNvGrpSpPr/>
         <p:nvPr/>
       </p:nvGrpSpPr>
@@ -15570,221 +15721,2532 @@
       </p:grpSpPr>
       <p:sp>
         <p:nvSpPr>
-          <p:cNvPr id="2" name="TextBox 1"/>
-          <p:cNvSpPr txBox="1"/>
+          <p:cNvPr id="2" name="Text 0">
+            <a:extLst>
+              <a:ext uri="{FF2B5EF4-FFF2-40B4-BE49-F238E27FC236}">
+                <a16:creationId xmlns:a16="http://schemas.microsoft.com/office/drawing/2014/main" id="{ADBD8BE6-4C5E-4418-FB11-FAA21E967249}"/>
+              </a:ext>
+            </a:extLst>
+          </p:cNvPr>
+          <p:cNvSpPr/>
           <p:nvPr/>
         </p:nvSpPr>
         <p:spPr>
           <a:xfrm>
-            <a:off x="4179632" y="30480"/>
-            <a:ext cx="3832075" cy="352854"/>
+            <a:off x="228600" y="-42516"/>
+            <a:ext cx="11704320" cy="274320"/>
           </a:xfrm>
           <a:prstGeom prst="rect">
             <a:avLst/>
           </a:prstGeom>
           <a:noFill/>
+          <a:ln/>
         </p:spPr>
         <p:txBody>
-          <a:bodyPr wrap="none">
-            <a:spAutoFit/>
-          </a:bodyPr>
+          <a:bodyPr wrap="square" lIns="0" tIns="0" rIns="0" bIns="0" rtlCol="0" anchor="ctr"/>
           <a:lstStyle/>
           <a:p>
-            <a:pPr algn="ctr"/>
+            <a:pPr marL="0" indent="0" algn="l">
+              <a:buNone/>
+            </a:pPr>
             <a:r>
-              <a:rPr sz="1693" b="1">
+              <a:rPr lang="en-US" sz="1900" b="1" dirty="0">
                 <a:solidFill>
-                  <a:srgbClr val="000000"/>
+                  <a:srgbClr val="212121"/>
                 </a:solidFill>
-                <a:latin typeface="Calibri"/>
+                <a:latin typeface="Calibri" pitchFamily="34" charset="0"/>
+                <a:ea typeface="Calibri" pitchFamily="34" charset="-122"/>
+                <a:cs typeface="Calibri" pitchFamily="34" charset="-120"/>
               </a:rPr>
-              <a:t>Pipeline de Inferencia de Elección Modal</a:t>
+              <a:t>Pipeline de </a:t>
             </a:r>
+            <a:r>
+              <a:rPr lang="en-US" sz="1900" b="1" dirty="0" err="1">
+                <a:solidFill>
+                  <a:srgbClr val="212121"/>
+                </a:solidFill>
+                <a:latin typeface="Calibri" pitchFamily="34" charset="0"/>
+                <a:ea typeface="Calibri" pitchFamily="34" charset="-122"/>
+                <a:cs typeface="Calibri" pitchFamily="34" charset="-120"/>
+              </a:rPr>
+              <a:t>preprocesado</a:t>
+            </a:r>
+            <a:r>
+              <a:rPr lang="en-US" sz="1900" b="1" dirty="0">
+                <a:solidFill>
+                  <a:srgbClr val="212121"/>
+                </a:solidFill>
+                <a:latin typeface="Calibri" pitchFamily="34" charset="0"/>
+                <a:ea typeface="Calibri" pitchFamily="34" charset="-122"/>
+                <a:cs typeface="Calibri" pitchFamily="34" charset="-120"/>
+              </a:rPr>
+              <a:t> OSRM </a:t>
+            </a:r>
+            <a:r>
+              <a:rPr lang="en-US" sz="1900" b="1" dirty="0" err="1">
+                <a:solidFill>
+                  <a:srgbClr val="212121"/>
+                </a:solidFill>
+                <a:latin typeface="Calibri" pitchFamily="34" charset="0"/>
+                <a:ea typeface="Calibri" pitchFamily="34" charset="-122"/>
+                <a:cs typeface="Calibri" pitchFamily="34" charset="-120"/>
+              </a:rPr>
+              <a:t>por</a:t>
+            </a:r>
+            <a:r>
+              <a:rPr lang="en-US" sz="1900" b="1" dirty="0">
+                <a:solidFill>
+                  <a:srgbClr val="212121"/>
+                </a:solidFill>
+                <a:latin typeface="Calibri" pitchFamily="34" charset="0"/>
+                <a:ea typeface="Calibri" pitchFamily="34" charset="-122"/>
+                <a:cs typeface="Calibri" pitchFamily="34" charset="-120"/>
+              </a:rPr>
+              <a:t> </a:t>
+            </a:r>
+            <a:r>
+              <a:rPr lang="en-US" sz="1900" b="1" dirty="0" err="1">
+                <a:solidFill>
+                  <a:srgbClr val="212121"/>
+                </a:solidFill>
+                <a:latin typeface="Calibri" pitchFamily="34" charset="0"/>
+                <a:ea typeface="Calibri" pitchFamily="34" charset="-122"/>
+                <a:cs typeface="Calibri" pitchFamily="34" charset="-120"/>
+              </a:rPr>
+              <a:t>perfil</a:t>
+            </a:r>
+            <a:r>
+              <a:rPr lang="en-US" sz="1900" b="1" dirty="0">
+                <a:solidFill>
+                  <a:srgbClr val="212121"/>
+                </a:solidFill>
+                <a:latin typeface="Calibri" pitchFamily="34" charset="0"/>
+                <a:ea typeface="Calibri" pitchFamily="34" charset="-122"/>
+                <a:cs typeface="Calibri" pitchFamily="34" charset="-120"/>
+              </a:rPr>
+              <a:t> de </a:t>
+            </a:r>
+            <a:r>
+              <a:rPr lang="en-US" sz="1900" b="1" dirty="0" err="1">
+                <a:solidFill>
+                  <a:srgbClr val="212121"/>
+                </a:solidFill>
+                <a:latin typeface="Calibri" pitchFamily="34" charset="0"/>
+                <a:ea typeface="Calibri" pitchFamily="34" charset="-122"/>
+                <a:cs typeface="Calibri" pitchFamily="34" charset="-120"/>
+              </a:rPr>
+              <a:t>transporte</a:t>
+            </a:r>
+            <a:endParaRPr lang="en-US" sz="1900" dirty="0"/>
           </a:p>
         </p:txBody>
       </p:sp>
       <p:sp>
         <p:nvSpPr>
-          <p:cNvPr id="3" name="Rounded Rectangle 2"/>
+          <p:cNvPr id="3" name="Shape 1">
+            <a:extLst>
+              <a:ext uri="{FF2B5EF4-FFF2-40B4-BE49-F238E27FC236}">
+                <a16:creationId xmlns:a16="http://schemas.microsoft.com/office/drawing/2014/main" id="{F371D37F-CE64-A524-32B8-3D5A429920E6}"/>
+              </a:ext>
+            </a:extLst>
+          </p:cNvPr>
           <p:cNvSpPr/>
           <p:nvPr/>
         </p:nvSpPr>
         <p:spPr>
           <a:xfrm>
-            <a:off x="3619237" y="312412"/>
-            <a:ext cx="4952866" cy="541005"/>
+            <a:off x="228600" y="224236"/>
+            <a:ext cx="11704320" cy="18288"/>
           </a:xfrm>
-          <a:prstGeom prst="roundRect">
+          <a:prstGeom prst="rect">
+            <a:avLst/>
+          </a:prstGeom>
+          <a:solidFill>
+            <a:srgbClr val="DDDDDD"/>
+          </a:solidFill>
+          <a:ln w="12700">
+            <a:solidFill>
+              <a:srgbClr val="DDDDDD"/>
+            </a:solidFill>
+            <a:prstDash val="solid"/>
+          </a:ln>
+        </p:spPr>
+        <p:txBody>
+          <a:bodyPr/>
+          <a:lstStyle/>
+          <a:p>
+            <a:endParaRPr lang="es-ES"/>
+          </a:p>
+        </p:txBody>
+      </p:sp>
+      <p:sp>
+        <p:nvSpPr>
+          <p:cNvPr id="78" name="Text 64">
+            <a:extLst>
+              <a:ext uri="{FF2B5EF4-FFF2-40B4-BE49-F238E27FC236}">
+                <a16:creationId xmlns:a16="http://schemas.microsoft.com/office/drawing/2014/main" id="{BB461C96-0101-4946-13EC-497BEBB0EA5F}"/>
+              </a:ext>
+            </a:extLst>
+          </p:cNvPr>
+          <p:cNvSpPr/>
+          <p:nvPr/>
+        </p:nvSpPr>
+        <p:spPr>
+          <a:xfrm>
+            <a:off x="6766561" y="3047543"/>
+            <a:ext cx="502920" cy="256032"/>
+          </a:xfrm>
+          <a:prstGeom prst="rect">
+            <a:avLst/>
+          </a:prstGeom>
+          <a:noFill/>
+          <a:ln/>
+        </p:spPr>
+        <p:txBody>
+          <a:bodyPr wrap="square" lIns="0" tIns="0" rIns="0" bIns="0" rtlCol="0" anchor="ctr"/>
+          <a:lstStyle/>
+          <a:p>
+            <a:pPr marL="0" indent="0" algn="ctr">
+              <a:buNone/>
+            </a:pPr>
+            <a:r>
+              <a:rPr lang="en-US" sz="800" b="1" dirty="0">
+                <a:solidFill>
+                  <a:srgbClr val="FFFFFF"/>
+                </a:solidFill>
+                <a:latin typeface="Calibri" pitchFamily="34" charset="0"/>
+                <a:ea typeface="Calibri" pitchFamily="34" charset="-122"/>
+                <a:cs typeface="Calibri" pitchFamily="34" charset="-120"/>
+              </a:rPr>
+              <a:t>OTP</a:t>
+            </a:r>
+            <a:endParaRPr lang="en-US" sz="800" dirty="0"/>
+          </a:p>
+        </p:txBody>
+      </p:sp>
+      <p:grpSp>
+        <p:nvGrpSpPr>
+          <p:cNvPr id="1284" name="Grupo 1283">
+            <a:extLst>
+              <a:ext uri="{FF2B5EF4-FFF2-40B4-BE49-F238E27FC236}">
+                <a16:creationId xmlns:a16="http://schemas.microsoft.com/office/drawing/2014/main" id="{6129169E-4217-7DC2-5A23-A497B04127B8}"/>
+              </a:ext>
+            </a:extLst>
+          </p:cNvPr>
+          <p:cNvGrpSpPr/>
+          <p:nvPr/>
+        </p:nvGrpSpPr>
+        <p:grpSpPr>
+          <a:xfrm>
+            <a:off x="1461833" y="280794"/>
+            <a:ext cx="10685307" cy="6503000"/>
+            <a:chOff x="6675121" y="878829"/>
+            <a:chExt cx="9736974" cy="6354397"/>
+          </a:xfrm>
+        </p:grpSpPr>
+        <p:grpSp>
+          <p:nvGrpSpPr>
+            <p:cNvPr id="1149" name="Grupo 1148">
+              <a:extLst>
+                <a:ext uri="{FF2B5EF4-FFF2-40B4-BE49-F238E27FC236}">
+                  <a16:creationId xmlns:a16="http://schemas.microsoft.com/office/drawing/2014/main" id="{41A5E85D-F189-B162-9033-1F153793FE42}"/>
+                </a:ext>
+              </a:extLst>
+            </p:cNvPr>
+            <p:cNvGrpSpPr/>
+            <p:nvPr/>
+          </p:nvGrpSpPr>
+          <p:grpSpPr>
+            <a:xfrm>
+              <a:off x="6675121" y="878829"/>
+              <a:ext cx="9736974" cy="6354397"/>
+              <a:chOff x="6303331" y="2478589"/>
+              <a:chExt cx="9736974" cy="6354397"/>
+            </a:xfrm>
+          </p:grpSpPr>
+          <p:sp>
+            <p:nvSpPr>
+              <p:cNvPr id="1136" name="Shape 62">
+                <a:extLst>
+                  <a:ext uri="{FF2B5EF4-FFF2-40B4-BE49-F238E27FC236}">
+                    <a16:creationId xmlns:a16="http://schemas.microsoft.com/office/drawing/2014/main" id="{AFED5CA2-C06F-755C-7AC6-31DB7696E16B}"/>
+                  </a:ext>
+                </a:extLst>
+              </p:cNvPr>
+              <p:cNvSpPr/>
+              <p:nvPr/>
+            </p:nvSpPr>
+            <p:spPr>
+              <a:xfrm>
+                <a:off x="6303331" y="2478589"/>
+                <a:ext cx="9736974" cy="6354397"/>
+              </a:xfrm>
+              <a:prstGeom prst="roundRect">
+                <a:avLst>
+                  <a:gd name="adj" fmla="val 4000"/>
+                </a:avLst>
+              </a:prstGeom>
+              <a:solidFill>
+                <a:srgbClr val="F0F8FE"/>
+              </a:solidFill>
+              <a:ln w="31750">
+                <a:solidFill>
+                  <a:srgbClr val="0097F4"/>
+                </a:solidFill>
+                <a:prstDash val="solid"/>
+              </a:ln>
+              <a:effectLst>
+                <a:outerShdw blurRad="76200" dist="25400" dir="8100000" algn="bl" rotWithShape="0">
+                  <a:srgbClr val="000000">
+                    <a:alpha val="10000"/>
+                  </a:srgbClr>
+                </a:outerShdw>
+              </a:effectLst>
+            </p:spPr>
+            <p:txBody>
+              <a:bodyPr/>
+              <a:lstStyle/>
+              <a:p>
+                <a:endParaRPr lang="es-ES" dirty="0"/>
+              </a:p>
+            </p:txBody>
+          </p:sp>
+          <p:sp>
+            <p:nvSpPr>
+              <p:cNvPr id="1140" name="Text 65">
+                <a:extLst>
+                  <a:ext uri="{FF2B5EF4-FFF2-40B4-BE49-F238E27FC236}">
+                    <a16:creationId xmlns:a16="http://schemas.microsoft.com/office/drawing/2014/main" id="{DBC9A2B9-DED1-E7F0-02F9-DB649E8B4F42}"/>
+                  </a:ext>
+                </a:extLst>
+              </p:cNvPr>
+              <p:cNvSpPr/>
+              <p:nvPr/>
+            </p:nvSpPr>
+            <p:spPr>
+              <a:xfrm>
+                <a:off x="6960659" y="2523266"/>
+                <a:ext cx="2624022" cy="461494"/>
+              </a:xfrm>
+              <a:prstGeom prst="rect">
+                <a:avLst/>
+              </a:prstGeom>
+              <a:noFill/>
+              <a:ln/>
+            </p:spPr>
+            <p:txBody>
+              <a:bodyPr wrap="square" lIns="0" tIns="0" rIns="0" bIns="0" rtlCol="0" anchor="ctr"/>
+              <a:lstStyle/>
+              <a:p>
+                <a:pPr marL="0" indent="0">
+                  <a:buNone/>
+                </a:pPr>
+                <a:r>
+                  <a:rPr lang="en-US" sz="2000" b="1" dirty="0" err="1">
+                    <a:solidFill>
+                      <a:srgbClr val="212121"/>
+                    </a:solidFill>
+                    <a:latin typeface="Calibri" pitchFamily="34" charset="0"/>
+                    <a:ea typeface="Calibri" pitchFamily="34" charset="-122"/>
+                    <a:cs typeface="Calibri" pitchFamily="34" charset="-120"/>
+                  </a:rPr>
+                  <a:t>osrm</a:t>
+                </a:r>
+                <a:r>
+                  <a:rPr lang="en-US" sz="2000" b="1" dirty="0">
+                    <a:solidFill>
+                      <a:srgbClr val="212121"/>
+                    </a:solidFill>
+                    <a:latin typeface="Calibri" pitchFamily="34" charset="0"/>
+                    <a:ea typeface="Calibri" pitchFamily="34" charset="-122"/>
+                    <a:cs typeface="Calibri" pitchFamily="34" charset="-120"/>
+                  </a:rPr>
+                  <a:t>/</a:t>
+                </a:r>
+                <a:r>
+                  <a:rPr lang="en-US" sz="2000" b="1" dirty="0" err="1">
+                    <a:solidFill>
+                      <a:srgbClr val="212121"/>
+                    </a:solidFill>
+                    <a:latin typeface="Calibri" pitchFamily="34" charset="0"/>
+                    <a:ea typeface="Calibri" pitchFamily="34" charset="-122"/>
+                    <a:cs typeface="Calibri" pitchFamily="34" charset="-120"/>
+                  </a:rPr>
+                  <a:t>osrm-backend</a:t>
+                </a:r>
+                <a:r>
+                  <a:rPr lang="en-US" sz="2000" dirty="0" err="1">
+                    <a:solidFill>
+                      <a:srgbClr val="212121"/>
+                    </a:solidFill>
+                    <a:latin typeface="Calibri" pitchFamily="34" charset="0"/>
+                    <a:ea typeface="Calibri" pitchFamily="34" charset="-122"/>
+                    <a:cs typeface="Calibri" pitchFamily="34" charset="-120"/>
+                  </a:rPr>
+                  <a:t>:latest</a:t>
+                </a:r>
+                <a:endParaRPr lang="en-US" sz="2000" dirty="0"/>
+              </a:p>
+            </p:txBody>
+          </p:sp>
+        </p:grpSp>
+        <p:pic>
+          <p:nvPicPr>
+            <p:cNvPr id="1229" name="Gráfico 1228">
+              <a:extLst>
+                <a:ext uri="{FF2B5EF4-FFF2-40B4-BE49-F238E27FC236}">
+                  <a16:creationId xmlns:a16="http://schemas.microsoft.com/office/drawing/2014/main" id="{E0B06812-9ED7-A9BF-C827-2C7F8EB70C3E}"/>
+                </a:ext>
+              </a:extLst>
+            </p:cNvPr>
+            <p:cNvPicPr>
+              <a:picLocks noChangeAspect="1"/>
+            </p:cNvPicPr>
+            <p:nvPr/>
+          </p:nvPicPr>
+          <p:blipFill>
+            <a:blip>
+              <a:extLst>
+                <a:ext uri="{96DAC541-7B7A-43D3-8B79-37D633B846F1}">
+                  <asvg:svgBlip xmlns:asvg="http://schemas.microsoft.com/office/drawing/2016/SVG/main" r:embed="rId3"/>
+                </a:ext>
+              </a:extLst>
+            </a:blip>
+            <a:stretch>
+              <a:fillRect/>
+            </a:stretch>
+          </p:blipFill>
+          <p:spPr>
+            <a:xfrm>
+              <a:off x="11060543" y="1000833"/>
+              <a:ext cx="966129" cy="325724"/>
+            </a:xfrm>
+            <a:prstGeom prst="rect">
+              <a:avLst/>
+            </a:prstGeom>
+          </p:spPr>
+        </p:pic>
+        <p:pic>
+          <p:nvPicPr>
+            <p:cNvPr id="1230" name="Gráfico 1229" descr="Dirigir dos pines por un camino con relleno sólido">
+              <a:extLst>
+                <a:ext uri="{FF2B5EF4-FFF2-40B4-BE49-F238E27FC236}">
+                  <a16:creationId xmlns:a16="http://schemas.microsoft.com/office/drawing/2014/main" id="{B63EEC19-036E-8375-19E6-2F23B5F84DAD}"/>
+                </a:ext>
+              </a:extLst>
+            </p:cNvPr>
+            <p:cNvPicPr>
+              <a:picLocks noChangeAspect="1"/>
+            </p:cNvPicPr>
+            <p:nvPr/>
+          </p:nvPicPr>
+          <p:blipFill>
+            <a:blip>
+              <a:extLst>
+                <a:ext uri="{96DAC541-7B7A-43D3-8B79-37D633B846F1}">
+                  <asvg:svgBlip xmlns:asvg="http://schemas.microsoft.com/office/drawing/2016/SVG/main" r:embed="rId4"/>
+                </a:ext>
+              </a:extLst>
+            </a:blip>
+            <a:stretch>
+              <a:fillRect/>
+            </a:stretch>
+          </p:blipFill>
+          <p:spPr>
+            <a:xfrm>
+              <a:off x="12100061" y="988493"/>
+              <a:ext cx="346808" cy="346808"/>
+            </a:xfrm>
+            <a:prstGeom prst="rect">
+              <a:avLst/>
+            </a:prstGeom>
+          </p:spPr>
+        </p:pic>
+      </p:grpSp>
+      <p:grpSp>
+        <p:nvGrpSpPr>
+          <p:cNvPr id="1316" name="Grupo 1315">
+            <a:extLst>
+              <a:ext uri="{FF2B5EF4-FFF2-40B4-BE49-F238E27FC236}">
+                <a16:creationId xmlns:a16="http://schemas.microsoft.com/office/drawing/2014/main" id="{14465698-E0CA-16E6-A9F8-98B336361474}"/>
+              </a:ext>
+            </a:extLst>
+          </p:cNvPr>
+          <p:cNvGrpSpPr/>
+          <p:nvPr/>
+        </p:nvGrpSpPr>
+        <p:grpSpPr>
+          <a:xfrm>
+            <a:off x="40713" y="1277219"/>
+            <a:ext cx="1173276" cy="1059714"/>
+            <a:chOff x="9639166" y="999274"/>
+            <a:chExt cx="728798" cy="658257"/>
+          </a:xfrm>
+        </p:grpSpPr>
+        <p:sp>
+          <p:nvSpPr>
+            <p:cNvPr id="1315" name="Shape 53">
+              <a:extLst>
+                <a:ext uri="{FF2B5EF4-FFF2-40B4-BE49-F238E27FC236}">
+                  <a16:creationId xmlns:a16="http://schemas.microsoft.com/office/drawing/2014/main" id="{FE1437E6-D5E6-5C80-A8D8-FC3C6B46F16E}"/>
+                </a:ext>
+              </a:extLst>
+            </p:cNvPr>
+            <p:cNvSpPr/>
+            <p:nvPr/>
+          </p:nvSpPr>
+          <p:spPr>
+            <a:xfrm>
+              <a:off x="9639166" y="999274"/>
+              <a:ext cx="728798" cy="658257"/>
+            </a:xfrm>
+            <a:prstGeom prst="roundRect">
+              <a:avLst>
+                <a:gd name="adj" fmla="val 7368"/>
+              </a:avLst>
+            </a:prstGeom>
+            <a:solidFill>
+              <a:srgbClr val="FFFFFF"/>
+            </a:solidFill>
+            <a:ln w="25400">
+              <a:solidFill>
+                <a:srgbClr val="88BFCC"/>
+              </a:solidFill>
+              <a:prstDash val="sysDot"/>
+            </a:ln>
+            <a:effectLst>
+              <a:outerShdw blurRad="76200" dist="25400" dir="8100000" algn="bl" rotWithShape="0">
+                <a:srgbClr val="000000">
+                  <a:alpha val="10000"/>
+                </a:srgbClr>
+              </a:outerShdw>
+            </a:effectLst>
+          </p:spPr>
+          <p:txBody>
+            <a:bodyPr/>
+            <a:lstStyle/>
+            <a:p>
+              <a:endParaRPr lang="es-ES" dirty="0"/>
+            </a:p>
+          </p:txBody>
+        </p:sp>
+        <p:pic>
+          <p:nvPicPr>
+            <p:cNvPr id="1310" name="Picture 28" descr="Geofabrik GmbH | CyberForum e.V.">
+              <a:extLst>
+                <a:ext uri="{FF2B5EF4-FFF2-40B4-BE49-F238E27FC236}">
+                  <a16:creationId xmlns:a16="http://schemas.microsoft.com/office/drawing/2014/main" id="{014DCE10-C95B-4690-F163-A384AD9A18CB}"/>
+                </a:ext>
+              </a:extLst>
+            </p:cNvPr>
+            <p:cNvPicPr>
+              <a:picLocks noChangeAspect="1" noChangeArrowheads="1"/>
+            </p:cNvPicPr>
+            <p:nvPr/>
+          </p:nvPicPr>
+          <p:blipFill>
+            <a:blip r:embed="rId5">
+              <a:extLst>
+                <a:ext uri="{28A0092B-C50C-407E-A947-70E740481C1C}">
+                  <a14:useLocalDpi xmlns:a14="http://schemas.microsoft.com/office/drawing/2010/main" val="0"/>
+                </a:ext>
+              </a:extLst>
+            </a:blip>
+            <a:srcRect/>
+            <a:stretch>
+              <a:fillRect/>
+            </a:stretch>
+          </p:blipFill>
+          <p:spPr bwMode="auto">
+            <a:xfrm>
+              <a:off x="9702427" y="1056651"/>
+              <a:ext cx="612353" cy="513145"/>
+            </a:xfrm>
+            <a:prstGeom prst="rect">
+              <a:avLst/>
+            </a:prstGeom>
+            <a:noFill/>
+            <a:extLst>
+              <a:ext uri="{909E8E84-426E-40DD-AFC4-6F175D3DCCD1}">
+                <a14:hiddenFill xmlns:a14="http://schemas.microsoft.com/office/drawing/2010/main">
+                  <a:solidFill>
+                    <a:srgbClr val="FFFFFF"/>
+                  </a:solidFill>
+                </a14:hiddenFill>
+              </a:ext>
+            </a:extLst>
+          </p:spPr>
+        </p:pic>
+      </p:grpSp>
+      <p:cxnSp>
+        <p:nvCxnSpPr>
+          <p:cNvPr id="1325" name="Conector: angular 1324">
+            <a:extLst>
+              <a:ext uri="{FF2B5EF4-FFF2-40B4-BE49-F238E27FC236}">
+                <a16:creationId xmlns:a16="http://schemas.microsoft.com/office/drawing/2014/main" id="{0A8699D0-BD79-15E4-EBE2-52E95EFE2E95}"/>
+              </a:ext>
+            </a:extLst>
+          </p:cNvPr>
+          <p:cNvCxnSpPr>
+            <a:cxnSpLocks/>
+            <a:stCxn id="1315" idx="2"/>
+            <a:endCxn id="1312" idx="0"/>
+          </p:cNvCxnSpPr>
+          <p:nvPr/>
+        </p:nvCxnSpPr>
+        <p:spPr>
+          <a:xfrm rot="16200000" flipH="1">
+            <a:off x="75448" y="2888835"/>
+            <a:ext cx="1103937" cy="131"/>
+          </a:xfrm>
+          <a:prstGeom prst="bentConnector3">
             <a:avLst>
-              <a:gd name="adj" fmla="val 16000"/>
+              <a:gd name="adj1" fmla="val 50000"/>
             </a:avLst>
           </a:prstGeom>
-          <a:solidFill>
-            <a:srgbClr val="EDFAFB"/>
-          </a:solidFill>
-          <a:ln w="31750">
-            <a:solidFill>
-              <a:srgbClr val="00BCD4"/>
-            </a:solidFill>
+          <a:ln>
+            <a:tailEnd type="triangle"/>
           </a:ln>
         </p:spPr>
         <p:style>
-          <a:lnRef idx="1">
+          <a:lnRef idx="2">
             <a:schemeClr val="accent1"/>
           </a:lnRef>
-          <a:fillRef idx="3">
+          <a:fillRef idx="0">
             <a:schemeClr val="accent1"/>
           </a:fillRef>
-          <a:effectRef idx="2">
+          <a:effectRef idx="1">
             <a:schemeClr val="accent1"/>
           </a:effectRef>
           <a:fontRef idx="minor">
-            <a:schemeClr val="lt1"/>
+            <a:schemeClr val="tx1"/>
           </a:fontRef>
         </p:style>
-        <p:txBody>
-          <a:bodyPr wrap="square" lIns="114297" tIns="30479" rIns="114297" bIns="30479" rtlCol="0" anchor="ctr"/>
-          <a:lstStyle/>
-          <a:p>
-            <a:pPr algn="ctr"/>
-            <a:r>
-              <a:rPr sz="1323" b="1" dirty="0">
+      </p:cxnSp>
+      <p:grpSp>
+        <p:nvGrpSpPr>
+          <p:cNvPr id="1346" name="Grupo 1345">
+            <a:extLst>
+              <a:ext uri="{FF2B5EF4-FFF2-40B4-BE49-F238E27FC236}">
+                <a16:creationId xmlns:a16="http://schemas.microsoft.com/office/drawing/2014/main" id="{DF77C21B-B50C-EFB5-F226-B2D973A6AC88}"/>
+              </a:ext>
+            </a:extLst>
+          </p:cNvPr>
+          <p:cNvGrpSpPr/>
+          <p:nvPr/>
+        </p:nvGrpSpPr>
+        <p:grpSpPr>
+          <a:xfrm>
+            <a:off x="27275" y="3436836"/>
+            <a:ext cx="1200413" cy="1202646"/>
+            <a:chOff x="9433312" y="971559"/>
+            <a:chExt cx="1343959" cy="1352154"/>
+          </a:xfrm>
+        </p:grpSpPr>
+        <p:grpSp>
+          <p:nvGrpSpPr>
+            <p:cNvPr id="1314" name="Grupo 1313">
+              <a:extLst>
+                <a:ext uri="{FF2B5EF4-FFF2-40B4-BE49-F238E27FC236}">
+                  <a16:creationId xmlns:a16="http://schemas.microsoft.com/office/drawing/2014/main" id="{E33962BC-954A-9AFD-F87A-0BBA244C76F9}"/>
+                </a:ext>
+              </a:extLst>
+            </p:cNvPr>
+            <p:cNvGrpSpPr/>
+            <p:nvPr/>
+          </p:nvGrpSpPr>
+          <p:grpSpPr>
+            <a:xfrm>
+              <a:off x="9433312" y="971559"/>
+              <a:ext cx="1343959" cy="1352154"/>
+              <a:chOff x="10100088" y="818689"/>
+              <a:chExt cx="1543376" cy="1513777"/>
+            </a:xfrm>
+          </p:grpSpPr>
+          <p:sp>
+            <p:nvSpPr>
+              <p:cNvPr id="1312" name="Shape 53">
+                <a:extLst>
+                  <a:ext uri="{FF2B5EF4-FFF2-40B4-BE49-F238E27FC236}">
+                    <a16:creationId xmlns:a16="http://schemas.microsoft.com/office/drawing/2014/main" id="{369EAF8C-17CB-622E-E4D3-D6CFD8B3BA9F}"/>
+                  </a:ext>
+                </a:extLst>
+              </p:cNvPr>
+              <p:cNvSpPr/>
+              <p:nvPr/>
+            </p:nvSpPr>
+            <p:spPr>
+              <a:xfrm>
+                <a:off x="10100088" y="823766"/>
+                <a:ext cx="1543376" cy="1508700"/>
+              </a:xfrm>
+              <a:prstGeom prst="roundRect">
+                <a:avLst>
+                  <a:gd name="adj" fmla="val 7368"/>
+                </a:avLst>
+              </a:prstGeom>
+              <a:solidFill>
+                <a:srgbClr val="FFFFFF"/>
+              </a:solidFill>
+              <a:ln w="25400">
                 <a:solidFill>
-                  <a:srgbClr val="000000"/>
+                  <a:srgbClr val="777777"/>
                 </a:solidFill>
-                <a:latin typeface="Calibri"/>
-              </a:rPr>
-              <a:t>POST   /</a:t>
-            </a:r>
-            <a:r>
-              <a:rPr sz="1323" b="1" dirty="0" err="1">
-                <a:solidFill>
-                  <a:srgbClr val="000000"/>
-                </a:solidFill>
-                <a:latin typeface="Calibri"/>
-              </a:rPr>
-              <a:t>api</a:t>
-            </a:r>
-            <a:r>
-              <a:rPr sz="1323" b="1" dirty="0">
-                <a:solidFill>
-                  <a:srgbClr val="000000"/>
-                </a:solidFill>
-                <a:latin typeface="Calibri"/>
-              </a:rPr>
-              <a:t>/</a:t>
-            </a:r>
-            <a:r>
-              <a:rPr sz="1323" b="1" dirty="0" err="1">
-                <a:solidFill>
-                  <a:srgbClr val="000000"/>
-                </a:solidFill>
-                <a:latin typeface="Calibri"/>
-              </a:rPr>
-              <a:t>lpmc</a:t>
-            </a:r>
-            <a:r>
-              <a:rPr sz="1323" b="1" dirty="0">
-                <a:solidFill>
-                  <a:srgbClr val="000000"/>
-                </a:solidFill>
-                <a:latin typeface="Calibri"/>
-              </a:rPr>
-              <a:t>/predict   |   /compare</a:t>
-            </a:r>
-          </a:p>
-          <a:p>
-            <a:pPr algn="ctr"/>
-            <a:r>
-              <a:rPr sz="1005" dirty="0" err="1">
-                <a:solidFill>
-                  <a:srgbClr val="444444"/>
-                </a:solidFill>
-                <a:latin typeface="Calibri"/>
-              </a:rPr>
-              <a:t>origen</a:t>
-            </a:r>
-            <a:r>
-              <a:rPr sz="1005" dirty="0">
-                <a:solidFill>
-                  <a:srgbClr val="444444"/>
-                </a:solidFill>
-                <a:latin typeface="Calibri"/>
-              </a:rPr>
-              <a:t>  ·  </a:t>
-            </a:r>
-            <a:r>
-              <a:rPr sz="1005" dirty="0" err="1">
-                <a:solidFill>
-                  <a:srgbClr val="444444"/>
-                </a:solidFill>
-                <a:latin typeface="Calibri"/>
-              </a:rPr>
-              <a:t>destino</a:t>
-            </a:r>
-            <a:r>
-              <a:rPr sz="1005" dirty="0">
-                <a:solidFill>
-                  <a:srgbClr val="444444"/>
-                </a:solidFill>
-                <a:latin typeface="Calibri"/>
-              </a:rPr>
-              <a:t>  ·  </a:t>
-            </a:r>
-            <a:r>
-              <a:rPr sz="1005" dirty="0" err="1">
-                <a:solidFill>
-                  <a:srgbClr val="444444"/>
-                </a:solidFill>
-                <a:latin typeface="Calibri"/>
-              </a:rPr>
-              <a:t>perfil</a:t>
-            </a:r>
-            <a:r>
-              <a:rPr sz="1005" dirty="0">
-                <a:solidFill>
-                  <a:srgbClr val="444444"/>
-                </a:solidFill>
-                <a:latin typeface="Calibri"/>
-              </a:rPr>
-              <a:t> </a:t>
-            </a:r>
-            <a:r>
-              <a:rPr sz="1005" dirty="0" err="1">
-                <a:solidFill>
-                  <a:srgbClr val="444444"/>
-                </a:solidFill>
-                <a:latin typeface="Calibri"/>
-              </a:rPr>
-              <a:t>sociodemográfico</a:t>
-            </a:r>
-            <a:endParaRPr sz="1005" dirty="0">
+                <a:prstDash val="solid"/>
+              </a:ln>
+              <a:effectLst>
+                <a:outerShdw blurRad="76200" dist="25400" dir="8100000" algn="bl" rotWithShape="0">
+                  <a:srgbClr val="000000">
+                    <a:alpha val="10000"/>
+                  </a:srgbClr>
+                </a:outerShdw>
+              </a:effectLst>
+            </p:spPr>
+            <p:txBody>
+              <a:bodyPr/>
+              <a:lstStyle/>
+              <a:p>
+                <a:endParaRPr lang="es-ES" dirty="0"/>
+              </a:p>
+            </p:txBody>
+          </p:sp>
+          <p:sp>
+            <p:nvSpPr>
+              <p:cNvPr id="1313" name="Text 54">
+                <a:extLst>
+                  <a:ext uri="{FF2B5EF4-FFF2-40B4-BE49-F238E27FC236}">
+                    <a16:creationId xmlns:a16="http://schemas.microsoft.com/office/drawing/2014/main" id="{4ACA02DD-ACA4-1A19-BA1C-BDC5CE61C893}"/>
+                  </a:ext>
+                </a:extLst>
+              </p:cNvPr>
+              <p:cNvSpPr/>
+              <p:nvPr/>
+            </p:nvSpPr>
+            <p:spPr>
+              <a:xfrm>
+                <a:off x="10137856" y="1835520"/>
+                <a:ext cx="1505607" cy="163438"/>
+              </a:xfrm>
+              <a:prstGeom prst="rect">
+                <a:avLst/>
+              </a:prstGeom>
+              <a:noFill/>
+              <a:ln/>
+            </p:spPr>
+            <p:txBody>
+              <a:bodyPr wrap="square" lIns="0" tIns="0" rIns="0" bIns="0" rtlCol="0" anchor="ctr"/>
+              <a:lstStyle/>
+              <a:p>
+                <a:pPr marL="0" indent="0" algn="ctr">
+                  <a:buNone/>
+                </a:pPr>
+                <a:r>
+                  <a:rPr lang="en-US" sz="900" b="1" dirty="0">
+                    <a:solidFill>
+                      <a:srgbClr val="212121"/>
+                    </a:solidFill>
+                    <a:latin typeface="Calibri" pitchFamily="34" charset="0"/>
+                    <a:ea typeface="Calibri" pitchFamily="34" charset="-122"/>
+                    <a:cs typeface="Calibri" pitchFamily="34" charset="-120"/>
+                  </a:rPr>
+                  <a:t>Castilla-La Mancha</a:t>
+                </a:r>
+                <a:endParaRPr lang="en-US" sz="900" dirty="0"/>
+              </a:p>
+            </p:txBody>
+          </p:sp>
+          <p:pic>
+            <p:nvPicPr>
+              <p:cNvPr id="1234" name="Imagen 1233">
+                <a:extLst>
+                  <a:ext uri="{FF2B5EF4-FFF2-40B4-BE49-F238E27FC236}">
+                    <a16:creationId xmlns:a16="http://schemas.microsoft.com/office/drawing/2014/main" id="{F1FE9A27-6F84-953A-9F72-051E84B014BD}"/>
+                  </a:ext>
+                </a:extLst>
+              </p:cNvPr>
+              <p:cNvPicPr>
+                <a:picLocks noChangeAspect="1"/>
+              </p:cNvPicPr>
+              <p:nvPr/>
+            </p:nvPicPr>
+            <p:blipFill>
+              <a:blip r:embed="rId6">
+                <a:extLst>
+                  <a:ext uri="{28A0092B-C50C-407E-A947-70E740481C1C}">
+                    <a14:useLocalDpi xmlns:a14="http://schemas.microsoft.com/office/drawing/2010/main" val="0"/>
+                  </a:ext>
+                </a:extLst>
+              </a:blip>
+              <a:stretch>
+                <a:fillRect/>
+              </a:stretch>
+            </p:blipFill>
+            <p:spPr>
+              <a:xfrm>
+                <a:off x="10107725" y="818689"/>
+                <a:ext cx="1445837" cy="481945"/>
+              </a:xfrm>
+              <a:prstGeom prst="rect">
+                <a:avLst/>
+              </a:prstGeom>
+            </p:spPr>
+          </p:pic>
+          <p:pic>
+            <p:nvPicPr>
+              <p:cNvPr id="1233" name="Picture 6">
+                <a:extLst>
+                  <a:ext uri="{FF2B5EF4-FFF2-40B4-BE49-F238E27FC236}">
+                    <a16:creationId xmlns:a16="http://schemas.microsoft.com/office/drawing/2014/main" id="{F337BB11-2871-AF23-964B-A5820E3BE661}"/>
+                  </a:ext>
+                </a:extLst>
+              </p:cNvPr>
+              <p:cNvPicPr>
+                <a:picLocks noChangeAspect="1" noChangeArrowheads="1"/>
+              </p:cNvPicPr>
+              <p:nvPr/>
+            </p:nvPicPr>
+            <p:blipFill>
+              <a:blip r:embed="rId7">
+                <a:extLst>
+                  <a:ext uri="{28A0092B-C50C-407E-A947-70E740481C1C}">
+                    <a14:useLocalDpi xmlns:a14="http://schemas.microsoft.com/office/drawing/2010/main" val="0"/>
+                  </a:ext>
+                </a:extLst>
+              </a:blip>
+              <a:srcRect/>
+              <a:stretch>
+                <a:fillRect/>
+              </a:stretch>
+            </p:blipFill>
+            <p:spPr bwMode="auto">
+              <a:xfrm>
+                <a:off x="10498228" y="1146551"/>
+                <a:ext cx="746760" cy="705689"/>
+              </a:xfrm>
+              <a:prstGeom prst="rect">
+                <a:avLst/>
+              </a:prstGeom>
+              <a:noFill/>
+              <a:extLst>
+                <a:ext uri="{909E8E84-426E-40DD-AFC4-6F175D3DCCD1}">
+                  <a14:hiddenFill xmlns:a14="http://schemas.microsoft.com/office/drawing/2010/main">
+                    <a:solidFill>
+                      <a:srgbClr val="FFFFFF"/>
+                    </a:solidFill>
+                  </a14:hiddenFill>
+                </a:ext>
+              </a:extLst>
+            </p:spPr>
+          </p:pic>
+        </p:grpSp>
+        <p:grpSp>
+          <p:nvGrpSpPr>
+            <p:cNvPr id="1344" name="Grupo 1343">
+              <a:extLst>
+                <a:ext uri="{FF2B5EF4-FFF2-40B4-BE49-F238E27FC236}">
+                  <a16:creationId xmlns:a16="http://schemas.microsoft.com/office/drawing/2014/main" id="{3D4EE8B1-DDDE-5B8D-93D7-B07F0901431F}"/>
+                </a:ext>
+              </a:extLst>
+            </p:cNvPr>
+            <p:cNvGrpSpPr/>
+            <p:nvPr/>
+          </p:nvGrpSpPr>
+          <p:grpSpPr>
+            <a:xfrm>
+              <a:off x="9615701" y="2055174"/>
+              <a:ext cx="960384" cy="236153"/>
+              <a:chOff x="9613758" y="2101008"/>
+              <a:chExt cx="960384" cy="236153"/>
+            </a:xfrm>
+          </p:grpSpPr>
+          <p:sp>
+            <p:nvSpPr>
+              <p:cNvPr id="1329" name="Text 66">
+                <a:extLst>
+                  <a:ext uri="{FF2B5EF4-FFF2-40B4-BE49-F238E27FC236}">
+                    <a16:creationId xmlns:a16="http://schemas.microsoft.com/office/drawing/2014/main" id="{AD4A8C24-E9D4-5944-4BDF-1B8ADC439E34}"/>
+                  </a:ext>
+                </a:extLst>
+              </p:cNvPr>
+              <p:cNvSpPr/>
+              <p:nvPr/>
+            </p:nvSpPr>
+            <p:spPr>
+              <a:xfrm>
+                <a:off x="9796903" y="2108561"/>
+                <a:ext cx="777239" cy="228600"/>
+              </a:xfrm>
+              <a:prstGeom prst="rect">
+                <a:avLst/>
+              </a:prstGeom>
+              <a:noFill/>
+              <a:ln/>
+            </p:spPr>
+            <p:txBody>
+              <a:bodyPr wrap="square" lIns="0" tIns="0" rIns="0" bIns="0" rtlCol="0" anchor="ctr"/>
+              <a:lstStyle/>
+              <a:p>
+                <a:pPr marL="0" indent="0" algn="ctr">
+                  <a:buNone/>
+                </a:pPr>
+                <a:r>
+                  <a:rPr lang="en-US" sz="900" dirty="0" err="1">
+                    <a:solidFill>
+                      <a:srgbClr val="777777"/>
+                    </a:solidFill>
+                    <a:latin typeface="Calibri" pitchFamily="34" charset="0"/>
+                    <a:ea typeface="Calibri" pitchFamily="34" charset="-122"/>
+                    <a:cs typeface="Calibri" pitchFamily="34" charset="-120"/>
+                  </a:rPr>
+                  <a:t>CLM.osm.pbf</a:t>
+                </a:r>
+                <a:endParaRPr lang="en-US" sz="900" dirty="0">
+                  <a:solidFill>
+                    <a:srgbClr val="777777"/>
+                  </a:solidFill>
+                  <a:latin typeface="Calibri" pitchFamily="34" charset="0"/>
+                  <a:ea typeface="Calibri" pitchFamily="34" charset="-122"/>
+                  <a:cs typeface="Calibri" pitchFamily="34" charset="-120"/>
+                </a:endParaRPr>
+              </a:p>
+              <a:p>
+                <a:pPr marL="0" indent="0" algn="ctr">
+                  <a:buNone/>
+                </a:pPr>
+                <a:r>
+                  <a:rPr lang="en-US" sz="900" dirty="0">
+                    <a:solidFill>
+                      <a:srgbClr val="777777"/>
+                    </a:solidFill>
+                    <a:latin typeface="Calibri" pitchFamily="34" charset="0"/>
+                    <a:ea typeface="Calibri" pitchFamily="34" charset="-122"/>
+                    <a:cs typeface="Calibri" pitchFamily="34" charset="-120"/>
+                  </a:rPr>
+                  <a:t>98 MB</a:t>
+                </a:r>
+                <a:endParaRPr lang="en-US" sz="900" dirty="0">
+                  <a:solidFill>
+                    <a:srgbClr val="777777"/>
+                  </a:solidFill>
+                </a:endParaRPr>
+              </a:p>
+            </p:txBody>
+          </p:sp>
+          <p:pic>
+            <p:nvPicPr>
+              <p:cNvPr id="1343" name="Gráfico 1342">
+                <a:extLst>
+                  <a:ext uri="{FF2B5EF4-FFF2-40B4-BE49-F238E27FC236}">
+                    <a16:creationId xmlns:a16="http://schemas.microsoft.com/office/drawing/2014/main" id="{FF8C1B9E-23E5-618E-9FD2-730948846DDD}"/>
+                  </a:ext>
+                </a:extLst>
+              </p:cNvPr>
+              <p:cNvPicPr>
+                <a:picLocks noChangeAspect="1"/>
+              </p:cNvPicPr>
+              <p:nvPr/>
+            </p:nvPicPr>
+            <p:blipFill>
+              <a:blip>
+                <a:extLst>
+                  <a:ext uri="{96DAC541-7B7A-43D3-8B79-37D633B846F1}">
+                    <asvg:svgBlip xmlns:asvg="http://schemas.microsoft.com/office/drawing/2016/SVG/main" r:embed="rId8"/>
+                  </a:ext>
+                </a:extLst>
+              </a:blip>
+              <a:stretch>
+                <a:fillRect/>
+              </a:stretch>
+            </p:blipFill>
+            <p:spPr>
+              <a:xfrm>
+                <a:off x="9613758" y="2101008"/>
+                <a:ext cx="219608" cy="219608"/>
+              </a:xfrm>
+              <a:prstGeom prst="rect">
+                <a:avLst/>
+              </a:prstGeom>
+            </p:spPr>
+          </p:pic>
+        </p:grpSp>
+      </p:grpSp>
+      <p:grpSp>
+        <p:nvGrpSpPr>
+          <p:cNvPr id="1395" name="Grupo 1394">
+            <a:extLst>
+              <a:ext uri="{FF2B5EF4-FFF2-40B4-BE49-F238E27FC236}">
+                <a16:creationId xmlns:a16="http://schemas.microsoft.com/office/drawing/2014/main" id="{2E240329-A3D1-8F0E-B04C-2084E23B5945}"/>
+              </a:ext>
+            </a:extLst>
+          </p:cNvPr>
+          <p:cNvGrpSpPr/>
+          <p:nvPr/>
+        </p:nvGrpSpPr>
+        <p:grpSpPr>
+          <a:xfrm>
+            <a:off x="4176302" y="1006581"/>
+            <a:ext cx="1999112" cy="4367989"/>
+            <a:chOff x="4880174" y="907899"/>
+            <a:chExt cx="1999112" cy="4367989"/>
+          </a:xfrm>
+        </p:grpSpPr>
+        <p:sp>
+          <p:nvSpPr>
+            <p:cNvPr id="22" name="Shape 53">
+              <a:extLst>
+                <a:ext uri="{FF2B5EF4-FFF2-40B4-BE49-F238E27FC236}">
+                  <a16:creationId xmlns:a16="http://schemas.microsoft.com/office/drawing/2014/main" id="{7659DF07-DBD2-5741-C967-CC29DFFE4A9F}"/>
+                </a:ext>
+              </a:extLst>
+            </p:cNvPr>
+            <p:cNvSpPr/>
+            <p:nvPr/>
+          </p:nvSpPr>
+          <p:spPr>
+            <a:xfrm>
+              <a:off x="4880174" y="907899"/>
+              <a:ext cx="1999112" cy="4367989"/>
+            </a:xfrm>
+            <a:prstGeom prst="roundRect">
+              <a:avLst>
+                <a:gd name="adj" fmla="val 7368"/>
+              </a:avLst>
+            </a:prstGeom>
+            <a:solidFill>
+              <a:srgbClr val="FFFFFF"/>
+            </a:solidFill>
+            <a:ln w="25400">
               <a:solidFill>
-                <a:srgbClr val="444444"/>
+                <a:srgbClr val="562C7A"/>
               </a:solidFill>
-              <a:latin typeface="Calibri"/>
-            </a:endParaRPr>
-          </a:p>
-        </p:txBody>
-      </p:sp>
+              <a:prstDash val="solid"/>
+            </a:ln>
+            <a:effectLst>
+              <a:outerShdw blurRad="76200" dist="25400" dir="8100000" algn="bl" rotWithShape="0">
+                <a:srgbClr val="000000">
+                  <a:alpha val="10000"/>
+                </a:srgbClr>
+              </a:outerShdw>
+            </a:effectLst>
+          </p:spPr>
+          <p:txBody>
+            <a:bodyPr anchor="t"/>
+            <a:lstStyle/>
+            <a:p>
+              <a:pPr algn="ctr"/>
+              <a:r>
+                <a:rPr lang="es-ES" sz="1600" b="1" dirty="0" err="1">
+                  <a:highlight>
+                    <a:srgbClr val="FFFDE7"/>
+                  </a:highlight>
+                  <a:latin typeface="Consolas" panose="020B0609020204030204" pitchFamily="49" charset="0"/>
+                  <a:cs typeface="Courier New" panose="02070309020205020404" pitchFamily="49" charset="0"/>
+                </a:rPr>
+                <a:t>osrm-partition</a:t>
+              </a:r>
+              <a:endParaRPr lang="es-ES" sz="1600" b="1" dirty="0">
+                <a:highlight>
+                  <a:srgbClr val="FFFDE7"/>
+                </a:highlight>
+                <a:latin typeface="Consolas" panose="020B0609020204030204" pitchFamily="49" charset="0"/>
+                <a:cs typeface="Courier New" panose="02070309020205020404" pitchFamily="49" charset="0"/>
+              </a:endParaRPr>
+            </a:p>
+            <a:p>
+              <a:endParaRPr lang="es-ES" sz="1100" dirty="0">
+                <a:latin typeface="Consolas" panose="020B0609020204030204" pitchFamily="49" charset="0"/>
+                <a:cs typeface="Courier New" panose="02070309020205020404" pitchFamily="49" charset="0"/>
+              </a:endParaRPr>
+            </a:p>
+            <a:p>
+              <a:r>
+                <a:rPr lang="es-ES" sz="1600" b="1" dirty="0">
+                  <a:latin typeface="Calibri" panose="020F0502020204030204" pitchFamily="34" charset="0"/>
+                  <a:ea typeface="Calibri" panose="020F0502020204030204" pitchFamily="34" charset="0"/>
+                  <a:cs typeface="Calibri" panose="020F0502020204030204" pitchFamily="34" charset="0"/>
+                </a:rPr>
+                <a:t>Divide el grafo en celdas jerárquicas</a:t>
+              </a:r>
+            </a:p>
+            <a:p>
+              <a:r>
+                <a:rPr lang="es-ES" sz="1600" dirty="0">
+                  <a:latin typeface="Calibri" panose="020F0502020204030204" pitchFamily="34" charset="0"/>
+                  <a:ea typeface="Calibri" panose="020F0502020204030204" pitchFamily="34" charset="0"/>
+                  <a:cs typeface="Calibri" panose="020F0502020204030204" pitchFamily="34" charset="0"/>
+                </a:rPr>
+                <a:t>Multi-Level Dijkstra (MLD)</a:t>
+              </a:r>
+            </a:p>
+          </p:txBody>
+        </p:sp>
+        <p:sp>
+          <p:nvSpPr>
+            <p:cNvPr id="37" name="Shape 53">
+              <a:extLst>
+                <a:ext uri="{FF2B5EF4-FFF2-40B4-BE49-F238E27FC236}">
+                  <a16:creationId xmlns:a16="http://schemas.microsoft.com/office/drawing/2014/main" id="{B7742DB8-5F33-90F5-67CC-666512672F47}"/>
+                </a:ext>
+              </a:extLst>
+            </p:cNvPr>
+            <p:cNvSpPr/>
+            <p:nvPr/>
+          </p:nvSpPr>
+          <p:spPr>
+            <a:xfrm>
+              <a:off x="5016160" y="2981723"/>
+              <a:ext cx="1758535" cy="365656"/>
+            </a:xfrm>
+            <a:prstGeom prst="roundRect">
+              <a:avLst>
+                <a:gd name="adj" fmla="val 7368"/>
+              </a:avLst>
+            </a:prstGeom>
+            <a:solidFill>
+              <a:srgbClr val="FFFFFF"/>
+            </a:solidFill>
+            <a:ln w="25400">
+              <a:solidFill>
+                <a:srgbClr val="573FF6"/>
+              </a:solidFill>
+              <a:prstDash val="solid"/>
+            </a:ln>
+            <a:effectLst>
+              <a:outerShdw blurRad="76200" dist="25400" dir="8100000" algn="bl" rotWithShape="0">
+                <a:srgbClr val="000000">
+                  <a:alpha val="10000"/>
+                </a:srgbClr>
+              </a:outerShdw>
+            </a:effectLst>
+          </p:spPr>
+          <p:txBody>
+            <a:bodyPr/>
+            <a:lstStyle/>
+            <a:p>
+              <a:pPr algn="ctr"/>
+              <a:r>
+                <a:rPr lang="es-ES" sz="1600" b="1" dirty="0" err="1">
+                  <a:latin typeface="Consolas" panose="020B0609020204030204" pitchFamily="49" charset="0"/>
+                  <a:cs typeface="Courier New" panose="02070309020205020404" pitchFamily="49" charset="0"/>
+                </a:rPr>
+                <a:t>osrm-partition</a:t>
+              </a:r>
+              <a:endParaRPr lang="es-ES" sz="1600" dirty="0">
+                <a:latin typeface="Consolas" panose="020B0609020204030204" pitchFamily="49" charset="0"/>
+                <a:cs typeface="Courier New" panose="02070309020205020404" pitchFamily="49" charset="0"/>
+              </a:endParaRPr>
+            </a:p>
+          </p:txBody>
+        </p:sp>
+        <p:sp>
+          <p:nvSpPr>
+            <p:cNvPr id="38" name="Shape 53">
+              <a:extLst>
+                <a:ext uri="{FF2B5EF4-FFF2-40B4-BE49-F238E27FC236}">
+                  <a16:creationId xmlns:a16="http://schemas.microsoft.com/office/drawing/2014/main" id="{16674733-DBB3-462D-EBB7-07E667C81E22}"/>
+                </a:ext>
+              </a:extLst>
+            </p:cNvPr>
+            <p:cNvSpPr/>
+            <p:nvPr/>
+          </p:nvSpPr>
+          <p:spPr>
+            <a:xfrm>
+              <a:off x="5016160" y="3759642"/>
+              <a:ext cx="1758535" cy="365656"/>
+            </a:xfrm>
+            <a:prstGeom prst="roundRect">
+              <a:avLst>
+                <a:gd name="adj" fmla="val 7368"/>
+              </a:avLst>
+            </a:prstGeom>
+            <a:solidFill>
+              <a:srgbClr val="FFFFFF"/>
+            </a:solidFill>
+            <a:ln w="25400">
+              <a:solidFill>
+                <a:srgbClr val="26AA57"/>
+              </a:solidFill>
+              <a:prstDash val="solid"/>
+            </a:ln>
+            <a:effectLst>
+              <a:outerShdw blurRad="76200" dist="25400" dir="8100000" algn="bl" rotWithShape="0">
+                <a:srgbClr val="000000">
+                  <a:alpha val="10000"/>
+                </a:srgbClr>
+              </a:outerShdw>
+            </a:effectLst>
+          </p:spPr>
+          <p:txBody>
+            <a:bodyPr/>
+            <a:lstStyle/>
+            <a:p>
+              <a:pPr algn="ctr"/>
+              <a:r>
+                <a:rPr lang="es-ES" sz="1600" b="1" dirty="0" err="1">
+                  <a:latin typeface="Consolas" panose="020B0609020204030204" pitchFamily="49" charset="0"/>
+                  <a:cs typeface="Courier New" panose="02070309020205020404" pitchFamily="49" charset="0"/>
+                </a:rPr>
+                <a:t>osrm-partition</a:t>
+              </a:r>
+              <a:endParaRPr lang="es-ES" sz="1600" dirty="0">
+                <a:latin typeface="Consolas" panose="020B0609020204030204" pitchFamily="49" charset="0"/>
+                <a:cs typeface="Courier New" panose="02070309020205020404" pitchFamily="49" charset="0"/>
+              </a:endParaRPr>
+            </a:p>
+          </p:txBody>
+        </p:sp>
+        <p:sp>
+          <p:nvSpPr>
+            <p:cNvPr id="39" name="Shape 53">
+              <a:extLst>
+                <a:ext uri="{FF2B5EF4-FFF2-40B4-BE49-F238E27FC236}">
+                  <a16:creationId xmlns:a16="http://schemas.microsoft.com/office/drawing/2014/main" id="{E35CFF8D-8B6D-9D16-E4FA-7F49F823F2F3}"/>
+                </a:ext>
+              </a:extLst>
+            </p:cNvPr>
+            <p:cNvSpPr/>
+            <p:nvPr/>
+          </p:nvSpPr>
+          <p:spPr>
+            <a:xfrm>
+              <a:off x="5020586" y="4527711"/>
+              <a:ext cx="1758535" cy="365656"/>
+            </a:xfrm>
+            <a:prstGeom prst="roundRect">
+              <a:avLst>
+                <a:gd name="adj" fmla="val 7368"/>
+              </a:avLst>
+            </a:prstGeom>
+            <a:solidFill>
+              <a:srgbClr val="FFFFFF"/>
+            </a:solidFill>
+            <a:ln w="25400">
+              <a:solidFill>
+                <a:srgbClr val="424242"/>
+              </a:solidFill>
+              <a:prstDash val="solid"/>
+            </a:ln>
+            <a:effectLst>
+              <a:outerShdw blurRad="76200" dist="25400" dir="8100000" algn="bl" rotWithShape="0">
+                <a:srgbClr val="000000">
+                  <a:alpha val="10000"/>
+                </a:srgbClr>
+              </a:outerShdw>
+            </a:effectLst>
+          </p:spPr>
+          <p:txBody>
+            <a:bodyPr/>
+            <a:lstStyle/>
+            <a:p>
+              <a:pPr algn="ctr"/>
+              <a:r>
+                <a:rPr lang="es-ES" sz="1600" b="1" dirty="0" err="1">
+                  <a:latin typeface="Consolas" panose="020B0609020204030204" pitchFamily="49" charset="0"/>
+                  <a:cs typeface="Courier New" panose="02070309020205020404" pitchFamily="49" charset="0"/>
+                </a:rPr>
+                <a:t>osrm-partition</a:t>
+              </a:r>
+              <a:endParaRPr lang="es-ES" sz="1600" dirty="0">
+                <a:latin typeface="Consolas" panose="020B0609020204030204" pitchFamily="49" charset="0"/>
+                <a:cs typeface="Courier New" panose="02070309020205020404" pitchFamily="49" charset="0"/>
+              </a:endParaRPr>
+            </a:p>
+          </p:txBody>
+        </p:sp>
+      </p:grpSp>
+      <p:grpSp>
+        <p:nvGrpSpPr>
+          <p:cNvPr id="1396" name="Grupo 1395">
+            <a:extLst>
+              <a:ext uri="{FF2B5EF4-FFF2-40B4-BE49-F238E27FC236}">
+                <a16:creationId xmlns:a16="http://schemas.microsoft.com/office/drawing/2014/main" id="{E9C66067-D148-77B2-8BA1-756D9E794902}"/>
+              </a:ext>
+            </a:extLst>
+          </p:cNvPr>
+          <p:cNvGrpSpPr/>
+          <p:nvPr/>
+        </p:nvGrpSpPr>
+        <p:grpSpPr>
+          <a:xfrm>
+            <a:off x="6314319" y="1006581"/>
+            <a:ext cx="1961567" cy="4367989"/>
+            <a:chOff x="7373442" y="1026314"/>
+            <a:chExt cx="1961567" cy="4367989"/>
+          </a:xfrm>
+        </p:grpSpPr>
+        <p:sp>
+          <p:nvSpPr>
+            <p:cNvPr id="23" name="Shape 53">
+              <a:extLst>
+                <a:ext uri="{FF2B5EF4-FFF2-40B4-BE49-F238E27FC236}">
+                  <a16:creationId xmlns:a16="http://schemas.microsoft.com/office/drawing/2014/main" id="{BE7633DE-5527-1424-3021-D5430C96CC2D}"/>
+                </a:ext>
+              </a:extLst>
+            </p:cNvPr>
+            <p:cNvSpPr/>
+            <p:nvPr/>
+          </p:nvSpPr>
+          <p:spPr>
+            <a:xfrm>
+              <a:off x="7373442" y="1026314"/>
+              <a:ext cx="1961567" cy="4367989"/>
+            </a:xfrm>
+            <a:prstGeom prst="roundRect">
+              <a:avLst>
+                <a:gd name="adj" fmla="val 7368"/>
+              </a:avLst>
+            </a:prstGeom>
+            <a:solidFill>
+              <a:srgbClr val="FFFFFF"/>
+            </a:solidFill>
+            <a:ln w="25400">
+              <a:solidFill>
+                <a:srgbClr val="562C7A"/>
+              </a:solidFill>
+              <a:prstDash val="solid"/>
+            </a:ln>
+            <a:effectLst>
+              <a:outerShdw blurRad="76200" dist="25400" dir="8100000" algn="bl" rotWithShape="0">
+                <a:srgbClr val="000000">
+                  <a:alpha val="10000"/>
+                </a:srgbClr>
+              </a:outerShdw>
+            </a:effectLst>
+          </p:spPr>
+          <p:txBody>
+            <a:bodyPr anchor="t"/>
+            <a:lstStyle/>
+            <a:p>
+              <a:pPr algn="ctr"/>
+              <a:r>
+                <a:rPr lang="es-ES" sz="1600" b="1" dirty="0" err="1">
+                  <a:highlight>
+                    <a:srgbClr val="FFFDE7"/>
+                  </a:highlight>
+                  <a:latin typeface="Consolas" panose="020B0609020204030204" pitchFamily="49" charset="0"/>
+                  <a:cs typeface="Courier New" panose="02070309020205020404" pitchFamily="49" charset="0"/>
+                </a:rPr>
+                <a:t>osrm-customize</a:t>
+              </a:r>
+              <a:endParaRPr lang="es-ES" sz="1600" b="1" dirty="0">
+                <a:highlight>
+                  <a:srgbClr val="FFFDE7"/>
+                </a:highlight>
+                <a:latin typeface="Consolas" panose="020B0609020204030204" pitchFamily="49" charset="0"/>
+                <a:cs typeface="Courier New" panose="02070309020205020404" pitchFamily="49" charset="0"/>
+              </a:endParaRPr>
+            </a:p>
+            <a:p>
+              <a:endParaRPr lang="es-ES" sz="1100" dirty="0">
+                <a:latin typeface="Consolas" panose="020B0609020204030204" pitchFamily="49" charset="0"/>
+                <a:cs typeface="Courier New" panose="02070309020205020404" pitchFamily="49" charset="0"/>
+              </a:endParaRPr>
+            </a:p>
+            <a:p>
+              <a:r>
+                <a:rPr lang="es-ES" sz="1600" b="1" dirty="0">
+                  <a:latin typeface="Calibri" panose="020F0502020204030204" pitchFamily="34" charset="0"/>
+                  <a:ea typeface="Calibri" panose="020F0502020204030204" pitchFamily="34" charset="0"/>
+                  <a:cs typeface="Calibri" panose="020F0502020204030204" pitchFamily="34" charset="0"/>
+                </a:rPr>
+                <a:t>Asigna pesos finales a cada arista </a:t>
+              </a:r>
+              <a:r>
+                <a:rPr lang="es-ES" sz="1600" dirty="0">
+                  <a:latin typeface="Calibri" panose="020F0502020204030204" pitchFamily="34" charset="0"/>
+                  <a:ea typeface="Calibri" panose="020F0502020204030204" pitchFamily="34" charset="0"/>
+                  <a:cs typeface="Calibri" panose="020F0502020204030204" pitchFamily="34" charset="0"/>
+                </a:rPr>
+                <a:t>sobre la estructura de celdas MLD</a:t>
+              </a:r>
+            </a:p>
+          </p:txBody>
+        </p:sp>
+        <p:sp>
+          <p:nvSpPr>
+            <p:cNvPr id="41" name="Shape 53">
+              <a:extLst>
+                <a:ext uri="{FF2B5EF4-FFF2-40B4-BE49-F238E27FC236}">
+                  <a16:creationId xmlns:a16="http://schemas.microsoft.com/office/drawing/2014/main" id="{F06786DE-FFE5-F6A1-7DED-E012E79684FA}"/>
+                </a:ext>
+              </a:extLst>
+            </p:cNvPr>
+            <p:cNvSpPr/>
+            <p:nvPr/>
+          </p:nvSpPr>
+          <p:spPr>
+            <a:xfrm>
+              <a:off x="7474957" y="3103135"/>
+              <a:ext cx="1758535" cy="365656"/>
+            </a:xfrm>
+            <a:prstGeom prst="roundRect">
+              <a:avLst>
+                <a:gd name="adj" fmla="val 7368"/>
+              </a:avLst>
+            </a:prstGeom>
+            <a:solidFill>
+              <a:srgbClr val="FFFFFF"/>
+            </a:solidFill>
+            <a:ln w="25400">
+              <a:solidFill>
+                <a:srgbClr val="573FF6"/>
+              </a:solidFill>
+              <a:prstDash val="solid"/>
+            </a:ln>
+            <a:effectLst>
+              <a:outerShdw blurRad="76200" dist="25400" dir="8100000" algn="bl" rotWithShape="0">
+                <a:srgbClr val="000000">
+                  <a:alpha val="10000"/>
+                </a:srgbClr>
+              </a:outerShdw>
+            </a:effectLst>
+          </p:spPr>
+          <p:txBody>
+            <a:bodyPr/>
+            <a:lstStyle/>
+            <a:p>
+              <a:pPr algn="ctr"/>
+              <a:r>
+                <a:rPr lang="es-ES" sz="1600" b="1" dirty="0" err="1">
+                  <a:latin typeface="Consolas" panose="020B0609020204030204" pitchFamily="49" charset="0"/>
+                  <a:cs typeface="Courier New" panose="02070309020205020404" pitchFamily="49" charset="0"/>
+                </a:rPr>
+                <a:t>osrm-customize</a:t>
+              </a:r>
+              <a:endParaRPr lang="es-ES" sz="1600" dirty="0">
+                <a:latin typeface="Consolas" panose="020B0609020204030204" pitchFamily="49" charset="0"/>
+                <a:cs typeface="Courier New" panose="02070309020205020404" pitchFamily="49" charset="0"/>
+              </a:endParaRPr>
+            </a:p>
+          </p:txBody>
+        </p:sp>
+        <p:sp>
+          <p:nvSpPr>
+            <p:cNvPr id="42" name="Shape 53">
+              <a:extLst>
+                <a:ext uri="{FF2B5EF4-FFF2-40B4-BE49-F238E27FC236}">
+                  <a16:creationId xmlns:a16="http://schemas.microsoft.com/office/drawing/2014/main" id="{C56DC085-E8C1-24F8-CCEA-C3983F7DBB31}"/>
+                </a:ext>
+              </a:extLst>
+            </p:cNvPr>
+            <p:cNvSpPr/>
+            <p:nvPr/>
+          </p:nvSpPr>
+          <p:spPr>
+            <a:xfrm>
+              <a:off x="7481368" y="3877279"/>
+              <a:ext cx="1758535" cy="365656"/>
+            </a:xfrm>
+            <a:prstGeom prst="roundRect">
+              <a:avLst>
+                <a:gd name="adj" fmla="val 7368"/>
+              </a:avLst>
+            </a:prstGeom>
+            <a:solidFill>
+              <a:srgbClr val="FFFFFF"/>
+            </a:solidFill>
+            <a:ln w="25400">
+              <a:solidFill>
+                <a:srgbClr val="26AA57"/>
+              </a:solidFill>
+              <a:prstDash val="solid"/>
+            </a:ln>
+            <a:effectLst>
+              <a:outerShdw blurRad="76200" dist="25400" dir="8100000" algn="bl" rotWithShape="0">
+                <a:srgbClr val="000000">
+                  <a:alpha val="10000"/>
+                </a:srgbClr>
+              </a:outerShdw>
+            </a:effectLst>
+          </p:spPr>
+          <p:txBody>
+            <a:bodyPr/>
+            <a:lstStyle/>
+            <a:p>
+              <a:pPr algn="ctr"/>
+              <a:r>
+                <a:rPr lang="es-ES" sz="1600" b="1" dirty="0" err="1">
+                  <a:latin typeface="Consolas" panose="020B0609020204030204" pitchFamily="49" charset="0"/>
+                  <a:cs typeface="Courier New" panose="02070309020205020404" pitchFamily="49" charset="0"/>
+                </a:rPr>
+                <a:t>osrm-customize</a:t>
+              </a:r>
+              <a:endParaRPr lang="es-ES" sz="1600" dirty="0">
+                <a:latin typeface="Consolas" panose="020B0609020204030204" pitchFamily="49" charset="0"/>
+                <a:cs typeface="Courier New" panose="02070309020205020404" pitchFamily="49" charset="0"/>
+              </a:endParaRPr>
+            </a:p>
+          </p:txBody>
+        </p:sp>
+        <p:sp>
+          <p:nvSpPr>
+            <p:cNvPr id="43" name="Shape 53">
+              <a:extLst>
+                <a:ext uri="{FF2B5EF4-FFF2-40B4-BE49-F238E27FC236}">
+                  <a16:creationId xmlns:a16="http://schemas.microsoft.com/office/drawing/2014/main" id="{F6B01A50-2B93-58D5-5FDF-3B471D2C2859}"/>
+                </a:ext>
+              </a:extLst>
+            </p:cNvPr>
+            <p:cNvSpPr/>
+            <p:nvPr/>
+          </p:nvSpPr>
+          <p:spPr>
+            <a:xfrm>
+              <a:off x="7463743" y="4645291"/>
+              <a:ext cx="1758535" cy="365656"/>
+            </a:xfrm>
+            <a:prstGeom prst="roundRect">
+              <a:avLst>
+                <a:gd name="adj" fmla="val 7368"/>
+              </a:avLst>
+            </a:prstGeom>
+            <a:solidFill>
+              <a:srgbClr val="FFFFFF"/>
+            </a:solidFill>
+            <a:ln w="25400">
+              <a:solidFill>
+                <a:srgbClr val="424242"/>
+              </a:solidFill>
+              <a:prstDash val="solid"/>
+            </a:ln>
+            <a:effectLst>
+              <a:outerShdw blurRad="76200" dist="25400" dir="8100000" algn="bl" rotWithShape="0">
+                <a:srgbClr val="000000">
+                  <a:alpha val="10000"/>
+                </a:srgbClr>
+              </a:outerShdw>
+            </a:effectLst>
+          </p:spPr>
+          <p:txBody>
+            <a:bodyPr/>
+            <a:lstStyle/>
+            <a:p>
+              <a:pPr algn="ctr"/>
+              <a:r>
+                <a:rPr lang="es-ES" sz="1600" b="1" dirty="0" err="1">
+                  <a:latin typeface="Consolas" panose="020B0609020204030204" pitchFamily="49" charset="0"/>
+                  <a:cs typeface="Courier New" panose="02070309020205020404" pitchFamily="49" charset="0"/>
+                </a:rPr>
+                <a:t>osrm-customize</a:t>
+              </a:r>
+              <a:endParaRPr lang="es-ES" sz="1600" dirty="0">
+                <a:latin typeface="Consolas" panose="020B0609020204030204" pitchFamily="49" charset="0"/>
+                <a:cs typeface="Courier New" panose="02070309020205020404" pitchFamily="49" charset="0"/>
+              </a:endParaRPr>
+            </a:p>
+          </p:txBody>
+        </p:sp>
+      </p:grpSp>
       <p:cxnSp>
         <p:nvCxnSpPr>
-          <p:cNvPr id="4" name="Connector 3"/>
-          <p:cNvCxnSpPr/>
+          <p:cNvPr id="56" name="Conector: angular 55">
+            <a:extLst>
+              <a:ext uri="{FF2B5EF4-FFF2-40B4-BE49-F238E27FC236}">
+                <a16:creationId xmlns:a16="http://schemas.microsoft.com/office/drawing/2014/main" id="{A6DA027C-03E4-3408-6492-C5540A807453}"/>
+              </a:ext>
+            </a:extLst>
+          </p:cNvPr>
+          <p:cNvCxnSpPr>
+            <a:stCxn id="37" idx="3"/>
+            <a:endCxn id="41" idx="1"/>
+          </p:cNvCxnSpPr>
           <p:nvPr/>
         </p:nvCxnSpPr>
         <p:spPr>
           <a:xfrm>
-            <a:off x="6095670" y="853416"/>
-            <a:ext cx="0" cy="198115"/>
+            <a:off x="6070823" y="3263233"/>
+            <a:ext cx="345011" cy="2997"/>
           </a:xfrm>
-          <a:prstGeom prst="line">
+          <a:prstGeom prst="bentConnector3">
             <a:avLst/>
           </a:prstGeom>
-          <a:ln w="25400">
+          <a:ln>
             <a:solidFill>
-              <a:srgbClr val="000000"/>
+              <a:srgbClr val="573FF6"/>
             </a:solidFill>
+            <a:tailEnd type="triangle"/>
+          </a:ln>
+        </p:spPr>
+        <p:style>
+          <a:lnRef idx="2">
+            <a:schemeClr val="accent1"/>
+          </a:lnRef>
+          <a:fillRef idx="0">
+            <a:schemeClr val="accent1"/>
+          </a:fillRef>
+          <a:effectRef idx="1">
+            <a:schemeClr val="accent1"/>
+          </a:effectRef>
+          <a:fontRef idx="minor">
+            <a:schemeClr val="tx1"/>
+          </a:fontRef>
+        </p:style>
+      </p:cxnSp>
+      <p:cxnSp>
+        <p:nvCxnSpPr>
+          <p:cNvPr id="58" name="Conector: angular 57">
+            <a:extLst>
+              <a:ext uri="{FF2B5EF4-FFF2-40B4-BE49-F238E27FC236}">
+                <a16:creationId xmlns:a16="http://schemas.microsoft.com/office/drawing/2014/main" id="{A31B24AF-5B89-F7B7-4FF0-19DBF4A1F4E9}"/>
+              </a:ext>
+            </a:extLst>
+          </p:cNvPr>
+          <p:cNvCxnSpPr>
+            <a:stCxn id="38" idx="3"/>
+            <a:endCxn id="42" idx="1"/>
+          </p:cNvCxnSpPr>
+          <p:nvPr/>
+        </p:nvCxnSpPr>
+        <p:spPr>
+          <a:xfrm flipV="1">
+            <a:off x="6070823" y="4040374"/>
+            <a:ext cx="351422" cy="778"/>
+          </a:xfrm>
+          <a:prstGeom prst="bentConnector3">
+            <a:avLst/>
+          </a:prstGeom>
+          <a:ln>
+            <a:solidFill>
+              <a:srgbClr val="26AA57"/>
+            </a:solidFill>
+            <a:tailEnd type="triangle"/>
+          </a:ln>
+        </p:spPr>
+        <p:style>
+          <a:lnRef idx="2">
+            <a:schemeClr val="accent1"/>
+          </a:lnRef>
+          <a:fillRef idx="0">
+            <a:schemeClr val="accent1"/>
+          </a:fillRef>
+          <a:effectRef idx="1">
+            <a:schemeClr val="accent1"/>
+          </a:effectRef>
+          <a:fontRef idx="minor">
+            <a:schemeClr val="tx1"/>
+          </a:fontRef>
+        </p:style>
+      </p:cxnSp>
+      <p:cxnSp>
+        <p:nvCxnSpPr>
+          <p:cNvPr id="60" name="Conector: angular 59">
+            <a:extLst>
+              <a:ext uri="{FF2B5EF4-FFF2-40B4-BE49-F238E27FC236}">
+                <a16:creationId xmlns:a16="http://schemas.microsoft.com/office/drawing/2014/main" id="{2300E7B8-1FEB-203C-4C1E-6E419D69D4C1}"/>
+              </a:ext>
+            </a:extLst>
+          </p:cNvPr>
+          <p:cNvCxnSpPr>
+            <a:stCxn id="39" idx="3"/>
+            <a:endCxn id="43" idx="1"/>
+          </p:cNvCxnSpPr>
+          <p:nvPr/>
+        </p:nvCxnSpPr>
+        <p:spPr>
+          <a:xfrm flipV="1">
+            <a:off x="6075249" y="4808386"/>
+            <a:ext cx="329371" cy="835"/>
+          </a:xfrm>
+          <a:prstGeom prst="bentConnector3">
+            <a:avLst/>
+          </a:prstGeom>
+          <a:ln>
+            <a:solidFill>
+              <a:srgbClr val="424242"/>
+            </a:solidFill>
+            <a:tailEnd type="triangle"/>
+          </a:ln>
+        </p:spPr>
+        <p:style>
+          <a:lnRef idx="2">
+            <a:schemeClr val="accent1"/>
+          </a:lnRef>
+          <a:fillRef idx="0">
+            <a:schemeClr val="accent1"/>
+          </a:fillRef>
+          <a:effectRef idx="1">
+            <a:schemeClr val="accent1"/>
+          </a:effectRef>
+          <a:fontRef idx="minor">
+            <a:schemeClr val="tx1"/>
+          </a:fontRef>
+        </p:style>
+      </p:cxnSp>
+      <p:grpSp>
+        <p:nvGrpSpPr>
+          <p:cNvPr id="1410" name="Grupo 1409">
+            <a:extLst>
+              <a:ext uri="{FF2B5EF4-FFF2-40B4-BE49-F238E27FC236}">
+                <a16:creationId xmlns:a16="http://schemas.microsoft.com/office/drawing/2014/main" id="{47A887D6-8CC9-69B5-3F42-6A10D318C672}"/>
+              </a:ext>
+            </a:extLst>
+          </p:cNvPr>
+          <p:cNvGrpSpPr/>
+          <p:nvPr/>
+        </p:nvGrpSpPr>
+        <p:grpSpPr>
+          <a:xfrm>
+            <a:off x="8376589" y="1009002"/>
+            <a:ext cx="1609816" cy="5677564"/>
+            <a:chOff x="9073955" y="1277218"/>
+            <a:chExt cx="1609816" cy="5345383"/>
+          </a:xfrm>
+        </p:grpSpPr>
+        <p:sp>
+          <p:nvSpPr>
+            <p:cNvPr id="73" name="Shape 62">
+              <a:extLst>
+                <a:ext uri="{FF2B5EF4-FFF2-40B4-BE49-F238E27FC236}">
+                  <a16:creationId xmlns:a16="http://schemas.microsoft.com/office/drawing/2014/main" id="{DB54415B-904A-0ECA-3F59-10100759DCE2}"/>
+                </a:ext>
+              </a:extLst>
+            </p:cNvPr>
+            <p:cNvSpPr/>
+            <p:nvPr/>
+          </p:nvSpPr>
+          <p:spPr>
+            <a:xfrm>
+              <a:off x="9073955" y="1277218"/>
+              <a:ext cx="1609816" cy="5345383"/>
+            </a:xfrm>
+            <a:prstGeom prst="roundRect">
+              <a:avLst>
+                <a:gd name="adj" fmla="val 4000"/>
+              </a:avLst>
+            </a:prstGeom>
+            <a:solidFill>
+              <a:srgbClr val="FFFDE7"/>
+            </a:solidFill>
+            <a:ln w="31750">
+              <a:solidFill>
+                <a:srgbClr val="F9A825"/>
+              </a:solidFill>
+              <a:prstDash val="solid"/>
+            </a:ln>
+            <a:effectLst>
+              <a:outerShdw blurRad="76200" dist="25400" dir="8100000" algn="bl" rotWithShape="0">
+                <a:srgbClr val="000000">
+                  <a:alpha val="10000"/>
+                </a:srgbClr>
+              </a:outerShdw>
+            </a:effectLst>
+          </p:spPr>
+          <p:txBody>
+            <a:bodyPr/>
+            <a:lstStyle/>
+            <a:p>
+              <a:pPr algn="ctr"/>
+              <a:r>
+                <a:rPr lang="es-ES" b="1" dirty="0">
+                  <a:latin typeface="Calibri" panose="020F0502020204030204" pitchFamily="34" charset="0"/>
+                  <a:ea typeface="Calibri" panose="020F0502020204030204" pitchFamily="34" charset="0"/>
+                  <a:cs typeface="Calibri" panose="020F0502020204030204" pitchFamily="34" charset="0"/>
+                </a:rPr>
+                <a:t>Grafos OSRM</a:t>
+              </a:r>
+              <a:br>
+                <a:rPr lang="es-ES" b="1" dirty="0">
+                  <a:latin typeface="Calibri" panose="020F0502020204030204" pitchFamily="34" charset="0"/>
+                  <a:ea typeface="Calibri" panose="020F0502020204030204" pitchFamily="34" charset="0"/>
+                  <a:cs typeface="Calibri" panose="020F0502020204030204" pitchFamily="34" charset="0"/>
+                </a:rPr>
+              </a:br>
+              <a:r>
+                <a:rPr lang="es-ES" b="1" dirty="0">
+                  <a:latin typeface="Calibri" panose="020F0502020204030204" pitchFamily="34" charset="0"/>
+                  <a:ea typeface="Calibri" panose="020F0502020204030204" pitchFamily="34" charset="0"/>
+                  <a:cs typeface="Calibri" panose="020F0502020204030204" pitchFamily="34" charset="0"/>
+                </a:rPr>
+                <a:t>preprocesados</a:t>
+              </a:r>
+            </a:p>
+            <a:p>
+              <a:endParaRPr lang="es-ES" sz="1400" b="1" dirty="0">
+                <a:latin typeface="Calibri" panose="020F0502020204030204" pitchFamily="34" charset="0"/>
+                <a:ea typeface="Calibri" panose="020F0502020204030204" pitchFamily="34" charset="0"/>
+                <a:cs typeface="Calibri" panose="020F0502020204030204" pitchFamily="34" charset="0"/>
+              </a:endParaRPr>
+            </a:p>
+            <a:p>
+              <a:r>
+                <a:rPr lang="es-ES" sz="1400" b="1" dirty="0">
+                  <a:latin typeface="Consolas" panose="020B0609020204030204" pitchFamily="49" charset="0"/>
+                  <a:ea typeface="Calibri" panose="020F0502020204030204" pitchFamily="34" charset="0"/>
+                  <a:cs typeface="Calibri" panose="020F0502020204030204" pitchFamily="34" charset="0"/>
+                </a:rPr>
+                <a:t>  </a:t>
+              </a:r>
+              <a:r>
+                <a:rPr lang="es-ES" sz="1400" b="1" dirty="0" err="1">
+                  <a:latin typeface="Consolas" panose="020B0609020204030204" pitchFamily="49" charset="0"/>
+                  <a:ea typeface="Calibri" panose="020F0502020204030204" pitchFamily="34" charset="0"/>
+                  <a:cs typeface="Calibri" panose="020F0502020204030204" pitchFamily="34" charset="0"/>
+                </a:rPr>
+                <a:t>clm.osrm</a:t>
+              </a:r>
+              <a:endParaRPr lang="es-ES" sz="1400" b="1" dirty="0">
+                <a:latin typeface="Consolas" panose="020B0609020204030204" pitchFamily="49" charset="0"/>
+                <a:ea typeface="Calibri" panose="020F0502020204030204" pitchFamily="34" charset="0"/>
+                <a:cs typeface="Calibri" panose="020F0502020204030204" pitchFamily="34" charset="0"/>
+              </a:endParaRPr>
+            </a:p>
+            <a:p>
+              <a:r>
+                <a:rPr lang="es-ES" sz="1400" dirty="0">
+                  <a:latin typeface="Consolas" panose="020B0609020204030204" pitchFamily="49" charset="0"/>
+                  <a:ea typeface="Calibri" panose="020F0502020204030204" pitchFamily="34" charset="0"/>
+                  <a:cs typeface="Calibri" panose="020F0502020204030204" pitchFamily="34" charset="0"/>
+                </a:rPr>
+                <a:t>  </a:t>
+              </a:r>
+              <a:r>
+                <a:rPr lang="es-ES" sz="1400" dirty="0" err="1">
+                  <a:latin typeface="Consolas" panose="020B0609020204030204" pitchFamily="49" charset="0"/>
+                  <a:ea typeface="Calibri" panose="020F0502020204030204" pitchFamily="34" charset="0"/>
+                  <a:cs typeface="Calibri" panose="020F0502020204030204" pitchFamily="34" charset="0"/>
+                </a:rPr>
+                <a:t>partition</a:t>
+              </a:r>
+              <a:endParaRPr lang="es-ES" sz="1400" dirty="0">
+                <a:latin typeface="Consolas" panose="020B0609020204030204" pitchFamily="49" charset="0"/>
+                <a:ea typeface="Calibri" panose="020F0502020204030204" pitchFamily="34" charset="0"/>
+                <a:cs typeface="Calibri" panose="020F0502020204030204" pitchFamily="34" charset="0"/>
+              </a:endParaRPr>
+            </a:p>
+            <a:p>
+              <a:r>
+                <a:rPr lang="es-ES" sz="1400" dirty="0">
+                  <a:latin typeface="Consolas" panose="020B0609020204030204" pitchFamily="49" charset="0"/>
+                  <a:ea typeface="Calibri" panose="020F0502020204030204" pitchFamily="34" charset="0"/>
+                  <a:cs typeface="Calibri" panose="020F0502020204030204" pitchFamily="34" charset="0"/>
+                </a:rPr>
+                <a:t>  </a:t>
+              </a:r>
+              <a:r>
+                <a:rPr lang="es-ES" sz="1400" dirty="0" err="1">
+                  <a:latin typeface="Consolas" panose="020B0609020204030204" pitchFamily="49" charset="0"/>
+                  <a:ea typeface="Calibri" panose="020F0502020204030204" pitchFamily="34" charset="0"/>
+                  <a:cs typeface="Calibri" panose="020F0502020204030204" pitchFamily="34" charset="0"/>
+                </a:rPr>
+                <a:t>cells</a:t>
+              </a:r>
+              <a:endParaRPr lang="es-ES" sz="1400" dirty="0">
+                <a:latin typeface="Consolas" panose="020B0609020204030204" pitchFamily="49" charset="0"/>
+                <a:ea typeface="Calibri" panose="020F0502020204030204" pitchFamily="34" charset="0"/>
+                <a:cs typeface="Calibri" panose="020F0502020204030204" pitchFamily="34" charset="0"/>
+              </a:endParaRPr>
+            </a:p>
+            <a:p>
+              <a:r>
+                <a:rPr lang="es-ES" sz="1400" dirty="0">
+                  <a:latin typeface="Consolas" panose="020B0609020204030204" pitchFamily="49" charset="0"/>
+                  <a:ea typeface="Calibri" panose="020F0502020204030204" pitchFamily="34" charset="0"/>
+                  <a:cs typeface="Calibri" panose="020F0502020204030204" pitchFamily="34" charset="0"/>
+                </a:rPr>
+                <a:t>  </a:t>
+              </a:r>
+              <a:r>
+                <a:rPr lang="es-ES" sz="1400" dirty="0" err="1">
+                  <a:latin typeface="Consolas" panose="020B0609020204030204" pitchFamily="49" charset="0"/>
+                  <a:ea typeface="Calibri" panose="020F0502020204030204" pitchFamily="34" charset="0"/>
+                  <a:cs typeface="Calibri" panose="020F0502020204030204" pitchFamily="34" charset="0"/>
+                </a:rPr>
+                <a:t>cell_metrics</a:t>
+              </a:r>
+              <a:endParaRPr lang="es-ES" sz="1400" dirty="0">
+                <a:latin typeface="Consolas" panose="020B0609020204030204" pitchFamily="49" charset="0"/>
+                <a:ea typeface="Calibri" panose="020F0502020204030204" pitchFamily="34" charset="0"/>
+                <a:cs typeface="Calibri" panose="020F0502020204030204" pitchFamily="34" charset="0"/>
+              </a:endParaRPr>
+            </a:p>
+            <a:p>
+              <a:r>
+                <a:rPr lang="es-ES" sz="1400" dirty="0">
+                  <a:latin typeface="Consolas" panose="020B0609020204030204" pitchFamily="49" charset="0"/>
+                  <a:ea typeface="Calibri" panose="020F0502020204030204" pitchFamily="34" charset="0"/>
+                  <a:cs typeface="Calibri" panose="020F0502020204030204" pitchFamily="34" charset="0"/>
+                </a:rPr>
+                <a:t>  ...(+15)</a:t>
+              </a:r>
+            </a:p>
+          </p:txBody>
+        </p:sp>
+        <p:grpSp>
+          <p:nvGrpSpPr>
+            <p:cNvPr id="74" name="Grupo 73">
+              <a:extLst>
+                <a:ext uri="{FF2B5EF4-FFF2-40B4-BE49-F238E27FC236}">
+                  <a16:creationId xmlns:a16="http://schemas.microsoft.com/office/drawing/2014/main" id="{EAEC5CCF-FC73-5304-0DED-9BBA3FBAF5EB}"/>
+                </a:ext>
+              </a:extLst>
+            </p:cNvPr>
+            <p:cNvGrpSpPr/>
+            <p:nvPr/>
+          </p:nvGrpSpPr>
+          <p:grpSpPr>
+            <a:xfrm>
+              <a:off x="9144308" y="3934170"/>
+              <a:ext cx="1457223" cy="392633"/>
+              <a:chOff x="9422361" y="2086719"/>
+              <a:chExt cx="1367559" cy="354442"/>
+            </a:xfrm>
+          </p:grpSpPr>
+          <p:grpSp>
+            <p:nvGrpSpPr>
+              <p:cNvPr id="75" name="Grupo 74">
+                <a:extLst>
+                  <a:ext uri="{FF2B5EF4-FFF2-40B4-BE49-F238E27FC236}">
+                    <a16:creationId xmlns:a16="http://schemas.microsoft.com/office/drawing/2014/main" id="{27207075-C5A8-8057-CFBE-D16C7D7D8D71}"/>
+                  </a:ext>
+                </a:extLst>
+              </p:cNvPr>
+              <p:cNvGrpSpPr/>
+              <p:nvPr/>
+            </p:nvGrpSpPr>
+            <p:grpSpPr>
+              <a:xfrm>
+                <a:off x="9422361" y="2086719"/>
+                <a:ext cx="1367559" cy="354437"/>
+                <a:chOff x="9422361" y="1695355"/>
+                <a:chExt cx="1367559" cy="354437"/>
+              </a:xfrm>
+            </p:grpSpPr>
+            <p:sp>
+              <p:nvSpPr>
+                <p:cNvPr id="79" name="Shape 8">
+                  <a:extLst>
+                    <a:ext uri="{FF2B5EF4-FFF2-40B4-BE49-F238E27FC236}">
+                      <a16:creationId xmlns:a16="http://schemas.microsoft.com/office/drawing/2014/main" id="{87298420-1BDF-82AF-87FA-1EB961A7014D}"/>
+                    </a:ext>
+                  </a:extLst>
+                </p:cNvPr>
+                <p:cNvSpPr/>
+                <p:nvPr/>
+              </p:nvSpPr>
+              <p:spPr>
+                <a:xfrm>
+                  <a:off x="9422361" y="1695355"/>
+                  <a:ext cx="1367559" cy="354433"/>
+                </a:xfrm>
+                <a:prstGeom prst="roundRect">
+                  <a:avLst>
+                    <a:gd name="adj" fmla="val 9259"/>
+                  </a:avLst>
+                </a:prstGeom>
+                <a:solidFill>
+                  <a:schemeClr val="bg1"/>
+                </a:solidFill>
+                <a:ln w="19050">
+                  <a:solidFill>
+                    <a:srgbClr val="F9A825"/>
+                  </a:solidFill>
+                  <a:prstDash val="solid"/>
+                </a:ln>
+              </p:spPr>
+              <p:txBody>
+                <a:bodyPr/>
+                <a:lstStyle/>
+                <a:p>
+                  <a:endParaRPr lang="es-ES" dirty="0"/>
+                </a:p>
+              </p:txBody>
+            </p:sp>
+            <p:sp>
+              <p:nvSpPr>
+                <p:cNvPr id="80" name="Text 9">
+                  <a:extLst>
+                    <a:ext uri="{FF2B5EF4-FFF2-40B4-BE49-F238E27FC236}">
+                      <a16:creationId xmlns:a16="http://schemas.microsoft.com/office/drawing/2014/main" id="{A87C0331-EC68-0A61-D723-10B4566D0141}"/>
+                    </a:ext>
+                  </a:extLst>
+                </p:cNvPr>
+                <p:cNvSpPr/>
+                <p:nvPr/>
+              </p:nvSpPr>
+              <p:spPr>
+                <a:xfrm>
+                  <a:off x="9746228" y="1695359"/>
+                  <a:ext cx="1029271" cy="354433"/>
+                </a:xfrm>
+                <a:prstGeom prst="rect">
+                  <a:avLst/>
+                </a:prstGeom>
+                <a:noFill/>
+                <a:ln/>
+              </p:spPr>
+              <p:txBody>
+                <a:bodyPr wrap="square" lIns="25400" tIns="25400" rIns="25400" bIns="25400" rtlCol="0" anchor="ctr"/>
+                <a:lstStyle/>
+                <a:p>
+                  <a:pPr marL="0" indent="0" algn="ctr">
+                    <a:buNone/>
+                  </a:pPr>
+                  <a:r>
+                    <a:rPr lang="en-US" sz="1200" b="1" dirty="0" err="1">
+                      <a:solidFill>
+                        <a:srgbClr val="212121"/>
+                      </a:solidFill>
+                      <a:latin typeface="Calibri" pitchFamily="34" charset="0"/>
+                      <a:ea typeface="Calibri" pitchFamily="34" charset="-122"/>
+                      <a:cs typeface="Calibri" pitchFamily="34" charset="-120"/>
+                    </a:rPr>
+                    <a:t>osrm-clm</a:t>
+                  </a:r>
+                  <a:r>
+                    <a:rPr lang="en-US" sz="1200" b="1" dirty="0">
+                      <a:solidFill>
+                        <a:srgbClr val="212121"/>
+                      </a:solidFill>
+                      <a:latin typeface="Calibri" pitchFamily="34" charset="0"/>
+                      <a:ea typeface="Calibri" pitchFamily="34" charset="-122"/>
+                      <a:cs typeface="Calibri" pitchFamily="34" charset="-120"/>
+                    </a:rPr>
+                    <a:t>/bike</a:t>
+                  </a:r>
+                  <a:r>
+                    <a:rPr lang="en-US" sz="850" b="1" dirty="0">
+                      <a:solidFill>
+                        <a:srgbClr val="212121"/>
+                      </a:solidFill>
+                      <a:latin typeface="Calibri" pitchFamily="34" charset="0"/>
+                      <a:ea typeface="Calibri" pitchFamily="34" charset="-122"/>
+                      <a:cs typeface="Calibri" pitchFamily="34" charset="-120"/>
+                    </a:rPr>
+                    <a:t> </a:t>
+                  </a:r>
+                  <a:endParaRPr lang="en-US" sz="1200" dirty="0"/>
+                </a:p>
+              </p:txBody>
+            </p:sp>
+          </p:grpSp>
+          <p:pic>
+            <p:nvPicPr>
+              <p:cNvPr id="77" name="Gráfico 76" descr="Carpeta abierta con relleno sólido">
+                <a:extLst>
+                  <a:ext uri="{FF2B5EF4-FFF2-40B4-BE49-F238E27FC236}">
+                    <a16:creationId xmlns:a16="http://schemas.microsoft.com/office/drawing/2014/main" id="{2A5D1EA1-C7A9-4BD8-246D-24136A91626E}"/>
+                  </a:ext>
+                </a:extLst>
+              </p:cNvPr>
+              <p:cNvPicPr>
+                <a:picLocks noChangeAspect="1"/>
+              </p:cNvPicPr>
+              <p:nvPr/>
+            </p:nvPicPr>
+            <p:blipFill>
+              <a:blip>
+                <a:extLst>
+                  <a:ext uri="{96DAC541-7B7A-43D3-8B79-37D633B846F1}">
+                    <asvg:svgBlip xmlns:asvg="http://schemas.microsoft.com/office/drawing/2016/SVG/main" r:embed="rId9"/>
+                  </a:ext>
+                </a:extLst>
+              </a:blip>
+              <a:stretch>
+                <a:fillRect/>
+              </a:stretch>
+            </p:blipFill>
+            <p:spPr>
+              <a:xfrm>
+                <a:off x="9452936" y="2086728"/>
+                <a:ext cx="354433" cy="354433"/>
+              </a:xfrm>
+              <a:prstGeom prst="rect">
+                <a:avLst/>
+              </a:prstGeom>
+            </p:spPr>
+          </p:pic>
+        </p:grpSp>
+        <p:grpSp>
+          <p:nvGrpSpPr>
+            <p:cNvPr id="81" name="Grupo 80">
+              <a:extLst>
+                <a:ext uri="{FF2B5EF4-FFF2-40B4-BE49-F238E27FC236}">
+                  <a16:creationId xmlns:a16="http://schemas.microsoft.com/office/drawing/2014/main" id="{D3503A30-E009-568E-8CE6-F8A77BEDFAAB}"/>
+                </a:ext>
+              </a:extLst>
+            </p:cNvPr>
+            <p:cNvGrpSpPr/>
+            <p:nvPr/>
+          </p:nvGrpSpPr>
+          <p:grpSpPr>
+            <a:xfrm>
+              <a:off x="9158205" y="4655873"/>
+              <a:ext cx="1442339" cy="392661"/>
+              <a:chOff x="9422361" y="2064356"/>
+              <a:chExt cx="1448125" cy="354470"/>
+            </a:xfrm>
+          </p:grpSpPr>
+          <p:grpSp>
+            <p:nvGrpSpPr>
+              <p:cNvPr id="82" name="Grupo 81">
+                <a:extLst>
+                  <a:ext uri="{FF2B5EF4-FFF2-40B4-BE49-F238E27FC236}">
+                    <a16:creationId xmlns:a16="http://schemas.microsoft.com/office/drawing/2014/main" id="{2209BDF5-1F1C-EB21-1F55-F149046E2C1C}"/>
+                  </a:ext>
+                </a:extLst>
+              </p:cNvPr>
+              <p:cNvGrpSpPr/>
+              <p:nvPr/>
+            </p:nvGrpSpPr>
+            <p:grpSpPr>
+              <a:xfrm>
+                <a:off x="9422361" y="2064356"/>
+                <a:ext cx="1448125" cy="354470"/>
+                <a:chOff x="9422361" y="1672992"/>
+                <a:chExt cx="1448125" cy="354470"/>
+              </a:xfrm>
+            </p:grpSpPr>
+            <p:sp>
+              <p:nvSpPr>
+                <p:cNvPr id="84" name="Shape 8">
+                  <a:extLst>
+                    <a:ext uri="{FF2B5EF4-FFF2-40B4-BE49-F238E27FC236}">
+                      <a16:creationId xmlns:a16="http://schemas.microsoft.com/office/drawing/2014/main" id="{BF9B3F5F-9C19-D978-4D68-38D82698FB3C}"/>
+                    </a:ext>
+                  </a:extLst>
+                </p:cNvPr>
+                <p:cNvSpPr/>
+                <p:nvPr/>
+              </p:nvSpPr>
+              <p:spPr>
+                <a:xfrm>
+                  <a:off x="9422361" y="1672992"/>
+                  <a:ext cx="1442437" cy="354433"/>
+                </a:xfrm>
+                <a:prstGeom prst="roundRect">
+                  <a:avLst>
+                    <a:gd name="adj" fmla="val 9259"/>
+                  </a:avLst>
+                </a:prstGeom>
+                <a:solidFill>
+                  <a:schemeClr val="bg1"/>
+                </a:solidFill>
+                <a:ln w="19050">
+                  <a:solidFill>
+                    <a:srgbClr val="F9A825"/>
+                  </a:solidFill>
+                  <a:prstDash val="solid"/>
+                </a:ln>
+              </p:spPr>
+              <p:txBody>
+                <a:bodyPr/>
+                <a:lstStyle/>
+                <a:p>
+                  <a:endParaRPr lang="es-ES" dirty="0"/>
+                </a:p>
+              </p:txBody>
+            </p:sp>
+            <p:sp>
+              <p:nvSpPr>
+                <p:cNvPr id="85" name="Text 9">
+                  <a:extLst>
+                    <a:ext uri="{FF2B5EF4-FFF2-40B4-BE49-F238E27FC236}">
+                      <a16:creationId xmlns:a16="http://schemas.microsoft.com/office/drawing/2014/main" id="{A3C301E0-AA7F-6A31-2410-4F9DC17EE4FA}"/>
+                    </a:ext>
+                  </a:extLst>
+                </p:cNvPr>
+                <p:cNvSpPr/>
+                <p:nvPr/>
+              </p:nvSpPr>
+              <p:spPr>
+                <a:xfrm>
+                  <a:off x="9732467" y="1673029"/>
+                  <a:ext cx="1138019" cy="354433"/>
+                </a:xfrm>
+                <a:prstGeom prst="rect">
+                  <a:avLst/>
+                </a:prstGeom>
+                <a:noFill/>
+                <a:ln/>
+              </p:spPr>
+              <p:txBody>
+                <a:bodyPr wrap="square" lIns="25400" tIns="25400" rIns="25400" bIns="25400" rtlCol="0" anchor="ctr"/>
+                <a:lstStyle/>
+                <a:p>
+                  <a:pPr marL="0" indent="0" algn="ctr">
+                    <a:buNone/>
+                  </a:pPr>
+                  <a:r>
+                    <a:rPr lang="en-US" sz="1200" b="1" dirty="0" err="1">
+                      <a:solidFill>
+                        <a:srgbClr val="212121"/>
+                      </a:solidFill>
+                      <a:latin typeface="Calibri" pitchFamily="34" charset="0"/>
+                      <a:ea typeface="Calibri" pitchFamily="34" charset="-122"/>
+                      <a:cs typeface="Calibri" pitchFamily="34" charset="-120"/>
+                    </a:rPr>
+                    <a:t>osrm-clm</a:t>
+                  </a:r>
+                  <a:r>
+                    <a:rPr lang="en-US" sz="1200" b="1" dirty="0">
+                      <a:solidFill>
+                        <a:srgbClr val="212121"/>
+                      </a:solidFill>
+                      <a:latin typeface="Calibri" pitchFamily="34" charset="0"/>
+                      <a:ea typeface="Calibri" pitchFamily="34" charset="-122"/>
+                      <a:cs typeface="Calibri" pitchFamily="34" charset="-120"/>
+                    </a:rPr>
+                    <a:t>/foot</a:t>
+                  </a:r>
+                  <a:r>
+                    <a:rPr lang="en-US" sz="850" b="1" dirty="0">
+                      <a:solidFill>
+                        <a:srgbClr val="212121"/>
+                      </a:solidFill>
+                      <a:latin typeface="Calibri" pitchFamily="34" charset="0"/>
+                      <a:ea typeface="Calibri" pitchFamily="34" charset="-122"/>
+                      <a:cs typeface="Calibri" pitchFamily="34" charset="-120"/>
+                    </a:rPr>
+                    <a:t> </a:t>
+                  </a:r>
+                  <a:endParaRPr lang="en-US" sz="1200" dirty="0"/>
+                </a:p>
+              </p:txBody>
+            </p:sp>
+          </p:grpSp>
+          <p:pic>
+            <p:nvPicPr>
+              <p:cNvPr id="83" name="Gráfico 82" descr="Carpeta abierta con relleno sólido">
+                <a:extLst>
+                  <a:ext uri="{FF2B5EF4-FFF2-40B4-BE49-F238E27FC236}">
+                    <a16:creationId xmlns:a16="http://schemas.microsoft.com/office/drawing/2014/main" id="{1EBA487A-FD30-53B3-704B-CBF694EFE7A4}"/>
+                  </a:ext>
+                </a:extLst>
+              </p:cNvPr>
+              <p:cNvPicPr>
+                <a:picLocks noChangeAspect="1"/>
+              </p:cNvPicPr>
+              <p:nvPr/>
+            </p:nvPicPr>
+            <p:blipFill>
+              <a:blip>
+                <a:extLst>
+                  <a:ext uri="{96DAC541-7B7A-43D3-8B79-37D633B846F1}">
+                    <asvg:svgBlip xmlns:asvg="http://schemas.microsoft.com/office/drawing/2016/SVG/main" r:embed="rId9"/>
+                  </a:ext>
+                </a:extLst>
+              </a:blip>
+              <a:stretch>
+                <a:fillRect/>
+              </a:stretch>
+            </p:blipFill>
+            <p:spPr>
+              <a:xfrm>
+                <a:off x="9452936" y="2064390"/>
+                <a:ext cx="354433" cy="354433"/>
+              </a:xfrm>
+              <a:prstGeom prst="rect">
+                <a:avLst/>
+              </a:prstGeom>
+            </p:spPr>
+          </p:pic>
+        </p:grpSp>
+        <p:grpSp>
+          <p:nvGrpSpPr>
+            <p:cNvPr id="87" name="Grupo 86">
+              <a:extLst>
+                <a:ext uri="{FF2B5EF4-FFF2-40B4-BE49-F238E27FC236}">
+                  <a16:creationId xmlns:a16="http://schemas.microsoft.com/office/drawing/2014/main" id="{DCD40976-B053-84CC-570B-F7D3C682512D}"/>
+                </a:ext>
+              </a:extLst>
+            </p:cNvPr>
+            <p:cNvGrpSpPr/>
+            <p:nvPr/>
+          </p:nvGrpSpPr>
+          <p:grpSpPr>
+            <a:xfrm>
+              <a:off x="9151749" y="3206640"/>
+              <a:ext cx="1457223" cy="392638"/>
+              <a:chOff x="9422361" y="2109072"/>
+              <a:chExt cx="1367559" cy="354447"/>
+            </a:xfrm>
+          </p:grpSpPr>
+          <p:grpSp>
+            <p:nvGrpSpPr>
+              <p:cNvPr id="88" name="Grupo 87">
+                <a:extLst>
+                  <a:ext uri="{FF2B5EF4-FFF2-40B4-BE49-F238E27FC236}">
+                    <a16:creationId xmlns:a16="http://schemas.microsoft.com/office/drawing/2014/main" id="{748A6F56-265D-76C9-A882-3951B736EFB4}"/>
+                  </a:ext>
+                </a:extLst>
+              </p:cNvPr>
+              <p:cNvGrpSpPr/>
+              <p:nvPr/>
+            </p:nvGrpSpPr>
+            <p:grpSpPr>
+              <a:xfrm>
+                <a:off x="9422361" y="2109079"/>
+                <a:ext cx="1367559" cy="354440"/>
+                <a:chOff x="9422361" y="1717715"/>
+                <a:chExt cx="1367559" cy="354440"/>
+              </a:xfrm>
+            </p:grpSpPr>
+            <p:sp>
+              <p:nvSpPr>
+                <p:cNvPr id="90" name="Shape 8">
+                  <a:extLst>
+                    <a:ext uri="{FF2B5EF4-FFF2-40B4-BE49-F238E27FC236}">
+                      <a16:creationId xmlns:a16="http://schemas.microsoft.com/office/drawing/2014/main" id="{17A7E456-04F1-5B04-7699-CDF38CF77399}"/>
+                    </a:ext>
+                  </a:extLst>
+                </p:cNvPr>
+                <p:cNvSpPr/>
+                <p:nvPr/>
+              </p:nvSpPr>
+              <p:spPr>
+                <a:xfrm>
+                  <a:off x="9422361" y="1717715"/>
+                  <a:ext cx="1367559" cy="354433"/>
+                </a:xfrm>
+                <a:prstGeom prst="roundRect">
+                  <a:avLst>
+                    <a:gd name="adj" fmla="val 9259"/>
+                  </a:avLst>
+                </a:prstGeom>
+                <a:solidFill>
+                  <a:schemeClr val="bg1"/>
+                </a:solidFill>
+                <a:ln w="19050">
+                  <a:solidFill>
+                    <a:srgbClr val="F9A825"/>
+                  </a:solidFill>
+                  <a:prstDash val="solid"/>
+                </a:ln>
+              </p:spPr>
+              <p:txBody>
+                <a:bodyPr/>
+                <a:lstStyle/>
+                <a:p>
+                  <a:endParaRPr lang="es-ES" dirty="0"/>
+                </a:p>
+              </p:txBody>
+            </p:sp>
+            <p:sp>
+              <p:nvSpPr>
+                <p:cNvPr id="91" name="Text 9">
+                  <a:extLst>
+                    <a:ext uri="{FF2B5EF4-FFF2-40B4-BE49-F238E27FC236}">
+                      <a16:creationId xmlns:a16="http://schemas.microsoft.com/office/drawing/2014/main" id="{289914D6-2E95-554E-4BF5-2C4B2FF9AAEB}"/>
+                    </a:ext>
+                  </a:extLst>
+                </p:cNvPr>
+                <p:cNvSpPr/>
+                <p:nvPr/>
+              </p:nvSpPr>
+              <p:spPr>
+                <a:xfrm>
+                  <a:off x="9746228" y="1717722"/>
+                  <a:ext cx="1029271" cy="354433"/>
+                </a:xfrm>
+                <a:prstGeom prst="rect">
+                  <a:avLst/>
+                </a:prstGeom>
+                <a:noFill/>
+                <a:ln/>
+              </p:spPr>
+              <p:txBody>
+                <a:bodyPr wrap="square" lIns="25400" tIns="25400" rIns="25400" bIns="25400" rtlCol="0" anchor="ctr"/>
+                <a:lstStyle/>
+                <a:p>
+                  <a:pPr marL="0" indent="0" algn="ctr">
+                    <a:buNone/>
+                  </a:pPr>
+                  <a:r>
+                    <a:rPr lang="en-US" sz="1200" b="1" dirty="0" err="1">
+                      <a:solidFill>
+                        <a:srgbClr val="212121"/>
+                      </a:solidFill>
+                      <a:latin typeface="Calibri" pitchFamily="34" charset="0"/>
+                      <a:ea typeface="Calibri" pitchFamily="34" charset="-122"/>
+                      <a:cs typeface="Calibri" pitchFamily="34" charset="-120"/>
+                    </a:rPr>
+                    <a:t>osrm-clm</a:t>
+                  </a:r>
+                  <a:r>
+                    <a:rPr lang="en-US" sz="1200" b="1" dirty="0">
+                      <a:solidFill>
+                        <a:srgbClr val="212121"/>
+                      </a:solidFill>
+                      <a:latin typeface="Calibri" pitchFamily="34" charset="0"/>
+                      <a:ea typeface="Calibri" pitchFamily="34" charset="-122"/>
+                      <a:cs typeface="Calibri" pitchFamily="34" charset="-120"/>
+                    </a:rPr>
+                    <a:t>/car</a:t>
+                  </a:r>
+                  <a:r>
+                    <a:rPr lang="en-US" sz="850" b="1" dirty="0">
+                      <a:solidFill>
+                        <a:srgbClr val="212121"/>
+                      </a:solidFill>
+                      <a:latin typeface="Calibri" pitchFamily="34" charset="0"/>
+                      <a:ea typeface="Calibri" pitchFamily="34" charset="-122"/>
+                      <a:cs typeface="Calibri" pitchFamily="34" charset="-120"/>
+                    </a:rPr>
+                    <a:t> </a:t>
+                  </a:r>
+                  <a:endParaRPr lang="en-US" sz="1200" dirty="0"/>
+                </a:p>
+              </p:txBody>
+            </p:sp>
+          </p:grpSp>
+          <p:pic>
+            <p:nvPicPr>
+              <p:cNvPr id="89" name="Gráfico 88" descr="Carpeta abierta con relleno sólido">
+                <a:extLst>
+                  <a:ext uri="{FF2B5EF4-FFF2-40B4-BE49-F238E27FC236}">
+                    <a16:creationId xmlns:a16="http://schemas.microsoft.com/office/drawing/2014/main" id="{874C328E-3638-3D3E-627E-3BEA18A1DF43}"/>
+                  </a:ext>
+                </a:extLst>
+              </p:cNvPr>
+              <p:cNvPicPr>
+                <a:picLocks noChangeAspect="1"/>
+              </p:cNvPicPr>
+              <p:nvPr/>
+            </p:nvPicPr>
+            <p:blipFill>
+              <a:blip>
+                <a:extLst>
+                  <a:ext uri="{96DAC541-7B7A-43D3-8B79-37D633B846F1}">
+                    <asvg:svgBlip xmlns:asvg="http://schemas.microsoft.com/office/drawing/2016/SVG/main" r:embed="rId9"/>
+                  </a:ext>
+                </a:extLst>
+              </a:blip>
+              <a:stretch>
+                <a:fillRect/>
+              </a:stretch>
+            </p:blipFill>
+            <p:spPr>
+              <a:xfrm>
+                <a:off x="9452936" y="2109072"/>
+                <a:ext cx="354433" cy="354433"/>
+              </a:xfrm>
+              <a:prstGeom prst="rect">
+                <a:avLst/>
+              </a:prstGeom>
+            </p:spPr>
+          </p:pic>
+        </p:grpSp>
+      </p:grpSp>
+      <p:cxnSp>
+        <p:nvCxnSpPr>
+          <p:cNvPr id="93" name="Conector: angular 92">
+            <a:extLst>
+              <a:ext uri="{FF2B5EF4-FFF2-40B4-BE49-F238E27FC236}">
+                <a16:creationId xmlns:a16="http://schemas.microsoft.com/office/drawing/2014/main" id="{40F602C9-2739-5349-5D7C-16CBEF390644}"/>
+              </a:ext>
+            </a:extLst>
+          </p:cNvPr>
+          <p:cNvCxnSpPr>
+            <a:cxnSpLocks/>
+            <a:stCxn id="41" idx="3"/>
+            <a:endCxn id="90" idx="1"/>
+          </p:cNvCxnSpPr>
+          <p:nvPr/>
+        </p:nvCxnSpPr>
+        <p:spPr>
+          <a:xfrm>
+            <a:off x="8174369" y="3266230"/>
+            <a:ext cx="280014" cy="618"/>
+          </a:xfrm>
+          <a:prstGeom prst="bentConnector3">
+            <a:avLst/>
+          </a:prstGeom>
+          <a:ln>
+            <a:solidFill>
+              <a:srgbClr val="573FF6"/>
+            </a:solidFill>
+            <a:tailEnd type="triangle"/>
+          </a:ln>
+        </p:spPr>
+        <p:style>
+          <a:lnRef idx="2">
+            <a:schemeClr val="accent1"/>
+          </a:lnRef>
+          <a:fillRef idx="0">
+            <a:schemeClr val="accent1"/>
+          </a:fillRef>
+          <a:effectRef idx="1">
+            <a:schemeClr val="accent1"/>
+          </a:effectRef>
+          <a:fontRef idx="minor">
+            <a:schemeClr val="tx1"/>
+          </a:fontRef>
+        </p:style>
+      </p:cxnSp>
+      <p:cxnSp>
+        <p:nvCxnSpPr>
+          <p:cNvPr id="96" name="Conector: angular 95">
+            <a:extLst>
+              <a:ext uri="{FF2B5EF4-FFF2-40B4-BE49-F238E27FC236}">
+                <a16:creationId xmlns:a16="http://schemas.microsoft.com/office/drawing/2014/main" id="{22CFF8EE-F82B-F198-9649-BCFC6C02F8FB}"/>
+              </a:ext>
+            </a:extLst>
+          </p:cNvPr>
+          <p:cNvCxnSpPr>
+            <a:stCxn id="42" idx="3"/>
+            <a:endCxn id="79" idx="1"/>
+          </p:cNvCxnSpPr>
+          <p:nvPr/>
+        </p:nvCxnSpPr>
+        <p:spPr>
+          <a:xfrm flipV="1">
+            <a:off x="8180780" y="4039579"/>
+            <a:ext cx="266162" cy="795"/>
+          </a:xfrm>
+          <a:prstGeom prst="bentConnector3">
+            <a:avLst/>
+          </a:prstGeom>
+          <a:ln>
+            <a:solidFill>
+              <a:srgbClr val="26AA57"/>
+            </a:solidFill>
+            <a:tailEnd type="triangle"/>
+          </a:ln>
+        </p:spPr>
+        <p:style>
+          <a:lnRef idx="2">
+            <a:schemeClr val="accent1"/>
+          </a:lnRef>
+          <a:fillRef idx="0">
+            <a:schemeClr val="accent1"/>
+          </a:fillRef>
+          <a:effectRef idx="1">
+            <a:schemeClr val="accent1"/>
+          </a:effectRef>
+          <a:fontRef idx="minor">
+            <a:schemeClr val="tx1"/>
+          </a:fontRef>
+        </p:style>
+      </p:cxnSp>
+      <p:cxnSp>
+        <p:nvCxnSpPr>
+          <p:cNvPr id="98" name="Conector: angular 97">
+            <a:extLst>
+              <a:ext uri="{FF2B5EF4-FFF2-40B4-BE49-F238E27FC236}">
+                <a16:creationId xmlns:a16="http://schemas.microsoft.com/office/drawing/2014/main" id="{F05F9057-2F7B-BEAB-2968-56A41E4EB34C}"/>
+              </a:ext>
+            </a:extLst>
+          </p:cNvPr>
+          <p:cNvCxnSpPr>
+            <a:stCxn id="43" idx="3"/>
+            <a:endCxn id="84" idx="1"/>
+          </p:cNvCxnSpPr>
+          <p:nvPr/>
+        </p:nvCxnSpPr>
+        <p:spPr>
+          <a:xfrm flipV="1">
+            <a:off x="8163155" y="4806129"/>
+            <a:ext cx="297684" cy="2257"/>
+          </a:xfrm>
+          <a:prstGeom prst="bentConnector3">
+            <a:avLst/>
+          </a:prstGeom>
+          <a:ln>
+            <a:solidFill>
+              <a:srgbClr val="424242"/>
+            </a:solidFill>
+            <a:tailEnd type="triangle"/>
           </a:ln>
         </p:spPr>
         <p:style>
@@ -15804,374 +18266,853 @@
       </p:cxnSp>
       <p:sp>
         <p:nvSpPr>
-          <p:cNvPr id="5" name="Rectangle 4"/>
+          <p:cNvPr id="1418" name="Shape 53">
+            <a:extLst>
+              <a:ext uri="{FF2B5EF4-FFF2-40B4-BE49-F238E27FC236}">
+                <a16:creationId xmlns:a16="http://schemas.microsoft.com/office/drawing/2014/main" id="{4866AD10-8AFE-8E36-79C6-C45B8C42DE72}"/>
+              </a:ext>
+            </a:extLst>
+          </p:cNvPr>
           <p:cNvSpPr/>
           <p:nvPr/>
         </p:nvSpPr>
         <p:spPr>
           <a:xfrm>
-            <a:off x="1933357" y="1127729"/>
-            <a:ext cx="8324625" cy="807698"/>
+            <a:off x="10081511" y="1006580"/>
+            <a:ext cx="1967934" cy="5677564"/>
           </a:xfrm>
-          <a:prstGeom prst="rect">
-            <a:avLst/>
+          <a:prstGeom prst="roundRect">
+            <a:avLst>
+              <a:gd name="adj" fmla="val 7368"/>
+            </a:avLst>
           </a:prstGeom>
-          <a:noFill/>
-          <a:ln w="19050">
+          <a:solidFill>
+            <a:srgbClr val="FFFFFF"/>
+          </a:solidFill>
+          <a:ln w="25400">
             <a:solidFill>
-              <a:srgbClr val="FF8F00"/>
+              <a:srgbClr val="562C7A"/>
             </a:solidFill>
-            <a:prstDash val="dashDot"/>
+            <a:prstDash val="solid"/>
           </a:ln>
+          <a:effectLst>
+            <a:outerShdw blurRad="76200" dist="25400" dir="8100000" algn="bl" rotWithShape="0">
+              <a:srgbClr val="000000">
+                <a:alpha val="10000"/>
+              </a:srgbClr>
+            </a:outerShdw>
+          </a:effectLst>
         </p:spPr>
-        <p:style>
-          <a:lnRef idx="1">
-            <a:schemeClr val="accent1"/>
-          </a:lnRef>
-          <a:fillRef idx="3">
-            <a:schemeClr val="accent1"/>
-          </a:fillRef>
-          <a:effectRef idx="2">
-            <a:schemeClr val="accent1"/>
-          </a:effectRef>
-          <a:fontRef idx="minor">
-            <a:schemeClr val="lt1"/>
-          </a:fontRef>
-        </p:style>
         <p:txBody>
-          <a:bodyPr rtlCol="0" anchor="ctr"/>
+          <a:bodyPr anchor="t"/>
           <a:lstStyle/>
           <a:p>
             <a:pPr algn="ctr"/>
-            <a:endParaRPr sz="1905"/>
+            <a:r>
+              <a:rPr lang="es-ES" sz="1600" b="1" dirty="0" err="1">
+                <a:highlight>
+                  <a:srgbClr val="FFFDE7"/>
+                </a:highlight>
+                <a:latin typeface="Consolas" panose="020B0609020204030204" pitchFamily="49" charset="0"/>
+                <a:cs typeface="Courier New" panose="02070309020205020404" pitchFamily="49" charset="0"/>
+              </a:rPr>
+              <a:t>osrm-routed</a:t>
+            </a:r>
+            <a:endParaRPr lang="es-ES" sz="1600" b="1" dirty="0">
+              <a:highlight>
+                <a:srgbClr val="FFFDE7"/>
+              </a:highlight>
+              <a:latin typeface="Consolas" panose="020B0609020204030204" pitchFamily="49" charset="0"/>
+              <a:cs typeface="Courier New" panose="02070309020205020404" pitchFamily="49" charset="0"/>
+            </a:endParaRPr>
+          </a:p>
+          <a:p>
+            <a:endParaRPr lang="es-ES" sz="1100" dirty="0">
+              <a:latin typeface="Consolas" panose="020B0609020204030204" pitchFamily="49" charset="0"/>
+              <a:cs typeface="Courier New" panose="02070309020205020404" pitchFamily="49" charset="0"/>
+            </a:endParaRPr>
+          </a:p>
+          <a:p>
+            <a:r>
+              <a:rPr lang="es-ES" sz="1600" dirty="0">
+                <a:latin typeface="Calibri" panose="020F0502020204030204" pitchFamily="34" charset="0"/>
+                <a:ea typeface="Calibri" panose="020F0502020204030204" pitchFamily="34" charset="0"/>
+                <a:cs typeface="Calibri" panose="020F0502020204030204" pitchFamily="34" charset="0"/>
+              </a:rPr>
+              <a:t>Lee los artefactos preprocesados y</a:t>
+            </a:r>
+            <a:r>
+              <a:rPr lang="es-ES" sz="1600" b="1" dirty="0">
+                <a:latin typeface="Calibri" panose="020F0502020204030204" pitchFamily="34" charset="0"/>
+                <a:ea typeface="Calibri" panose="020F0502020204030204" pitchFamily="34" charset="0"/>
+                <a:cs typeface="Calibri" panose="020F0502020204030204" pitchFamily="34" charset="0"/>
+              </a:rPr>
+              <a:t> despliega una API HTTP de rutas.</a:t>
+            </a:r>
+            <a:endParaRPr lang="es-ES" sz="1600" dirty="0">
+              <a:latin typeface="Calibri" panose="020F0502020204030204" pitchFamily="34" charset="0"/>
+              <a:ea typeface="Calibri" panose="020F0502020204030204" pitchFamily="34" charset="0"/>
+              <a:cs typeface="Calibri" panose="020F0502020204030204" pitchFamily="34" charset="0"/>
+            </a:endParaRPr>
           </a:p>
         </p:txBody>
       </p:sp>
       <p:sp>
         <p:nvSpPr>
-          <p:cNvPr id="6" name="TextBox 5"/>
-          <p:cNvSpPr txBox="1"/>
-          <p:nvPr/>
-        </p:nvSpPr>
-        <p:spPr>
-          <a:xfrm>
-            <a:off x="5080808" y="998193"/>
-            <a:ext cx="2029722" cy="263277"/>
-          </a:xfrm>
-          <a:prstGeom prst="rect">
-            <a:avLst/>
-          </a:prstGeom>
-          <a:noFill/>
-        </p:spPr>
-        <p:txBody>
-          <a:bodyPr wrap="none">
-            <a:spAutoFit/>
-          </a:bodyPr>
-          <a:lstStyle/>
-          <a:p>
-            <a:pPr algn="ctr"/>
-            <a:r>
-              <a:rPr sz="1111" b="1" i="1">
-                <a:solidFill>
-                  <a:srgbClr val="FF8F00"/>
-                </a:solidFill>
-                <a:latin typeface="Calibri"/>
-              </a:rPr>
-              <a:t>asyncio.gather  —  concurrente</a:t>
-            </a:r>
-          </a:p>
-        </p:txBody>
-      </p:sp>
-      <p:sp>
-        <p:nvSpPr>
-          <p:cNvPr id="7" name="Rounded Rectangle 6"/>
+          <p:cNvPr id="1412" name="Shape 53">
+            <a:extLst>
+              <a:ext uri="{FF2B5EF4-FFF2-40B4-BE49-F238E27FC236}">
+                <a16:creationId xmlns:a16="http://schemas.microsoft.com/office/drawing/2014/main" id="{BFA9CF01-62A7-084B-72DB-ED11EC62053B}"/>
+              </a:ext>
+            </a:extLst>
+          </p:cNvPr>
           <p:cNvSpPr/>
           <p:nvPr/>
         </p:nvSpPr>
         <p:spPr>
           <a:xfrm>
-            <a:off x="2017175" y="1211548"/>
-            <a:ext cx="1904949" cy="640063"/>
+            <a:off x="10275650" y="2777070"/>
+            <a:ext cx="1724363" cy="742973"/>
           </a:xfrm>
           <a:prstGeom prst="roundRect">
             <a:avLst>
-              <a:gd name="adj" fmla="val 16000"/>
+              <a:gd name="adj" fmla="val 7368"/>
             </a:avLst>
           </a:prstGeom>
           <a:solidFill>
-            <a:srgbClr val="FFF7ED"/>
+            <a:srgbClr val="FFFFFF"/>
           </a:solidFill>
-          <a:ln w="31750">
+          <a:ln w="25400">
             <a:solidFill>
-              <a:srgbClr val="FF8F00"/>
+              <a:srgbClr val="573FF6"/>
             </a:solidFill>
+            <a:prstDash val="solid"/>
           </a:ln>
+          <a:effectLst>
+            <a:outerShdw blurRad="76200" dist="25400" dir="8100000" algn="bl" rotWithShape="0">
+              <a:srgbClr val="000000">
+                <a:alpha val="10000"/>
+              </a:srgbClr>
+            </a:outerShdw>
+          </a:effectLst>
         </p:spPr>
-        <p:style>
-          <a:lnRef idx="1">
-            <a:schemeClr val="accent1"/>
-          </a:lnRef>
-          <a:fillRef idx="3">
-            <a:schemeClr val="accent1"/>
-          </a:fillRef>
-          <a:effectRef idx="2">
-            <a:schemeClr val="accent1"/>
-          </a:effectRef>
-          <a:fontRef idx="minor">
-            <a:schemeClr val="lt1"/>
-          </a:fontRef>
-        </p:style>
         <p:txBody>
-          <a:bodyPr wrap="square" lIns="114297" tIns="30479" rIns="114297" bIns="30479" rtlCol="0" anchor="ctr"/>
+          <a:bodyPr/>
           <a:lstStyle/>
           <a:p>
             <a:pPr algn="ctr"/>
             <a:r>
-              <a:rPr sz="1323" b="1">
-                <a:solidFill>
-                  <a:srgbClr val="000000"/>
-                </a:solidFill>
-                <a:latin typeface="Calibri"/>
+              <a:rPr lang="es-ES" sz="1400" b="1" dirty="0">
+                <a:latin typeface="Consolas" panose="020B0609020204030204" pitchFamily="49" charset="0"/>
+                <a:cs typeface="Courier New" panose="02070309020205020404" pitchFamily="49" charset="0"/>
               </a:rPr>
-              <a:t>OSRM car</a:t>
+              <a:t> </a:t>
             </a:r>
+            <a:r>
+              <a:rPr lang="es-ES" sz="1400" b="1" dirty="0" err="1">
+                <a:latin typeface="Consolas" panose="020B0609020204030204" pitchFamily="49" charset="0"/>
+                <a:cs typeface="Courier New" panose="02070309020205020404" pitchFamily="49" charset="0"/>
+              </a:rPr>
+              <a:t>osrm-routed</a:t>
+            </a:r>
+            <a:endParaRPr lang="es-ES" sz="1400" b="1" dirty="0">
+              <a:latin typeface="Consolas" panose="020B0609020204030204" pitchFamily="49" charset="0"/>
+              <a:cs typeface="Courier New" panose="02070309020205020404" pitchFamily="49" charset="0"/>
+            </a:endParaRPr>
           </a:p>
           <a:p>
             <a:pPr algn="ctr"/>
             <a:r>
-              <a:rPr sz="1164">
-                <a:solidFill>
-                  <a:srgbClr val="444444"/>
-                </a:solidFill>
-                <a:latin typeface="Calibri"/>
+              <a:rPr lang="es-ES" sz="1400" dirty="0">
+                <a:latin typeface="Consolas" panose="020B0609020204030204" pitchFamily="49" charset="0"/>
+                <a:cs typeface="Courier New" panose="02070309020205020404" pitchFamily="49" charset="0"/>
+              </a:rPr>
+              <a:t>--</a:t>
+            </a:r>
+            <a:r>
+              <a:rPr lang="es-ES" sz="1400" dirty="0" err="1">
+                <a:latin typeface="Consolas" panose="020B0609020204030204" pitchFamily="49" charset="0"/>
+                <a:cs typeface="Courier New" panose="02070309020205020404" pitchFamily="49" charset="0"/>
+              </a:rPr>
+              <a:t>algorithm</a:t>
+            </a:r>
+            <a:r>
+              <a:rPr lang="es-ES" sz="1400" dirty="0">
+                <a:latin typeface="Consolas" panose="020B0609020204030204" pitchFamily="49" charset="0"/>
+                <a:cs typeface="Courier New" panose="02070309020205020404" pitchFamily="49" charset="0"/>
+              </a:rPr>
+              <a:t> </a:t>
+            </a:r>
+            <a:r>
+              <a:rPr lang="es-ES" sz="1400" dirty="0" err="1">
+                <a:latin typeface="Consolas" panose="020B0609020204030204" pitchFamily="49" charset="0"/>
+                <a:cs typeface="Courier New" panose="02070309020205020404" pitchFamily="49" charset="0"/>
+              </a:rPr>
+              <a:t>mld</a:t>
+            </a:r>
+            <a:br>
+              <a:rPr lang="es-ES" sz="1400" dirty="0">
+                <a:latin typeface="Consolas" panose="020B0609020204030204" pitchFamily="49" charset="0"/>
+                <a:cs typeface="Courier New" panose="02070309020205020404" pitchFamily="49" charset="0"/>
+              </a:rPr>
+            </a:br>
+            <a:r>
+              <a:rPr lang="es-ES" sz="1400" dirty="0">
+                <a:latin typeface="Consolas" panose="020B0609020204030204" pitchFamily="49" charset="0"/>
+                <a:cs typeface="Courier New" panose="02070309020205020404" pitchFamily="49" charset="0"/>
               </a:rPr>
               <a:t>:5000</a:t>
             </a:r>
           </a:p>
         </p:txBody>
       </p:sp>
-      <p:sp>
-        <p:nvSpPr>
-          <p:cNvPr id="8" name="Rounded Rectangle 7"/>
-          <p:cNvSpPr/>
+      <p:grpSp>
+        <p:nvGrpSpPr>
+          <p:cNvPr id="1159" name="Grupo 1158">
+            <a:extLst>
+              <a:ext uri="{FF2B5EF4-FFF2-40B4-BE49-F238E27FC236}">
+                <a16:creationId xmlns:a16="http://schemas.microsoft.com/office/drawing/2014/main" id="{3E0E50B3-1C7A-17DA-A913-20B8B606F543}"/>
+              </a:ext>
+            </a:extLst>
+          </p:cNvPr>
+          <p:cNvGrpSpPr/>
           <p:nvPr/>
-        </p:nvSpPr>
-        <p:spPr>
+        </p:nvGrpSpPr>
+        <p:grpSpPr>
           <a:xfrm>
-            <a:off x="4101188" y="1211548"/>
-            <a:ext cx="1904949" cy="640063"/>
+            <a:off x="9350874" y="356145"/>
+            <a:ext cx="1277377" cy="409872"/>
+            <a:chOff x="7027680" y="2689310"/>
+            <a:chExt cx="1277377" cy="409872"/>
           </a:xfrm>
-          <a:prstGeom prst="roundRect">
-            <a:avLst>
-              <a:gd name="adj" fmla="val 16000"/>
-            </a:avLst>
-          </a:prstGeom>
-          <a:solidFill>
-            <a:srgbClr val="FFF7ED"/>
-          </a:solidFill>
-          <a:ln w="31750">
+        </p:grpSpPr>
+        <p:sp>
+          <p:nvSpPr>
+            <p:cNvPr id="1160" name="Shape 53">
+              <a:extLst>
+                <a:ext uri="{FF2B5EF4-FFF2-40B4-BE49-F238E27FC236}">
+                  <a16:creationId xmlns:a16="http://schemas.microsoft.com/office/drawing/2014/main" id="{82891983-7891-FB1F-8A51-D0CB1C187A8B}"/>
+                </a:ext>
+              </a:extLst>
+            </p:cNvPr>
+            <p:cNvSpPr/>
+            <p:nvPr/>
+          </p:nvSpPr>
+          <p:spPr>
+            <a:xfrm>
+              <a:off x="7027680" y="2689310"/>
+              <a:ext cx="1277377" cy="409872"/>
+            </a:xfrm>
+            <a:prstGeom prst="roundRect">
+              <a:avLst>
+                <a:gd name="adj" fmla="val 7368"/>
+              </a:avLst>
+            </a:prstGeom>
             <a:solidFill>
-              <a:srgbClr val="FF8F00"/>
+              <a:srgbClr val="FFFFFF"/>
             </a:solidFill>
-          </a:ln>
-        </p:spPr>
-        <p:style>
-          <a:lnRef idx="1">
-            <a:schemeClr val="accent1"/>
-          </a:lnRef>
-          <a:fillRef idx="3">
-            <a:schemeClr val="accent1"/>
-          </a:fillRef>
-          <a:effectRef idx="2">
-            <a:schemeClr val="accent1"/>
-          </a:effectRef>
-          <a:fontRef idx="minor">
-            <a:schemeClr val="lt1"/>
-          </a:fontRef>
-        </p:style>
-        <p:txBody>
-          <a:bodyPr wrap="square" lIns="114297" tIns="30479" rIns="114297" bIns="30479" rtlCol="0" anchor="ctr"/>
-          <a:lstStyle/>
-          <a:p>
-            <a:pPr algn="ctr"/>
-            <a:r>
-              <a:rPr sz="1323" b="1">
+            <a:ln w="25400">
+              <a:solidFill>
+                <a:srgbClr val="16A34A"/>
+              </a:solidFill>
+              <a:prstDash val="solid"/>
+            </a:ln>
+            <a:effectLst>
+              <a:outerShdw blurRad="76200" dist="25400" dir="8100000" algn="bl" rotWithShape="0">
+                <a:srgbClr val="000000">
+                  <a:alpha val="10000"/>
+                </a:srgbClr>
+              </a:outerShdw>
+            </a:effectLst>
+          </p:spPr>
+          <p:txBody>
+            <a:bodyPr/>
+            <a:lstStyle/>
+            <a:p>
+              <a:endParaRPr lang="es-ES" dirty="0">
                 <a:solidFill>
-                  <a:srgbClr val="000000"/>
+                  <a:srgbClr val="26AA57"/>
                 </a:solidFill>
-                <a:latin typeface="Calibri"/>
-              </a:rPr>
-              <a:t>OSRM bike</a:t>
-            </a:r>
-          </a:p>
-          <a:p>
-            <a:pPr algn="ctr"/>
-            <a:r>
-              <a:rPr sz="1164">
-                <a:solidFill>
-                  <a:srgbClr val="444444"/>
-                </a:solidFill>
-                <a:latin typeface="Calibri"/>
-              </a:rPr>
-              <a:t>:5001</a:t>
-            </a:r>
-          </a:p>
-        </p:txBody>
-      </p:sp>
-      <p:sp>
-        <p:nvSpPr>
-          <p:cNvPr id="9" name="Rounded Rectangle 8"/>
-          <p:cNvSpPr/>
+              </a:endParaRPr>
+            </a:p>
+          </p:txBody>
+        </p:sp>
+        <p:pic>
+          <p:nvPicPr>
+            <p:cNvPr id="1161" name="Image 9" descr="Triciclo con relleno sólido">
+              <a:extLst>
+                <a:ext uri="{FF2B5EF4-FFF2-40B4-BE49-F238E27FC236}">
+                  <a16:creationId xmlns:a16="http://schemas.microsoft.com/office/drawing/2014/main" id="{08CDDB9C-8738-167A-5A65-86320442A97E}"/>
+                </a:ext>
+              </a:extLst>
+            </p:cNvPr>
+            <p:cNvPicPr>
+              <a:picLocks noChangeAspect="1"/>
+            </p:cNvPicPr>
+            <p:nvPr/>
+          </p:nvPicPr>
+          <p:blipFill>
+            <a:blip>
+              <a:extLst>
+                <a:ext uri="{96DAC541-7B7A-43D3-8B79-37D633B846F1}">
+                  <asvg:svgBlip xmlns:asvg="http://schemas.microsoft.com/office/drawing/2016/SVG/main" r:embed="rId10"/>
+                </a:ext>
+              </a:extLst>
+            </a:blip>
+            <a:srcRect/>
+            <a:stretch/>
+          </p:blipFill>
+          <p:spPr>
+            <a:xfrm>
+              <a:off x="7123176" y="2747264"/>
+              <a:ext cx="292608" cy="292608"/>
+            </a:xfrm>
+            <a:prstGeom prst="rect">
+              <a:avLst/>
+            </a:prstGeom>
+          </p:spPr>
+        </p:pic>
+        <p:sp>
+          <p:nvSpPr>
+            <p:cNvPr id="1162" name="Text 54">
+              <a:extLst>
+                <a:ext uri="{FF2B5EF4-FFF2-40B4-BE49-F238E27FC236}">
+                  <a16:creationId xmlns:a16="http://schemas.microsoft.com/office/drawing/2014/main" id="{11D00774-8AAB-C9D9-B39B-7E50BE0DC9F7}"/>
+                </a:ext>
+              </a:extLst>
+            </p:cNvPr>
+            <p:cNvSpPr/>
+            <p:nvPr/>
+          </p:nvSpPr>
+          <p:spPr>
+            <a:xfrm>
+              <a:off x="7488936" y="2723926"/>
+              <a:ext cx="661416" cy="196118"/>
+            </a:xfrm>
+            <a:prstGeom prst="rect">
+              <a:avLst/>
+            </a:prstGeom>
+            <a:noFill/>
+            <a:ln/>
+          </p:spPr>
+          <p:txBody>
+            <a:bodyPr wrap="square" lIns="0" tIns="0" rIns="0" bIns="0" rtlCol="0" anchor="ctr"/>
+            <a:lstStyle/>
+            <a:p>
+              <a:pPr marL="0" indent="0" algn="l">
+                <a:buNone/>
+              </a:pPr>
+              <a:r>
+                <a:rPr lang="en-US" sz="1100" b="1" dirty="0" err="1">
+                  <a:solidFill>
+                    <a:srgbClr val="212121"/>
+                  </a:solidFill>
+                  <a:latin typeface="Calibri" pitchFamily="34" charset="0"/>
+                  <a:ea typeface="Calibri" pitchFamily="34" charset="-122"/>
+                  <a:cs typeface="Calibri" pitchFamily="34" charset="-120"/>
+                </a:rPr>
+                <a:t>osrm</a:t>
+              </a:r>
+              <a:r>
+                <a:rPr lang="en-US" sz="1100" b="1" dirty="0">
+                  <a:solidFill>
+                    <a:srgbClr val="212121"/>
+                  </a:solidFill>
+                  <a:latin typeface="Calibri" pitchFamily="34" charset="0"/>
+                  <a:ea typeface="Calibri" pitchFamily="34" charset="-122"/>
+                  <a:cs typeface="Calibri" pitchFamily="34" charset="-120"/>
+                </a:rPr>
+                <a:t>-bike</a:t>
+              </a:r>
+              <a:endParaRPr lang="en-US" sz="1100" dirty="0"/>
+            </a:p>
+          </p:txBody>
+        </p:sp>
+        <p:sp>
+          <p:nvSpPr>
+            <p:cNvPr id="1163" name="Text 55">
+              <a:extLst>
+                <a:ext uri="{FF2B5EF4-FFF2-40B4-BE49-F238E27FC236}">
+                  <a16:creationId xmlns:a16="http://schemas.microsoft.com/office/drawing/2014/main" id="{35844A74-B223-B0ED-FAA0-030B7CBF3FF4}"/>
+                </a:ext>
+              </a:extLst>
+            </p:cNvPr>
+            <p:cNvSpPr/>
+            <p:nvPr/>
+          </p:nvSpPr>
+          <p:spPr>
+            <a:xfrm>
+              <a:off x="7430593" y="2886593"/>
+              <a:ext cx="365760" cy="201168"/>
+            </a:xfrm>
+            <a:prstGeom prst="rect">
+              <a:avLst/>
+            </a:prstGeom>
+            <a:noFill/>
+            <a:ln/>
+          </p:spPr>
+          <p:txBody>
+            <a:bodyPr wrap="square" lIns="0" tIns="0" rIns="0" bIns="0" rtlCol="0" anchor="ctr"/>
+            <a:lstStyle/>
+            <a:p>
+              <a:pPr marL="0" indent="0" algn="ctr">
+                <a:buNone/>
+              </a:pPr>
+              <a:r>
+                <a:rPr lang="en-US" sz="900" dirty="0">
+                  <a:solidFill>
+                    <a:srgbClr val="777777"/>
+                  </a:solidFill>
+                  <a:latin typeface="Calibri" pitchFamily="34" charset="0"/>
+                  <a:ea typeface="Calibri" pitchFamily="34" charset="-122"/>
+                  <a:cs typeface="Calibri" pitchFamily="34" charset="-120"/>
+                </a:rPr>
+                <a:t>:5001</a:t>
+              </a:r>
+              <a:endParaRPr lang="en-US" sz="900" dirty="0"/>
+            </a:p>
+          </p:txBody>
+        </p:sp>
+      </p:grpSp>
+      <p:grpSp>
+        <p:nvGrpSpPr>
+          <p:cNvPr id="1164" name="Grupo 1163">
+            <a:extLst>
+              <a:ext uri="{FF2B5EF4-FFF2-40B4-BE49-F238E27FC236}">
+                <a16:creationId xmlns:a16="http://schemas.microsoft.com/office/drawing/2014/main" id="{EC38A0BE-AAB8-8416-6AED-6AF6283AEE30}"/>
+              </a:ext>
+            </a:extLst>
+          </p:cNvPr>
+          <p:cNvGrpSpPr/>
           <p:nvPr/>
-        </p:nvSpPr>
-        <p:spPr>
+        </p:nvGrpSpPr>
+        <p:grpSpPr>
           <a:xfrm>
-            <a:off x="6185202" y="1211548"/>
-            <a:ext cx="1904949" cy="640063"/>
+            <a:off x="10760067" y="362663"/>
+            <a:ext cx="1277377" cy="403354"/>
+            <a:chOff x="7013246" y="2749412"/>
+            <a:chExt cx="1277377" cy="403354"/>
           </a:xfrm>
-          <a:prstGeom prst="roundRect">
-            <a:avLst>
-              <a:gd name="adj" fmla="val 16000"/>
-            </a:avLst>
-          </a:prstGeom>
-          <a:solidFill>
-            <a:srgbClr val="FFF7ED"/>
-          </a:solidFill>
-          <a:ln w="31750">
+        </p:grpSpPr>
+        <p:sp>
+          <p:nvSpPr>
+            <p:cNvPr id="1165" name="Shape 53">
+              <a:extLst>
+                <a:ext uri="{FF2B5EF4-FFF2-40B4-BE49-F238E27FC236}">
+                  <a16:creationId xmlns:a16="http://schemas.microsoft.com/office/drawing/2014/main" id="{C8071431-8609-81E3-661E-9270FBBDBCBD}"/>
+                </a:ext>
+              </a:extLst>
+            </p:cNvPr>
+            <p:cNvSpPr/>
+            <p:nvPr/>
+          </p:nvSpPr>
+          <p:spPr>
+            <a:xfrm>
+              <a:off x="7013246" y="2749412"/>
+              <a:ext cx="1277377" cy="403354"/>
+            </a:xfrm>
+            <a:prstGeom prst="roundRect">
+              <a:avLst>
+                <a:gd name="adj" fmla="val 7368"/>
+              </a:avLst>
+            </a:prstGeom>
             <a:solidFill>
-              <a:srgbClr val="FF8F00"/>
+              <a:srgbClr val="FFFFFF"/>
             </a:solidFill>
-          </a:ln>
-        </p:spPr>
-        <p:style>
-          <a:lnRef idx="1">
-            <a:schemeClr val="accent1"/>
-          </a:lnRef>
-          <a:fillRef idx="3">
-            <a:schemeClr val="accent1"/>
-          </a:fillRef>
-          <a:effectRef idx="2">
-            <a:schemeClr val="accent1"/>
-          </a:effectRef>
-          <a:fontRef idx="minor">
-            <a:schemeClr val="lt1"/>
-          </a:fontRef>
-        </p:style>
-        <p:txBody>
-          <a:bodyPr wrap="square" lIns="114297" tIns="30479" rIns="114297" bIns="30479" rtlCol="0" anchor="ctr"/>
-          <a:lstStyle/>
-          <a:p>
-            <a:pPr algn="ctr"/>
-            <a:r>
-              <a:rPr sz="1323" b="1">
-                <a:solidFill>
-                  <a:srgbClr val="000000"/>
-                </a:solidFill>
-                <a:latin typeface="Calibri"/>
-              </a:rPr>
-              <a:t>OSRM foot</a:t>
-            </a:r>
-          </a:p>
-          <a:p>
-            <a:pPr algn="ctr"/>
-            <a:r>
-              <a:rPr sz="1164">
-                <a:solidFill>
-                  <a:srgbClr val="444444"/>
-                </a:solidFill>
-                <a:latin typeface="Calibri"/>
-              </a:rPr>
-              <a:t>:5002</a:t>
-            </a:r>
-          </a:p>
-        </p:txBody>
-      </p:sp>
-      <p:sp>
-        <p:nvSpPr>
-          <p:cNvPr id="10" name="Rounded Rectangle 9"/>
-          <p:cNvSpPr/>
+            <a:ln w="25400">
+              <a:solidFill>
+                <a:srgbClr val="555555"/>
+              </a:solidFill>
+              <a:prstDash val="solid"/>
+            </a:ln>
+            <a:effectLst>
+              <a:outerShdw blurRad="76200" dist="25400" dir="8100000" algn="bl" rotWithShape="0">
+                <a:srgbClr val="000000">
+                  <a:alpha val="10000"/>
+                </a:srgbClr>
+              </a:outerShdw>
+            </a:effectLst>
+          </p:spPr>
+          <p:txBody>
+            <a:bodyPr/>
+            <a:lstStyle/>
+            <a:p>
+              <a:endParaRPr lang="es-ES" dirty="0"/>
+            </a:p>
+          </p:txBody>
+        </p:sp>
+        <p:pic>
+          <p:nvPicPr>
+            <p:cNvPr id="1166" name="Image 9" descr="Andar con relleno sólido">
+              <a:extLst>
+                <a:ext uri="{FF2B5EF4-FFF2-40B4-BE49-F238E27FC236}">
+                  <a16:creationId xmlns:a16="http://schemas.microsoft.com/office/drawing/2014/main" id="{A3B090C0-A7CD-B6BA-0EE0-147E7820EF7E}"/>
+                </a:ext>
+              </a:extLst>
+            </p:cNvPr>
+            <p:cNvPicPr>
+              <a:picLocks noChangeAspect="1"/>
+            </p:cNvPicPr>
+            <p:nvPr/>
+          </p:nvPicPr>
+          <p:blipFill>
+            <a:blip>
+              <a:extLst>
+                <a:ext uri="{96DAC541-7B7A-43D3-8B79-37D633B846F1}">
+                  <asvg:svgBlip xmlns:asvg="http://schemas.microsoft.com/office/drawing/2016/SVG/main" r:embed="rId11"/>
+                </a:ext>
+              </a:extLst>
+            </a:blip>
+            <a:srcRect/>
+            <a:stretch/>
+          </p:blipFill>
+          <p:spPr>
+            <a:xfrm>
+              <a:off x="7123176" y="2798064"/>
+              <a:ext cx="292608" cy="292608"/>
+            </a:xfrm>
+            <a:prstGeom prst="rect">
+              <a:avLst/>
+            </a:prstGeom>
+          </p:spPr>
+        </p:pic>
+        <p:sp>
+          <p:nvSpPr>
+            <p:cNvPr id="1167" name="Text 54">
+              <a:extLst>
+                <a:ext uri="{FF2B5EF4-FFF2-40B4-BE49-F238E27FC236}">
+                  <a16:creationId xmlns:a16="http://schemas.microsoft.com/office/drawing/2014/main" id="{F349B4BF-5F21-3970-B709-D656CAFB3290}"/>
+                </a:ext>
+              </a:extLst>
+            </p:cNvPr>
+            <p:cNvSpPr/>
+            <p:nvPr/>
+          </p:nvSpPr>
+          <p:spPr>
+            <a:xfrm>
+              <a:off x="7488936" y="2774726"/>
+              <a:ext cx="661416" cy="196118"/>
+            </a:xfrm>
+            <a:prstGeom prst="rect">
+              <a:avLst/>
+            </a:prstGeom>
+            <a:noFill/>
+            <a:ln/>
+          </p:spPr>
+          <p:txBody>
+            <a:bodyPr wrap="square" lIns="0" tIns="0" rIns="0" bIns="0" rtlCol="0" anchor="ctr"/>
+            <a:lstStyle/>
+            <a:p>
+              <a:pPr marL="0" indent="0" algn="l">
+                <a:buNone/>
+              </a:pPr>
+              <a:r>
+                <a:rPr lang="en-US" sz="1100" b="1" dirty="0" err="1">
+                  <a:solidFill>
+                    <a:srgbClr val="212121"/>
+                  </a:solidFill>
+                  <a:latin typeface="Calibri" pitchFamily="34" charset="0"/>
+                  <a:ea typeface="Calibri" pitchFamily="34" charset="-122"/>
+                  <a:cs typeface="Calibri" pitchFamily="34" charset="-120"/>
+                </a:rPr>
+                <a:t>osrm</a:t>
+              </a:r>
+              <a:r>
+                <a:rPr lang="en-US" sz="1100" b="1" dirty="0">
+                  <a:solidFill>
+                    <a:srgbClr val="212121"/>
+                  </a:solidFill>
+                  <a:latin typeface="Calibri" pitchFamily="34" charset="0"/>
+                  <a:ea typeface="Calibri" pitchFamily="34" charset="-122"/>
+                  <a:cs typeface="Calibri" pitchFamily="34" charset="-120"/>
+                </a:rPr>
+                <a:t>-foot</a:t>
+              </a:r>
+              <a:endParaRPr lang="en-US" sz="1100" dirty="0"/>
+            </a:p>
+          </p:txBody>
+        </p:sp>
+        <p:sp>
+          <p:nvSpPr>
+            <p:cNvPr id="1168" name="Text 55">
+              <a:extLst>
+                <a:ext uri="{FF2B5EF4-FFF2-40B4-BE49-F238E27FC236}">
+                  <a16:creationId xmlns:a16="http://schemas.microsoft.com/office/drawing/2014/main" id="{B753ED22-6648-A820-EB53-5A560A1E4FE8}"/>
+                </a:ext>
+              </a:extLst>
+            </p:cNvPr>
+            <p:cNvSpPr/>
+            <p:nvPr/>
+          </p:nvSpPr>
+          <p:spPr>
+            <a:xfrm>
+              <a:off x="7430593" y="2937393"/>
+              <a:ext cx="365760" cy="201168"/>
+            </a:xfrm>
+            <a:prstGeom prst="rect">
+              <a:avLst/>
+            </a:prstGeom>
+            <a:noFill/>
+            <a:ln/>
+          </p:spPr>
+          <p:txBody>
+            <a:bodyPr wrap="square" lIns="0" tIns="0" rIns="0" bIns="0" rtlCol="0" anchor="ctr"/>
+            <a:lstStyle/>
+            <a:p>
+              <a:pPr marL="0" indent="0" algn="ctr">
+                <a:buNone/>
+              </a:pPr>
+              <a:r>
+                <a:rPr lang="en-US" sz="900" dirty="0">
+                  <a:solidFill>
+                    <a:srgbClr val="777777"/>
+                  </a:solidFill>
+                  <a:latin typeface="Calibri" pitchFamily="34" charset="0"/>
+                  <a:ea typeface="Calibri" pitchFamily="34" charset="-122"/>
+                  <a:cs typeface="Calibri" pitchFamily="34" charset="-120"/>
+                </a:rPr>
+                <a:t>:5002</a:t>
+              </a:r>
+              <a:endParaRPr lang="en-US" sz="900" dirty="0"/>
+            </a:p>
+          </p:txBody>
+        </p:sp>
+      </p:grpSp>
+      <p:grpSp>
+        <p:nvGrpSpPr>
+          <p:cNvPr id="1174" name="Grupo 1173">
+            <a:extLst>
+              <a:ext uri="{FF2B5EF4-FFF2-40B4-BE49-F238E27FC236}">
+                <a16:creationId xmlns:a16="http://schemas.microsoft.com/office/drawing/2014/main" id="{4AF88682-C814-9FA4-45E9-63CDC62E0BDC}"/>
+              </a:ext>
+            </a:extLst>
+          </p:cNvPr>
+          <p:cNvGrpSpPr/>
           <p:nvPr/>
-        </p:nvSpPr>
-        <p:spPr>
+        </p:nvGrpSpPr>
+        <p:grpSpPr>
           <a:xfrm>
-            <a:off x="8269215" y="1211548"/>
-            <a:ext cx="1904949" cy="640063"/>
+            <a:off x="7931148" y="369265"/>
+            <a:ext cx="1277377" cy="390149"/>
+            <a:chOff x="7031736" y="2764531"/>
+            <a:chExt cx="1277377" cy="390149"/>
           </a:xfrm>
-          <a:prstGeom prst="roundRect">
-            <a:avLst>
-              <a:gd name="adj" fmla="val 16000"/>
-            </a:avLst>
-          </a:prstGeom>
-          <a:solidFill>
-            <a:srgbClr val="FFF7ED"/>
-          </a:solidFill>
-          <a:ln w="31750">
+        </p:grpSpPr>
+        <p:sp>
+          <p:nvSpPr>
+            <p:cNvPr id="1175" name="Shape 53">
+              <a:extLst>
+                <a:ext uri="{FF2B5EF4-FFF2-40B4-BE49-F238E27FC236}">
+                  <a16:creationId xmlns:a16="http://schemas.microsoft.com/office/drawing/2014/main" id="{17D8853A-FA8F-8E16-4BD2-2E467C2DA6EF}"/>
+                </a:ext>
+              </a:extLst>
+            </p:cNvPr>
+            <p:cNvSpPr/>
+            <p:nvPr/>
+          </p:nvSpPr>
+          <p:spPr>
+            <a:xfrm>
+              <a:off x="7031736" y="2764531"/>
+              <a:ext cx="1277377" cy="390149"/>
+            </a:xfrm>
+            <a:prstGeom prst="roundRect">
+              <a:avLst>
+                <a:gd name="adj" fmla="val 7368"/>
+              </a:avLst>
+            </a:prstGeom>
             <a:solidFill>
-              <a:srgbClr val="FF8F00"/>
+              <a:srgbClr val="FFFFFF"/>
             </a:solidFill>
-          </a:ln>
-        </p:spPr>
-        <p:style>
-          <a:lnRef idx="1">
-            <a:schemeClr val="accent1"/>
-          </a:lnRef>
-          <a:fillRef idx="3">
-            <a:schemeClr val="accent1"/>
-          </a:fillRef>
-          <a:effectRef idx="2">
-            <a:schemeClr val="accent1"/>
-          </a:effectRef>
-          <a:fontRef idx="minor">
-            <a:schemeClr val="lt1"/>
-          </a:fontRef>
-        </p:style>
-        <p:txBody>
-          <a:bodyPr wrap="square" lIns="114297" tIns="30479" rIns="114297" bIns="30479" rtlCol="0" anchor="ctr"/>
-          <a:lstStyle/>
-          <a:p>
-            <a:pPr algn="ctr"/>
-            <a:r>
-              <a:rPr sz="1323" b="1">
-                <a:solidFill>
-                  <a:srgbClr val="000000"/>
-                </a:solidFill>
-                <a:latin typeface="Calibri"/>
-              </a:rPr>
-              <a:t>OTP</a:t>
-            </a:r>
-          </a:p>
-          <a:p>
-            <a:pPr algn="ctr"/>
-            <a:r>
-              <a:rPr sz="1164">
-                <a:solidFill>
-                  <a:srgbClr val="444444"/>
-                </a:solidFill>
-                <a:latin typeface="Calibri"/>
-              </a:rPr>
-              <a:t>:8080</a:t>
-            </a:r>
-          </a:p>
-        </p:txBody>
-      </p:sp>
+            <a:ln w="25400">
+              <a:solidFill>
+                <a:srgbClr val="573FF6"/>
+              </a:solidFill>
+              <a:prstDash val="solid"/>
+            </a:ln>
+            <a:effectLst>
+              <a:outerShdw blurRad="76200" dist="25400" dir="8100000" algn="bl" rotWithShape="0">
+                <a:srgbClr val="000000">
+                  <a:alpha val="10000"/>
+                </a:srgbClr>
+              </a:outerShdw>
+            </a:effectLst>
+          </p:spPr>
+          <p:txBody>
+            <a:bodyPr/>
+            <a:lstStyle/>
+            <a:p>
+              <a:endParaRPr lang="es-ES" dirty="0"/>
+            </a:p>
+          </p:txBody>
+        </p:sp>
+        <p:pic>
+          <p:nvPicPr>
+            <p:cNvPr id="1176" name="Image 9" descr="Coche con relleno sólido">
+              <a:extLst>
+                <a:ext uri="{FF2B5EF4-FFF2-40B4-BE49-F238E27FC236}">
+                  <a16:creationId xmlns:a16="http://schemas.microsoft.com/office/drawing/2014/main" id="{4D735D90-B0B1-A01F-A715-B16DE874D6C0}"/>
+                </a:ext>
+              </a:extLst>
+            </p:cNvPr>
+            <p:cNvPicPr>
+              <a:picLocks noChangeAspect="1"/>
+            </p:cNvPicPr>
+            <p:nvPr/>
+          </p:nvPicPr>
+          <p:blipFill>
+            <a:blip>
+              <a:extLst>
+                <a:ext uri="{96DAC541-7B7A-43D3-8B79-37D633B846F1}">
+                  <asvg:svgBlip xmlns:asvg="http://schemas.microsoft.com/office/drawing/2016/SVG/main" r:embed="rId12"/>
+                </a:ext>
+              </a:extLst>
+            </a:blip>
+            <a:srcRect/>
+            <a:stretch/>
+          </p:blipFill>
+          <p:spPr>
+            <a:xfrm>
+              <a:off x="7123176" y="2798064"/>
+              <a:ext cx="292608" cy="292608"/>
+            </a:xfrm>
+            <a:prstGeom prst="rect">
+              <a:avLst/>
+            </a:prstGeom>
+          </p:spPr>
+        </p:pic>
+        <p:sp>
+          <p:nvSpPr>
+            <p:cNvPr id="1177" name="Text 54">
+              <a:extLst>
+                <a:ext uri="{FF2B5EF4-FFF2-40B4-BE49-F238E27FC236}">
+                  <a16:creationId xmlns:a16="http://schemas.microsoft.com/office/drawing/2014/main" id="{E5F78776-814F-8AB1-C08B-92A83946FE29}"/>
+                </a:ext>
+              </a:extLst>
+            </p:cNvPr>
+            <p:cNvSpPr/>
+            <p:nvPr/>
+          </p:nvSpPr>
+          <p:spPr>
+            <a:xfrm>
+              <a:off x="7488936" y="2774726"/>
+              <a:ext cx="661416" cy="196118"/>
+            </a:xfrm>
+            <a:prstGeom prst="rect">
+              <a:avLst/>
+            </a:prstGeom>
+            <a:noFill/>
+            <a:ln/>
+          </p:spPr>
+          <p:txBody>
+            <a:bodyPr wrap="square" lIns="0" tIns="0" rIns="0" bIns="0" rtlCol="0" anchor="ctr"/>
+            <a:lstStyle/>
+            <a:p>
+              <a:pPr marL="0" indent="0" algn="l">
+                <a:buNone/>
+              </a:pPr>
+              <a:r>
+                <a:rPr lang="en-US" sz="1100" b="1" dirty="0" err="1">
+                  <a:solidFill>
+                    <a:srgbClr val="212121"/>
+                  </a:solidFill>
+                  <a:latin typeface="Calibri" pitchFamily="34" charset="0"/>
+                  <a:ea typeface="Calibri" pitchFamily="34" charset="-122"/>
+                  <a:cs typeface="Calibri" pitchFamily="34" charset="-120"/>
+                </a:rPr>
+                <a:t>osrm</a:t>
+              </a:r>
+              <a:r>
+                <a:rPr lang="en-US" sz="1100" b="1" dirty="0">
+                  <a:solidFill>
+                    <a:srgbClr val="212121"/>
+                  </a:solidFill>
+                  <a:latin typeface="Calibri" pitchFamily="34" charset="0"/>
+                  <a:ea typeface="Calibri" pitchFamily="34" charset="-122"/>
+                  <a:cs typeface="Calibri" pitchFamily="34" charset="-120"/>
+                </a:rPr>
+                <a:t>-car</a:t>
+              </a:r>
+              <a:endParaRPr lang="en-US" sz="1100" dirty="0"/>
+            </a:p>
+          </p:txBody>
+        </p:sp>
+        <p:sp>
+          <p:nvSpPr>
+            <p:cNvPr id="1178" name="Text 55">
+              <a:extLst>
+                <a:ext uri="{FF2B5EF4-FFF2-40B4-BE49-F238E27FC236}">
+                  <a16:creationId xmlns:a16="http://schemas.microsoft.com/office/drawing/2014/main" id="{8F725A9D-FF4B-1BBB-232C-3D1DD91E1ECF}"/>
+                </a:ext>
+              </a:extLst>
+            </p:cNvPr>
+            <p:cNvSpPr/>
+            <p:nvPr/>
+          </p:nvSpPr>
+          <p:spPr>
+            <a:xfrm>
+              <a:off x="7430593" y="2937393"/>
+              <a:ext cx="365760" cy="201168"/>
+            </a:xfrm>
+            <a:prstGeom prst="rect">
+              <a:avLst/>
+            </a:prstGeom>
+            <a:noFill/>
+            <a:ln/>
+          </p:spPr>
+          <p:txBody>
+            <a:bodyPr wrap="square" lIns="0" tIns="0" rIns="0" bIns="0" rtlCol="0" anchor="ctr"/>
+            <a:lstStyle/>
+            <a:p>
+              <a:pPr marL="0" indent="0" algn="ctr">
+                <a:buNone/>
+              </a:pPr>
+              <a:r>
+                <a:rPr lang="en-US" sz="900" dirty="0">
+                  <a:solidFill>
+                    <a:srgbClr val="777777"/>
+                  </a:solidFill>
+                  <a:latin typeface="Calibri" pitchFamily="34" charset="0"/>
+                  <a:ea typeface="Calibri" pitchFamily="34" charset="-122"/>
+                  <a:cs typeface="Calibri" pitchFamily="34" charset="-120"/>
+                </a:rPr>
+                <a:t>:5000</a:t>
+              </a:r>
+              <a:endParaRPr lang="en-US" sz="900" dirty="0"/>
+            </a:p>
+          </p:txBody>
+        </p:sp>
+      </p:grpSp>
       <p:cxnSp>
         <p:nvCxnSpPr>
-          <p:cNvPr id="11" name="Connector 10"/>
-          <p:cNvCxnSpPr/>
+          <p:cNvPr id="106" name="Conector: angular 105">
+            <a:extLst>
+              <a:ext uri="{FF2B5EF4-FFF2-40B4-BE49-F238E27FC236}">
+                <a16:creationId xmlns:a16="http://schemas.microsoft.com/office/drawing/2014/main" id="{785A04E7-0AB7-9E97-AFD1-87D0B4D58FF4}"/>
+              </a:ext>
+            </a:extLst>
+          </p:cNvPr>
+          <p:cNvCxnSpPr>
+            <a:cxnSpLocks/>
+            <a:stCxn id="84" idx="3"/>
+            <a:endCxn id="1436" idx="1"/>
+          </p:cNvCxnSpPr>
           <p:nvPr/>
         </p:nvCxnSpPr>
         <p:spPr>
           <a:xfrm>
-            <a:off x="6095670" y="853416"/>
-            <a:ext cx="0" cy="198115"/>
+            <a:off x="9897513" y="4806128"/>
+            <a:ext cx="385388" cy="87111"/>
           </a:xfrm>
-          <a:prstGeom prst="line">
-            <a:avLst/>
+          <a:prstGeom prst="bentConnector3">
+            <a:avLst>
+              <a:gd name="adj1" fmla="val 63656"/>
+            </a:avLst>
           </a:prstGeom>
-          <a:ln w="25400">
+          <a:ln>
             <a:solidFill>
-              <a:srgbClr val="000000"/>
+              <a:srgbClr val="424242"/>
             </a:solidFill>
+            <a:tailEnd type="triangle"/>
           </a:ln>
         </p:spPr>
         <p:style>
@@ -16191,22 +19132,35 @@
       </p:cxnSp>
       <p:cxnSp>
         <p:nvCxnSpPr>
-          <p:cNvPr id="12" name="Connector 11"/>
-          <p:cNvCxnSpPr/>
+          <p:cNvPr id="102" name="Conector: angular 101">
+            <a:extLst>
+              <a:ext uri="{FF2B5EF4-FFF2-40B4-BE49-F238E27FC236}">
+                <a16:creationId xmlns:a16="http://schemas.microsoft.com/office/drawing/2014/main" id="{13B65A2C-F327-1B06-EA2A-C6FB02323BA0}"/>
+              </a:ext>
+            </a:extLst>
+          </p:cNvPr>
+          <p:cNvCxnSpPr>
+            <a:cxnSpLocks/>
+            <a:stCxn id="79" idx="3"/>
+            <a:endCxn id="1431" idx="1"/>
+          </p:cNvCxnSpPr>
           <p:nvPr/>
         </p:nvCxnSpPr>
         <p:spPr>
-          <a:xfrm>
-            <a:off x="2969650" y="1051531"/>
-            <a:ext cx="6252040" cy="0"/>
+          <a:xfrm flipV="1">
+            <a:off x="9904165" y="4035791"/>
+            <a:ext cx="378851" cy="3786"/>
           </a:xfrm>
-          <a:prstGeom prst="line">
-            <a:avLst/>
+          <a:prstGeom prst="bentConnector3">
+            <a:avLst>
+              <a:gd name="adj1" fmla="val 50000"/>
+            </a:avLst>
           </a:prstGeom>
-          <a:ln w="25400">
+          <a:ln>
             <a:solidFill>
-              <a:srgbClr val="000000"/>
+              <a:srgbClr val="26AA57"/>
             </a:solidFill>
+            <a:tailEnd type="triangle"/>
           </a:ln>
         </p:spPr>
         <p:style>
@@ -16226,25 +19180,1297 @@
       </p:cxnSp>
       <p:cxnSp>
         <p:nvCxnSpPr>
-          <p:cNvPr id="13" name="Connector 12"/>
+          <p:cNvPr id="100" name="Conector: angular 99">
+            <a:extLst>
+              <a:ext uri="{FF2B5EF4-FFF2-40B4-BE49-F238E27FC236}">
+                <a16:creationId xmlns:a16="http://schemas.microsoft.com/office/drawing/2014/main" id="{A7F15F9D-9667-3F5A-8CFF-AA50236144EE}"/>
+              </a:ext>
+            </a:extLst>
+          </p:cNvPr>
           <p:cNvCxnSpPr>
             <a:cxnSpLocks/>
+            <a:stCxn id="90" idx="3"/>
+            <a:endCxn id="1412" idx="1"/>
           </p:cNvCxnSpPr>
           <p:nvPr/>
         </p:nvCxnSpPr>
         <p:spPr>
+          <a:xfrm flipV="1">
+            <a:off x="9911606" y="3148557"/>
+            <a:ext cx="364044" cy="118287"/>
+          </a:xfrm>
+          <a:prstGeom prst="bentConnector3">
+            <a:avLst>
+              <a:gd name="adj1" fmla="val 59035"/>
+            </a:avLst>
+          </a:prstGeom>
+          <a:ln>
+            <a:solidFill>
+              <a:srgbClr val="573FF6"/>
+            </a:solidFill>
+            <a:tailEnd type="triangle"/>
+          </a:ln>
+        </p:spPr>
+        <p:style>
+          <a:lnRef idx="2">
+            <a:schemeClr val="accent1"/>
+          </a:lnRef>
+          <a:fillRef idx="0">
+            <a:schemeClr val="accent1"/>
+          </a:fillRef>
+          <a:effectRef idx="1">
+            <a:schemeClr val="accent1"/>
+          </a:effectRef>
+          <a:fontRef idx="minor">
+            <a:schemeClr val="tx1"/>
+          </a:fontRef>
+        </p:style>
+      </p:cxnSp>
+      <p:pic>
+        <p:nvPicPr>
+          <p:cNvPr id="1426" name="Image 9" descr="Coche con relleno sólido">
+            <a:extLst>
+              <a:ext uri="{FF2B5EF4-FFF2-40B4-BE49-F238E27FC236}">
+                <a16:creationId xmlns:a16="http://schemas.microsoft.com/office/drawing/2014/main" id="{7C0D749B-18E0-6888-3450-2C03E35789C0}"/>
+              </a:ext>
+            </a:extLst>
+          </p:cNvPr>
+          <p:cNvPicPr>
+            <a:picLocks noChangeAspect="1"/>
+          </p:cNvPicPr>
+          <p:nvPr/>
+        </p:nvPicPr>
+        <p:blipFill>
+          <a:blip>
+            <a:extLst>
+              <a:ext uri="{96DAC541-7B7A-43D3-8B79-37D633B846F1}">
+                <asvg:svgBlip xmlns:asvg="http://schemas.microsoft.com/office/drawing/2016/SVG/main" r:embed="rId12"/>
+              </a:ext>
+            </a:extLst>
+          </a:blip>
+          <a:srcRect/>
+          <a:stretch/>
+        </p:blipFill>
+        <p:spPr>
           <a:xfrm>
-            <a:off x="2969649" y="1051531"/>
-            <a:ext cx="0" cy="160017"/>
+            <a:off x="10326290" y="2777070"/>
+            <a:ext cx="292608" cy="292608"/>
           </a:xfrm>
-          <a:prstGeom prst="line">
+          <a:prstGeom prst="rect">
             <a:avLst/>
           </a:prstGeom>
+        </p:spPr>
+      </p:pic>
+      <p:sp>
+        <p:nvSpPr>
+          <p:cNvPr id="1431" name="Shape 53">
+            <a:extLst>
+              <a:ext uri="{FF2B5EF4-FFF2-40B4-BE49-F238E27FC236}">
+                <a16:creationId xmlns:a16="http://schemas.microsoft.com/office/drawing/2014/main" id="{CA524712-47E2-4715-8C52-F61C3324C880}"/>
+              </a:ext>
+            </a:extLst>
+          </p:cNvPr>
+          <p:cNvSpPr/>
+          <p:nvPr/>
+        </p:nvSpPr>
+        <p:spPr>
+          <a:xfrm>
+            <a:off x="10283016" y="3664304"/>
+            <a:ext cx="1717112" cy="742973"/>
+          </a:xfrm>
+          <a:prstGeom prst="roundRect">
+            <a:avLst>
+              <a:gd name="adj" fmla="val 7368"/>
+            </a:avLst>
+          </a:prstGeom>
+          <a:solidFill>
+            <a:srgbClr val="FFFFFF"/>
+          </a:solidFill>
           <a:ln w="25400">
             <a:solidFill>
-              <a:srgbClr val="000000"/>
+              <a:srgbClr val="26AA57"/>
             </a:solidFill>
-            <a:headEnd type="triangle" w="med" len="med"/>
+            <a:prstDash val="solid"/>
+          </a:ln>
+          <a:effectLst>
+            <a:outerShdw blurRad="76200" dist="25400" dir="8100000" algn="bl" rotWithShape="0">
+              <a:srgbClr val="000000">
+                <a:alpha val="10000"/>
+              </a:srgbClr>
+            </a:outerShdw>
+          </a:effectLst>
+        </p:spPr>
+        <p:txBody>
+          <a:bodyPr/>
+          <a:lstStyle/>
+          <a:p>
+            <a:pPr algn="ctr"/>
+            <a:r>
+              <a:rPr lang="es-ES" sz="1400" b="1" dirty="0">
+                <a:latin typeface="Consolas" panose="020B0609020204030204" pitchFamily="49" charset="0"/>
+                <a:cs typeface="Courier New" panose="02070309020205020404" pitchFamily="49" charset="0"/>
+              </a:rPr>
+              <a:t> </a:t>
+            </a:r>
+            <a:r>
+              <a:rPr lang="es-ES" sz="1400" b="1" dirty="0" err="1">
+                <a:latin typeface="Consolas" panose="020B0609020204030204" pitchFamily="49" charset="0"/>
+                <a:cs typeface="Courier New" panose="02070309020205020404" pitchFamily="49" charset="0"/>
+              </a:rPr>
+              <a:t>osrm-routed</a:t>
+            </a:r>
+            <a:endParaRPr lang="es-ES" sz="1400" b="1" dirty="0">
+              <a:latin typeface="Consolas" panose="020B0609020204030204" pitchFamily="49" charset="0"/>
+              <a:cs typeface="Courier New" panose="02070309020205020404" pitchFamily="49" charset="0"/>
+            </a:endParaRPr>
+          </a:p>
+          <a:p>
+            <a:pPr algn="ctr"/>
+            <a:r>
+              <a:rPr lang="es-ES" sz="1400" dirty="0">
+                <a:latin typeface="Consolas" panose="020B0609020204030204" pitchFamily="49" charset="0"/>
+                <a:cs typeface="Courier New" panose="02070309020205020404" pitchFamily="49" charset="0"/>
+              </a:rPr>
+              <a:t>--</a:t>
+            </a:r>
+            <a:r>
+              <a:rPr lang="es-ES" sz="1400" dirty="0" err="1">
+                <a:latin typeface="Consolas" panose="020B0609020204030204" pitchFamily="49" charset="0"/>
+                <a:cs typeface="Courier New" panose="02070309020205020404" pitchFamily="49" charset="0"/>
+              </a:rPr>
+              <a:t>algorithm</a:t>
+            </a:r>
+            <a:r>
+              <a:rPr lang="es-ES" sz="1400" dirty="0">
+                <a:latin typeface="Consolas" panose="020B0609020204030204" pitchFamily="49" charset="0"/>
+                <a:cs typeface="Courier New" panose="02070309020205020404" pitchFamily="49" charset="0"/>
+              </a:rPr>
+              <a:t> </a:t>
+            </a:r>
+            <a:r>
+              <a:rPr lang="es-ES" sz="1400" dirty="0" err="1">
+                <a:latin typeface="Consolas" panose="020B0609020204030204" pitchFamily="49" charset="0"/>
+                <a:cs typeface="Courier New" panose="02070309020205020404" pitchFamily="49" charset="0"/>
+              </a:rPr>
+              <a:t>mld</a:t>
+            </a:r>
+            <a:br>
+              <a:rPr lang="es-ES" sz="1400" dirty="0">
+                <a:latin typeface="Consolas" panose="020B0609020204030204" pitchFamily="49" charset="0"/>
+                <a:cs typeface="Courier New" panose="02070309020205020404" pitchFamily="49" charset="0"/>
+              </a:rPr>
+            </a:br>
+            <a:r>
+              <a:rPr lang="es-ES" sz="1400" dirty="0">
+                <a:latin typeface="Consolas" panose="020B0609020204030204" pitchFamily="49" charset="0"/>
+                <a:cs typeface="Courier New" panose="02070309020205020404" pitchFamily="49" charset="0"/>
+              </a:rPr>
+              <a:t>:5001</a:t>
+            </a:r>
+          </a:p>
+        </p:txBody>
+      </p:sp>
+      <p:sp>
+        <p:nvSpPr>
+          <p:cNvPr id="1436" name="Shape 53">
+            <a:extLst>
+              <a:ext uri="{FF2B5EF4-FFF2-40B4-BE49-F238E27FC236}">
+                <a16:creationId xmlns:a16="http://schemas.microsoft.com/office/drawing/2014/main" id="{B373883A-3690-2E11-5386-EB54A8459388}"/>
+              </a:ext>
+            </a:extLst>
+          </p:cNvPr>
+          <p:cNvSpPr/>
+          <p:nvPr/>
+        </p:nvSpPr>
+        <p:spPr>
+          <a:xfrm>
+            <a:off x="10282901" y="4521752"/>
+            <a:ext cx="1717112" cy="742973"/>
+          </a:xfrm>
+          <a:prstGeom prst="roundRect">
+            <a:avLst>
+              <a:gd name="adj" fmla="val 7368"/>
+            </a:avLst>
+          </a:prstGeom>
+          <a:solidFill>
+            <a:srgbClr val="FFFFFF"/>
+          </a:solidFill>
+          <a:ln w="25400">
+            <a:solidFill>
+              <a:srgbClr val="424242"/>
+            </a:solidFill>
+            <a:prstDash val="solid"/>
+          </a:ln>
+          <a:effectLst>
+            <a:outerShdw blurRad="76200" dist="25400" dir="8100000" algn="bl" rotWithShape="0">
+              <a:srgbClr val="000000">
+                <a:alpha val="10000"/>
+              </a:srgbClr>
+            </a:outerShdw>
+          </a:effectLst>
+        </p:spPr>
+        <p:txBody>
+          <a:bodyPr/>
+          <a:lstStyle/>
+          <a:p>
+            <a:pPr algn="ctr"/>
+            <a:r>
+              <a:rPr lang="es-ES" sz="1400" b="1" dirty="0">
+                <a:latin typeface="Consolas" panose="020B0609020204030204" pitchFamily="49" charset="0"/>
+                <a:cs typeface="Courier New" panose="02070309020205020404" pitchFamily="49" charset="0"/>
+              </a:rPr>
+              <a:t> </a:t>
+            </a:r>
+            <a:r>
+              <a:rPr lang="es-ES" sz="1400" b="1" dirty="0" err="1">
+                <a:latin typeface="Consolas" panose="020B0609020204030204" pitchFamily="49" charset="0"/>
+                <a:cs typeface="Courier New" panose="02070309020205020404" pitchFamily="49" charset="0"/>
+              </a:rPr>
+              <a:t>osrm-routed</a:t>
+            </a:r>
+            <a:endParaRPr lang="es-ES" sz="1400" b="1" dirty="0">
+              <a:latin typeface="Consolas" panose="020B0609020204030204" pitchFamily="49" charset="0"/>
+              <a:cs typeface="Courier New" panose="02070309020205020404" pitchFamily="49" charset="0"/>
+            </a:endParaRPr>
+          </a:p>
+          <a:p>
+            <a:pPr algn="ctr"/>
+            <a:r>
+              <a:rPr lang="es-ES" sz="1400" dirty="0">
+                <a:latin typeface="Consolas" panose="020B0609020204030204" pitchFamily="49" charset="0"/>
+                <a:cs typeface="Courier New" panose="02070309020205020404" pitchFamily="49" charset="0"/>
+              </a:rPr>
+              <a:t>--</a:t>
+            </a:r>
+            <a:r>
+              <a:rPr lang="es-ES" sz="1400" dirty="0" err="1">
+                <a:latin typeface="Consolas" panose="020B0609020204030204" pitchFamily="49" charset="0"/>
+                <a:cs typeface="Courier New" panose="02070309020205020404" pitchFamily="49" charset="0"/>
+              </a:rPr>
+              <a:t>algorithm</a:t>
+            </a:r>
+            <a:r>
+              <a:rPr lang="es-ES" sz="1400" dirty="0">
+                <a:latin typeface="Consolas" panose="020B0609020204030204" pitchFamily="49" charset="0"/>
+                <a:cs typeface="Courier New" panose="02070309020205020404" pitchFamily="49" charset="0"/>
+              </a:rPr>
+              <a:t> </a:t>
+            </a:r>
+            <a:r>
+              <a:rPr lang="es-ES" sz="1400" dirty="0" err="1">
+                <a:latin typeface="Consolas" panose="020B0609020204030204" pitchFamily="49" charset="0"/>
+                <a:cs typeface="Courier New" panose="02070309020205020404" pitchFamily="49" charset="0"/>
+              </a:rPr>
+              <a:t>mld</a:t>
+            </a:r>
+            <a:br>
+              <a:rPr lang="es-ES" sz="1400" dirty="0">
+                <a:latin typeface="Consolas" panose="020B0609020204030204" pitchFamily="49" charset="0"/>
+                <a:cs typeface="Courier New" panose="02070309020205020404" pitchFamily="49" charset="0"/>
+              </a:rPr>
+            </a:br>
+            <a:r>
+              <a:rPr lang="es-ES" sz="1400" dirty="0">
+                <a:latin typeface="Consolas" panose="020B0609020204030204" pitchFamily="49" charset="0"/>
+                <a:cs typeface="Courier New" panose="02070309020205020404" pitchFamily="49" charset="0"/>
+              </a:rPr>
+              <a:t>:5002</a:t>
+            </a:r>
+          </a:p>
+        </p:txBody>
+      </p:sp>
+      <p:pic>
+        <p:nvPicPr>
+          <p:cNvPr id="1449" name="Image 9" descr="Triciclo con relleno sólido">
+            <a:extLst>
+              <a:ext uri="{FF2B5EF4-FFF2-40B4-BE49-F238E27FC236}">
+                <a16:creationId xmlns:a16="http://schemas.microsoft.com/office/drawing/2014/main" id="{BD025079-9FF1-9F0E-E21F-5DEAAE6C2258}"/>
+              </a:ext>
+            </a:extLst>
+          </p:cNvPr>
+          <p:cNvPicPr>
+            <a:picLocks noChangeAspect="1"/>
+          </p:cNvPicPr>
+          <p:nvPr/>
+        </p:nvPicPr>
+        <p:blipFill>
+          <a:blip>
+            <a:extLst>
+              <a:ext uri="{96DAC541-7B7A-43D3-8B79-37D633B846F1}">
+                <asvg:svgBlip xmlns:asvg="http://schemas.microsoft.com/office/drawing/2016/SVG/main" r:embed="rId10"/>
+              </a:ext>
+            </a:extLst>
+          </a:blip>
+          <a:srcRect/>
+          <a:stretch/>
+        </p:blipFill>
+        <p:spPr>
+          <a:xfrm>
+            <a:off x="10326290" y="3698604"/>
+            <a:ext cx="292608" cy="292608"/>
+          </a:xfrm>
+          <a:prstGeom prst="rect">
+            <a:avLst/>
+          </a:prstGeom>
+        </p:spPr>
+      </p:pic>
+      <p:pic>
+        <p:nvPicPr>
+          <p:cNvPr id="1450" name="Image 9" descr="Andar con relleno sólido">
+            <a:extLst>
+              <a:ext uri="{FF2B5EF4-FFF2-40B4-BE49-F238E27FC236}">
+                <a16:creationId xmlns:a16="http://schemas.microsoft.com/office/drawing/2014/main" id="{91559C0B-CBDB-D9CB-2C6E-BEEC73623CD1}"/>
+              </a:ext>
+            </a:extLst>
+          </p:cNvPr>
+          <p:cNvPicPr>
+            <a:picLocks noChangeAspect="1"/>
+          </p:cNvPicPr>
+          <p:nvPr/>
+        </p:nvPicPr>
+        <p:blipFill>
+          <a:blip>
+            <a:extLst>
+              <a:ext uri="{96DAC541-7B7A-43D3-8B79-37D633B846F1}">
+                <asvg:svgBlip xmlns:asvg="http://schemas.microsoft.com/office/drawing/2016/SVG/main" r:embed="rId11"/>
+              </a:ext>
+            </a:extLst>
+          </a:blip>
+          <a:srcRect/>
+          <a:stretch/>
+        </p:blipFill>
+        <p:spPr>
+          <a:xfrm>
+            <a:off x="10322200" y="4550528"/>
+            <a:ext cx="300787" cy="300787"/>
+          </a:xfrm>
+          <a:prstGeom prst="rect">
+            <a:avLst/>
+          </a:prstGeom>
+        </p:spPr>
+      </p:pic>
+      <p:grpSp>
+        <p:nvGrpSpPr>
+          <p:cNvPr id="1038" name="Grupo 1037">
+            <a:extLst>
+              <a:ext uri="{FF2B5EF4-FFF2-40B4-BE49-F238E27FC236}">
+                <a16:creationId xmlns:a16="http://schemas.microsoft.com/office/drawing/2014/main" id="{CC5C22B7-F14F-A47C-EA59-899463919CA2}"/>
+              </a:ext>
+            </a:extLst>
+          </p:cNvPr>
+          <p:cNvGrpSpPr/>
+          <p:nvPr/>
+        </p:nvGrpSpPr>
+        <p:grpSpPr>
+          <a:xfrm>
+            <a:off x="1727335" y="1006581"/>
+            <a:ext cx="2283509" cy="4360484"/>
+            <a:chOff x="1727335" y="1269713"/>
+            <a:chExt cx="2283509" cy="4360484"/>
+          </a:xfrm>
+        </p:grpSpPr>
+        <p:grpSp>
+          <p:nvGrpSpPr>
+            <p:cNvPr id="1397" name="Grupo 1396">
+              <a:extLst>
+                <a:ext uri="{FF2B5EF4-FFF2-40B4-BE49-F238E27FC236}">
+                  <a16:creationId xmlns:a16="http://schemas.microsoft.com/office/drawing/2014/main" id="{78D30DA2-74C1-3C14-03D2-A395B3F31E0A}"/>
+                </a:ext>
+              </a:extLst>
+            </p:cNvPr>
+            <p:cNvGrpSpPr/>
+            <p:nvPr/>
+          </p:nvGrpSpPr>
+          <p:grpSpPr>
+            <a:xfrm>
+              <a:off x="1727335" y="1269713"/>
+              <a:ext cx="2283509" cy="4360484"/>
+              <a:chOff x="2086465" y="1033825"/>
+              <a:chExt cx="2283509" cy="4360484"/>
+            </a:xfrm>
+          </p:grpSpPr>
+          <p:sp>
+            <p:nvSpPr>
+              <p:cNvPr id="16" name="Shape 53">
+                <a:extLst>
+                  <a:ext uri="{FF2B5EF4-FFF2-40B4-BE49-F238E27FC236}">
+                    <a16:creationId xmlns:a16="http://schemas.microsoft.com/office/drawing/2014/main" id="{2CC15734-CE75-D9A9-7F2C-38C5DE17A15B}"/>
+                  </a:ext>
+                </a:extLst>
+              </p:cNvPr>
+              <p:cNvSpPr/>
+              <p:nvPr/>
+            </p:nvSpPr>
+            <p:spPr>
+              <a:xfrm>
+                <a:off x="2086465" y="1033825"/>
+                <a:ext cx="2283509" cy="4360484"/>
+              </a:xfrm>
+              <a:prstGeom prst="roundRect">
+                <a:avLst>
+                  <a:gd name="adj" fmla="val 7368"/>
+                </a:avLst>
+              </a:prstGeom>
+              <a:solidFill>
+                <a:srgbClr val="FFFFFF"/>
+              </a:solidFill>
+              <a:ln w="25400">
+                <a:solidFill>
+                  <a:srgbClr val="562C7A"/>
+                </a:solidFill>
+                <a:prstDash val="solid"/>
+              </a:ln>
+              <a:effectLst>
+                <a:outerShdw blurRad="76200" dist="25400" dir="8100000" algn="bl" rotWithShape="0">
+                  <a:srgbClr val="000000">
+                    <a:alpha val="10000"/>
+                  </a:srgbClr>
+                </a:outerShdw>
+              </a:effectLst>
+            </p:spPr>
+            <p:txBody>
+              <a:bodyPr/>
+              <a:lstStyle/>
+              <a:p>
+                <a:pPr algn="ctr"/>
+                <a:r>
+                  <a:rPr lang="es-ES" sz="1600" b="1" dirty="0" err="1">
+                    <a:highlight>
+                      <a:srgbClr val="FFFDE7"/>
+                    </a:highlight>
+                    <a:latin typeface="Consolas" panose="020B0609020204030204" pitchFamily="49" charset="0"/>
+                    <a:cs typeface="Courier New" panose="02070309020205020404" pitchFamily="49" charset="0"/>
+                  </a:rPr>
+                  <a:t>osrm-extract</a:t>
+                </a:r>
+                <a:endParaRPr lang="es-ES" sz="1600" b="1" dirty="0">
+                  <a:highlight>
+                    <a:srgbClr val="FFFDE7"/>
+                  </a:highlight>
+                  <a:latin typeface="Consolas" panose="020B0609020204030204" pitchFamily="49" charset="0"/>
+                  <a:cs typeface="Courier New" panose="02070309020205020404" pitchFamily="49" charset="0"/>
+                </a:endParaRPr>
+              </a:p>
+              <a:p>
+                <a:pPr algn="ctr"/>
+                <a:endParaRPr lang="es-ES" sz="1100" dirty="0">
+                  <a:latin typeface="Consolas" panose="020B0609020204030204" pitchFamily="49" charset="0"/>
+                  <a:cs typeface="Courier New" panose="02070309020205020404" pitchFamily="49" charset="0"/>
+                </a:endParaRPr>
+              </a:p>
+              <a:p>
+                <a:r>
+                  <a:rPr lang="es-ES" sz="1600" b="1" dirty="0">
+                    <a:latin typeface="Calibri" panose="020F0502020204030204" pitchFamily="34" charset="0"/>
+                    <a:ea typeface="Calibri" panose="020F0502020204030204" pitchFamily="34" charset="0"/>
+                    <a:cs typeface="Calibri" panose="020F0502020204030204" pitchFamily="34" charset="0"/>
+                  </a:rPr>
+                  <a:t>Aplica reglas de movilidad del perfil:</a:t>
+                </a:r>
+              </a:p>
+              <a:p>
+                <a:pPr marL="285750" indent="-285750">
+                  <a:buFont typeface="Arial" panose="020B0604020202020204" pitchFamily="34" charset="0"/>
+                  <a:buChar char="•"/>
+                </a:pPr>
+                <a:r>
+                  <a:rPr lang="es-ES" sz="1600" dirty="0">
+                    <a:latin typeface="Calibri" panose="020F0502020204030204" pitchFamily="34" charset="0"/>
+                    <a:ea typeface="Calibri" panose="020F0502020204030204" pitchFamily="34" charset="0"/>
+                    <a:cs typeface="Calibri" panose="020F0502020204030204" pitchFamily="34" charset="0"/>
+                  </a:rPr>
+                  <a:t>Vías accesibles</a:t>
+                </a:r>
+              </a:p>
+              <a:p>
+                <a:pPr marL="285750" indent="-285750">
+                  <a:buFont typeface="Arial" panose="020B0604020202020204" pitchFamily="34" charset="0"/>
+                  <a:buChar char="•"/>
+                </a:pPr>
+                <a:r>
+                  <a:rPr lang="es-ES" sz="1600" dirty="0">
+                    <a:latin typeface="Calibri" panose="020F0502020204030204" pitchFamily="34" charset="0"/>
+                    <a:ea typeface="Calibri" panose="020F0502020204030204" pitchFamily="34" charset="0"/>
+                    <a:cs typeface="Calibri" panose="020F0502020204030204" pitchFamily="34" charset="0"/>
+                  </a:rPr>
+                  <a:t>Velocidades por tipo</a:t>
+                </a:r>
+              </a:p>
+              <a:p>
+                <a:pPr marL="285750" indent="-285750">
+                  <a:buFont typeface="Arial" panose="020B0604020202020204" pitchFamily="34" charset="0"/>
+                  <a:buChar char="•"/>
+                </a:pPr>
+                <a:r>
+                  <a:rPr lang="es-ES" sz="1600" dirty="0">
+                    <a:latin typeface="Calibri" panose="020F0502020204030204" pitchFamily="34" charset="0"/>
+                    <a:ea typeface="Calibri" panose="020F0502020204030204" pitchFamily="34" charset="0"/>
+                    <a:cs typeface="Calibri" panose="020F0502020204030204" pitchFamily="34" charset="0"/>
+                  </a:rPr>
+                  <a:t>Restricciones de giro</a:t>
+                </a:r>
+              </a:p>
+            </p:txBody>
+          </p:sp>
+          <p:sp>
+            <p:nvSpPr>
+              <p:cNvPr id="18" name="Shape 53">
+                <a:extLst>
+                  <a:ext uri="{FF2B5EF4-FFF2-40B4-BE49-F238E27FC236}">
+                    <a16:creationId xmlns:a16="http://schemas.microsoft.com/office/drawing/2014/main" id="{5DD1ACE4-B089-8830-A003-F13EC73C8EBE}"/>
+                  </a:ext>
+                </a:extLst>
+              </p:cNvPr>
+              <p:cNvSpPr/>
+              <p:nvPr/>
+            </p:nvSpPr>
+            <p:spPr>
+              <a:xfrm>
+                <a:off x="2259052" y="3763303"/>
+                <a:ext cx="1956217" cy="604161"/>
+              </a:xfrm>
+              <a:prstGeom prst="roundRect">
+                <a:avLst>
+                  <a:gd name="adj" fmla="val 7368"/>
+                </a:avLst>
+              </a:prstGeom>
+              <a:solidFill>
+                <a:srgbClr val="FFFFFF"/>
+              </a:solidFill>
+              <a:ln w="25400">
+                <a:solidFill>
+                  <a:srgbClr val="26AA57"/>
+                </a:solidFill>
+                <a:prstDash val="solid"/>
+              </a:ln>
+              <a:effectLst>
+                <a:outerShdw blurRad="76200" dist="25400" dir="8100000" algn="bl" rotWithShape="0">
+                  <a:srgbClr val="000000">
+                    <a:alpha val="10000"/>
+                  </a:srgbClr>
+                </a:outerShdw>
+              </a:effectLst>
+            </p:spPr>
+            <p:txBody>
+              <a:bodyPr/>
+              <a:lstStyle/>
+              <a:p>
+                <a:pPr algn="r"/>
+                <a:r>
+                  <a:rPr lang="es-ES" sz="1600" b="1" dirty="0" err="1">
+                    <a:latin typeface="Consolas" panose="020B0609020204030204" pitchFamily="49" charset="0"/>
+                    <a:cs typeface="Courier New" panose="02070309020205020404" pitchFamily="49" charset="0"/>
+                  </a:rPr>
+                  <a:t>osrm-extract</a:t>
+                </a:r>
+                <a:endParaRPr lang="es-ES" sz="1600" b="1" dirty="0">
+                  <a:latin typeface="Consolas" panose="020B0609020204030204" pitchFamily="49" charset="0"/>
+                  <a:cs typeface="Courier New" panose="02070309020205020404" pitchFamily="49" charset="0"/>
+                </a:endParaRPr>
+              </a:p>
+              <a:p>
+                <a:pPr algn="r"/>
+                <a:r>
+                  <a:rPr lang="es-ES" sz="1600" dirty="0">
+                    <a:latin typeface="Consolas" panose="020B0609020204030204" pitchFamily="49" charset="0"/>
+                    <a:cs typeface="Courier New" panose="02070309020205020404" pitchFamily="49" charset="0"/>
+                  </a:rPr>
+                  <a:t>–p </a:t>
+                </a:r>
+                <a:r>
+                  <a:rPr lang="es-ES" sz="1600" dirty="0" err="1">
+                    <a:latin typeface="Consolas" panose="020B0609020204030204" pitchFamily="49" charset="0"/>
+                    <a:cs typeface="Courier New" panose="02070309020205020404" pitchFamily="49" charset="0"/>
+                  </a:rPr>
+                  <a:t>bicycle.lua</a:t>
+                </a:r>
+                <a:endParaRPr lang="es-ES" sz="1600" dirty="0">
+                  <a:latin typeface="Consolas" panose="020B0609020204030204" pitchFamily="49" charset="0"/>
+                  <a:cs typeface="Courier New" panose="02070309020205020404" pitchFamily="49" charset="0"/>
+                </a:endParaRPr>
+              </a:p>
+            </p:txBody>
+          </p:sp>
+          <p:sp>
+            <p:nvSpPr>
+              <p:cNvPr id="20" name="Shape 53">
+                <a:extLst>
+                  <a:ext uri="{FF2B5EF4-FFF2-40B4-BE49-F238E27FC236}">
+                    <a16:creationId xmlns:a16="http://schemas.microsoft.com/office/drawing/2014/main" id="{5792C627-160C-2D1A-5654-5451508C733E}"/>
+                  </a:ext>
+                </a:extLst>
+              </p:cNvPr>
+              <p:cNvSpPr/>
+              <p:nvPr/>
+            </p:nvSpPr>
+            <p:spPr>
+              <a:xfrm>
+                <a:off x="2259052" y="4535432"/>
+                <a:ext cx="1956217" cy="604161"/>
+              </a:xfrm>
+              <a:prstGeom prst="roundRect">
+                <a:avLst>
+                  <a:gd name="adj" fmla="val 7368"/>
+                </a:avLst>
+              </a:prstGeom>
+              <a:solidFill>
+                <a:srgbClr val="FFFFFF"/>
+              </a:solidFill>
+              <a:ln w="25400">
+                <a:solidFill>
+                  <a:srgbClr val="424242"/>
+                </a:solidFill>
+                <a:prstDash val="solid"/>
+              </a:ln>
+              <a:effectLst>
+                <a:outerShdw blurRad="76200" dist="25400" dir="8100000" algn="bl" rotWithShape="0">
+                  <a:srgbClr val="000000">
+                    <a:alpha val="10000"/>
+                  </a:srgbClr>
+                </a:outerShdw>
+              </a:effectLst>
+            </p:spPr>
+            <p:txBody>
+              <a:bodyPr/>
+              <a:lstStyle/>
+              <a:p>
+                <a:pPr algn="r"/>
+                <a:r>
+                  <a:rPr lang="es-ES" sz="1600" b="1" dirty="0" err="1">
+                    <a:latin typeface="Consolas" panose="020B0609020204030204" pitchFamily="49" charset="0"/>
+                    <a:cs typeface="Courier New" panose="02070309020205020404" pitchFamily="49" charset="0"/>
+                  </a:rPr>
+                  <a:t>osrm-extract</a:t>
+                </a:r>
+                <a:endParaRPr lang="es-ES" sz="1600" b="1" dirty="0">
+                  <a:latin typeface="Consolas" panose="020B0609020204030204" pitchFamily="49" charset="0"/>
+                  <a:cs typeface="Courier New" panose="02070309020205020404" pitchFamily="49" charset="0"/>
+                </a:endParaRPr>
+              </a:p>
+              <a:p>
+                <a:pPr algn="r"/>
+                <a:r>
+                  <a:rPr lang="es-ES" sz="1600" dirty="0">
+                    <a:latin typeface="Consolas" panose="020B0609020204030204" pitchFamily="49" charset="0"/>
+                    <a:cs typeface="Courier New" panose="02070309020205020404" pitchFamily="49" charset="0"/>
+                  </a:rPr>
+                  <a:t>–p </a:t>
+                </a:r>
+                <a:r>
+                  <a:rPr lang="es-ES" sz="1600" dirty="0" err="1">
+                    <a:latin typeface="Consolas" panose="020B0609020204030204" pitchFamily="49" charset="0"/>
+                    <a:cs typeface="Courier New" panose="02070309020205020404" pitchFamily="49" charset="0"/>
+                  </a:rPr>
+                  <a:t>foot.lua</a:t>
+                </a:r>
+                <a:endParaRPr lang="es-ES" sz="1600" dirty="0">
+                  <a:latin typeface="Consolas" panose="020B0609020204030204" pitchFamily="49" charset="0"/>
+                  <a:cs typeface="Courier New" panose="02070309020205020404" pitchFamily="49" charset="0"/>
+                </a:endParaRPr>
+              </a:p>
+            </p:txBody>
+          </p:sp>
+          <p:sp>
+            <p:nvSpPr>
+              <p:cNvPr id="12" name="Shape 53">
+                <a:extLst>
+                  <a:ext uri="{FF2B5EF4-FFF2-40B4-BE49-F238E27FC236}">
+                    <a16:creationId xmlns:a16="http://schemas.microsoft.com/office/drawing/2014/main" id="{4BC9BBC4-6DA6-C1B2-855E-6B4FB84C562D}"/>
+                  </a:ext>
+                </a:extLst>
+              </p:cNvPr>
+              <p:cNvSpPr/>
+              <p:nvPr/>
+            </p:nvSpPr>
+            <p:spPr>
+              <a:xfrm>
+                <a:off x="2259052" y="2991173"/>
+                <a:ext cx="1948561" cy="604161"/>
+              </a:xfrm>
+              <a:prstGeom prst="roundRect">
+                <a:avLst>
+                  <a:gd name="adj" fmla="val 7368"/>
+                </a:avLst>
+              </a:prstGeom>
+              <a:solidFill>
+                <a:srgbClr val="FFFFFF"/>
+              </a:solidFill>
+              <a:ln w="25400">
+                <a:solidFill>
+                  <a:srgbClr val="573FF6"/>
+                </a:solidFill>
+                <a:prstDash val="solid"/>
+              </a:ln>
+              <a:effectLst>
+                <a:outerShdw blurRad="76200" dist="25400" dir="8100000" algn="bl" rotWithShape="0">
+                  <a:srgbClr val="000000">
+                    <a:alpha val="10000"/>
+                  </a:srgbClr>
+                </a:outerShdw>
+              </a:effectLst>
+            </p:spPr>
+            <p:txBody>
+              <a:bodyPr/>
+              <a:lstStyle/>
+              <a:p>
+                <a:pPr algn="r"/>
+                <a:r>
+                  <a:rPr lang="es-ES" sz="1600" b="1" dirty="0" err="1">
+                    <a:latin typeface="Consolas" panose="020B0609020204030204" pitchFamily="49" charset="0"/>
+                    <a:cs typeface="Courier New" panose="02070309020205020404" pitchFamily="49" charset="0"/>
+                  </a:rPr>
+                  <a:t>osrm-extract</a:t>
+                </a:r>
+                <a:endParaRPr lang="es-ES" sz="1600" b="1" dirty="0">
+                  <a:latin typeface="Consolas" panose="020B0609020204030204" pitchFamily="49" charset="0"/>
+                  <a:cs typeface="Courier New" panose="02070309020205020404" pitchFamily="49" charset="0"/>
+                </a:endParaRPr>
+              </a:p>
+              <a:p>
+                <a:pPr algn="r"/>
+                <a:r>
+                  <a:rPr lang="es-ES" sz="1600" dirty="0">
+                    <a:latin typeface="Consolas" panose="020B0609020204030204" pitchFamily="49" charset="0"/>
+                    <a:cs typeface="Courier New" panose="02070309020205020404" pitchFamily="49" charset="0"/>
+                  </a:rPr>
+                  <a:t>–p </a:t>
+                </a:r>
+                <a:r>
+                  <a:rPr lang="es-ES" sz="1600" dirty="0" err="1">
+                    <a:latin typeface="Consolas" panose="020B0609020204030204" pitchFamily="49" charset="0"/>
+                    <a:cs typeface="Courier New" panose="02070309020205020404" pitchFamily="49" charset="0"/>
+                  </a:rPr>
+                  <a:t>car.lua</a:t>
+                </a:r>
+                <a:endParaRPr lang="es-ES" sz="1600" dirty="0">
+                  <a:latin typeface="Consolas" panose="020B0609020204030204" pitchFamily="49" charset="0"/>
+                  <a:cs typeface="Courier New" panose="02070309020205020404" pitchFamily="49" charset="0"/>
+                </a:endParaRPr>
+              </a:p>
+            </p:txBody>
+          </p:sp>
+        </p:grpSp>
+        <p:pic>
+          <p:nvPicPr>
+            <p:cNvPr id="1457" name="Image 9" descr="Coche con relleno sólido">
+              <a:extLst>
+                <a:ext uri="{FF2B5EF4-FFF2-40B4-BE49-F238E27FC236}">
+                  <a16:creationId xmlns:a16="http://schemas.microsoft.com/office/drawing/2014/main" id="{54DAB0A0-115F-E585-70EB-06CE3A918B8C}"/>
+                </a:ext>
+              </a:extLst>
+            </p:cNvPr>
+            <p:cNvPicPr>
+              <a:picLocks noChangeAspect="1"/>
+            </p:cNvPicPr>
+            <p:nvPr/>
+          </p:nvPicPr>
+          <p:blipFill>
+            <a:blip>
+              <a:extLst>
+                <a:ext uri="{96DAC541-7B7A-43D3-8B79-37D633B846F1}">
+                  <asvg:svgBlip xmlns:asvg="http://schemas.microsoft.com/office/drawing/2016/SVG/main" r:embed="rId12"/>
+                </a:ext>
+              </a:extLst>
+            </a:blip>
+            <a:srcRect/>
+            <a:stretch/>
+          </p:blipFill>
+          <p:spPr>
+            <a:xfrm>
+              <a:off x="1977247" y="3272786"/>
+              <a:ext cx="354099" cy="354099"/>
+            </a:xfrm>
+            <a:prstGeom prst="rect">
+              <a:avLst/>
+            </a:prstGeom>
+          </p:spPr>
+        </p:pic>
+        <p:pic>
+          <p:nvPicPr>
+            <p:cNvPr id="1458" name="Image 9" descr="Triciclo con relleno sólido">
+              <a:extLst>
+                <a:ext uri="{FF2B5EF4-FFF2-40B4-BE49-F238E27FC236}">
+                  <a16:creationId xmlns:a16="http://schemas.microsoft.com/office/drawing/2014/main" id="{D218A625-94ED-8FF0-DF3A-CD1FC7742405}"/>
+                </a:ext>
+              </a:extLst>
+            </p:cNvPr>
+            <p:cNvPicPr>
+              <a:picLocks noChangeAspect="1"/>
+            </p:cNvPicPr>
+            <p:nvPr/>
+          </p:nvPicPr>
+          <p:blipFill>
+            <a:blip>
+              <a:extLst>
+                <a:ext uri="{96DAC541-7B7A-43D3-8B79-37D633B846F1}">
+                  <asvg:svgBlip xmlns:asvg="http://schemas.microsoft.com/office/drawing/2016/SVG/main" r:embed="rId10"/>
+                </a:ext>
+              </a:extLst>
+            </a:blip>
+            <a:srcRect/>
+            <a:stretch/>
+          </p:blipFill>
+          <p:spPr>
+            <a:xfrm>
+              <a:off x="1954701" y="4023811"/>
+              <a:ext cx="357879" cy="357879"/>
+            </a:xfrm>
+            <a:prstGeom prst="rect">
+              <a:avLst/>
+            </a:prstGeom>
+          </p:spPr>
+        </p:pic>
+        <p:pic>
+          <p:nvPicPr>
+            <p:cNvPr id="1459" name="Image 9" descr="Andar con relleno sólido">
+              <a:extLst>
+                <a:ext uri="{FF2B5EF4-FFF2-40B4-BE49-F238E27FC236}">
+                  <a16:creationId xmlns:a16="http://schemas.microsoft.com/office/drawing/2014/main" id="{A1D5BC2B-A726-78CE-8AFD-E4C4ECAD8E90}"/>
+                </a:ext>
+              </a:extLst>
+            </p:cNvPr>
+            <p:cNvPicPr>
+              <a:picLocks noChangeAspect="1"/>
+            </p:cNvPicPr>
+            <p:nvPr/>
+          </p:nvPicPr>
+          <p:blipFill>
+            <a:blip>
+              <a:extLst>
+                <a:ext uri="{96DAC541-7B7A-43D3-8B79-37D633B846F1}">
+                  <asvg:svgBlip xmlns:asvg="http://schemas.microsoft.com/office/drawing/2016/SVG/main" r:embed="rId11"/>
+                </a:ext>
+              </a:extLst>
+            </a:blip>
+            <a:srcRect/>
+            <a:stretch/>
+          </p:blipFill>
+          <p:spPr>
+            <a:xfrm>
+              <a:off x="1955145" y="4830479"/>
+              <a:ext cx="338180" cy="338180"/>
+            </a:xfrm>
+            <a:prstGeom prst="rect">
+              <a:avLst/>
+            </a:prstGeom>
+          </p:spPr>
+        </p:pic>
+      </p:grpSp>
+      <p:pic>
+        <p:nvPicPr>
+          <p:cNvPr id="1461" name="Imagen 1460">
+            <a:extLst>
+              <a:ext uri="{FF2B5EF4-FFF2-40B4-BE49-F238E27FC236}">
+                <a16:creationId xmlns:a16="http://schemas.microsoft.com/office/drawing/2014/main" id="{687564CB-6645-3568-2AE3-684AA54BE00B}"/>
+              </a:ext>
+            </a:extLst>
+          </p:cNvPr>
+          <p:cNvPicPr>
+            <a:picLocks noChangeAspect="1"/>
+          </p:cNvPicPr>
+          <p:nvPr/>
+        </p:nvPicPr>
+        <p:blipFill>
+          <a:blip r:embed="rId13">
+            <a:extLst>
+              <a:ext uri="{28A0092B-C50C-407E-A947-70E740481C1C}">
+                <a14:useLocalDpi xmlns:a14="http://schemas.microsoft.com/office/drawing/2010/main" val="0"/>
+              </a:ext>
+            </a:extLst>
+          </a:blip>
+          <a:stretch>
+            <a:fillRect/>
+          </a:stretch>
+        </p:blipFill>
+        <p:spPr>
+          <a:xfrm>
+            <a:off x="1565393" y="369265"/>
+            <a:ext cx="560404" cy="560404"/>
+          </a:xfrm>
+          <a:prstGeom prst="rect">
+            <a:avLst/>
+          </a:prstGeom>
+        </p:spPr>
+      </p:pic>
+      <p:grpSp>
+        <p:nvGrpSpPr>
+          <p:cNvPr id="1029" name="Grupo 1028">
+            <a:extLst>
+              <a:ext uri="{FF2B5EF4-FFF2-40B4-BE49-F238E27FC236}">
+                <a16:creationId xmlns:a16="http://schemas.microsoft.com/office/drawing/2014/main" id="{9B08C81F-2CD1-DC22-C8FC-C7B818A2CD56}"/>
+              </a:ext>
+            </a:extLst>
+          </p:cNvPr>
+          <p:cNvGrpSpPr/>
+          <p:nvPr/>
+        </p:nvGrpSpPr>
+        <p:grpSpPr>
+          <a:xfrm>
+            <a:off x="4173920" y="5680309"/>
+            <a:ext cx="1999112" cy="568360"/>
+            <a:chOff x="4183395" y="5750600"/>
+            <a:chExt cx="1999112" cy="568360"/>
+          </a:xfrm>
+        </p:grpSpPr>
+        <p:sp>
+          <p:nvSpPr>
+            <p:cNvPr id="1024" name="Shape 8">
+              <a:extLst>
+                <a:ext uri="{FF2B5EF4-FFF2-40B4-BE49-F238E27FC236}">
+                  <a16:creationId xmlns:a16="http://schemas.microsoft.com/office/drawing/2014/main" id="{3320D446-1B1E-C5C0-DB9E-62A5609AE974}"/>
+                </a:ext>
+              </a:extLst>
+            </p:cNvPr>
+            <p:cNvSpPr/>
+            <p:nvPr/>
+          </p:nvSpPr>
+          <p:spPr>
+            <a:xfrm>
+              <a:off x="4183395" y="5750600"/>
+              <a:ext cx="1999112" cy="568360"/>
+            </a:xfrm>
+            <a:prstGeom prst="roundRect">
+              <a:avLst>
+                <a:gd name="adj" fmla="val 9259"/>
+              </a:avLst>
+            </a:prstGeom>
+            <a:solidFill>
+              <a:schemeClr val="bg1"/>
+            </a:solidFill>
+            <a:ln w="19050">
+              <a:solidFill>
+                <a:srgbClr val="F9A825"/>
+              </a:solidFill>
+              <a:prstDash val="solid"/>
+            </a:ln>
+          </p:spPr>
+          <p:txBody>
+            <a:bodyPr anchor="ctr"/>
+            <a:lstStyle/>
+            <a:p>
+              <a:pPr algn="r"/>
+              <a:r>
+                <a:rPr lang="es-ES" sz="1200" b="1" dirty="0" err="1">
+                  <a:latin typeface="Consolas" panose="020B0609020204030204" pitchFamily="49" charset="0"/>
+                </a:rPr>
+                <a:t>clm.osrm.partition</a:t>
+              </a:r>
+              <a:br>
+                <a:rPr lang="es-ES" sz="1200" b="1" dirty="0">
+                  <a:latin typeface="Consolas" panose="020B0609020204030204" pitchFamily="49" charset="0"/>
+                </a:rPr>
+              </a:br>
+              <a:r>
+                <a:rPr lang="es-ES" sz="1100" dirty="0">
+                  <a:latin typeface="Calibri" panose="020F0502020204030204" pitchFamily="34" charset="0"/>
+                  <a:ea typeface="Calibri" panose="020F0502020204030204" pitchFamily="34" charset="0"/>
+                  <a:cs typeface="Calibri" panose="020F0502020204030204" pitchFamily="34" charset="0"/>
+                </a:rPr>
+                <a:t>Partición jerárquica</a:t>
+              </a:r>
+            </a:p>
+          </p:txBody>
+        </p:sp>
+        <p:pic>
+          <p:nvPicPr>
+            <p:cNvPr id="1028" name="Gráfico 1027">
+              <a:extLst>
+                <a:ext uri="{FF2B5EF4-FFF2-40B4-BE49-F238E27FC236}">
+                  <a16:creationId xmlns:a16="http://schemas.microsoft.com/office/drawing/2014/main" id="{8FDD2606-D05A-3FC5-E47D-082546B7D67D}"/>
+                </a:ext>
+              </a:extLst>
+            </p:cNvPr>
+            <p:cNvPicPr>
+              <a:picLocks noChangeAspect="1"/>
+            </p:cNvPicPr>
+            <p:nvPr/>
+          </p:nvPicPr>
+          <p:blipFill>
+            <a:blip>
+              <a:extLst>
+                <a:ext uri="{96DAC541-7B7A-43D3-8B79-37D633B846F1}">
+                  <asvg:svgBlip xmlns:asvg="http://schemas.microsoft.com/office/drawing/2016/SVG/main" r:embed="rId14"/>
+                </a:ext>
+              </a:extLst>
+            </a:blip>
+            <a:stretch>
+              <a:fillRect/>
+            </a:stretch>
+          </p:blipFill>
+          <p:spPr>
+            <a:xfrm>
+              <a:off x="4183395" y="5829807"/>
+              <a:ext cx="414919" cy="409946"/>
+            </a:xfrm>
+            <a:prstGeom prst="rect">
+              <a:avLst/>
+            </a:prstGeom>
+          </p:spPr>
+        </p:pic>
+      </p:grpSp>
+      <p:grpSp>
+        <p:nvGrpSpPr>
+          <p:cNvPr id="1031" name="Grupo 1030">
+            <a:extLst>
+              <a:ext uri="{FF2B5EF4-FFF2-40B4-BE49-F238E27FC236}">
+                <a16:creationId xmlns:a16="http://schemas.microsoft.com/office/drawing/2014/main" id="{D65061E2-560F-B2FC-1F52-3D90B0653045}"/>
+              </a:ext>
+            </a:extLst>
+          </p:cNvPr>
+          <p:cNvGrpSpPr/>
+          <p:nvPr/>
+        </p:nvGrpSpPr>
+        <p:grpSpPr>
+          <a:xfrm>
+            <a:off x="2121044" y="5686612"/>
+            <a:ext cx="1496090" cy="568360"/>
+            <a:chOff x="4183395" y="5750600"/>
+            <a:chExt cx="1496090" cy="568360"/>
+          </a:xfrm>
+        </p:grpSpPr>
+        <p:sp>
+          <p:nvSpPr>
+            <p:cNvPr id="1033" name="Shape 8">
+              <a:extLst>
+                <a:ext uri="{FF2B5EF4-FFF2-40B4-BE49-F238E27FC236}">
+                  <a16:creationId xmlns:a16="http://schemas.microsoft.com/office/drawing/2014/main" id="{9939866B-5580-711B-181C-7434A085DBAD}"/>
+                </a:ext>
+              </a:extLst>
+            </p:cNvPr>
+            <p:cNvSpPr/>
+            <p:nvPr/>
+          </p:nvSpPr>
+          <p:spPr>
+            <a:xfrm>
+              <a:off x="4183395" y="5750600"/>
+              <a:ext cx="1496090" cy="568360"/>
+            </a:xfrm>
+            <a:prstGeom prst="roundRect">
+              <a:avLst>
+                <a:gd name="adj" fmla="val 9259"/>
+              </a:avLst>
+            </a:prstGeom>
+            <a:solidFill>
+              <a:schemeClr val="bg1"/>
+            </a:solidFill>
+            <a:ln w="19050">
+              <a:solidFill>
+                <a:srgbClr val="F9A825"/>
+              </a:solidFill>
+              <a:prstDash val="solid"/>
+            </a:ln>
+          </p:spPr>
+          <p:txBody>
+            <a:bodyPr anchor="ctr"/>
+            <a:lstStyle/>
+            <a:p>
+              <a:pPr algn="r"/>
+              <a:r>
+                <a:rPr lang="es-ES" sz="1200" b="1" dirty="0" err="1">
+                  <a:latin typeface="Consolas" panose="020B0609020204030204" pitchFamily="49" charset="0"/>
+                </a:rPr>
+                <a:t>clm.osrm</a:t>
+              </a:r>
+              <a:br>
+                <a:rPr lang="es-ES" sz="1200" b="1" dirty="0">
+                  <a:latin typeface="Consolas" panose="020B0609020204030204" pitchFamily="49" charset="0"/>
+                </a:rPr>
+              </a:br>
+              <a:r>
+                <a:rPr lang="es-ES" sz="1100" dirty="0">
+                  <a:latin typeface="Calibri" panose="020F0502020204030204" pitchFamily="34" charset="0"/>
+                  <a:ea typeface="Calibri" panose="020F0502020204030204" pitchFamily="34" charset="0"/>
+                  <a:cs typeface="Calibri" panose="020F0502020204030204" pitchFamily="34" charset="0"/>
+                </a:rPr>
+                <a:t>Grafo principal</a:t>
+              </a:r>
+            </a:p>
+          </p:txBody>
+        </p:sp>
+        <p:pic>
+          <p:nvPicPr>
+            <p:cNvPr id="1034" name="Gráfico 1033">
+              <a:extLst>
+                <a:ext uri="{FF2B5EF4-FFF2-40B4-BE49-F238E27FC236}">
+                  <a16:creationId xmlns:a16="http://schemas.microsoft.com/office/drawing/2014/main" id="{4DCCC494-C5C7-86AF-02B4-5E395A819BE0}"/>
+                </a:ext>
+              </a:extLst>
+            </p:cNvPr>
+            <p:cNvPicPr>
+              <a:picLocks noChangeAspect="1"/>
+            </p:cNvPicPr>
+            <p:nvPr/>
+          </p:nvPicPr>
+          <p:blipFill>
+            <a:blip>
+              <a:extLst>
+                <a:ext uri="{96DAC541-7B7A-43D3-8B79-37D633B846F1}">
+                  <asvg:svgBlip xmlns:asvg="http://schemas.microsoft.com/office/drawing/2016/SVG/main" r:embed="rId14"/>
+                </a:ext>
+              </a:extLst>
+            </a:blip>
+            <a:stretch>
+              <a:fillRect/>
+            </a:stretch>
+          </p:blipFill>
+          <p:spPr>
+            <a:xfrm>
+              <a:off x="4183395" y="5829807"/>
+              <a:ext cx="414919" cy="409946"/>
+            </a:xfrm>
+            <a:prstGeom prst="rect">
+              <a:avLst/>
+            </a:prstGeom>
+          </p:spPr>
+        </p:pic>
+      </p:grpSp>
+      <p:grpSp>
+        <p:nvGrpSpPr>
+          <p:cNvPr id="1035" name="Grupo 1034">
+            <a:extLst>
+              <a:ext uri="{FF2B5EF4-FFF2-40B4-BE49-F238E27FC236}">
+                <a16:creationId xmlns:a16="http://schemas.microsoft.com/office/drawing/2014/main" id="{89FCDA10-320C-7DAF-A5A3-60ECA8C5A42C}"/>
+              </a:ext>
+            </a:extLst>
+          </p:cNvPr>
+          <p:cNvGrpSpPr/>
+          <p:nvPr/>
+        </p:nvGrpSpPr>
+        <p:grpSpPr>
+          <a:xfrm>
+            <a:off x="6710252" y="5570422"/>
+            <a:ext cx="1464117" cy="356714"/>
+            <a:chOff x="4183395" y="5750600"/>
+            <a:chExt cx="1464117" cy="356714"/>
+          </a:xfrm>
+        </p:grpSpPr>
+        <p:sp>
+          <p:nvSpPr>
+            <p:cNvPr id="1036" name="Shape 8">
+              <a:extLst>
+                <a:ext uri="{FF2B5EF4-FFF2-40B4-BE49-F238E27FC236}">
+                  <a16:creationId xmlns:a16="http://schemas.microsoft.com/office/drawing/2014/main" id="{246304B0-D619-0781-413D-EDFB770323A9}"/>
+                </a:ext>
+              </a:extLst>
+            </p:cNvPr>
+            <p:cNvSpPr/>
+            <p:nvPr/>
+          </p:nvSpPr>
+          <p:spPr>
+            <a:xfrm>
+              <a:off x="4183395" y="5750600"/>
+              <a:ext cx="1464117" cy="356714"/>
+            </a:xfrm>
+            <a:prstGeom prst="roundRect">
+              <a:avLst>
+                <a:gd name="adj" fmla="val 9259"/>
+              </a:avLst>
+            </a:prstGeom>
+            <a:solidFill>
+              <a:schemeClr val="bg1"/>
+            </a:solidFill>
+            <a:ln w="19050">
+              <a:solidFill>
+                <a:srgbClr val="F9A825"/>
+              </a:solidFill>
+              <a:prstDash val="solid"/>
+            </a:ln>
+          </p:spPr>
+          <p:txBody>
+            <a:bodyPr anchor="ctr"/>
+            <a:lstStyle/>
+            <a:p>
+              <a:pPr algn="r"/>
+              <a:r>
+                <a:rPr lang="es-ES" sz="1000" b="1" dirty="0" err="1">
+                  <a:latin typeface="Consolas" panose="020B0609020204030204" pitchFamily="49" charset="0"/>
+                </a:rPr>
+                <a:t>clm.osrm.cells</a:t>
+              </a:r>
+              <a:br>
+                <a:rPr lang="es-ES" sz="1000" b="1" dirty="0">
+                  <a:latin typeface="Consolas" panose="020B0609020204030204" pitchFamily="49" charset="0"/>
+                </a:rPr>
+              </a:br>
+              <a:r>
+                <a:rPr lang="es-ES" sz="900" dirty="0">
+                  <a:latin typeface="Calibri" panose="020F0502020204030204" pitchFamily="34" charset="0"/>
+                  <a:ea typeface="Calibri" panose="020F0502020204030204" pitchFamily="34" charset="0"/>
+                  <a:cs typeface="Calibri" panose="020F0502020204030204" pitchFamily="34" charset="0"/>
+                </a:rPr>
+                <a:t>Celdas MLD</a:t>
+              </a:r>
+            </a:p>
+          </p:txBody>
+        </p:sp>
+        <p:pic>
+          <p:nvPicPr>
+            <p:cNvPr id="1037" name="Gráfico 1036">
+              <a:extLst>
+                <a:ext uri="{FF2B5EF4-FFF2-40B4-BE49-F238E27FC236}">
+                  <a16:creationId xmlns:a16="http://schemas.microsoft.com/office/drawing/2014/main" id="{8264CDD3-55B2-44BC-1E32-D27FAB663533}"/>
+                </a:ext>
+              </a:extLst>
+            </p:cNvPr>
+            <p:cNvPicPr>
+              <a:picLocks noChangeAspect="1"/>
+            </p:cNvPicPr>
+            <p:nvPr/>
+          </p:nvPicPr>
+          <p:blipFill>
+            <a:blip>
+              <a:extLst>
+                <a:ext uri="{96DAC541-7B7A-43D3-8B79-37D633B846F1}">
+                  <asvg:svgBlip xmlns:asvg="http://schemas.microsoft.com/office/drawing/2016/SVG/main" r:embed="rId14"/>
+                </a:ext>
+              </a:extLst>
+            </a:blip>
+            <a:stretch>
+              <a:fillRect/>
+            </a:stretch>
+          </p:blipFill>
+          <p:spPr>
+            <a:xfrm>
+              <a:off x="4202833" y="5791272"/>
+              <a:ext cx="297824" cy="294254"/>
+            </a:xfrm>
+            <a:prstGeom prst="rect">
+              <a:avLst/>
+            </a:prstGeom>
+          </p:spPr>
+        </p:pic>
+      </p:grpSp>
+      <p:cxnSp>
+        <p:nvCxnSpPr>
+          <p:cNvPr id="25" name="Conector: angular 24">
+            <a:extLst>
+              <a:ext uri="{FF2B5EF4-FFF2-40B4-BE49-F238E27FC236}">
+                <a16:creationId xmlns:a16="http://schemas.microsoft.com/office/drawing/2014/main" id="{2EA014C8-C9AC-6519-3478-9053142DE2CE}"/>
+              </a:ext>
+            </a:extLst>
+          </p:cNvPr>
+          <p:cNvCxnSpPr>
+            <a:cxnSpLocks/>
+            <a:stCxn id="1312" idx="3"/>
+            <a:endCxn id="12" idx="1"/>
+          </p:cNvCxnSpPr>
+          <p:nvPr/>
+        </p:nvCxnSpPr>
+        <p:spPr>
+          <a:xfrm flipV="1">
+            <a:off x="1227688" y="3266010"/>
+            <a:ext cx="672234" cy="774166"/>
+          </a:xfrm>
+          <a:prstGeom prst="bentConnector3">
+            <a:avLst>
+              <a:gd name="adj1" fmla="val 50000"/>
+            </a:avLst>
+          </a:prstGeom>
+          <a:ln>
+            <a:solidFill>
+              <a:srgbClr val="573FF6"/>
+            </a:solidFill>
+            <a:tailEnd type="triangle"/>
           </a:ln>
         </p:spPr>
         <p:style>
@@ -16264,23 +20490,35 @@
       </p:cxnSp>
       <p:cxnSp>
         <p:nvCxnSpPr>
-          <p:cNvPr id="14" name="Connector 13"/>
-          <p:cNvCxnSpPr/>
+          <p:cNvPr id="29" name="Conector: angular 28">
+            <a:extLst>
+              <a:ext uri="{FF2B5EF4-FFF2-40B4-BE49-F238E27FC236}">
+                <a16:creationId xmlns:a16="http://schemas.microsoft.com/office/drawing/2014/main" id="{2F6A10E5-4C42-D3BF-6326-09C535BD9146}"/>
+              </a:ext>
+            </a:extLst>
+          </p:cNvPr>
+          <p:cNvCxnSpPr>
+            <a:cxnSpLocks/>
+            <a:stCxn id="1312" idx="3"/>
+            <a:endCxn id="18" idx="1"/>
+          </p:cNvCxnSpPr>
           <p:nvPr/>
         </p:nvCxnSpPr>
         <p:spPr>
-          <a:xfrm>
-            <a:off x="5053663" y="1051531"/>
-            <a:ext cx="0" cy="160017"/>
+          <a:xfrm flipV="1">
+            <a:off x="1227688" y="4038140"/>
+            <a:ext cx="672234" cy="2036"/>
           </a:xfrm>
-          <a:prstGeom prst="line">
-            <a:avLst/>
+          <a:prstGeom prst="bentConnector3">
+            <a:avLst>
+              <a:gd name="adj1" fmla="val 50000"/>
+            </a:avLst>
           </a:prstGeom>
-          <a:ln w="25400">
+          <a:ln>
             <a:solidFill>
-              <a:srgbClr val="000000"/>
+              <a:srgbClr val="26AA57"/>
             </a:solidFill>
-            <a:headEnd type="triangle" w="med" len="med"/>
+            <a:tailEnd type="triangle"/>
           </a:ln>
         </p:spPr>
         <p:style>
@@ -16300,23 +20538,35 @@
       </p:cxnSp>
       <p:cxnSp>
         <p:nvCxnSpPr>
-          <p:cNvPr id="15" name="Connector 14"/>
-          <p:cNvCxnSpPr/>
+          <p:cNvPr id="33" name="Conector: angular 32">
+            <a:extLst>
+              <a:ext uri="{FF2B5EF4-FFF2-40B4-BE49-F238E27FC236}">
+                <a16:creationId xmlns:a16="http://schemas.microsoft.com/office/drawing/2014/main" id="{60CD4A74-4DB8-6B7D-F24A-AEB16BD8440A}"/>
+              </a:ext>
+            </a:extLst>
+          </p:cNvPr>
+          <p:cNvCxnSpPr>
+            <a:cxnSpLocks/>
+            <a:stCxn id="1312" idx="3"/>
+            <a:endCxn id="20" idx="1"/>
+          </p:cNvCxnSpPr>
           <p:nvPr/>
         </p:nvCxnSpPr>
         <p:spPr>
           <a:xfrm>
-            <a:off x="7137677" y="1051531"/>
-            <a:ext cx="0" cy="160017"/>
+            <a:off x="1227688" y="4040176"/>
+            <a:ext cx="672234" cy="770093"/>
           </a:xfrm>
-          <a:prstGeom prst="line">
-            <a:avLst/>
+          <a:prstGeom prst="bentConnector3">
+            <a:avLst>
+              <a:gd name="adj1" fmla="val 50000"/>
+            </a:avLst>
           </a:prstGeom>
-          <a:ln w="25400">
+          <a:ln>
             <a:solidFill>
-              <a:srgbClr val="000000"/>
+              <a:srgbClr val="424242"/>
             </a:solidFill>
-            <a:headEnd type="triangle" w="med" len="med"/>
+            <a:tailEnd type="triangle"/>
           </a:ln>
         </p:spPr>
         <p:style>
@@ -16336,23 +20586,33 @@
       </p:cxnSp>
       <p:cxnSp>
         <p:nvCxnSpPr>
-          <p:cNvPr id="16" name="Connector 15"/>
-          <p:cNvCxnSpPr/>
+          <p:cNvPr id="47" name="Conector: angular 46">
+            <a:extLst>
+              <a:ext uri="{FF2B5EF4-FFF2-40B4-BE49-F238E27FC236}">
+                <a16:creationId xmlns:a16="http://schemas.microsoft.com/office/drawing/2014/main" id="{847D9914-0193-19B4-FC02-FEC9EB0B365C}"/>
+              </a:ext>
+            </a:extLst>
+          </p:cNvPr>
+          <p:cNvCxnSpPr>
+            <a:cxnSpLocks/>
+            <a:stCxn id="12" idx="3"/>
+            <a:endCxn id="37" idx="1"/>
+          </p:cNvCxnSpPr>
           <p:nvPr/>
         </p:nvCxnSpPr>
         <p:spPr>
-          <a:xfrm>
-            <a:off x="9221689" y="1051531"/>
-            <a:ext cx="0" cy="160017"/>
+          <a:xfrm flipV="1">
+            <a:off x="3848483" y="3263233"/>
+            <a:ext cx="463805" cy="2777"/>
           </a:xfrm>
-          <a:prstGeom prst="line">
+          <a:prstGeom prst="bentConnector3">
             <a:avLst/>
           </a:prstGeom>
-          <a:ln w="25400">
+          <a:ln>
             <a:solidFill>
-              <a:srgbClr val="000000"/>
+              <a:srgbClr val="573FF6"/>
             </a:solidFill>
-            <a:headEnd type="triangle" w="med" len="med"/>
+            <a:tailEnd type="triangle"/>
           </a:ln>
         </p:spPr>
         <p:style>
@@ -16372,22 +20632,32 @@
       </p:cxnSp>
       <p:cxnSp>
         <p:nvCxnSpPr>
-          <p:cNvPr id="17" name="Connector 16"/>
-          <p:cNvCxnSpPr/>
+          <p:cNvPr id="51" name="Conector: angular 50">
+            <a:extLst>
+              <a:ext uri="{FF2B5EF4-FFF2-40B4-BE49-F238E27FC236}">
+                <a16:creationId xmlns:a16="http://schemas.microsoft.com/office/drawing/2014/main" id="{E9A1ADE4-DE59-F46B-8313-6C355A0B28A9}"/>
+              </a:ext>
+            </a:extLst>
+          </p:cNvPr>
+          <p:cNvCxnSpPr>
+            <a:stCxn id="18" idx="3"/>
+            <a:endCxn id="38" idx="1"/>
+          </p:cNvCxnSpPr>
           <p:nvPr/>
         </p:nvCxnSpPr>
         <p:spPr>
           <a:xfrm>
-            <a:off x="2969649" y="1851610"/>
-            <a:ext cx="0" cy="152397"/>
+            <a:off x="3856139" y="4038140"/>
+            <a:ext cx="456149" cy="3012"/>
           </a:xfrm>
-          <a:prstGeom prst="line">
+          <a:prstGeom prst="bentConnector3">
             <a:avLst/>
           </a:prstGeom>
-          <a:ln w="25400">
+          <a:ln>
             <a:solidFill>
-              <a:srgbClr val="000000"/>
+              <a:srgbClr val="26AA57"/>
             </a:solidFill>
+            <a:tailEnd type="triangle"/>
           </a:ln>
         </p:spPr>
         <p:style>
@@ -16407,22 +20677,195 @@
       </p:cxnSp>
       <p:cxnSp>
         <p:nvCxnSpPr>
-          <p:cNvPr id="18" name="Connector 17"/>
-          <p:cNvCxnSpPr/>
+          <p:cNvPr id="53" name="Conector: angular 52">
+            <a:extLst>
+              <a:ext uri="{FF2B5EF4-FFF2-40B4-BE49-F238E27FC236}">
+                <a16:creationId xmlns:a16="http://schemas.microsoft.com/office/drawing/2014/main" id="{D667326E-84AB-B9D2-3B82-FD08E3CF09A4}"/>
+              </a:ext>
+            </a:extLst>
+          </p:cNvPr>
+          <p:cNvCxnSpPr>
+            <a:cxnSpLocks/>
+            <a:stCxn id="20" idx="3"/>
+            <a:endCxn id="39" idx="1"/>
+          </p:cNvCxnSpPr>
           <p:nvPr/>
         </p:nvCxnSpPr>
         <p:spPr>
-          <a:xfrm>
-            <a:off x="5053663" y="1851610"/>
-            <a:ext cx="0" cy="152397"/>
+          <a:xfrm flipV="1">
+            <a:off x="3856139" y="4809221"/>
+            <a:ext cx="460575" cy="1048"/>
           </a:xfrm>
-          <a:prstGeom prst="line">
+          <a:prstGeom prst="bentConnector3">
             <a:avLst/>
           </a:prstGeom>
-          <a:ln w="25400">
+          <a:ln>
             <a:solidFill>
-              <a:srgbClr val="000000"/>
+              <a:srgbClr val="424242"/>
             </a:solidFill>
+            <a:tailEnd type="triangle"/>
+          </a:ln>
+        </p:spPr>
+        <p:style>
+          <a:lnRef idx="2">
+            <a:schemeClr val="accent1"/>
+          </a:lnRef>
+          <a:fillRef idx="0">
+            <a:schemeClr val="accent1"/>
+          </a:fillRef>
+          <a:effectRef idx="1">
+            <a:schemeClr val="accent1"/>
+          </a:effectRef>
+          <a:fontRef idx="minor">
+            <a:schemeClr val="tx1"/>
+          </a:fontRef>
+        </p:style>
+      </p:cxnSp>
+      <p:grpSp>
+        <p:nvGrpSpPr>
+          <p:cNvPr id="1083" name="Grupo 1082">
+            <a:extLst>
+              <a:ext uri="{FF2B5EF4-FFF2-40B4-BE49-F238E27FC236}">
+                <a16:creationId xmlns:a16="http://schemas.microsoft.com/office/drawing/2014/main" id="{AEABC946-B1B0-C63E-AAEE-49B3A88EAB82}"/>
+              </a:ext>
+            </a:extLst>
+          </p:cNvPr>
+          <p:cNvGrpSpPr/>
+          <p:nvPr/>
+        </p:nvGrpSpPr>
+        <p:grpSpPr>
+          <a:xfrm>
+            <a:off x="6498415" y="5994322"/>
+            <a:ext cx="1682365" cy="409946"/>
+            <a:chOff x="6584564" y="6115284"/>
+            <a:chExt cx="1682365" cy="409946"/>
+          </a:xfrm>
+        </p:grpSpPr>
+        <p:sp>
+          <p:nvSpPr>
+            <p:cNvPr id="1079" name="Shape 8">
+              <a:extLst>
+                <a:ext uri="{FF2B5EF4-FFF2-40B4-BE49-F238E27FC236}">
+                  <a16:creationId xmlns:a16="http://schemas.microsoft.com/office/drawing/2014/main" id="{A7CDA10F-BC15-57B7-3ACD-F5311618F61E}"/>
+                </a:ext>
+              </a:extLst>
+            </p:cNvPr>
+            <p:cNvSpPr/>
+            <p:nvPr/>
+          </p:nvSpPr>
+          <p:spPr>
+            <a:xfrm>
+              <a:off x="6584564" y="6115284"/>
+              <a:ext cx="1682365" cy="409946"/>
+            </a:xfrm>
+            <a:prstGeom prst="roundRect">
+              <a:avLst>
+                <a:gd name="adj" fmla="val 9259"/>
+              </a:avLst>
+            </a:prstGeom>
+            <a:solidFill>
+              <a:schemeClr val="bg1"/>
+            </a:solidFill>
+            <a:ln w="19050">
+              <a:solidFill>
+                <a:srgbClr val="F9A825"/>
+              </a:solidFill>
+              <a:prstDash val="solid"/>
+            </a:ln>
+          </p:spPr>
+          <p:txBody>
+            <a:bodyPr anchor="ctr"/>
+            <a:lstStyle/>
+            <a:p>
+              <a:pPr algn="r"/>
+              <a:r>
+                <a:rPr lang="es-ES" sz="1000" b="1" dirty="0" err="1">
+                  <a:latin typeface="Consolas" panose="020B0609020204030204" pitchFamily="49" charset="0"/>
+                </a:rPr>
+                <a:t>clm.osrm.cell_metrics</a:t>
+              </a:r>
+              <a:br>
+                <a:rPr lang="es-ES" sz="1000" b="1" dirty="0">
+                  <a:latin typeface="Consolas" panose="020B0609020204030204" pitchFamily="49" charset="0"/>
+                </a:rPr>
+              </a:br>
+              <a:r>
+                <a:rPr lang="es-ES" sz="900" dirty="0">
+                  <a:latin typeface="Calibri" panose="020F0502020204030204" pitchFamily="34" charset="0"/>
+                  <a:ea typeface="Calibri" panose="020F0502020204030204" pitchFamily="34" charset="0"/>
+                  <a:cs typeface="Calibri" panose="020F0502020204030204" pitchFamily="34" charset="0"/>
+                </a:rPr>
+                <a:t>Pesos por celda</a:t>
+              </a:r>
+            </a:p>
+          </p:txBody>
+        </p:sp>
+        <p:pic>
+          <p:nvPicPr>
+            <p:cNvPr id="1082" name="Gráfico 1081">
+              <a:extLst>
+                <a:ext uri="{FF2B5EF4-FFF2-40B4-BE49-F238E27FC236}">
+                  <a16:creationId xmlns:a16="http://schemas.microsoft.com/office/drawing/2014/main" id="{82DEF794-9A81-3A5B-26BE-3460DF06CFC3}"/>
+                </a:ext>
+              </a:extLst>
+            </p:cNvPr>
+            <p:cNvPicPr>
+              <a:picLocks noChangeAspect="1"/>
+            </p:cNvPicPr>
+            <p:nvPr/>
+          </p:nvPicPr>
+          <p:blipFill>
+            <a:blip>
+              <a:extLst>
+                <a:ext uri="{96DAC541-7B7A-43D3-8B79-37D633B846F1}">
+                  <asvg:svgBlip xmlns:asvg="http://schemas.microsoft.com/office/drawing/2016/SVG/main" r:embed="rId14"/>
+                </a:ext>
+              </a:extLst>
+            </a:blip>
+            <a:stretch>
+              <a:fillRect/>
+            </a:stretch>
+          </p:blipFill>
+          <p:spPr>
+            <a:xfrm>
+              <a:off x="6584564" y="6345414"/>
+              <a:ext cx="181997" cy="179815"/>
+            </a:xfrm>
+            <a:prstGeom prst="rect">
+              <a:avLst/>
+            </a:prstGeom>
+          </p:spPr>
+        </p:pic>
+      </p:grpSp>
+      <p:cxnSp>
+        <p:nvCxnSpPr>
+          <p:cNvPr id="1085" name="Conector: angular 1084">
+            <a:extLst>
+              <a:ext uri="{FF2B5EF4-FFF2-40B4-BE49-F238E27FC236}">
+                <a16:creationId xmlns:a16="http://schemas.microsoft.com/office/drawing/2014/main" id="{3C2B9FBF-DA11-3729-AD78-ABE92588D866}"/>
+              </a:ext>
+            </a:extLst>
+          </p:cNvPr>
+          <p:cNvCxnSpPr>
+            <a:cxnSpLocks/>
+            <a:stCxn id="16" idx="2"/>
+            <a:endCxn id="1033" idx="0"/>
+          </p:cNvCxnSpPr>
+          <p:nvPr/>
+        </p:nvCxnSpPr>
+        <p:spPr>
+          <a:xfrm rot="5400000">
+            <a:off x="2709317" y="5526838"/>
+            <a:ext cx="319547" cy="1"/>
+          </a:xfrm>
+          <a:prstGeom prst="bentConnector3">
+            <a:avLst/>
+          </a:prstGeom>
+          <a:ln>
+            <a:solidFill>
+              <a:srgbClr val="562C7A"/>
+            </a:solidFill>
+            <a:tailEnd type="triangle"/>
           </a:ln>
         </p:spPr>
         <p:style>
@@ -16442,22 +20885,33 @@
       </p:cxnSp>
       <p:cxnSp>
         <p:nvCxnSpPr>
-          <p:cNvPr id="19" name="Connector 18"/>
-          <p:cNvCxnSpPr/>
+          <p:cNvPr id="1472" name="Conector: angular 1471">
+            <a:extLst>
+              <a:ext uri="{FF2B5EF4-FFF2-40B4-BE49-F238E27FC236}">
+                <a16:creationId xmlns:a16="http://schemas.microsoft.com/office/drawing/2014/main" id="{51D54BC3-AC51-249B-FC61-58D365ED88B5}"/>
+              </a:ext>
+            </a:extLst>
+          </p:cNvPr>
+          <p:cNvCxnSpPr>
+            <a:cxnSpLocks/>
+            <a:stCxn id="22" idx="2"/>
+            <a:endCxn id="1024" idx="0"/>
+          </p:cNvCxnSpPr>
           <p:nvPr/>
         </p:nvCxnSpPr>
         <p:spPr>
-          <a:xfrm>
-            <a:off x="7137677" y="1851610"/>
-            <a:ext cx="0" cy="152397"/>
+          <a:xfrm rot="5400000">
+            <a:off x="5021798" y="5526248"/>
+            <a:ext cx="305739" cy="2382"/>
           </a:xfrm>
-          <a:prstGeom prst="line">
+          <a:prstGeom prst="bentConnector3">
             <a:avLst/>
           </a:prstGeom>
-          <a:ln w="25400">
+          <a:ln>
             <a:solidFill>
-              <a:srgbClr val="000000"/>
+              <a:srgbClr val="562C7A"/>
             </a:solidFill>
+            <a:tailEnd type="triangle"/>
           </a:ln>
         </p:spPr>
         <p:style>
@@ -16477,22 +20931,36 @@
       </p:cxnSp>
       <p:cxnSp>
         <p:nvCxnSpPr>
-          <p:cNvPr id="20" name="Connector 19"/>
-          <p:cNvCxnSpPr/>
+          <p:cNvPr id="1475" name="Conector: angular 1474">
+            <a:extLst>
+              <a:ext uri="{FF2B5EF4-FFF2-40B4-BE49-F238E27FC236}">
+                <a16:creationId xmlns:a16="http://schemas.microsoft.com/office/drawing/2014/main" id="{CD430F0A-EB04-C608-E14C-5919865FCC3D}"/>
+              </a:ext>
+            </a:extLst>
+          </p:cNvPr>
+          <p:cNvCxnSpPr>
+            <a:cxnSpLocks/>
+            <a:stCxn id="23" idx="2"/>
+            <a:endCxn id="1079" idx="1"/>
+          </p:cNvCxnSpPr>
           <p:nvPr/>
         </p:nvCxnSpPr>
         <p:spPr>
-          <a:xfrm>
-            <a:off x="9221689" y="1851610"/>
-            <a:ext cx="0" cy="152397"/>
+          <a:xfrm rot="5400000">
+            <a:off x="6484397" y="5388588"/>
+            <a:ext cx="824725" cy="796688"/>
           </a:xfrm>
-          <a:prstGeom prst="line">
-            <a:avLst/>
+          <a:prstGeom prst="bentConnector4">
+            <a:avLst>
+              <a:gd name="adj1" fmla="val 8060"/>
+              <a:gd name="adj2" fmla="val 117959"/>
+            </a:avLst>
           </a:prstGeom>
-          <a:ln w="25400">
+          <a:ln>
             <a:solidFill>
-              <a:srgbClr val="000000"/>
+              <a:srgbClr val="562C7A"/>
             </a:solidFill>
+            <a:tailEnd type="triangle"/>
           </a:ln>
         </p:spPr>
         <p:style>
@@ -16512,22 +20980,36 @@
       </p:cxnSp>
       <p:cxnSp>
         <p:nvCxnSpPr>
-          <p:cNvPr id="21" name="Connector 20"/>
-          <p:cNvCxnSpPr/>
+          <p:cNvPr id="1487" name="Conector: angular 1486">
+            <a:extLst>
+              <a:ext uri="{FF2B5EF4-FFF2-40B4-BE49-F238E27FC236}">
+                <a16:creationId xmlns:a16="http://schemas.microsoft.com/office/drawing/2014/main" id="{F1475716-4E55-3356-F492-C55137DA7356}"/>
+              </a:ext>
+            </a:extLst>
+          </p:cNvPr>
+          <p:cNvCxnSpPr>
+            <a:cxnSpLocks/>
+            <a:stCxn id="23" idx="2"/>
+            <a:endCxn id="1036" idx="1"/>
+          </p:cNvCxnSpPr>
           <p:nvPr/>
         </p:nvCxnSpPr>
         <p:spPr>
-          <a:xfrm>
-            <a:off x="2969650" y="2004006"/>
-            <a:ext cx="6252040" cy="0"/>
+          <a:xfrm rot="5400000">
+            <a:off x="6815574" y="5269249"/>
+            <a:ext cx="374209" cy="584851"/>
           </a:xfrm>
-          <a:prstGeom prst="line">
-            <a:avLst/>
+          <a:prstGeom prst="bentConnector4">
+            <a:avLst>
+              <a:gd name="adj1" fmla="val 17379"/>
+              <a:gd name="adj2" fmla="val 160458"/>
+            </a:avLst>
           </a:prstGeom>
-          <a:ln w="25400">
+          <a:ln>
             <a:solidFill>
-              <a:srgbClr val="000000"/>
+              <a:srgbClr val="562C7A"/>
             </a:solidFill>
+            <a:tailEnd type="triangle"/>
           </a:ln>
         </p:spPr>
         <p:style>
@@ -16547,702 +21029,33 @@
       </p:cxnSp>
       <p:cxnSp>
         <p:nvCxnSpPr>
-          <p:cNvPr id="22" name="Connector 21"/>
-          <p:cNvCxnSpPr/>
+          <p:cNvPr id="1501" name="Conector: angular 1500">
+            <a:extLst>
+              <a:ext uri="{FF2B5EF4-FFF2-40B4-BE49-F238E27FC236}">
+                <a16:creationId xmlns:a16="http://schemas.microsoft.com/office/drawing/2014/main" id="{AC702430-81DC-9154-7CF8-FC02B7E68849}"/>
+              </a:ext>
+            </a:extLst>
+          </p:cNvPr>
+          <p:cNvCxnSpPr>
+            <a:cxnSpLocks/>
+          </p:cNvCxnSpPr>
           <p:nvPr/>
         </p:nvCxnSpPr>
         <p:spPr>
           <a:xfrm>
-            <a:off x="6095670" y="2004006"/>
-            <a:ext cx="0" cy="144776"/>
+            <a:off x="2869090" y="6248669"/>
+            <a:ext cx="5519258" cy="323170"/>
           </a:xfrm>
-          <a:prstGeom prst="line">
-            <a:avLst/>
-          </a:prstGeom>
-          <a:ln w="25400">
-            <a:solidFill>
-              <a:srgbClr val="000000"/>
-            </a:solidFill>
-            <a:headEnd type="triangle" w="med" len="med"/>
-          </a:ln>
-        </p:spPr>
-        <p:style>
-          <a:lnRef idx="2">
-            <a:schemeClr val="accent1"/>
-          </a:lnRef>
-          <a:fillRef idx="0">
-            <a:schemeClr val="accent1"/>
-          </a:fillRef>
-          <a:effectRef idx="1">
-            <a:schemeClr val="accent1"/>
-          </a:effectRef>
-          <a:fontRef idx="minor">
-            <a:schemeClr val="tx1"/>
-          </a:fontRef>
-        </p:style>
-      </p:cxnSp>
-      <p:sp>
-        <p:nvSpPr>
-          <p:cNvPr id="23" name="Rounded Rectangle 22"/>
-          <p:cNvSpPr/>
-          <p:nvPr/>
-        </p:nvSpPr>
-        <p:spPr>
-          <a:xfrm>
-            <a:off x="3619237" y="2148783"/>
-            <a:ext cx="4952866" cy="541005"/>
-          </a:xfrm>
-          <a:prstGeom prst="roundRect">
+          <a:prstGeom prst="bentConnector3">
             <a:avLst>
-              <a:gd name="adj" fmla="val 16000"/>
+              <a:gd name="adj1" fmla="val 59"/>
             </a:avLst>
           </a:prstGeom>
-          <a:solidFill>
-            <a:srgbClr val="F3F4F5"/>
-          </a:solidFill>
-          <a:ln w="31750">
+          <a:ln>
             <a:solidFill>
-              <a:srgbClr val="546E7A"/>
+              <a:srgbClr val="F89939"/>
             </a:solidFill>
-          </a:ln>
-        </p:spPr>
-        <p:style>
-          <a:lnRef idx="1">
-            <a:schemeClr val="accent1"/>
-          </a:lnRef>
-          <a:fillRef idx="3">
-            <a:schemeClr val="accent1"/>
-          </a:fillRef>
-          <a:effectRef idx="2">
-            <a:schemeClr val="accent1"/>
-          </a:effectRef>
-          <a:fontRef idx="minor">
-            <a:schemeClr val="lt1"/>
-          </a:fontRef>
-        </p:style>
-        <p:txBody>
-          <a:bodyPr wrap="square" lIns="114297" tIns="30479" rIns="114297" bIns="30479" rtlCol="0" anchor="ctr"/>
-          <a:lstStyle/>
-          <a:p>
-            <a:pPr algn="ctr"/>
-            <a:r>
-              <a:rPr sz="1323" b="1" dirty="0" err="1">
-                <a:solidFill>
-                  <a:srgbClr val="000000"/>
-                </a:solidFill>
-                <a:latin typeface="Calibri"/>
-              </a:rPr>
-              <a:t>build_route_features</a:t>
-            </a:r>
-            <a:endParaRPr sz="1323" b="1" dirty="0">
-              <a:solidFill>
-                <a:srgbClr val="000000"/>
-              </a:solidFill>
-              <a:latin typeface="Calibri"/>
-            </a:endParaRPr>
-          </a:p>
-          <a:p>
-            <a:pPr algn="ctr"/>
-            <a:r>
-              <a:rPr sz="1005" dirty="0" err="1">
-                <a:solidFill>
-                  <a:srgbClr val="444444"/>
-                </a:solidFill>
-                <a:latin typeface="Calibri"/>
-              </a:rPr>
-              <a:t>duración</a:t>
-            </a:r>
-            <a:r>
-              <a:rPr sz="1005" dirty="0">
-                <a:solidFill>
-                  <a:srgbClr val="444444"/>
-                </a:solidFill>
-                <a:latin typeface="Calibri"/>
-              </a:rPr>
-              <a:t> (s) → horas  ·  legs OTP → </a:t>
-            </a:r>
-            <a:r>
-              <a:rPr sz="1005" dirty="0" err="1">
-                <a:solidFill>
-                  <a:srgbClr val="444444"/>
-                </a:solidFill>
-                <a:latin typeface="Calibri"/>
-              </a:rPr>
-              <a:t>dur_pt</a:t>
-            </a:r>
-            <a:r>
-              <a:rPr sz="1005" dirty="0">
-                <a:solidFill>
-                  <a:srgbClr val="444444"/>
-                </a:solidFill>
-                <a:latin typeface="Calibri"/>
-              </a:rPr>
-              <a:t>_*  ·  </a:t>
-            </a:r>
-            <a:r>
-              <a:rPr sz="1005" dirty="0" err="1">
-                <a:solidFill>
-                  <a:srgbClr val="444444"/>
-                </a:solidFill>
-                <a:latin typeface="Calibri"/>
-              </a:rPr>
-              <a:t>transbordos</a:t>
-            </a:r>
-            <a:endParaRPr sz="1005" dirty="0">
-              <a:solidFill>
-                <a:srgbClr val="444444"/>
-              </a:solidFill>
-              <a:latin typeface="Calibri"/>
-            </a:endParaRPr>
-          </a:p>
-        </p:txBody>
-      </p:sp>
-      <p:cxnSp>
-        <p:nvCxnSpPr>
-          <p:cNvPr id="24" name="Connector 23"/>
-          <p:cNvCxnSpPr/>
-          <p:nvPr/>
-        </p:nvCxnSpPr>
-        <p:spPr>
-          <a:xfrm>
-            <a:off x="6095670" y="2689788"/>
-            <a:ext cx="0" cy="236214"/>
-          </a:xfrm>
-          <a:prstGeom prst="line">
-            <a:avLst/>
-          </a:prstGeom>
-          <a:ln w="25400">
-            <a:solidFill>
-              <a:srgbClr val="000000"/>
-            </a:solidFill>
-            <a:headEnd type="triangle" w="med" len="med"/>
-          </a:ln>
-        </p:spPr>
-        <p:style>
-          <a:lnRef idx="2">
-            <a:schemeClr val="accent1"/>
-          </a:lnRef>
-          <a:fillRef idx="0">
-            <a:schemeClr val="accent1"/>
-          </a:fillRef>
-          <a:effectRef idx="1">
-            <a:schemeClr val="accent1"/>
-          </a:effectRef>
-          <a:fontRef idx="minor">
-            <a:schemeClr val="tx1"/>
-          </a:fontRef>
-        </p:style>
-      </p:cxnSp>
-      <p:sp>
-        <p:nvSpPr>
-          <p:cNvPr id="25" name="Rounded Rectangle 24"/>
-          <p:cNvSpPr/>
-          <p:nvPr/>
-        </p:nvSpPr>
-        <p:spPr>
-          <a:xfrm>
-            <a:off x="3619237" y="2926002"/>
-            <a:ext cx="4952866" cy="541005"/>
-          </a:xfrm>
-          <a:prstGeom prst="roundRect">
-            <a:avLst>
-              <a:gd name="adj" fmla="val 16000"/>
-            </a:avLst>
-          </a:prstGeom>
-          <a:solidFill>
-            <a:srgbClr val="F3F4F5"/>
-          </a:solidFill>
-          <a:ln w="31750">
-            <a:solidFill>
-              <a:srgbClr val="546E7A"/>
-            </a:solidFill>
-          </a:ln>
-        </p:spPr>
-        <p:style>
-          <a:lnRef idx="1">
-            <a:schemeClr val="accent1"/>
-          </a:lnRef>
-          <a:fillRef idx="3">
-            <a:schemeClr val="accent1"/>
-          </a:fillRef>
-          <a:effectRef idx="2">
-            <a:schemeClr val="accent1"/>
-          </a:effectRef>
-          <a:fontRef idx="minor">
-            <a:schemeClr val="lt1"/>
-          </a:fontRef>
-        </p:style>
-        <p:txBody>
-          <a:bodyPr wrap="square" lIns="114297" tIns="30479" rIns="114297" bIns="30479" rtlCol="0" anchor="ctr"/>
-          <a:lstStyle/>
-          <a:p>
-            <a:pPr algn="ctr"/>
-            <a:r>
-              <a:rPr sz="1323" b="1" dirty="0" err="1">
-                <a:solidFill>
-                  <a:srgbClr val="000000"/>
-                </a:solidFill>
-                <a:latin typeface="Calibri"/>
-              </a:rPr>
-              <a:t>build_feature_frame</a:t>
-            </a:r>
-            <a:endParaRPr sz="1323" b="1" dirty="0">
-              <a:solidFill>
-                <a:srgbClr val="000000"/>
-              </a:solidFill>
-              <a:latin typeface="Calibri"/>
-            </a:endParaRPr>
-          </a:p>
-          <a:p>
-            <a:pPr algn="ctr"/>
-            <a:r>
-              <a:rPr sz="1005" dirty="0">
-                <a:solidFill>
-                  <a:srgbClr val="444444"/>
-                </a:solidFill>
-                <a:latin typeface="Calibri"/>
-              </a:rPr>
-              <a:t>+ variables </a:t>
-            </a:r>
-            <a:r>
-              <a:rPr sz="1005" dirty="0" err="1">
-                <a:solidFill>
-                  <a:srgbClr val="444444"/>
-                </a:solidFill>
-                <a:latin typeface="Calibri"/>
-              </a:rPr>
-              <a:t>sociodemográficas</a:t>
-            </a:r>
-            <a:r>
-              <a:rPr sz="1005" dirty="0">
-                <a:solidFill>
-                  <a:srgbClr val="444444"/>
-                </a:solidFill>
-                <a:latin typeface="Calibri"/>
-              </a:rPr>
-              <a:t>  ·  one-hot purpose / </a:t>
-            </a:r>
-            <a:r>
-              <a:rPr sz="1005" dirty="0" err="1">
-                <a:solidFill>
-                  <a:srgbClr val="444444"/>
-                </a:solidFill>
-                <a:latin typeface="Calibri"/>
-              </a:rPr>
-              <a:t>fueltype</a:t>
-            </a:r>
-            <a:endParaRPr sz="1005" dirty="0">
-              <a:solidFill>
-                <a:srgbClr val="444444"/>
-              </a:solidFill>
-              <a:latin typeface="Calibri"/>
-            </a:endParaRPr>
-          </a:p>
-        </p:txBody>
-      </p:sp>
-      <p:cxnSp>
-        <p:nvCxnSpPr>
-          <p:cNvPr id="26" name="Connector 25"/>
-          <p:cNvCxnSpPr/>
-          <p:nvPr/>
-        </p:nvCxnSpPr>
-        <p:spPr>
-          <a:xfrm>
-            <a:off x="6095670" y="3467007"/>
-            <a:ext cx="0" cy="236213"/>
-          </a:xfrm>
-          <a:prstGeom prst="line">
-            <a:avLst/>
-          </a:prstGeom>
-          <a:ln w="25400">
-            <a:solidFill>
-              <a:srgbClr val="000000"/>
-            </a:solidFill>
-            <a:headEnd type="triangle" w="med" len="med"/>
-          </a:ln>
-        </p:spPr>
-        <p:style>
-          <a:lnRef idx="2">
-            <a:schemeClr val="accent1"/>
-          </a:lnRef>
-          <a:fillRef idx="0">
-            <a:schemeClr val="accent1"/>
-          </a:fillRef>
-          <a:effectRef idx="1">
-            <a:schemeClr val="accent1"/>
-          </a:effectRef>
-          <a:fontRef idx="minor">
-            <a:schemeClr val="tx1"/>
-          </a:fontRef>
-        </p:style>
-      </p:cxnSp>
-      <p:sp>
-        <p:nvSpPr>
-          <p:cNvPr id="27" name="Rounded Rectangle 26"/>
-          <p:cNvSpPr/>
-          <p:nvPr/>
-        </p:nvSpPr>
-        <p:spPr>
-          <a:xfrm>
-            <a:off x="3619237" y="3703220"/>
-            <a:ext cx="4952866" cy="541005"/>
-          </a:xfrm>
-          <a:prstGeom prst="roundRect">
-            <a:avLst>
-              <a:gd name="adj" fmla="val 16000"/>
-            </a:avLst>
-          </a:prstGeom>
-          <a:solidFill>
-            <a:srgbClr val="F0F5F0"/>
-          </a:solidFill>
-          <a:ln w="31750">
-            <a:solidFill>
-              <a:srgbClr val="2E7D32"/>
-            </a:solidFill>
-          </a:ln>
-        </p:spPr>
-        <p:style>
-          <a:lnRef idx="1">
-            <a:schemeClr val="accent1"/>
-          </a:lnRef>
-          <a:fillRef idx="3">
-            <a:schemeClr val="accent1"/>
-          </a:fillRef>
-          <a:effectRef idx="2">
-            <a:schemeClr val="accent1"/>
-          </a:effectRef>
-          <a:fontRef idx="minor">
-            <a:schemeClr val="lt1"/>
-          </a:fontRef>
-        </p:style>
-        <p:txBody>
-          <a:bodyPr wrap="square" lIns="114297" tIns="30479" rIns="114297" bIns="30479" rtlCol="0" anchor="ctr"/>
-          <a:lstStyle/>
-          <a:p>
-            <a:pPr algn="ctr"/>
-            <a:r>
-              <a:rPr sz="1323" b="1" dirty="0" err="1">
-                <a:solidFill>
-                  <a:srgbClr val="000000"/>
-                </a:solidFill>
-                <a:latin typeface="Calibri"/>
-              </a:rPr>
-              <a:t>StandardScaler.transform</a:t>
-            </a:r>
-            <a:endParaRPr sz="1323" b="1" dirty="0">
-              <a:solidFill>
-                <a:srgbClr val="000000"/>
-              </a:solidFill>
-              <a:latin typeface="Calibri"/>
-            </a:endParaRPr>
-          </a:p>
-          <a:p>
-            <a:pPr algn="ctr"/>
-            <a:r>
-              <a:rPr sz="1005" dirty="0">
-                <a:solidFill>
-                  <a:srgbClr val="444444"/>
-                </a:solidFill>
-                <a:latin typeface="Calibri"/>
-              </a:rPr>
-              <a:t>columnas </a:t>
-            </a:r>
-            <a:r>
-              <a:rPr sz="1005" dirty="0" err="1">
-                <a:solidFill>
-                  <a:srgbClr val="444444"/>
-                </a:solidFill>
-                <a:latin typeface="Calibri"/>
-              </a:rPr>
-              <a:t>continuas</a:t>
-            </a:r>
-            <a:r>
-              <a:rPr sz="1005" dirty="0">
-                <a:solidFill>
-                  <a:srgbClr val="444444"/>
-                </a:solidFill>
-                <a:latin typeface="Calibri"/>
-              </a:rPr>
-              <a:t>  ·  μ y σ </a:t>
-            </a:r>
-            <a:r>
-              <a:rPr sz="1005" dirty="0" err="1">
-                <a:solidFill>
-                  <a:srgbClr val="444444"/>
-                </a:solidFill>
-                <a:latin typeface="Calibri"/>
-              </a:rPr>
-              <a:t>ajustados</a:t>
-            </a:r>
-            <a:r>
-              <a:rPr sz="1005" dirty="0">
-                <a:solidFill>
-                  <a:srgbClr val="444444"/>
-                </a:solidFill>
-                <a:latin typeface="Calibri"/>
-              </a:rPr>
-              <a:t> </a:t>
-            </a:r>
-            <a:r>
-              <a:rPr sz="1005" dirty="0" err="1">
-                <a:solidFill>
-                  <a:srgbClr val="444444"/>
-                </a:solidFill>
-                <a:latin typeface="Calibri"/>
-              </a:rPr>
-              <a:t>sobre</a:t>
-            </a:r>
-            <a:r>
-              <a:rPr sz="1005" dirty="0">
-                <a:solidFill>
-                  <a:srgbClr val="444444"/>
-                </a:solidFill>
-                <a:latin typeface="Calibri"/>
-              </a:rPr>
-              <a:t> </a:t>
-            </a:r>
-            <a:r>
-              <a:rPr sz="1005" dirty="0" err="1">
-                <a:solidFill>
-                  <a:srgbClr val="444444"/>
-                </a:solidFill>
-                <a:latin typeface="Calibri"/>
-              </a:rPr>
-              <a:t>el</a:t>
-            </a:r>
-            <a:r>
-              <a:rPr sz="1005" dirty="0">
-                <a:solidFill>
-                  <a:srgbClr val="444444"/>
-                </a:solidFill>
-                <a:latin typeface="Calibri"/>
-              </a:rPr>
-              <a:t> conjunto train</a:t>
-            </a:r>
-          </a:p>
-        </p:txBody>
-      </p:sp>
-      <p:cxnSp>
-        <p:nvCxnSpPr>
-          <p:cNvPr id="28" name="Connector 27"/>
-          <p:cNvCxnSpPr/>
-          <p:nvPr/>
-        </p:nvCxnSpPr>
-        <p:spPr>
-          <a:xfrm>
-            <a:off x="6095670" y="4244225"/>
-            <a:ext cx="0" cy="190495"/>
-          </a:xfrm>
-          <a:prstGeom prst="line">
-            <a:avLst/>
-          </a:prstGeom>
-          <a:ln w="25400">
-            <a:solidFill>
-              <a:srgbClr val="000000"/>
-            </a:solidFill>
-          </a:ln>
-        </p:spPr>
-        <p:style>
-          <a:lnRef idx="2">
-            <a:schemeClr val="accent1"/>
-          </a:lnRef>
-          <a:fillRef idx="0">
-            <a:schemeClr val="accent1"/>
-          </a:fillRef>
-          <a:effectRef idx="1">
-            <a:schemeClr val="accent1"/>
-          </a:effectRef>
-          <a:fontRef idx="minor">
-            <a:schemeClr val="tx1"/>
-          </a:fontRef>
-        </p:style>
-      </p:cxnSp>
-      <p:sp>
-        <p:nvSpPr>
-          <p:cNvPr id="29" name="Rounded Rectangle 28"/>
-          <p:cNvSpPr/>
-          <p:nvPr/>
-        </p:nvSpPr>
-        <p:spPr>
-          <a:xfrm>
-            <a:off x="2438169" y="4594736"/>
-            <a:ext cx="2209740" cy="647683"/>
-          </a:xfrm>
-          <a:prstGeom prst="roundRect">
-            <a:avLst>
-              <a:gd name="adj" fmla="val 16000"/>
-            </a:avLst>
-          </a:prstGeom>
-          <a:solidFill>
-            <a:srgbClr val="EEF4FA"/>
-          </a:solidFill>
-          <a:ln w="31750">
-            <a:solidFill>
-              <a:srgbClr val="1565C0"/>
-            </a:solidFill>
-          </a:ln>
-        </p:spPr>
-        <p:style>
-          <a:lnRef idx="1">
-            <a:schemeClr val="accent1"/>
-          </a:lnRef>
-          <a:fillRef idx="3">
-            <a:schemeClr val="accent1"/>
-          </a:fillRef>
-          <a:effectRef idx="2">
-            <a:schemeClr val="accent1"/>
-          </a:effectRef>
-          <a:fontRef idx="minor">
-            <a:schemeClr val="lt1"/>
-          </a:fontRef>
-        </p:style>
-        <p:txBody>
-          <a:bodyPr wrap="square" lIns="114297" tIns="30479" rIns="114297" bIns="30479" rtlCol="0" anchor="ctr"/>
-          <a:lstStyle/>
-          <a:p>
-            <a:pPr algn="ctr"/>
-            <a:r>
-              <a:rPr sz="1482" b="1">
-                <a:solidFill>
-                  <a:srgbClr val="000000"/>
-                </a:solidFill>
-                <a:latin typeface="Calibri"/>
-              </a:rPr>
-              <a:t>XGBoost</a:t>
-            </a:r>
-          </a:p>
-        </p:txBody>
-      </p:sp>
-      <p:sp>
-        <p:nvSpPr>
-          <p:cNvPr id="30" name="Rounded Rectangle 29"/>
-          <p:cNvSpPr/>
-          <p:nvPr/>
-        </p:nvSpPr>
-        <p:spPr>
-          <a:xfrm>
-            <a:off x="4990800" y="4594736"/>
-            <a:ext cx="2209740" cy="647683"/>
-          </a:xfrm>
-          <a:prstGeom prst="roundRect">
-            <a:avLst>
-              <a:gd name="adj" fmla="val 16000"/>
-            </a:avLst>
-          </a:prstGeom>
-          <a:solidFill>
-            <a:srgbClr val="F1F8F2"/>
-          </a:solidFill>
-          <a:ln w="31750">
-            <a:solidFill>
-              <a:srgbClr val="43A047"/>
-            </a:solidFill>
-          </a:ln>
-        </p:spPr>
-        <p:style>
-          <a:lnRef idx="1">
-            <a:schemeClr val="accent1"/>
-          </a:lnRef>
-          <a:fillRef idx="3">
-            <a:schemeClr val="accent1"/>
-          </a:fillRef>
-          <a:effectRef idx="2">
-            <a:schemeClr val="accent1"/>
-          </a:effectRef>
-          <a:fontRef idx="minor">
-            <a:schemeClr val="lt1"/>
-          </a:fontRef>
-        </p:style>
-        <p:txBody>
-          <a:bodyPr wrap="square" lIns="114297" tIns="30479" rIns="114297" bIns="30479" rtlCol="0" anchor="ctr"/>
-          <a:lstStyle/>
-          <a:p>
-            <a:pPr algn="ctr"/>
-            <a:r>
-              <a:rPr sz="1482" b="1">
-                <a:solidFill>
-                  <a:srgbClr val="000000"/>
-                </a:solidFill>
-                <a:latin typeface="Calibri"/>
-              </a:rPr>
-              <a:t>Random Forest</a:t>
-            </a:r>
-          </a:p>
-        </p:txBody>
-      </p:sp>
-      <p:sp>
-        <p:nvSpPr>
-          <p:cNvPr id="31" name="Rounded Rectangle 30"/>
-          <p:cNvSpPr/>
-          <p:nvPr/>
-        </p:nvSpPr>
-        <p:spPr>
-          <a:xfrm>
-            <a:off x="7543431" y="4594736"/>
-            <a:ext cx="2209740" cy="647683"/>
-          </a:xfrm>
-          <a:prstGeom prst="roundRect">
-            <a:avLst>
-              <a:gd name="adj" fmla="val 16000"/>
-            </a:avLst>
-          </a:prstGeom>
-          <a:solidFill>
-            <a:srgbClr val="FDF1F0"/>
-          </a:solidFill>
-          <a:ln w="31750">
-            <a:solidFill>
-              <a:srgbClr val="E53935"/>
-            </a:solidFill>
-          </a:ln>
-        </p:spPr>
-        <p:style>
-          <a:lnRef idx="1">
-            <a:schemeClr val="accent1"/>
-          </a:lnRef>
-          <a:fillRef idx="3">
-            <a:schemeClr val="accent1"/>
-          </a:fillRef>
-          <a:effectRef idx="2">
-            <a:schemeClr val="accent1"/>
-          </a:effectRef>
-          <a:fontRef idx="minor">
-            <a:schemeClr val="lt1"/>
-          </a:fontRef>
-        </p:style>
-        <p:txBody>
-          <a:bodyPr wrap="square" lIns="114297" tIns="30479" rIns="114297" bIns="30479" rtlCol="0" anchor="ctr"/>
-          <a:lstStyle/>
-          <a:p>
-            <a:pPr algn="ctr"/>
-            <a:r>
-              <a:rPr sz="1482" b="1">
-                <a:solidFill>
-                  <a:srgbClr val="000000"/>
-                </a:solidFill>
-                <a:latin typeface="Calibri"/>
-              </a:rPr>
-              <a:t>DNN  —  PyTorch</a:t>
-            </a:r>
-          </a:p>
-        </p:txBody>
-      </p:sp>
-      <p:cxnSp>
-        <p:nvCxnSpPr>
-          <p:cNvPr id="32" name="Connector 31"/>
-          <p:cNvCxnSpPr/>
-          <p:nvPr/>
-        </p:nvCxnSpPr>
-        <p:spPr>
-          <a:xfrm>
-            <a:off x="6095670" y="4244225"/>
-            <a:ext cx="0" cy="190495"/>
-          </a:xfrm>
-          <a:prstGeom prst="line">
-            <a:avLst/>
-          </a:prstGeom>
-          <a:ln w="25400">
-            <a:solidFill>
-              <a:srgbClr val="000000"/>
-            </a:solidFill>
+            <a:tailEnd type="triangle"/>
           </a:ln>
         </p:spPr>
         <p:style>
@@ -17262,22 +21075,32 @@
       </p:cxnSp>
       <p:cxnSp>
         <p:nvCxnSpPr>
-          <p:cNvPr id="33" name="Connector 32"/>
-          <p:cNvCxnSpPr/>
+          <p:cNvPr id="1509" name="Conector: angular 1508">
+            <a:extLst>
+              <a:ext uri="{FF2B5EF4-FFF2-40B4-BE49-F238E27FC236}">
+                <a16:creationId xmlns:a16="http://schemas.microsoft.com/office/drawing/2014/main" id="{5191FBCF-F540-FB2B-6C3B-449A75C90904}"/>
+              </a:ext>
+            </a:extLst>
+          </p:cNvPr>
+          <p:cNvCxnSpPr>
+            <a:cxnSpLocks/>
+            <a:stCxn id="1024" idx="2"/>
+          </p:cNvCxnSpPr>
           <p:nvPr/>
         </p:nvCxnSpPr>
         <p:spPr>
-          <a:xfrm>
-            <a:off x="3543039" y="4434720"/>
-            <a:ext cx="5105262" cy="0"/>
+          <a:xfrm rot="16200000" flipH="1">
+            <a:off x="6665977" y="4756168"/>
+            <a:ext cx="229871" cy="3214872"/>
           </a:xfrm>
-          <a:prstGeom prst="line">
+          <a:prstGeom prst="bentConnector2">
             <a:avLst/>
           </a:prstGeom>
-          <a:ln w="25400">
+          <a:ln>
             <a:solidFill>
-              <a:srgbClr val="000000"/>
+              <a:srgbClr val="F89939"/>
             </a:solidFill>
+            <a:tailEnd type="triangle"/>
           </a:ln>
         </p:spPr>
         <p:style>
@@ -17297,23 +21120,33 @@
       </p:cxnSp>
       <p:cxnSp>
         <p:nvCxnSpPr>
-          <p:cNvPr id="34" name="Connector 33"/>
-          <p:cNvCxnSpPr/>
+          <p:cNvPr id="1516" name="Conector: angular 1515">
+            <a:extLst>
+              <a:ext uri="{FF2B5EF4-FFF2-40B4-BE49-F238E27FC236}">
+                <a16:creationId xmlns:a16="http://schemas.microsoft.com/office/drawing/2014/main" id="{FC6B7D83-F3F3-E17A-CD1F-7A37A0B85D0B}"/>
+              </a:ext>
+            </a:extLst>
+          </p:cNvPr>
+          <p:cNvCxnSpPr>
+            <a:stCxn id="1079" idx="3"/>
+          </p:cNvCxnSpPr>
           <p:nvPr/>
         </p:nvCxnSpPr>
         <p:spPr>
           <a:xfrm>
-            <a:off x="3543039" y="4434720"/>
-            <a:ext cx="0" cy="160017"/>
+            <a:off x="8180780" y="6199295"/>
+            <a:ext cx="207568" cy="12700"/>
           </a:xfrm>
-          <a:prstGeom prst="line">
-            <a:avLst/>
+          <a:prstGeom prst="bentConnector3">
+            <a:avLst>
+              <a:gd name="adj1" fmla="val -709"/>
+            </a:avLst>
           </a:prstGeom>
-          <a:ln w="25400">
+          <a:ln>
             <a:solidFill>
-              <a:srgbClr val="000000"/>
+              <a:srgbClr val="F89939"/>
             </a:solidFill>
-            <a:headEnd type="triangle" w="med" len="med"/>
+            <a:tailEnd type="triangle"/>
           </a:ln>
         </p:spPr>
         <p:style>
@@ -17333,23 +21166,33 @@
       </p:cxnSp>
       <p:cxnSp>
         <p:nvCxnSpPr>
-          <p:cNvPr id="35" name="Connector 34"/>
-          <p:cNvCxnSpPr/>
+          <p:cNvPr id="1519" name="Conector: angular 1518">
+            <a:extLst>
+              <a:ext uri="{FF2B5EF4-FFF2-40B4-BE49-F238E27FC236}">
+                <a16:creationId xmlns:a16="http://schemas.microsoft.com/office/drawing/2014/main" id="{27DA852C-FFF7-BF0B-9D02-329939561286}"/>
+              </a:ext>
+            </a:extLst>
+          </p:cNvPr>
+          <p:cNvCxnSpPr>
+            <a:stCxn id="1036" idx="3"/>
+          </p:cNvCxnSpPr>
           <p:nvPr/>
         </p:nvCxnSpPr>
         <p:spPr>
           <a:xfrm>
-            <a:off x="6095670" y="4434720"/>
-            <a:ext cx="0" cy="160017"/>
+            <a:off x="8174369" y="5748779"/>
+            <a:ext cx="213979" cy="10737"/>
           </a:xfrm>
-          <a:prstGeom prst="line">
-            <a:avLst/>
+          <a:prstGeom prst="bentConnector3">
+            <a:avLst>
+              <a:gd name="adj1" fmla="val 811"/>
+            </a:avLst>
           </a:prstGeom>
-          <a:ln w="25400">
+          <a:ln>
             <a:solidFill>
-              <a:srgbClr val="000000"/>
+              <a:srgbClr val="F89939"/>
             </a:solidFill>
-            <a:headEnd type="triangle" w="med" len="med"/>
+            <a:tailEnd type="triangle"/>
           </a:ln>
         </p:spPr>
         <p:style>
@@ -17367,287 +21210,192 @@
           </a:fontRef>
         </p:style>
       </p:cxnSp>
-      <p:cxnSp>
-        <p:nvCxnSpPr>
-          <p:cNvPr id="36" name="Connector 35"/>
-          <p:cNvCxnSpPr/>
+      <p:pic>
+        <p:nvPicPr>
+          <p:cNvPr id="1089" name="Gráfico 1088">
+            <a:extLst>
+              <a:ext uri="{FF2B5EF4-FFF2-40B4-BE49-F238E27FC236}">
+                <a16:creationId xmlns:a16="http://schemas.microsoft.com/office/drawing/2014/main" id="{9655BD63-B5A6-23D8-B582-DDFFE3B81066}"/>
+              </a:ext>
+            </a:extLst>
+          </p:cNvPr>
+          <p:cNvPicPr>
+            <a:picLocks noChangeAspect="1"/>
+          </p:cNvPicPr>
           <p:nvPr/>
-        </p:nvCxnSpPr>
+        </p:nvPicPr>
+        <p:blipFill>
+          <a:blip>
+            <a:extLst>
+              <a:ext uri="{96DAC541-7B7A-43D3-8B79-37D633B846F1}">
+                <asvg:svgBlip xmlns:asvg="http://schemas.microsoft.com/office/drawing/2016/SVG/main" r:embed="rId15"/>
+              </a:ext>
+            </a:extLst>
+          </a:blip>
+          <a:stretch>
+            <a:fillRect/>
+          </a:stretch>
+        </p:blipFill>
         <p:spPr>
           <a:xfrm>
-            <a:off x="8648301" y="4434720"/>
-            <a:ext cx="0" cy="160017"/>
+            <a:off x="8465601" y="1813724"/>
+            <a:ext cx="248823" cy="245840"/>
           </a:xfrm>
-          <a:prstGeom prst="line">
+          <a:prstGeom prst="rect">
             <a:avLst/>
           </a:prstGeom>
-          <a:ln w="25400">
-            <a:solidFill>
-              <a:srgbClr val="000000"/>
-            </a:solidFill>
-            <a:headEnd type="triangle" w="med" len="med"/>
-          </a:ln>
         </p:spPr>
-        <p:style>
-          <a:lnRef idx="2">
-            <a:schemeClr val="accent1"/>
-          </a:lnRef>
-          <a:fillRef idx="0">
-            <a:schemeClr val="accent1"/>
-          </a:fillRef>
-          <a:effectRef idx="1">
-            <a:schemeClr val="accent1"/>
-          </a:effectRef>
-          <a:fontRef idx="minor">
-            <a:schemeClr val="tx1"/>
-          </a:fontRef>
-        </p:style>
-      </p:cxnSp>
-      <p:cxnSp>
-        <p:nvCxnSpPr>
-          <p:cNvPr id="37" name="Connector 36"/>
-          <p:cNvCxnSpPr/>
+      </p:pic>
+      <p:pic>
+        <p:nvPicPr>
+          <p:cNvPr id="1090" name="Gráfico 1089">
+            <a:extLst>
+              <a:ext uri="{FF2B5EF4-FFF2-40B4-BE49-F238E27FC236}">
+                <a16:creationId xmlns:a16="http://schemas.microsoft.com/office/drawing/2014/main" id="{B0D3F664-2FC9-020C-F579-64876134225D}"/>
+              </a:ext>
+            </a:extLst>
+          </p:cNvPr>
+          <p:cNvPicPr>
+            <a:picLocks noChangeAspect="1"/>
+          </p:cNvPicPr>
           <p:nvPr/>
-        </p:nvCxnSpPr>
+        </p:nvPicPr>
+        <p:blipFill>
+          <a:blip>
+            <a:extLst>
+              <a:ext uri="{96DAC541-7B7A-43D3-8B79-37D633B846F1}">
+                <asvg:svgBlip xmlns:asvg="http://schemas.microsoft.com/office/drawing/2016/SVG/main" r:embed="rId15"/>
+              </a:ext>
+            </a:extLst>
+          </a:blip>
+          <a:stretch>
+            <a:fillRect/>
+          </a:stretch>
+        </p:blipFill>
         <p:spPr>
           <a:xfrm>
-            <a:off x="3543039" y="5242418"/>
-            <a:ext cx="0" cy="160016"/>
+            <a:off x="8464653" y="2026758"/>
+            <a:ext cx="248823" cy="245840"/>
           </a:xfrm>
-          <a:prstGeom prst="line">
+          <a:prstGeom prst="rect">
             <a:avLst/>
           </a:prstGeom>
-          <a:ln w="25400">
-            <a:solidFill>
-              <a:srgbClr val="000000"/>
-            </a:solidFill>
-          </a:ln>
         </p:spPr>
-        <p:style>
-          <a:lnRef idx="2">
-            <a:schemeClr val="accent1"/>
-          </a:lnRef>
-          <a:fillRef idx="0">
-            <a:schemeClr val="accent1"/>
-          </a:fillRef>
-          <a:effectRef idx="1">
-            <a:schemeClr val="accent1"/>
-          </a:effectRef>
-          <a:fontRef idx="minor">
-            <a:schemeClr val="tx1"/>
-          </a:fontRef>
-        </p:style>
-      </p:cxnSp>
-      <p:cxnSp>
-        <p:nvCxnSpPr>
-          <p:cNvPr id="38" name="Connector 37"/>
-          <p:cNvCxnSpPr/>
+      </p:pic>
+      <p:pic>
+        <p:nvPicPr>
+          <p:cNvPr id="1091" name="Gráfico 1090">
+            <a:extLst>
+              <a:ext uri="{FF2B5EF4-FFF2-40B4-BE49-F238E27FC236}">
+                <a16:creationId xmlns:a16="http://schemas.microsoft.com/office/drawing/2014/main" id="{D79C75BC-F3CF-358B-6D64-F16BE1D4D7BC}"/>
+              </a:ext>
+            </a:extLst>
+          </p:cNvPr>
+          <p:cNvPicPr>
+            <a:picLocks noChangeAspect="1"/>
+          </p:cNvPicPr>
           <p:nvPr/>
-        </p:nvCxnSpPr>
+        </p:nvPicPr>
+        <p:blipFill>
+          <a:blip>
+            <a:extLst>
+              <a:ext uri="{96DAC541-7B7A-43D3-8B79-37D633B846F1}">
+                <asvg:svgBlip xmlns:asvg="http://schemas.microsoft.com/office/drawing/2016/SVG/main" r:embed="rId15"/>
+              </a:ext>
+            </a:extLst>
+          </a:blip>
+          <a:stretch>
+            <a:fillRect/>
+          </a:stretch>
+        </p:blipFill>
         <p:spPr>
           <a:xfrm>
-            <a:off x="6095670" y="5242418"/>
-            <a:ext cx="0" cy="160016"/>
+            <a:off x="8465601" y="2241542"/>
+            <a:ext cx="248823" cy="245840"/>
           </a:xfrm>
-          <a:prstGeom prst="line">
+          <a:prstGeom prst="rect">
             <a:avLst/>
           </a:prstGeom>
-          <a:ln w="25400">
-            <a:solidFill>
-              <a:srgbClr val="000000"/>
-            </a:solidFill>
-          </a:ln>
         </p:spPr>
-        <p:style>
-          <a:lnRef idx="2">
-            <a:schemeClr val="accent1"/>
-          </a:lnRef>
-          <a:fillRef idx="0">
-            <a:schemeClr val="accent1"/>
-          </a:fillRef>
-          <a:effectRef idx="1">
-            <a:schemeClr val="accent1"/>
-          </a:effectRef>
-          <a:fontRef idx="minor">
-            <a:schemeClr val="tx1"/>
-          </a:fontRef>
-        </p:style>
-      </p:cxnSp>
-      <p:cxnSp>
-        <p:nvCxnSpPr>
-          <p:cNvPr id="39" name="Connector 38"/>
-          <p:cNvCxnSpPr/>
+      </p:pic>
+      <p:pic>
+        <p:nvPicPr>
+          <p:cNvPr id="1092" name="Gráfico 1091">
+            <a:extLst>
+              <a:ext uri="{FF2B5EF4-FFF2-40B4-BE49-F238E27FC236}">
+                <a16:creationId xmlns:a16="http://schemas.microsoft.com/office/drawing/2014/main" id="{80AC92E9-9FA4-3222-AC03-ABB7A84AE3D0}"/>
+              </a:ext>
+            </a:extLst>
+          </p:cNvPr>
+          <p:cNvPicPr>
+            <a:picLocks noChangeAspect="1"/>
+          </p:cNvPicPr>
           <p:nvPr/>
-        </p:nvCxnSpPr>
+        </p:nvPicPr>
+        <p:blipFill>
+          <a:blip>
+            <a:extLst>
+              <a:ext uri="{96DAC541-7B7A-43D3-8B79-37D633B846F1}">
+                <asvg:svgBlip xmlns:asvg="http://schemas.microsoft.com/office/drawing/2016/SVG/main" r:embed="rId15"/>
+              </a:ext>
+            </a:extLst>
+          </a:blip>
+          <a:stretch>
+            <a:fillRect/>
+          </a:stretch>
+        </p:blipFill>
         <p:spPr>
           <a:xfrm>
-            <a:off x="8648301" y="5242418"/>
-            <a:ext cx="0" cy="160016"/>
+            <a:off x="8465601" y="2457902"/>
+            <a:ext cx="248823" cy="245840"/>
           </a:xfrm>
-          <a:prstGeom prst="line">
+          <a:prstGeom prst="rect">
             <a:avLst/>
           </a:prstGeom>
-          <a:ln w="25400">
-            <a:solidFill>
-              <a:srgbClr val="000000"/>
-            </a:solidFill>
-          </a:ln>
         </p:spPr>
-        <p:style>
-          <a:lnRef idx="2">
-            <a:schemeClr val="accent1"/>
-          </a:lnRef>
-          <a:fillRef idx="0">
-            <a:schemeClr val="accent1"/>
-          </a:fillRef>
-          <a:effectRef idx="1">
-            <a:schemeClr val="accent1"/>
-          </a:effectRef>
-          <a:fontRef idx="minor">
-            <a:schemeClr val="tx1"/>
-          </a:fontRef>
-        </p:style>
-      </p:cxnSp>
-      <p:cxnSp>
-        <p:nvCxnSpPr>
-          <p:cNvPr id="40" name="Connector 39"/>
-          <p:cNvCxnSpPr/>
+      </p:pic>
+      <p:pic>
+        <p:nvPicPr>
+          <p:cNvPr id="1093" name="Gráfico 1092">
+            <a:extLst>
+              <a:ext uri="{FF2B5EF4-FFF2-40B4-BE49-F238E27FC236}">
+                <a16:creationId xmlns:a16="http://schemas.microsoft.com/office/drawing/2014/main" id="{A656F81F-E1A3-DB2C-5763-36FB504EA1AE}"/>
+              </a:ext>
+            </a:extLst>
+          </p:cNvPr>
+          <p:cNvPicPr>
+            <a:picLocks noChangeAspect="1"/>
+          </p:cNvPicPr>
           <p:nvPr/>
-        </p:nvCxnSpPr>
+        </p:nvPicPr>
+        <p:blipFill>
+          <a:blip>
+            <a:extLst>
+              <a:ext uri="{96DAC541-7B7A-43D3-8B79-37D633B846F1}">
+                <asvg:svgBlip xmlns:asvg="http://schemas.microsoft.com/office/drawing/2016/SVG/main" r:embed="rId15"/>
+              </a:ext>
+            </a:extLst>
+          </a:blip>
+          <a:stretch>
+            <a:fillRect/>
+          </a:stretch>
+        </p:blipFill>
         <p:spPr>
           <a:xfrm>
-            <a:off x="3543039" y="5402434"/>
-            <a:ext cx="5105262" cy="0"/>
+            <a:off x="8465601" y="2667953"/>
+            <a:ext cx="248823" cy="245840"/>
           </a:xfrm>
-          <a:prstGeom prst="line">
+          <a:prstGeom prst="rect">
             <a:avLst/>
           </a:prstGeom>
-          <a:ln w="25400">
-            <a:solidFill>
-              <a:srgbClr val="000000"/>
-            </a:solidFill>
-          </a:ln>
         </p:spPr>
-        <p:style>
-          <a:lnRef idx="2">
-            <a:schemeClr val="accent1"/>
-          </a:lnRef>
-          <a:fillRef idx="0">
-            <a:schemeClr val="accent1"/>
-          </a:fillRef>
-          <a:effectRef idx="1">
-            <a:schemeClr val="accent1"/>
-          </a:effectRef>
-          <a:fontRef idx="minor">
-            <a:schemeClr val="tx1"/>
-          </a:fontRef>
-        </p:style>
-      </p:cxnSp>
-      <p:cxnSp>
-        <p:nvCxnSpPr>
-          <p:cNvPr id="41" name="Connector 40"/>
-          <p:cNvCxnSpPr/>
-          <p:nvPr/>
-        </p:nvCxnSpPr>
-        <p:spPr>
-          <a:xfrm>
-            <a:off x="6095670" y="5402434"/>
-            <a:ext cx="0" cy="144777"/>
-          </a:xfrm>
-          <a:prstGeom prst="line">
-            <a:avLst/>
-          </a:prstGeom>
-          <a:ln w="25400">
-            <a:solidFill>
-              <a:srgbClr val="000000"/>
-            </a:solidFill>
-            <a:headEnd type="triangle" w="med" len="med"/>
-          </a:ln>
-        </p:spPr>
-        <p:style>
-          <a:lnRef idx="2">
-            <a:schemeClr val="accent1"/>
-          </a:lnRef>
-          <a:fillRef idx="0">
-            <a:schemeClr val="accent1"/>
-          </a:fillRef>
-          <a:effectRef idx="1">
-            <a:schemeClr val="accent1"/>
-          </a:effectRef>
-          <a:fontRef idx="minor">
-            <a:schemeClr val="tx1"/>
-          </a:fontRef>
-        </p:style>
-      </p:cxnSp>
-      <p:sp>
-        <p:nvSpPr>
-          <p:cNvPr id="42" name="Rounded Rectangle 41"/>
-          <p:cNvSpPr/>
-          <p:nvPr/>
-        </p:nvSpPr>
-        <p:spPr>
-          <a:xfrm>
-            <a:off x="3619237" y="5547211"/>
-            <a:ext cx="4952866" cy="541005"/>
-          </a:xfrm>
-          <a:prstGeom prst="roundRect">
-            <a:avLst>
-              <a:gd name="adj" fmla="val 16000"/>
-            </a:avLst>
-          </a:prstGeom>
-          <a:solidFill>
-            <a:srgbClr val="EDFAFB"/>
-          </a:solidFill>
-          <a:ln w="31750">
-            <a:solidFill>
-              <a:srgbClr val="00BCD4"/>
-            </a:solidFill>
-          </a:ln>
-        </p:spPr>
-        <p:style>
-          <a:lnRef idx="1">
-            <a:schemeClr val="accent1"/>
-          </a:lnRef>
-          <a:fillRef idx="3">
-            <a:schemeClr val="accent1"/>
-          </a:fillRef>
-          <a:effectRef idx="2">
-            <a:schemeClr val="accent1"/>
-          </a:effectRef>
-          <a:fontRef idx="minor">
-            <a:schemeClr val="lt1"/>
-          </a:fontRef>
-        </p:style>
-        <p:txBody>
-          <a:bodyPr wrap="square" lIns="114297" tIns="30479" rIns="114297" bIns="30479" rtlCol="0" anchor="ctr"/>
-          <a:lstStyle/>
-          <a:p>
-            <a:pPr algn="ctr"/>
-            <a:r>
-              <a:rPr sz="1323" b="1">
-                <a:solidFill>
-                  <a:srgbClr val="000000"/>
-                </a:solidFill>
-                <a:latin typeface="Calibri"/>
-              </a:rPr>
-              <a:t>Respuesta JSON</a:t>
-            </a:r>
-          </a:p>
-          <a:p>
-            <a:pPr algn="ctr"/>
-            <a:r>
-              <a:rPr sz="1005">
-                <a:solidFill>
-                  <a:srgbClr val="444444"/>
-                </a:solidFill>
-                <a:latin typeface="Calibri"/>
-              </a:rPr>
-              <a:t>predicted_mode  ·  confidence  ·  probabilities [walk, cycle, pt, drive]</a:t>
-            </a:r>
-          </a:p>
-        </p:txBody>
-      </p:sp>
+      </p:pic>
     </p:spTree>
+    <p:extLst>
+      <p:ext uri="{BB962C8B-B14F-4D97-AF65-F5344CB8AC3E}">
+        <p14:creationId xmlns:p14="http://schemas.microsoft.com/office/powerpoint/2010/main" val="2383244599"/>
+      </p:ext>
+    </p:extLst>
   </p:cSld>
   <p:clrMapOvr>
     <a:masterClrMapping/>
@@ -18286,6 +22034,23 @@
 </file>
 
 <file path=customXml/item1.xml><?xml version="1.0" encoding="utf-8"?>
+<p:properties xmlns:p="http://schemas.microsoft.com/office/2006/metadata/properties" xmlns:xsi="http://www.w3.org/2001/XMLSchema-instance" xmlns:pc="http://schemas.microsoft.com/office/infopath/2007/PartnerControls">
+  <documentManagement>
+    <_activity xmlns="da169425-153d-4080-8705-45c92938e7f0" xsi:nil="true"/>
+  </documentManagement>
+</p:properties>
+</file>
+
+<file path=customXml/item2.xml><?xml version="1.0" encoding="utf-8"?>
+<?mso-contentType ?>
+<FormTemplates xmlns="http://schemas.microsoft.com/sharepoint/v3/contenttype/forms">
+  <Display>DocumentLibraryForm</Display>
+  <Edit>DocumentLibraryForm</Edit>
+  <New>DocumentLibraryForm</New>
+</FormTemplates>
+</file>
+
+<file path=customXml/item3.xml><?xml version="1.0" encoding="utf-8"?>
 <ct:contentTypeSchema xmlns:ct="http://schemas.microsoft.com/office/2006/metadata/contentType" xmlns:ma="http://schemas.microsoft.com/office/2006/metadata/properties/metaAttributes" ct:_="" ma:_="" ma:contentTypeName="Documento" ma:contentTypeID="0x010100DEA5B49C5DE5F44CB629258CFB70E19D" ma:contentTypeVersion="18" ma:contentTypeDescription="Crear nuevo documento." ma:contentTypeScope="" ma:versionID="74d7687ff137e87fb3b1bb4914d165da">
   <xsd:schema xmlns:xsd="http://www.w3.org/2001/XMLSchema" xmlns:xs="http://www.w3.org/2001/XMLSchema" xmlns:p="http://schemas.microsoft.com/office/2006/metadata/properties" xmlns:ns3="da169425-153d-4080-8705-45c92938e7f0" xmlns:ns4="89f1de4a-40f7-4e81-987b-401414521485" targetNamespace="http://schemas.microsoft.com/office/2006/metadata/properties" ma:root="true" ma:fieldsID="4c882593e756bab23045d9ebaf71ae2a" ns3:_="" ns4:_="">
     <xsd:import namespace="da169425-153d-4080-8705-45c92938e7f0"/>
@@ -18538,24 +22303,32 @@
 </ct:contentTypeSchema>
 </file>
 
-<file path=customXml/item2.xml><?xml version="1.0" encoding="utf-8"?>
-<?mso-contentType ?>
-<FormTemplates xmlns="http://schemas.microsoft.com/sharepoint/v3/contenttype/forms">
-  <Display>DocumentLibraryForm</Display>
-  <Edit>DocumentLibraryForm</Edit>
-  <New>DocumentLibraryForm</New>
-</FormTemplates>
+<file path=customXml/itemProps1.xml><?xml version="1.0" encoding="utf-8"?>
+<ds:datastoreItem xmlns:ds="http://schemas.openxmlformats.org/officeDocument/2006/customXml" ds:itemID="{E10D70F7-8416-46C5-896C-E4C67671FD25}">
+  <ds:schemaRefs>
+    <ds:schemaRef ds:uri="89f1de4a-40f7-4e81-987b-401414521485"/>
+    <ds:schemaRef ds:uri="http://purl.org/dc/elements/1.1/"/>
+    <ds:schemaRef ds:uri="http://purl.org/dc/dcmitype/"/>
+    <ds:schemaRef ds:uri="http://schemas.microsoft.com/office/infopath/2007/PartnerControls"/>
+    <ds:schemaRef ds:uri="http://schemas.microsoft.com/office/2006/metadata/properties"/>
+    <ds:schemaRef ds:uri="http://schemas.microsoft.com/office/2006/documentManagement/types"/>
+    <ds:schemaRef ds:uri="http://purl.org/dc/terms/"/>
+    <ds:schemaRef ds:uri="http://schemas.openxmlformats.org/package/2006/metadata/core-properties"/>
+    <ds:schemaRef ds:uri="da169425-153d-4080-8705-45c92938e7f0"/>
+    <ds:schemaRef ds:uri="http://www.w3.org/XML/1998/namespace"/>
+  </ds:schemaRefs>
+</ds:datastoreItem>
 </file>
 
-<file path=customXml/item3.xml><?xml version="1.0" encoding="utf-8"?>
-<p:properties xmlns:p="http://schemas.microsoft.com/office/2006/metadata/properties" xmlns:xsi="http://www.w3.org/2001/XMLSchema-instance" xmlns:pc="http://schemas.microsoft.com/office/infopath/2007/PartnerControls">
-  <documentManagement>
-    <_activity xmlns="da169425-153d-4080-8705-45c92938e7f0" xsi:nil="true"/>
-  </documentManagement>
-</p:properties>
+<file path=customXml/itemProps2.xml><?xml version="1.0" encoding="utf-8"?>
+<ds:datastoreItem xmlns:ds="http://schemas.openxmlformats.org/officeDocument/2006/customXml" ds:itemID="{4E1C400D-5C3C-43E3-9C88-F800C5BA2249}">
+  <ds:schemaRefs>
+    <ds:schemaRef ds:uri="http://schemas.microsoft.com/sharepoint/v3/contenttype/forms"/>
+  </ds:schemaRefs>
+</ds:datastoreItem>
 </file>
 
-<file path=customXml/itemProps1.xml><?xml version="1.0" encoding="utf-8"?>
+<file path=customXml/itemProps3.xml><?xml version="1.0" encoding="utf-8"?>
 <ds:datastoreItem xmlns:ds="http://schemas.openxmlformats.org/officeDocument/2006/customXml" ds:itemID="{F22018BE-1405-4A4B-BB67-C88962BABDE1}">
   <ds:schemaRefs>
     <ds:schemaRef ds:uri="http://schemas.microsoft.com/office/2006/metadata/contentType"/>
@@ -18572,29 +22345,4 @@
     <ds:schemaRef ds:uri="http://schemas.microsoft.com/internal/obd"/>
   </ds:schemaRefs>
 </ds:datastoreItem>
-</file>
-
-<file path=customXml/itemProps2.xml><?xml version="1.0" encoding="utf-8"?>
-<ds:datastoreItem xmlns:ds="http://schemas.openxmlformats.org/officeDocument/2006/customXml" ds:itemID="{4E1C400D-5C3C-43E3-9C88-F800C5BA2249}">
-  <ds:schemaRefs>
-    <ds:schemaRef ds:uri="http://schemas.microsoft.com/sharepoint/v3/contenttype/forms"/>
-  </ds:schemaRefs>
-</ds:datastoreItem>
-</file>
-
-<file path=customXml/itemProps3.xml><?xml version="1.0" encoding="utf-8"?>
-<ds:datastoreItem xmlns:ds="http://schemas.openxmlformats.org/officeDocument/2006/customXml" ds:itemID="{E10D70F7-8416-46C5-896C-E4C67671FD25}">
-  <ds:schemaRefs>
-    <ds:schemaRef ds:uri="89f1de4a-40f7-4e81-987b-401414521485"/>
-    <ds:schemaRef ds:uri="http://purl.org/dc/dcmitype/"/>
-    <ds:schemaRef ds:uri="http://www.w3.org/XML/1998/namespace"/>
-    <ds:schemaRef ds:uri="http://purl.org/dc/terms/"/>
-    <ds:schemaRef ds:uri="http://schemas.microsoft.com/office/2006/metadata/properties"/>
-    <ds:schemaRef ds:uri="http://purl.org/dc/elements/1.1/"/>
-    <ds:schemaRef ds:uri="http://schemas.microsoft.com/office/2006/documentManagement/types"/>
-    <ds:schemaRef ds:uri="http://schemas.microsoft.com/office/infopath/2007/PartnerControls"/>
-    <ds:schemaRef ds:uri="http://schemas.openxmlformats.org/package/2006/metadata/core-properties"/>
-    <ds:schemaRef ds:uri="da169425-153d-4080-8705-45c92938e7f0"/>
-  </ds:schemaRefs>
-</ds:datastoreItem>
 </file>